--- a/output/wordlabs-paint-3day.pptx
+++ b/output/wordlabs-paint-3day.pptx
@@ -4240,7 +4240,7 @@
                 <a:ea typeface="Calibri" pitchFamily="34" charset="-122"/>
                 <a:cs typeface="Calibri" pitchFamily="34" charset="-120"/>
               </a:rPr>
-              <a:t>"to apply colour or pigment"</a:t>
+              <a:t>"to colour or coat surface"</a:t>
             </a:r>
             <a:endParaRPr lang="en-US" sz="2200" dirty="0"/>
           </a:p>
@@ -5288,7 +5288,7 @@
                 <a:ea typeface="Calibri" pitchFamily="34" charset="-122"/>
                 <a:cs typeface="Calibri" pitchFamily="34" charset="-120"/>
               </a:rPr>
-              <a:t>Word Labs  •  wordlabs.app  •  Root: 'paint' = to apply colour or pigment</a:t>
+              <a:t>Word Labs  •  wordlabs.app  •  Root: 'paint' = to colour or coat surface</a:t>
             </a:r>
             <a:endParaRPr lang="en-US" sz="800" dirty="0"/>
           </a:p>
@@ -5622,7 +5622,7 @@
                 <a:ea typeface="Trebuchet MS" pitchFamily="34" charset="-122"/>
                 <a:cs typeface="Trebuchet MS" pitchFamily="34" charset="-120"/>
               </a:rPr>
-              <a:t>0</a:t>
+              <a:t>1</a:t>
             </a:r>
             <a:pPr algn="ctr" indent="0" marL="0">
               <a:buNone/>
@@ -5928,7 +5928,7 @@
                 <a:ea typeface="Calibri" pitchFamily="34" charset="-122"/>
                 <a:cs typeface="Calibri" pitchFamily="34" charset="-120"/>
               </a:rPr>
-              <a:t>Word Labs  •  wordlabs.app  •  Root: 'paint' = to apply colour or pigment</a:t>
+              <a:t>Word Labs  •  wordlabs.app  •  Root: 'paint' = to colour or coat surface</a:t>
             </a:r>
             <a:endParaRPr lang="en-US" sz="800" dirty="0"/>
           </a:p>
@@ -6071,7 +6071,7 @@
                 <a:ea typeface="Calibri" pitchFamily="34" charset="-122"/>
                 <a:cs typeface="Calibri" pitchFamily="34" charset="-120"/>
               </a:rPr>
-              <a:t> decided to </a:t>
+              <a:t> used bright colours, and the finished </a:t>
             </a:r>
             <a:pPr algn="l" indent="0" marL="0">
               <a:buNone/>
@@ -6088,7 +6088,7 @@
                 <a:ea typeface="Calibri" pitchFamily="34" charset="-122"/>
                 <a:cs typeface="Calibri" pitchFamily="34" charset="-120"/>
               </a:rPr>
-              <a:t>repaint</a:t>
+              <a:t>painting</a:t>
             </a:r>
             <a:pPr algn="l" indent="0" marL="0">
               <a:buNone/>
@@ -6102,7 +6102,7 @@
                 <a:ea typeface="Calibri" pitchFamily="34" charset="-122"/>
                 <a:cs typeface="Calibri" pitchFamily="34" charset="-120"/>
               </a:rPr>
-              <a:t> the old shed before winter arrived.</a:t>
+              <a:t> was hung in the hall.</a:t>
             </a:r>
             <a:endParaRPr lang="en-US" sz="1800" dirty="0"/>
           </a:p>
@@ -6385,7 +6385,7 @@
                 <a:ea typeface="Trebuchet MS" pitchFamily="34" charset="-122"/>
                 <a:cs typeface="Trebuchet MS" pitchFamily="34" charset="-120"/>
               </a:rPr>
-              <a:t>repaint</a:t>
+              <a:t>painting</a:t>
             </a:r>
             <a:endParaRPr lang="en-US" sz="1400" dirty="0"/>
           </a:p>
@@ -6716,7 +6716,7 @@
                 <a:ea typeface="Calibri" pitchFamily="34" charset="-122"/>
                 <a:cs typeface="Calibri" pitchFamily="34" charset="-120"/>
               </a:rPr>
-              <a:t>Word Labs  •  wordlabs.app  •  Root: 'paint' = to apply colour or pigment</a:t>
+              <a:t>Word Labs  •  wordlabs.app  •  Root: 'paint' = to colour or coat surface</a:t>
             </a:r>
             <a:endParaRPr lang="en-US" sz="800" dirty="0"/>
           </a:p>
@@ -7543,7 +7543,7 @@
                 <a:ea typeface="Calibri" pitchFamily="34" charset="-122"/>
                 <a:cs typeface="Calibri" pitchFamily="34" charset="-120"/>
               </a:rPr>
-              <a:t>Word Labs  •  wordlabs.app  •  Root: 'paint' = to apply colour or pigment</a:t>
+              <a:t>Word Labs  •  wordlabs.app  •  Root: 'paint' = to colour or coat surface</a:t>
             </a:r>
             <a:endParaRPr lang="en-US" sz="800" dirty="0"/>
           </a:p>
@@ -7860,7 +7860,7 @@
                 <a:ea typeface="Calibri" pitchFamily="34" charset="-122"/>
                 <a:cs typeface="Calibri" pitchFamily="34" charset="-120"/>
               </a:rPr>
-              <a:t>to apply colour</a:t>
+              <a:t>to colour a surface</a:t>
             </a:r>
             <a:endParaRPr lang="en-US" sz="850" dirty="0"/>
           </a:p>
@@ -7972,7 +7972,7 @@
                 <a:ea typeface="Calibri" pitchFamily="34" charset="-122"/>
                 <a:cs typeface="Calibri" pitchFamily="34" charset="-120"/>
               </a:rPr>
-              <a:t>a person who does something</a:t>
+              <a:t>one who does</a:t>
             </a:r>
             <a:endParaRPr lang="en-US" sz="850" dirty="0"/>
           </a:p>
@@ -8528,7 +8528,7 @@
                 <a:ea typeface="Calibri" pitchFamily="34" charset="-122"/>
                 <a:cs typeface="Calibri" pitchFamily="34" charset="-120"/>
               </a:rPr>
-              <a:t>Word Labs  •  wordlabs.app  •  Root: 'paint' = to apply colour or pigment</a:t>
+              <a:t>Word Labs  •  wordlabs.app  •  Root: 'paint' = to colour or coat surface</a:t>
             </a:r>
             <a:endParaRPr lang="en-US" sz="800" dirty="0"/>
           </a:p>
@@ -8845,7 +8845,7 @@
                 <a:ea typeface="Calibri" pitchFamily="34" charset="-122"/>
                 <a:cs typeface="Calibri" pitchFamily="34" charset="-120"/>
               </a:rPr>
-              <a:t>to apply colour</a:t>
+              <a:t>to colour a surface</a:t>
             </a:r>
             <a:endParaRPr lang="en-US" sz="850" dirty="0"/>
           </a:p>
@@ -8957,7 +8957,7 @@
                 <a:ea typeface="Calibri" pitchFamily="34" charset="-122"/>
                 <a:cs typeface="Calibri" pitchFamily="34" charset="-120"/>
               </a:rPr>
-              <a:t>a person who does something</a:t>
+              <a:t>one who does</a:t>
             </a:r>
             <a:endParaRPr lang="en-US" sz="850" dirty="0"/>
           </a:p>
@@ -9645,7 +9645,7 @@
                 <a:ea typeface="Calibri" pitchFamily="34" charset="-122"/>
                 <a:cs typeface="Calibri" pitchFamily="34" charset="-120"/>
               </a:rPr>
-              <a:t>Word Labs  •  wordlabs.app  •  Root: 'paint' = to apply colour or pigment</a:t>
+              <a:t>Word Labs  •  wordlabs.app  •  Root: 'paint' = to colour or coat surface</a:t>
             </a:r>
             <a:endParaRPr lang="en-US" sz="800" dirty="0"/>
           </a:p>
@@ -9962,7 +9962,7 @@
                 <a:ea typeface="Calibri" pitchFamily="34" charset="-122"/>
                 <a:cs typeface="Calibri" pitchFamily="34" charset="-120"/>
               </a:rPr>
-              <a:t>to apply colour</a:t>
+              <a:t>to colour a surface</a:t>
             </a:r>
             <a:endParaRPr lang="en-US" sz="850" dirty="0"/>
           </a:p>
@@ -10074,7 +10074,7 @@
                 <a:ea typeface="Calibri" pitchFamily="34" charset="-122"/>
                 <a:cs typeface="Calibri" pitchFamily="34" charset="-120"/>
               </a:rPr>
-              <a:t>a person who does something</a:t>
+              <a:t>one who does</a:t>
             </a:r>
             <a:endParaRPr lang="en-US" sz="850" dirty="0"/>
           </a:p>
@@ -11053,7 +11053,7 @@
                 <a:ea typeface="Calibri" pitchFamily="34" charset="-122"/>
                 <a:cs typeface="Calibri" pitchFamily="34" charset="-120"/>
               </a:rPr>
-              <a:t>Word Labs  •  wordlabs.app  •  Root: 'paint' = to apply colour or pigment</a:t>
+              <a:t>Word Labs  •  wordlabs.app  •  Root: 'paint' = to colour or coat surface</a:t>
             </a:r>
             <a:endParaRPr lang="en-US" sz="800" dirty="0"/>
           </a:p>
@@ -11192,7 +11192,7 @@
                 <a:ea typeface="Trebuchet MS" pitchFamily="34" charset="-122"/>
                 <a:cs typeface="Trebuchet MS" pitchFamily="34" charset="-120"/>
               </a:rPr>
-              <a:t>repaint</a:t>
+              <a:t>painting</a:t>
             </a:r>
             <a:endParaRPr lang="en-US" sz="2800" dirty="0"/>
           </a:p>
@@ -11880,7 +11880,7 @@
                 <a:ea typeface="Calibri" pitchFamily="34" charset="-122"/>
                 <a:cs typeface="Calibri" pitchFamily="34" charset="-120"/>
               </a:rPr>
-              <a:t>Word Labs  •  wordlabs.app  •  Root: 'paint' = to apply colour or pigment</a:t>
+              <a:t>Word Labs  •  wordlabs.app  •  Root: 'paint' = to colour or coat surface</a:t>
             </a:r>
             <a:endParaRPr lang="en-US" sz="800" dirty="0"/>
           </a:p>
@@ -12019,7 +12019,7 @@
                 <a:ea typeface="Trebuchet MS" pitchFamily="34" charset="-122"/>
                 <a:cs typeface="Trebuchet MS" pitchFamily="34" charset="-120"/>
               </a:rPr>
-              <a:t>repaint</a:t>
+              <a:t>painting</a:t>
             </a:r>
             <a:endParaRPr lang="en-US" sz="2800" dirty="0"/>
           </a:p>
@@ -12108,11 +12108,11 @@
             </a:avLst>
           </a:prstGeom>
           <a:solidFill>
-            <a:srgbClr val="DDD6FE"/>
+            <a:srgbClr val="CCFBF1"/>
           </a:solidFill>
           <a:ln w="19050">
             <a:solidFill>
-              <a:srgbClr val="7C3AED"/>
+              <a:srgbClr val="0D9488"/>
             </a:solidFill>
             <a:prstDash val="solid"/>
           </a:ln>
@@ -12152,13 +12152,13 @@
             <a:r>
               <a:rPr lang="en-US" sz="1300" b="1" dirty="0">
                 <a:solidFill>
-                  <a:srgbClr val="4C1D95"/>
+                  <a:srgbClr val="0F766E"/>
                 </a:solidFill>
                 <a:latin typeface="Trebuchet MS" pitchFamily="34" charset="0"/>
                 <a:ea typeface="Trebuchet MS" pitchFamily="34" charset="-122"/>
                 <a:cs typeface="Trebuchet MS" pitchFamily="34" charset="-120"/>
               </a:rPr>
-              <a:t>re</a:t>
+              <a:t>paint</a:t>
             </a:r>
             <a:endParaRPr lang="en-US" sz="1300" dirty="0"/>
           </a:p>
@@ -12197,7 +12197,7 @@
                 <a:ea typeface="Calibri" pitchFamily="34" charset="-122"/>
                 <a:cs typeface="Calibri" pitchFamily="34" charset="-120"/>
               </a:rPr>
-              <a:t>again</a:t>
+              <a:t>to colour a surface</a:t>
             </a:r>
             <a:endParaRPr lang="en-US" sz="850" dirty="0"/>
           </a:p>
@@ -12220,11 +12220,11 @@
             </a:avLst>
           </a:prstGeom>
           <a:solidFill>
-            <a:srgbClr val="CCFBF1"/>
+            <a:srgbClr val="FCE7F3"/>
           </a:solidFill>
           <a:ln w="19050">
             <a:solidFill>
-              <a:srgbClr val="0D9488"/>
+              <a:srgbClr val="DB2777"/>
             </a:solidFill>
             <a:prstDash val="solid"/>
           </a:ln>
@@ -12264,13 +12264,13 @@
             <a:r>
               <a:rPr lang="en-US" sz="1300" b="1" dirty="0">
                 <a:solidFill>
-                  <a:srgbClr val="0F766E"/>
+                  <a:srgbClr val="9D174D"/>
                 </a:solidFill>
                 <a:latin typeface="Trebuchet MS" pitchFamily="34" charset="0"/>
                 <a:ea typeface="Trebuchet MS" pitchFamily="34" charset="-122"/>
                 <a:cs typeface="Trebuchet MS" pitchFamily="34" charset="-120"/>
               </a:rPr>
-              <a:t>paint</a:t>
+              <a:t>ing</a:t>
             </a:r>
             <a:endParaRPr lang="en-US" sz="1300" dirty="0"/>
           </a:p>
@@ -12309,7 +12309,7 @@
                 <a:ea typeface="Calibri" pitchFamily="34" charset="-122"/>
                 <a:cs typeface="Calibri" pitchFamily="34" charset="-120"/>
               </a:rPr>
-              <a:t>to apply colour</a:t>
+              <a:t>action or process</a:t>
             </a:r>
             <a:endParaRPr lang="en-US" sz="850" dirty="0"/>
           </a:p>
@@ -12865,7 +12865,7 @@
                 <a:ea typeface="Calibri" pitchFamily="34" charset="-122"/>
                 <a:cs typeface="Calibri" pitchFamily="34" charset="-120"/>
               </a:rPr>
-              <a:t>Word Labs  •  wordlabs.app  •  Root: 'paint' = to apply colour or pigment</a:t>
+              <a:t>Word Labs  •  wordlabs.app  •  Root: 'paint' = to colour or coat surface</a:t>
             </a:r>
             <a:endParaRPr lang="en-US" sz="800" dirty="0"/>
           </a:p>
@@ -13004,7 +13004,7 @@
                 <a:ea typeface="Trebuchet MS" pitchFamily="34" charset="-122"/>
                 <a:cs typeface="Trebuchet MS" pitchFamily="34" charset="-120"/>
               </a:rPr>
-              <a:t>repaint</a:t>
+              <a:t>painting</a:t>
             </a:r>
             <a:endParaRPr lang="en-US" sz="2800" dirty="0"/>
           </a:p>
@@ -13093,11 +13093,11 @@
             </a:avLst>
           </a:prstGeom>
           <a:solidFill>
-            <a:srgbClr val="DDD6FE"/>
+            <a:srgbClr val="CCFBF1"/>
           </a:solidFill>
           <a:ln w="19050">
             <a:solidFill>
-              <a:srgbClr val="7C3AED"/>
+              <a:srgbClr val="0D9488"/>
             </a:solidFill>
             <a:prstDash val="solid"/>
           </a:ln>
@@ -13137,13 +13137,13 @@
             <a:r>
               <a:rPr lang="en-US" sz="1300" b="1" dirty="0">
                 <a:solidFill>
-                  <a:srgbClr val="4C1D95"/>
+                  <a:srgbClr val="0F766E"/>
                 </a:solidFill>
                 <a:latin typeface="Trebuchet MS" pitchFamily="34" charset="0"/>
                 <a:ea typeface="Trebuchet MS" pitchFamily="34" charset="-122"/>
                 <a:cs typeface="Trebuchet MS" pitchFamily="34" charset="-120"/>
               </a:rPr>
-              <a:t>re</a:t>
+              <a:t>paint</a:t>
             </a:r>
             <a:endParaRPr lang="en-US" sz="1300" dirty="0"/>
           </a:p>
@@ -13182,7 +13182,7 @@
                 <a:ea typeface="Calibri" pitchFamily="34" charset="-122"/>
                 <a:cs typeface="Calibri" pitchFamily="34" charset="-120"/>
               </a:rPr>
-              <a:t>again</a:t>
+              <a:t>to colour a surface</a:t>
             </a:r>
             <a:endParaRPr lang="en-US" sz="850" dirty="0"/>
           </a:p>
@@ -13205,11 +13205,11 @@
             </a:avLst>
           </a:prstGeom>
           <a:solidFill>
-            <a:srgbClr val="CCFBF1"/>
+            <a:srgbClr val="FCE7F3"/>
           </a:solidFill>
           <a:ln w="19050">
             <a:solidFill>
-              <a:srgbClr val="0D9488"/>
+              <a:srgbClr val="DB2777"/>
             </a:solidFill>
             <a:prstDash val="solid"/>
           </a:ln>
@@ -13249,13 +13249,13 @@
             <a:r>
               <a:rPr lang="en-US" sz="1300" b="1" dirty="0">
                 <a:solidFill>
-                  <a:srgbClr val="0F766E"/>
+                  <a:srgbClr val="9D174D"/>
                 </a:solidFill>
                 <a:latin typeface="Trebuchet MS" pitchFamily="34" charset="0"/>
                 <a:ea typeface="Trebuchet MS" pitchFamily="34" charset="-122"/>
                 <a:cs typeface="Trebuchet MS" pitchFamily="34" charset="-120"/>
               </a:rPr>
-              <a:t>paint</a:t>
+              <a:t>ing</a:t>
             </a:r>
             <a:endParaRPr lang="en-US" sz="1300" dirty="0"/>
           </a:p>
@@ -13294,7 +13294,7 @@
                 <a:ea typeface="Calibri" pitchFamily="34" charset="-122"/>
                 <a:cs typeface="Calibri" pitchFamily="34" charset="-120"/>
               </a:rPr>
-              <a:t>to apply colour</a:t>
+              <a:t>action or process</a:t>
             </a:r>
             <a:endParaRPr lang="en-US" sz="850" dirty="0"/>
           </a:p>
@@ -13453,7 +13453,7 @@
                 <a:ea typeface="Trebuchet MS" pitchFamily="34" charset="-122"/>
                 <a:cs typeface="Trebuchet MS" pitchFamily="34" charset="-120"/>
               </a:rPr>
-              <a:t>re</a:t>
+              <a:t>pain</a:t>
             </a:r>
             <a:endParaRPr lang="en-US" sz="1400" dirty="0"/>
           </a:p>
@@ -13558,7 +13558,7 @@
                 <a:ea typeface="Trebuchet MS" pitchFamily="34" charset="-122"/>
                 <a:cs typeface="Trebuchet MS" pitchFamily="34" charset="-120"/>
               </a:rPr>
-              <a:t>paint</a:t>
+              <a:t>ting</a:t>
             </a:r>
             <a:endParaRPr lang="en-US" sz="1400" dirty="0"/>
           </a:p>
@@ -13891,7 +13891,7 @@
                 <a:ea typeface="Calibri" pitchFamily="34" charset="-122"/>
                 <a:cs typeface="Calibri" pitchFamily="34" charset="-120"/>
               </a:rPr>
-              <a:t>Root 'paint' — to apply colour or pigment</a:t>
+              <a:t>Root 'paint' — to colour or coat surface</a:t>
             </a:r>
             <a:endParaRPr lang="en-US" sz="1600" dirty="0"/>
           </a:p>
@@ -14247,7 +14247,7 @@
                 <a:ea typeface="Calibri" pitchFamily="34" charset="-122"/>
                 <a:cs typeface="Calibri" pitchFamily="34" charset="-120"/>
               </a:rPr>
-              <a:t>Word Labs  •  wordlabs.app  •  Root: 'paint' = to apply colour or pigment</a:t>
+              <a:t>Word Labs  •  wordlabs.app  •  Root: 'paint' = to colour or coat surface</a:t>
             </a:r>
             <a:endParaRPr lang="en-US" sz="800" dirty="0"/>
           </a:p>
@@ -14386,7 +14386,7 @@
                 <a:ea typeface="Trebuchet MS" pitchFamily="34" charset="-122"/>
                 <a:cs typeface="Trebuchet MS" pitchFamily="34" charset="-120"/>
               </a:rPr>
-              <a:t>repaint</a:t>
+              <a:t>painting</a:t>
             </a:r>
             <a:endParaRPr lang="en-US" sz="2800" dirty="0"/>
           </a:p>
@@ -14475,11 +14475,11 @@
             </a:avLst>
           </a:prstGeom>
           <a:solidFill>
-            <a:srgbClr val="DDD6FE"/>
+            <a:srgbClr val="CCFBF1"/>
           </a:solidFill>
           <a:ln w="19050">
             <a:solidFill>
-              <a:srgbClr val="7C3AED"/>
+              <a:srgbClr val="0D9488"/>
             </a:solidFill>
             <a:prstDash val="solid"/>
           </a:ln>
@@ -14519,13 +14519,13 @@
             <a:r>
               <a:rPr lang="en-US" sz="1300" b="1" dirty="0">
                 <a:solidFill>
-                  <a:srgbClr val="4C1D95"/>
+                  <a:srgbClr val="0F766E"/>
                 </a:solidFill>
                 <a:latin typeface="Trebuchet MS" pitchFamily="34" charset="0"/>
                 <a:ea typeface="Trebuchet MS" pitchFamily="34" charset="-122"/>
                 <a:cs typeface="Trebuchet MS" pitchFamily="34" charset="-120"/>
               </a:rPr>
-              <a:t>re</a:t>
+              <a:t>paint</a:t>
             </a:r>
             <a:endParaRPr lang="en-US" sz="1300" dirty="0"/>
           </a:p>
@@ -14564,7 +14564,7 @@
                 <a:ea typeface="Calibri" pitchFamily="34" charset="-122"/>
                 <a:cs typeface="Calibri" pitchFamily="34" charset="-120"/>
               </a:rPr>
-              <a:t>again</a:t>
+              <a:t>to colour a surface</a:t>
             </a:r>
             <a:endParaRPr lang="en-US" sz="850" dirty="0"/>
           </a:p>
@@ -14587,11 +14587,11 @@
             </a:avLst>
           </a:prstGeom>
           <a:solidFill>
-            <a:srgbClr val="CCFBF1"/>
+            <a:srgbClr val="FCE7F3"/>
           </a:solidFill>
           <a:ln w="19050">
             <a:solidFill>
-              <a:srgbClr val="0D9488"/>
+              <a:srgbClr val="DB2777"/>
             </a:solidFill>
             <a:prstDash val="solid"/>
           </a:ln>
@@ -14631,13 +14631,13 @@
             <a:r>
               <a:rPr lang="en-US" sz="1300" b="1" dirty="0">
                 <a:solidFill>
-                  <a:srgbClr val="0F766E"/>
+                  <a:srgbClr val="9D174D"/>
                 </a:solidFill>
                 <a:latin typeface="Trebuchet MS" pitchFamily="34" charset="0"/>
                 <a:ea typeface="Trebuchet MS" pitchFamily="34" charset="-122"/>
                 <a:cs typeface="Trebuchet MS" pitchFamily="34" charset="-120"/>
               </a:rPr>
-              <a:t>paint</a:t>
+              <a:t>ing</a:t>
             </a:r>
             <a:endParaRPr lang="en-US" sz="1300" dirty="0"/>
           </a:p>
@@ -14676,7 +14676,7 @@
                 <a:ea typeface="Calibri" pitchFamily="34" charset="-122"/>
                 <a:cs typeface="Calibri" pitchFamily="34" charset="-120"/>
               </a:rPr>
-              <a:t>to apply colour</a:t>
+              <a:t>action or process</a:t>
             </a:r>
             <a:endParaRPr lang="en-US" sz="850" dirty="0"/>
           </a:p>
@@ -14835,7 +14835,7 @@
                 <a:ea typeface="Trebuchet MS" pitchFamily="34" charset="-122"/>
                 <a:cs typeface="Trebuchet MS" pitchFamily="34" charset="-120"/>
               </a:rPr>
-              <a:t>re</a:t>
+              <a:t>pain</a:t>
             </a:r>
             <a:endParaRPr lang="en-US" sz="1400" dirty="0"/>
           </a:p>
@@ -14940,7 +14940,7 @@
                 <a:ea typeface="Trebuchet MS" pitchFamily="34" charset="-122"/>
                 <a:cs typeface="Trebuchet MS" pitchFamily="34" charset="-120"/>
               </a:rPr>
-              <a:t>paint</a:t>
+              <a:t>ting</a:t>
             </a:r>
             <a:endParaRPr lang="en-US" sz="1400" dirty="0"/>
           </a:p>
@@ -15047,7 +15047,7 @@
         </p:nvSpPr>
         <p:spPr>
           <a:xfrm>
-            <a:off x="2254649" y="4169664"/>
+            <a:off x="2427732" y="4169664"/>
             <a:ext cx="685800" cy="475488"/>
           </a:xfrm>
           <a:prstGeom prst="rect">
@@ -15074,7 +15074,7 @@
         </p:nvSpPr>
         <p:spPr>
           <a:xfrm>
-            <a:off x="2254649" y="4169664"/>
+            <a:off x="2427732" y="4169664"/>
             <a:ext cx="685800" cy="475488"/>
           </a:xfrm>
           <a:prstGeom prst="rect">
@@ -15099,7 +15099,7 @@
                 <a:ea typeface="Trebuchet MS" pitchFamily="34" charset="-122"/>
                 <a:cs typeface="Trebuchet MS" pitchFamily="34" charset="-120"/>
               </a:rPr>
-              <a:t>r</a:t>
+              <a:t>p</a:t>
             </a:r>
             <a:endParaRPr lang="en-US" sz="900" dirty="0"/>
           </a:p>
@@ -15113,7 +15113,7 @@
         </p:nvSpPr>
         <p:spPr>
           <a:xfrm>
-            <a:off x="3293146" y="4169664"/>
+            <a:off x="3639312" y="4169664"/>
             <a:ext cx="685800" cy="475488"/>
           </a:xfrm>
           <a:prstGeom prst="rect">
@@ -15140,7 +15140,7 @@
         </p:nvSpPr>
         <p:spPr>
           <a:xfrm>
-            <a:off x="3293146" y="4169664"/>
+            <a:off x="3639312" y="4169664"/>
             <a:ext cx="685800" cy="475488"/>
           </a:xfrm>
           <a:prstGeom prst="rect">
@@ -15165,7 +15165,7 @@
                 <a:ea typeface="Trebuchet MS" pitchFamily="34" charset="-122"/>
                 <a:cs typeface="Trebuchet MS" pitchFamily="34" charset="-120"/>
               </a:rPr>
-              <a:t>e</a:t>
+              <a:t>ai</a:t>
             </a:r>
             <a:endParaRPr lang="en-US" sz="900" dirty="0"/>
           </a:p>
@@ -15179,7 +15179,7 @@
         </p:nvSpPr>
         <p:spPr>
           <a:xfrm>
-            <a:off x="4331643" y="4169664"/>
+            <a:off x="4850892" y="4169664"/>
             <a:ext cx="685800" cy="475488"/>
           </a:xfrm>
           <a:prstGeom prst="rect">
@@ -15206,7 +15206,7 @@
         </p:nvSpPr>
         <p:spPr>
           <a:xfrm>
-            <a:off x="4331643" y="4169664"/>
+            <a:off x="4850892" y="4169664"/>
             <a:ext cx="685800" cy="475488"/>
           </a:xfrm>
           <a:prstGeom prst="rect">
@@ -15231,7 +15231,7 @@
                 <a:ea typeface="Trebuchet MS" pitchFamily="34" charset="-122"/>
                 <a:cs typeface="Trebuchet MS" pitchFamily="34" charset="-120"/>
               </a:rPr>
-              <a:t>p</a:t>
+              <a:t>n</a:t>
             </a:r>
             <a:endParaRPr lang="en-US" sz="900" dirty="0"/>
           </a:p>
@@ -15245,7 +15245,7 @@
         </p:nvSpPr>
         <p:spPr>
           <a:xfrm>
-            <a:off x="5370141" y="4169664"/>
+            <a:off x="6062472" y="4169664"/>
             <a:ext cx="685800" cy="475488"/>
           </a:xfrm>
           <a:prstGeom prst="rect">
@@ -15272,7 +15272,7 @@
         </p:nvSpPr>
         <p:spPr>
           <a:xfrm>
-            <a:off x="5370141" y="4169664"/>
+            <a:off x="6062472" y="4169664"/>
             <a:ext cx="685800" cy="475488"/>
           </a:xfrm>
           <a:prstGeom prst="rect">
@@ -15297,7 +15297,7 @@
                 <a:ea typeface="Trebuchet MS" pitchFamily="34" charset="-122"/>
                 <a:cs typeface="Trebuchet MS" pitchFamily="34" charset="-120"/>
               </a:rPr>
-              <a:t>ai</a:t>
+              <a:t>t</a:t>
             </a:r>
             <a:endParaRPr lang="en-US" sz="900" dirty="0"/>
           </a:p>
@@ -15311,7 +15311,7 @@
         </p:nvSpPr>
         <p:spPr>
           <a:xfrm>
-            <a:off x="6408638" y="4169664"/>
+            <a:off x="7274052" y="4169664"/>
             <a:ext cx="685800" cy="475488"/>
           </a:xfrm>
           <a:prstGeom prst="rect">
@@ -15338,7 +15338,7 @@
         </p:nvSpPr>
         <p:spPr>
           <a:xfrm>
-            <a:off x="6408638" y="4169664"/>
+            <a:off x="7274052" y="4169664"/>
             <a:ext cx="685800" cy="475488"/>
           </a:xfrm>
           <a:prstGeom prst="rect">
@@ -15363,73 +15363,7 @@
                 <a:ea typeface="Trebuchet MS" pitchFamily="34" charset="-122"/>
                 <a:cs typeface="Trebuchet MS" pitchFamily="34" charset="-120"/>
               </a:rPr>
-              <a:t>n</a:t>
-            </a:r>
-            <a:endParaRPr lang="en-US" sz="900" dirty="0"/>
-          </a:p>
-        </p:txBody>
-      </p:sp>
-      <p:sp>
-        <p:nvSpPr>
-          <p:cNvPr id="43" name="Shape 41"/>
-          <p:cNvSpPr/>
-          <p:nvPr/>
-        </p:nvSpPr>
-        <p:spPr>
-          <a:xfrm>
-            <a:off x="7447135" y="4169664"/>
-            <a:ext cx="685800" cy="475488"/>
-          </a:xfrm>
-          <a:prstGeom prst="rect">
-            <a:avLst>
-              <a:gd name="adj" fmla="val 7692"/>
-            </a:avLst>
-          </a:prstGeom>
-          <a:solidFill>
-            <a:srgbClr val="FFFFFF"/>
-          </a:solidFill>
-          <a:ln w="12700">
-            <a:solidFill>
-              <a:srgbClr val="DB2777"/>
-            </a:solidFill>
-            <a:prstDash val="solid"/>
-          </a:ln>
-        </p:spPr>
-      </p:sp>
-      <p:sp>
-        <p:nvSpPr>
-          <p:cNvPr id="44" name="Text 42"/>
-          <p:cNvSpPr/>
-          <p:nvPr/>
-        </p:nvSpPr>
-        <p:spPr>
-          <a:xfrm>
-            <a:off x="7447135" y="4169664"/>
-            <a:ext cx="685800" cy="475488"/>
-          </a:xfrm>
-          <a:prstGeom prst="rect">
-            <a:avLst/>
-          </a:prstGeom>
-          <a:noFill/>
-          <a:ln/>
-        </p:spPr>
-        <p:txBody>
-          <a:bodyPr wrap="square" lIns="0" tIns="0" rIns="0" bIns="0" rtlCol="0" anchor="ctr"/>
-          <a:lstStyle/>
-          <a:p>
-            <a:pPr algn="ctr" indent="0" marL="0">
-              <a:buNone/>
-            </a:pPr>
-            <a:r>
-              <a:rPr lang="en-US" sz="900" b="1" dirty="0">
-                <a:solidFill>
-                  <a:srgbClr val="9D174D"/>
-                </a:solidFill>
-                <a:latin typeface="Trebuchet MS" pitchFamily="34" charset="0"/>
-                <a:ea typeface="Trebuchet MS" pitchFamily="34" charset="-122"/>
-                <a:cs typeface="Trebuchet MS" pitchFamily="34" charset="-120"/>
-              </a:rPr>
-              <a:t>t</a:t>
+              <a:t>ing</a:t>
             </a:r>
             <a:endParaRPr lang="en-US" sz="900" dirty="0"/>
           </a:p>
@@ -16003,7 +15937,7 @@
                 <a:ea typeface="Calibri" pitchFamily="34" charset="-122"/>
                 <a:cs typeface="Calibri" pitchFamily="34" charset="-120"/>
               </a:rPr>
-              <a:t>Word Labs  •  wordlabs.app  •  Root: 'paint' = to apply colour or pigment</a:t>
+              <a:t>Word Labs  •  wordlabs.app  •  Root: 'paint' = to colour or coat surface</a:t>
             </a:r>
             <a:endParaRPr lang="en-US" sz="800" dirty="0"/>
           </a:p>
@@ -16337,7 +16271,7 @@
                 <a:ea typeface="Trebuchet MS" pitchFamily="34" charset="-122"/>
                 <a:cs typeface="Trebuchet MS" pitchFamily="34" charset="-120"/>
               </a:rPr>
-              <a:t>2</a:t>
+              <a:t>1</a:t>
             </a:r>
             <a:pPr algn="ctr" indent="0" marL="0">
               <a:buNone/>
@@ -16351,7 +16285,7 @@
                 <a:ea typeface="Trebuchet MS" pitchFamily="34" charset="-122"/>
                 <a:cs typeface="Trebuchet MS" pitchFamily="34" charset="-120"/>
               </a:rPr>
-              <a:t>  punctuation marks</a:t>
+              <a:t>  punctuation mark</a:t>
             </a:r>
             <a:endParaRPr lang="en-US" sz="2800" dirty="0"/>
           </a:p>
@@ -16643,7 +16577,7 @@
                 <a:ea typeface="Calibri" pitchFamily="34" charset="-122"/>
                 <a:cs typeface="Calibri" pitchFamily="34" charset="-120"/>
               </a:rPr>
-              <a:t>Word Labs  •  wordlabs.app  •  Root: 'paint' = to apply colour or pigment</a:t>
+              <a:t>Word Labs  •  wordlabs.app  •  Root: 'paint' = to colour or coat surface</a:t>
             </a:r>
             <a:endParaRPr lang="en-US" sz="800" dirty="0"/>
           </a:p>
@@ -16755,7 +16689,7 @@
                 <a:ea typeface="Calibri" pitchFamily="34" charset="-122"/>
                 <a:cs typeface="Calibri" pitchFamily="34" charset="-120"/>
               </a:rPr>
-              <a:t>The talented </a:t>
+              <a:t>She decided to </a:t>
             </a:r>
             <a:pPr algn="l" indent="0" marL="0">
               <a:buNone/>
@@ -16772,7 +16706,7 @@
                 <a:ea typeface="Calibri" pitchFamily="34" charset="-122"/>
                 <a:cs typeface="Calibri" pitchFamily="34" charset="-120"/>
               </a:rPr>
-              <a:t>painter</a:t>
+              <a:t>repaint</a:t>
             </a:r>
             <a:pPr algn="l" indent="0" marL="0">
               <a:buNone/>
@@ -16786,7 +16720,7 @@
                 <a:ea typeface="Calibri" pitchFamily="34" charset="-122"/>
                 <a:cs typeface="Calibri" pitchFamily="34" charset="-120"/>
               </a:rPr>
-              <a:t> used </a:t>
+              <a:t> the shed, but the </a:t>
             </a:r>
             <a:pPr algn="l" indent="0" marL="0">
               <a:buNone/>
@@ -16803,7 +16737,7 @@
                 <a:ea typeface="Calibri" pitchFamily="34" charset="-122"/>
                 <a:cs typeface="Calibri" pitchFamily="34" charset="-120"/>
               </a:rPr>
-              <a:t>underpaint</a:t>
+              <a:t>paintwork</a:t>
             </a:r>
             <a:pPr algn="l" indent="0" marL="0">
               <a:buNone/>
@@ -16817,7 +16751,7 @@
                 <a:ea typeface="Calibri" pitchFamily="34" charset="-122"/>
                 <a:cs typeface="Calibri" pitchFamily="34" charset="-120"/>
               </a:rPr>
-              <a:t> as a base, and then </a:t>
+              <a:t> was already peeling and the </a:t>
             </a:r>
             <a:pPr algn="l" indent="0" marL="0">
               <a:buNone/>
@@ -16834,7 +16768,7 @@
                 <a:ea typeface="Calibri" pitchFamily="34" charset="-122"/>
                 <a:cs typeface="Calibri" pitchFamily="34" charset="-120"/>
               </a:rPr>
-              <a:t>overpainted</a:t>
+              <a:t>unpainted</a:t>
             </a:r>
             <a:pPr algn="l" indent="0" marL="0">
               <a:buNone/>
@@ -16848,7 +16782,7 @@
                 <a:ea typeface="Calibri" pitchFamily="34" charset="-122"/>
                 <a:cs typeface="Calibri" pitchFamily="34" charset="-120"/>
               </a:rPr>
-              <a:t> the whole canvas with bright colours!</a:t>
+              <a:t> patches looked terrible.</a:t>
             </a:r>
             <a:endParaRPr lang="en-US" sz="1800" dirty="0"/>
           </a:p>
@@ -17003,7 +16937,7 @@
                 <a:ea typeface="Trebuchet MS" pitchFamily="34" charset="-122"/>
                 <a:cs typeface="Trebuchet MS" pitchFamily="34" charset="-120"/>
               </a:rPr>
-              <a:t>painter</a:t>
+              <a:t>repaint</a:t>
             </a:r>
             <a:endParaRPr lang="en-US" sz="1400" dirty="0"/>
           </a:p>
@@ -17131,7 +17065,7 @@
                 <a:ea typeface="Trebuchet MS" pitchFamily="34" charset="-122"/>
                 <a:cs typeface="Trebuchet MS" pitchFamily="34" charset="-120"/>
               </a:rPr>
-              <a:t>underpaint</a:t>
+              <a:t>paintwork</a:t>
             </a:r>
             <a:endParaRPr lang="en-US" sz="1400" dirty="0"/>
           </a:p>
@@ -17259,7 +17193,7 @@
                 <a:ea typeface="Trebuchet MS" pitchFamily="34" charset="-122"/>
                 <a:cs typeface="Trebuchet MS" pitchFamily="34" charset="-120"/>
               </a:rPr>
-              <a:t>overpainted</a:t>
+              <a:t>unpainted</a:t>
             </a:r>
             <a:endParaRPr lang="en-US" sz="1400" dirty="0"/>
           </a:p>
@@ -17590,7 +17524,7 @@
                 <a:ea typeface="Calibri" pitchFamily="34" charset="-122"/>
                 <a:cs typeface="Calibri" pitchFamily="34" charset="-120"/>
               </a:rPr>
-              <a:t>Word Labs  •  wordlabs.app  •  Root: 'paint' = to apply colour or pigment</a:t>
+              <a:t>Word Labs  •  wordlabs.app  •  Root: 'paint' = to colour or coat surface</a:t>
             </a:r>
             <a:endParaRPr lang="en-US" sz="800" dirty="0"/>
           </a:p>
@@ -17729,7 +17663,7 @@
                 <a:ea typeface="Trebuchet MS" pitchFamily="34" charset="-122"/>
                 <a:cs typeface="Trebuchet MS" pitchFamily="34" charset="-120"/>
               </a:rPr>
-              <a:t>painter</a:t>
+              <a:t>repaint</a:t>
             </a:r>
             <a:endParaRPr lang="en-US" sz="2800" dirty="0"/>
           </a:p>
@@ -18417,7 +18351,7 @@
                 <a:ea typeface="Calibri" pitchFamily="34" charset="-122"/>
                 <a:cs typeface="Calibri" pitchFamily="34" charset="-120"/>
               </a:rPr>
-              <a:t>Word Labs  •  wordlabs.app  •  Root: 'paint' = to apply colour or pigment</a:t>
+              <a:t>Word Labs  •  wordlabs.app  •  Root: 'paint' = to colour or coat surface</a:t>
             </a:r>
             <a:endParaRPr lang="en-US" sz="800" dirty="0"/>
           </a:p>
@@ -18556,7 +18490,7 @@
                 <a:ea typeface="Trebuchet MS" pitchFamily="34" charset="-122"/>
                 <a:cs typeface="Trebuchet MS" pitchFamily="34" charset="-120"/>
               </a:rPr>
-              <a:t>painter</a:t>
+              <a:t>repaint</a:t>
             </a:r>
             <a:endParaRPr lang="en-US" sz="2800" dirty="0"/>
           </a:p>
@@ -18645,11 +18579,11 @@
             </a:avLst>
           </a:prstGeom>
           <a:solidFill>
-            <a:srgbClr val="CCFBF1"/>
+            <a:srgbClr val="DDD6FE"/>
           </a:solidFill>
           <a:ln w="19050">
             <a:solidFill>
-              <a:srgbClr val="0D9488"/>
+              <a:srgbClr val="7C3AED"/>
             </a:solidFill>
             <a:prstDash val="solid"/>
           </a:ln>
@@ -18689,13 +18623,13 @@
             <a:r>
               <a:rPr lang="en-US" sz="1300" b="1" dirty="0">
                 <a:solidFill>
-                  <a:srgbClr val="0F766E"/>
+                  <a:srgbClr val="4C1D95"/>
                 </a:solidFill>
                 <a:latin typeface="Trebuchet MS" pitchFamily="34" charset="0"/>
                 <a:ea typeface="Trebuchet MS" pitchFamily="34" charset="-122"/>
                 <a:cs typeface="Trebuchet MS" pitchFamily="34" charset="-120"/>
               </a:rPr>
-              <a:t>paint</a:t>
+              <a:t>re</a:t>
             </a:r>
             <a:endParaRPr lang="en-US" sz="1300" dirty="0"/>
           </a:p>
@@ -18734,7 +18668,7 @@
                 <a:ea typeface="Calibri" pitchFamily="34" charset="-122"/>
                 <a:cs typeface="Calibri" pitchFamily="34" charset="-120"/>
               </a:rPr>
-              <a:t>to apply colour</a:t>
+              <a:t>again</a:t>
             </a:r>
             <a:endParaRPr lang="en-US" sz="850" dirty="0"/>
           </a:p>
@@ -18757,11 +18691,11 @@
             </a:avLst>
           </a:prstGeom>
           <a:solidFill>
-            <a:srgbClr val="FCE7F3"/>
+            <a:srgbClr val="CCFBF1"/>
           </a:solidFill>
           <a:ln w="19050">
             <a:solidFill>
-              <a:srgbClr val="DB2777"/>
+              <a:srgbClr val="0D9488"/>
             </a:solidFill>
             <a:prstDash val="solid"/>
           </a:ln>
@@ -18801,13 +18735,13 @@
             <a:r>
               <a:rPr lang="en-US" sz="1300" b="1" dirty="0">
                 <a:solidFill>
-                  <a:srgbClr val="9D174D"/>
+                  <a:srgbClr val="0F766E"/>
                 </a:solidFill>
                 <a:latin typeface="Trebuchet MS" pitchFamily="34" charset="0"/>
                 <a:ea typeface="Trebuchet MS" pitchFamily="34" charset="-122"/>
                 <a:cs typeface="Trebuchet MS" pitchFamily="34" charset="-120"/>
               </a:rPr>
-              <a:t>er</a:t>
+              <a:t>paint</a:t>
             </a:r>
             <a:endParaRPr lang="en-US" sz="1300" dirty="0"/>
           </a:p>
@@ -18846,7 +18780,7 @@
                 <a:ea typeface="Calibri" pitchFamily="34" charset="-122"/>
                 <a:cs typeface="Calibri" pitchFamily="34" charset="-120"/>
               </a:rPr>
-              <a:t>a person who does something</a:t>
+              <a:t>to colour a surface</a:t>
             </a:r>
             <a:endParaRPr lang="en-US" sz="850" dirty="0"/>
           </a:p>
@@ -19402,7 +19336,7 @@
                 <a:ea typeface="Calibri" pitchFamily="34" charset="-122"/>
                 <a:cs typeface="Calibri" pitchFamily="34" charset="-120"/>
               </a:rPr>
-              <a:t>Word Labs  •  wordlabs.app  •  Root: 'paint' = to apply colour or pigment</a:t>
+              <a:t>Word Labs  •  wordlabs.app  •  Root: 'paint' = to colour or coat surface</a:t>
             </a:r>
             <a:endParaRPr lang="en-US" sz="800" dirty="0"/>
           </a:p>
@@ -19541,7 +19475,7 @@
                 <a:ea typeface="Trebuchet MS" pitchFamily="34" charset="-122"/>
                 <a:cs typeface="Trebuchet MS" pitchFamily="34" charset="-120"/>
               </a:rPr>
-              <a:t>painter</a:t>
+              <a:t>repaint</a:t>
             </a:r>
             <a:endParaRPr lang="en-US" sz="2800" dirty="0"/>
           </a:p>
@@ -19630,11 +19564,11 @@
             </a:avLst>
           </a:prstGeom>
           <a:solidFill>
-            <a:srgbClr val="CCFBF1"/>
+            <a:srgbClr val="DDD6FE"/>
           </a:solidFill>
           <a:ln w="19050">
             <a:solidFill>
-              <a:srgbClr val="0D9488"/>
+              <a:srgbClr val="7C3AED"/>
             </a:solidFill>
             <a:prstDash val="solid"/>
           </a:ln>
@@ -19674,13 +19608,13 @@
             <a:r>
               <a:rPr lang="en-US" sz="1300" b="1" dirty="0">
                 <a:solidFill>
-                  <a:srgbClr val="0F766E"/>
+                  <a:srgbClr val="4C1D95"/>
                 </a:solidFill>
                 <a:latin typeface="Trebuchet MS" pitchFamily="34" charset="0"/>
                 <a:ea typeface="Trebuchet MS" pitchFamily="34" charset="-122"/>
                 <a:cs typeface="Trebuchet MS" pitchFamily="34" charset="-120"/>
               </a:rPr>
-              <a:t>paint</a:t>
+              <a:t>re</a:t>
             </a:r>
             <a:endParaRPr lang="en-US" sz="1300" dirty="0"/>
           </a:p>
@@ -19719,7 +19653,7 @@
                 <a:ea typeface="Calibri" pitchFamily="34" charset="-122"/>
                 <a:cs typeface="Calibri" pitchFamily="34" charset="-120"/>
               </a:rPr>
-              <a:t>to apply colour</a:t>
+              <a:t>again</a:t>
             </a:r>
             <a:endParaRPr lang="en-US" sz="850" dirty="0"/>
           </a:p>
@@ -19742,11 +19676,11 @@
             </a:avLst>
           </a:prstGeom>
           <a:solidFill>
-            <a:srgbClr val="FCE7F3"/>
+            <a:srgbClr val="CCFBF1"/>
           </a:solidFill>
           <a:ln w="19050">
             <a:solidFill>
-              <a:srgbClr val="DB2777"/>
+              <a:srgbClr val="0D9488"/>
             </a:solidFill>
             <a:prstDash val="solid"/>
           </a:ln>
@@ -19786,13 +19720,13 @@
             <a:r>
               <a:rPr lang="en-US" sz="1300" b="1" dirty="0">
                 <a:solidFill>
-                  <a:srgbClr val="9D174D"/>
+                  <a:srgbClr val="0F766E"/>
                 </a:solidFill>
                 <a:latin typeface="Trebuchet MS" pitchFamily="34" charset="0"/>
                 <a:ea typeface="Trebuchet MS" pitchFamily="34" charset="-122"/>
                 <a:cs typeface="Trebuchet MS" pitchFamily="34" charset="-120"/>
               </a:rPr>
-              <a:t>er</a:t>
+              <a:t>paint</a:t>
             </a:r>
             <a:endParaRPr lang="en-US" sz="1300" dirty="0"/>
           </a:p>
@@ -19831,7 +19765,7 @@
                 <a:ea typeface="Calibri" pitchFamily="34" charset="-122"/>
                 <a:cs typeface="Calibri" pitchFamily="34" charset="-120"/>
               </a:rPr>
-              <a:t>a person who does something</a:t>
+              <a:t>to colour a surface</a:t>
             </a:r>
             <a:endParaRPr lang="en-US" sz="850" dirty="0"/>
           </a:p>
@@ -19990,7 +19924,7 @@
                 <a:ea typeface="Trebuchet MS" pitchFamily="34" charset="-122"/>
                 <a:cs typeface="Trebuchet MS" pitchFamily="34" charset="-120"/>
               </a:rPr>
-              <a:t>pain</a:t>
+              <a:t>re</a:t>
             </a:r>
             <a:endParaRPr lang="en-US" sz="1400" dirty="0"/>
           </a:p>
@@ -20095,7 +20029,7 @@
                 <a:ea typeface="Trebuchet MS" pitchFamily="34" charset="-122"/>
                 <a:cs typeface="Trebuchet MS" pitchFamily="34" charset="-120"/>
               </a:rPr>
-              <a:t>ter</a:t>
+              <a:t>paint</a:t>
             </a:r>
             <a:endParaRPr lang="en-US" sz="1400" dirty="0"/>
           </a:p>
@@ -20519,7 +20453,7 @@
                 <a:ea typeface="Calibri" pitchFamily="34" charset="-122"/>
                 <a:cs typeface="Calibri" pitchFamily="34" charset="-120"/>
               </a:rPr>
-              <a:t>Word Labs  •  wordlabs.app  •  Root: 'paint' = to apply colour or pigment</a:t>
+              <a:t>Word Labs  •  wordlabs.app  •  Root: 'paint' = to colour or coat surface</a:t>
             </a:r>
             <a:endParaRPr lang="en-US" sz="800" dirty="0"/>
           </a:p>
@@ -20658,7 +20592,7 @@
                 <a:ea typeface="Trebuchet MS" pitchFamily="34" charset="-122"/>
                 <a:cs typeface="Trebuchet MS" pitchFamily="34" charset="-120"/>
               </a:rPr>
-              <a:t>painter</a:t>
+              <a:t>repaint</a:t>
             </a:r>
             <a:endParaRPr lang="en-US" sz="2800" dirty="0"/>
           </a:p>
@@ -20747,11 +20681,11 @@
             </a:avLst>
           </a:prstGeom>
           <a:solidFill>
-            <a:srgbClr val="CCFBF1"/>
+            <a:srgbClr val="DDD6FE"/>
           </a:solidFill>
           <a:ln w="19050">
             <a:solidFill>
-              <a:srgbClr val="0D9488"/>
+              <a:srgbClr val="7C3AED"/>
             </a:solidFill>
             <a:prstDash val="solid"/>
           </a:ln>
@@ -20791,13 +20725,13 @@
             <a:r>
               <a:rPr lang="en-US" sz="1300" b="1" dirty="0">
                 <a:solidFill>
-                  <a:srgbClr val="0F766E"/>
+                  <a:srgbClr val="4C1D95"/>
                 </a:solidFill>
                 <a:latin typeface="Trebuchet MS" pitchFamily="34" charset="0"/>
                 <a:ea typeface="Trebuchet MS" pitchFamily="34" charset="-122"/>
                 <a:cs typeface="Trebuchet MS" pitchFamily="34" charset="-120"/>
               </a:rPr>
-              <a:t>paint</a:t>
+              <a:t>re</a:t>
             </a:r>
             <a:endParaRPr lang="en-US" sz="1300" dirty="0"/>
           </a:p>
@@ -20836,7 +20770,7 @@
                 <a:ea typeface="Calibri" pitchFamily="34" charset="-122"/>
                 <a:cs typeface="Calibri" pitchFamily="34" charset="-120"/>
               </a:rPr>
-              <a:t>to apply colour</a:t>
+              <a:t>again</a:t>
             </a:r>
             <a:endParaRPr lang="en-US" sz="850" dirty="0"/>
           </a:p>
@@ -20859,11 +20793,11 @@
             </a:avLst>
           </a:prstGeom>
           <a:solidFill>
-            <a:srgbClr val="FCE7F3"/>
+            <a:srgbClr val="CCFBF1"/>
           </a:solidFill>
           <a:ln w="19050">
             <a:solidFill>
-              <a:srgbClr val="DB2777"/>
+              <a:srgbClr val="0D9488"/>
             </a:solidFill>
             <a:prstDash val="solid"/>
           </a:ln>
@@ -20903,13 +20837,13 @@
             <a:r>
               <a:rPr lang="en-US" sz="1300" b="1" dirty="0">
                 <a:solidFill>
-                  <a:srgbClr val="9D174D"/>
+                  <a:srgbClr val="0F766E"/>
                 </a:solidFill>
                 <a:latin typeface="Trebuchet MS" pitchFamily="34" charset="0"/>
                 <a:ea typeface="Trebuchet MS" pitchFamily="34" charset="-122"/>
                 <a:cs typeface="Trebuchet MS" pitchFamily="34" charset="-120"/>
               </a:rPr>
-              <a:t>er</a:t>
+              <a:t>paint</a:t>
             </a:r>
             <a:endParaRPr lang="en-US" sz="1300" dirty="0"/>
           </a:p>
@@ -20948,7 +20882,7 @@
                 <a:ea typeface="Calibri" pitchFamily="34" charset="-122"/>
                 <a:cs typeface="Calibri" pitchFamily="34" charset="-120"/>
               </a:rPr>
-              <a:t>a person who does something</a:t>
+              <a:t>to colour a surface</a:t>
             </a:r>
             <a:endParaRPr lang="en-US" sz="850" dirty="0"/>
           </a:p>
@@ -21107,7 +21041,7 @@
                 <a:ea typeface="Trebuchet MS" pitchFamily="34" charset="-122"/>
                 <a:cs typeface="Trebuchet MS" pitchFamily="34" charset="-120"/>
               </a:rPr>
-              <a:t>pain</a:t>
+              <a:t>re</a:t>
             </a:r>
             <a:endParaRPr lang="en-US" sz="1400" dirty="0"/>
           </a:p>
@@ -21212,7 +21146,7 @@
                 <a:ea typeface="Trebuchet MS" pitchFamily="34" charset="-122"/>
                 <a:cs typeface="Trebuchet MS" pitchFamily="34" charset="-120"/>
               </a:rPr>
-              <a:t>ter</a:t>
+              <a:t>paint</a:t>
             </a:r>
             <a:endParaRPr lang="en-US" sz="1400" dirty="0"/>
           </a:p>
@@ -21319,7 +21253,7 @@
         </p:nvSpPr>
         <p:spPr>
           <a:xfrm>
-            <a:off x="2427732" y="4169664"/>
+            <a:off x="2254649" y="4169664"/>
             <a:ext cx="685800" cy="475488"/>
           </a:xfrm>
           <a:prstGeom prst="rect">
@@ -21346,7 +21280,7 @@
         </p:nvSpPr>
         <p:spPr>
           <a:xfrm>
-            <a:off x="2427732" y="4169664"/>
+            <a:off x="2254649" y="4169664"/>
             <a:ext cx="685800" cy="475488"/>
           </a:xfrm>
           <a:prstGeom prst="rect">
@@ -21371,7 +21305,7 @@
                 <a:ea typeface="Trebuchet MS" pitchFamily="34" charset="-122"/>
                 <a:cs typeface="Trebuchet MS" pitchFamily="34" charset="-120"/>
               </a:rPr>
-              <a:t>p</a:t>
+              <a:t>r</a:t>
             </a:r>
             <a:endParaRPr lang="en-US" sz="900" dirty="0"/>
           </a:p>
@@ -21385,7 +21319,7 @@
         </p:nvSpPr>
         <p:spPr>
           <a:xfrm>
-            <a:off x="3639312" y="4169664"/>
+            <a:off x="3293146" y="4169664"/>
             <a:ext cx="685800" cy="475488"/>
           </a:xfrm>
           <a:prstGeom prst="rect">
@@ -21412,7 +21346,7 @@
         </p:nvSpPr>
         <p:spPr>
           <a:xfrm>
-            <a:off x="3639312" y="4169664"/>
+            <a:off x="3293146" y="4169664"/>
             <a:ext cx="685800" cy="475488"/>
           </a:xfrm>
           <a:prstGeom prst="rect">
@@ -21437,7 +21371,7 @@
                 <a:ea typeface="Trebuchet MS" pitchFamily="34" charset="-122"/>
                 <a:cs typeface="Trebuchet MS" pitchFamily="34" charset="-120"/>
               </a:rPr>
-              <a:t>ai</a:t>
+              <a:t>e</a:t>
             </a:r>
             <a:endParaRPr lang="en-US" sz="900" dirty="0"/>
           </a:p>
@@ -21451,7 +21385,7 @@
         </p:nvSpPr>
         <p:spPr>
           <a:xfrm>
-            <a:off x="4850892" y="4169664"/>
+            <a:off x="4331643" y="4169664"/>
             <a:ext cx="685800" cy="475488"/>
           </a:xfrm>
           <a:prstGeom prst="rect">
@@ -21478,7 +21412,7 @@
         </p:nvSpPr>
         <p:spPr>
           <a:xfrm>
-            <a:off x="4850892" y="4169664"/>
+            <a:off x="4331643" y="4169664"/>
             <a:ext cx="685800" cy="475488"/>
           </a:xfrm>
           <a:prstGeom prst="rect">
@@ -21503,7 +21437,7 @@
                 <a:ea typeface="Trebuchet MS" pitchFamily="34" charset="-122"/>
                 <a:cs typeface="Trebuchet MS" pitchFamily="34" charset="-120"/>
               </a:rPr>
-              <a:t>n</a:t>
+              <a:t>p</a:t>
             </a:r>
             <a:endParaRPr lang="en-US" sz="900" dirty="0"/>
           </a:p>
@@ -21517,7 +21451,7 @@
         </p:nvSpPr>
         <p:spPr>
           <a:xfrm>
-            <a:off x="6062472" y="4169664"/>
+            <a:off x="5370141" y="4169664"/>
             <a:ext cx="685800" cy="475488"/>
           </a:xfrm>
           <a:prstGeom prst="rect">
@@ -21544,7 +21478,7 @@
         </p:nvSpPr>
         <p:spPr>
           <a:xfrm>
-            <a:off x="6062472" y="4169664"/>
+            <a:off x="5370141" y="4169664"/>
             <a:ext cx="685800" cy="475488"/>
           </a:xfrm>
           <a:prstGeom prst="rect">
@@ -21569,7 +21503,7 @@
                 <a:ea typeface="Trebuchet MS" pitchFamily="34" charset="-122"/>
                 <a:cs typeface="Trebuchet MS" pitchFamily="34" charset="-120"/>
               </a:rPr>
-              <a:t>t</a:t>
+              <a:t>ai</a:t>
             </a:r>
             <a:endParaRPr lang="en-US" sz="900" dirty="0"/>
           </a:p>
@@ -21583,7 +21517,7 @@
         </p:nvSpPr>
         <p:spPr>
           <a:xfrm>
-            <a:off x="7274052" y="4169664"/>
+            <a:off x="6408638" y="4169664"/>
             <a:ext cx="685800" cy="475488"/>
           </a:xfrm>
           <a:prstGeom prst="rect">
@@ -21610,7 +21544,7 @@
         </p:nvSpPr>
         <p:spPr>
           <a:xfrm>
-            <a:off x="7274052" y="4169664"/>
+            <a:off x="6408638" y="4169664"/>
             <a:ext cx="685800" cy="475488"/>
           </a:xfrm>
           <a:prstGeom prst="rect">
@@ -21635,7 +21569,73 @@
                 <a:ea typeface="Trebuchet MS" pitchFamily="34" charset="-122"/>
                 <a:cs typeface="Trebuchet MS" pitchFamily="34" charset="-120"/>
               </a:rPr>
-              <a:t>er</a:t>
+              <a:t>n</a:t>
+            </a:r>
+            <a:endParaRPr lang="en-US" sz="900" dirty="0"/>
+          </a:p>
+        </p:txBody>
+      </p:sp>
+      <p:sp>
+        <p:nvSpPr>
+          <p:cNvPr id="43" name="Shape 41"/>
+          <p:cNvSpPr/>
+          <p:nvPr/>
+        </p:nvSpPr>
+        <p:spPr>
+          <a:xfrm>
+            <a:off x="7447135" y="4169664"/>
+            <a:ext cx="685800" cy="475488"/>
+          </a:xfrm>
+          <a:prstGeom prst="rect">
+            <a:avLst>
+              <a:gd name="adj" fmla="val 7692"/>
+            </a:avLst>
+          </a:prstGeom>
+          <a:solidFill>
+            <a:srgbClr val="FFFFFF"/>
+          </a:solidFill>
+          <a:ln w="12700">
+            <a:solidFill>
+              <a:srgbClr val="DB2777"/>
+            </a:solidFill>
+            <a:prstDash val="solid"/>
+          </a:ln>
+        </p:spPr>
+      </p:sp>
+      <p:sp>
+        <p:nvSpPr>
+          <p:cNvPr id="44" name="Text 42"/>
+          <p:cNvSpPr/>
+          <p:nvPr/>
+        </p:nvSpPr>
+        <p:spPr>
+          <a:xfrm>
+            <a:off x="7447135" y="4169664"/>
+            <a:ext cx="685800" cy="475488"/>
+          </a:xfrm>
+          <a:prstGeom prst="rect">
+            <a:avLst/>
+          </a:prstGeom>
+          <a:noFill/>
+          <a:ln/>
+        </p:spPr>
+        <p:txBody>
+          <a:bodyPr wrap="square" lIns="0" tIns="0" rIns="0" bIns="0" rtlCol="0" anchor="ctr"/>
+          <a:lstStyle/>
+          <a:p>
+            <a:pPr algn="ctr" indent="0" marL="0">
+              <a:buNone/>
+            </a:pPr>
+            <a:r>
+              <a:rPr lang="en-US" sz="900" b="1" dirty="0">
+                <a:solidFill>
+                  <a:srgbClr val="9D174D"/>
+                </a:solidFill>
+                <a:latin typeface="Trebuchet MS" pitchFamily="34" charset="0"/>
+                <a:ea typeface="Trebuchet MS" pitchFamily="34" charset="-122"/>
+                <a:cs typeface="Trebuchet MS" pitchFamily="34" charset="-120"/>
+              </a:rPr>
+              <a:t>t</a:t>
             </a:r>
             <a:endParaRPr lang="en-US" sz="900" dirty="0"/>
           </a:p>
@@ -21927,7 +21927,7 @@
                 <a:ea typeface="Calibri" pitchFamily="34" charset="-122"/>
                 <a:cs typeface="Calibri" pitchFamily="34" charset="-120"/>
               </a:rPr>
-              <a:t>Word Labs  •  wordlabs.app  •  Root: 'paint' = to apply colour or pigment</a:t>
+              <a:t>Word Labs  •  wordlabs.app  •  Root: 'paint' = to colour or coat surface</a:t>
             </a:r>
             <a:endParaRPr lang="en-US" sz="800" dirty="0"/>
           </a:p>
@@ -22066,7 +22066,7 @@
                 <a:ea typeface="Trebuchet MS" pitchFamily="34" charset="-122"/>
                 <a:cs typeface="Trebuchet MS" pitchFamily="34" charset="-120"/>
               </a:rPr>
-              <a:t>underpaint</a:t>
+              <a:t>paintwork</a:t>
             </a:r>
             <a:endParaRPr lang="en-US" sz="2800" dirty="0"/>
           </a:p>
@@ -22754,7 +22754,7 @@
                 <a:ea typeface="Calibri" pitchFamily="34" charset="-122"/>
                 <a:cs typeface="Calibri" pitchFamily="34" charset="-120"/>
               </a:rPr>
-              <a:t>Word Labs  •  wordlabs.app  •  Root: 'paint' = to apply colour or pigment</a:t>
+              <a:t>Word Labs  •  wordlabs.app  •  Root: 'paint' = to colour or coat surface</a:t>
             </a:r>
             <a:endParaRPr lang="en-US" sz="800" dirty="0"/>
           </a:p>
@@ -22893,7 +22893,7 @@
                 <a:ea typeface="Trebuchet MS" pitchFamily="34" charset="-122"/>
                 <a:cs typeface="Trebuchet MS" pitchFamily="34" charset="-120"/>
               </a:rPr>
-              <a:t>underpaint</a:t>
+              <a:t>paintwork</a:t>
             </a:r>
             <a:endParaRPr lang="en-US" sz="2800" dirty="0"/>
           </a:p>
@@ -22982,11 +22982,11 @@
             </a:avLst>
           </a:prstGeom>
           <a:solidFill>
-            <a:srgbClr val="DDD6FE"/>
+            <a:srgbClr val="CCFBF1"/>
           </a:solidFill>
           <a:ln w="19050">
             <a:solidFill>
-              <a:srgbClr val="7C3AED"/>
+              <a:srgbClr val="0D9488"/>
             </a:solidFill>
             <a:prstDash val="solid"/>
           </a:ln>
@@ -23026,13 +23026,13 @@
             <a:r>
               <a:rPr lang="en-US" sz="1300" b="1" dirty="0">
                 <a:solidFill>
-                  <a:srgbClr val="4C1D95"/>
+                  <a:srgbClr val="0F766E"/>
                 </a:solidFill>
                 <a:latin typeface="Trebuchet MS" pitchFamily="34" charset="0"/>
                 <a:ea typeface="Trebuchet MS" pitchFamily="34" charset="-122"/>
                 <a:cs typeface="Trebuchet MS" pitchFamily="34" charset="-120"/>
               </a:rPr>
-              <a:t>under</a:t>
+              <a:t>paint</a:t>
             </a:r>
             <a:endParaRPr lang="en-US" sz="1300" dirty="0"/>
           </a:p>
@@ -23071,7 +23071,7 @@
                 <a:ea typeface="Calibri" pitchFamily="34" charset="-122"/>
                 <a:cs typeface="Calibri" pitchFamily="34" charset="-120"/>
               </a:rPr>
-              <a:t>below or beneath</a:t>
+              <a:t>to colour a surface</a:t>
             </a:r>
             <a:endParaRPr lang="en-US" sz="850" dirty="0"/>
           </a:p>
@@ -23094,11 +23094,11 @@
             </a:avLst>
           </a:prstGeom>
           <a:solidFill>
-            <a:srgbClr val="CCFBF1"/>
+            <a:srgbClr val="FCE7F3"/>
           </a:solidFill>
           <a:ln w="19050">
             <a:solidFill>
-              <a:srgbClr val="0D9488"/>
+              <a:srgbClr val="DB2777"/>
             </a:solidFill>
             <a:prstDash val="solid"/>
           </a:ln>
@@ -23138,13 +23138,13 @@
             <a:r>
               <a:rPr lang="en-US" sz="1300" b="1" dirty="0">
                 <a:solidFill>
-                  <a:srgbClr val="0F766E"/>
+                  <a:srgbClr val="9D174D"/>
                 </a:solidFill>
                 <a:latin typeface="Trebuchet MS" pitchFamily="34" charset="0"/>
                 <a:ea typeface="Trebuchet MS" pitchFamily="34" charset="-122"/>
                 <a:cs typeface="Trebuchet MS" pitchFamily="34" charset="-120"/>
               </a:rPr>
-              <a:t>paint</a:t>
+              <a:t>work</a:t>
             </a:r>
             <a:endParaRPr lang="en-US" sz="1300" dirty="0"/>
           </a:p>
@@ -23183,7 +23183,7 @@
                 <a:ea typeface="Calibri" pitchFamily="34" charset="-122"/>
                 <a:cs typeface="Calibri" pitchFamily="34" charset="-120"/>
               </a:rPr>
-              <a:t>to apply colour</a:t>
+              <a:t>result or surface area</a:t>
             </a:r>
             <a:endParaRPr lang="en-US" sz="850" dirty="0"/>
           </a:p>
@@ -23739,7 +23739,7 @@
                 <a:ea typeface="Calibri" pitchFamily="34" charset="-122"/>
                 <a:cs typeface="Calibri" pitchFamily="34" charset="-120"/>
               </a:rPr>
-              <a:t>Word Labs  •  wordlabs.app  •  Root: 'paint' = to apply colour or pigment</a:t>
+              <a:t>Word Labs  •  wordlabs.app  •  Root: 'paint' = to colour or coat surface</a:t>
             </a:r>
             <a:endParaRPr lang="en-US" sz="800" dirty="0"/>
           </a:p>
@@ -23812,7 +23812,7 @@
                 <a:ea typeface="Trebuchet MS" pitchFamily="34" charset="-122"/>
                 <a:cs typeface="Trebuchet MS" pitchFamily="34" charset="-120"/>
               </a:rPr>
-              <a:t>We are learning that the root 'paint' means 'to apply colour or pigment'.</a:t>
+              <a:t>We are learning that the root 'paint' means 'to colour or coat surface'.</a:t>
             </a:r>
             <a:endParaRPr lang="en-US" sz="2000" dirty="0"/>
           </a:p>
@@ -24458,7 +24458,7 @@
                 <a:ea typeface="Calibri" pitchFamily="34" charset="-122"/>
                 <a:cs typeface="Calibri" pitchFamily="34" charset="-120"/>
               </a:rPr>
-              <a:t>Word Labs  •  wordlabs.app  •  Root: 'paint' = to apply colour or pigment</a:t>
+              <a:t>Word Labs  •  wordlabs.app  •  Root: 'paint' = to colour or coat surface</a:t>
             </a:r>
             <a:endParaRPr lang="en-US" sz="800" dirty="0"/>
           </a:p>
@@ -24597,7 +24597,7 @@
                 <a:ea typeface="Trebuchet MS" pitchFamily="34" charset="-122"/>
                 <a:cs typeface="Trebuchet MS" pitchFamily="34" charset="-120"/>
               </a:rPr>
-              <a:t>underpaint</a:t>
+              <a:t>paintwork</a:t>
             </a:r>
             <a:endParaRPr lang="en-US" sz="2800" dirty="0"/>
           </a:p>
@@ -24686,11 +24686,11 @@
             </a:avLst>
           </a:prstGeom>
           <a:solidFill>
-            <a:srgbClr val="DDD6FE"/>
+            <a:srgbClr val="CCFBF1"/>
           </a:solidFill>
           <a:ln w="19050">
             <a:solidFill>
-              <a:srgbClr val="7C3AED"/>
+              <a:srgbClr val="0D9488"/>
             </a:solidFill>
             <a:prstDash val="solid"/>
           </a:ln>
@@ -24730,13 +24730,13 @@
             <a:r>
               <a:rPr lang="en-US" sz="1300" b="1" dirty="0">
                 <a:solidFill>
-                  <a:srgbClr val="4C1D95"/>
+                  <a:srgbClr val="0F766E"/>
                 </a:solidFill>
                 <a:latin typeface="Trebuchet MS" pitchFamily="34" charset="0"/>
                 <a:ea typeface="Trebuchet MS" pitchFamily="34" charset="-122"/>
                 <a:cs typeface="Trebuchet MS" pitchFamily="34" charset="-120"/>
               </a:rPr>
-              <a:t>under</a:t>
+              <a:t>paint</a:t>
             </a:r>
             <a:endParaRPr lang="en-US" sz="1300" dirty="0"/>
           </a:p>
@@ -24775,7 +24775,7 @@
                 <a:ea typeface="Calibri" pitchFamily="34" charset="-122"/>
                 <a:cs typeface="Calibri" pitchFamily="34" charset="-120"/>
               </a:rPr>
-              <a:t>below or beneath</a:t>
+              <a:t>to colour a surface</a:t>
             </a:r>
             <a:endParaRPr lang="en-US" sz="850" dirty="0"/>
           </a:p>
@@ -24798,11 +24798,11 @@
             </a:avLst>
           </a:prstGeom>
           <a:solidFill>
-            <a:srgbClr val="CCFBF1"/>
+            <a:srgbClr val="FCE7F3"/>
           </a:solidFill>
           <a:ln w="19050">
             <a:solidFill>
-              <a:srgbClr val="0D9488"/>
+              <a:srgbClr val="DB2777"/>
             </a:solidFill>
             <a:prstDash val="solid"/>
           </a:ln>
@@ -24842,13 +24842,13 @@
             <a:r>
               <a:rPr lang="en-US" sz="1300" b="1" dirty="0">
                 <a:solidFill>
-                  <a:srgbClr val="0F766E"/>
+                  <a:srgbClr val="9D174D"/>
                 </a:solidFill>
                 <a:latin typeface="Trebuchet MS" pitchFamily="34" charset="0"/>
                 <a:ea typeface="Trebuchet MS" pitchFamily="34" charset="-122"/>
                 <a:cs typeface="Trebuchet MS" pitchFamily="34" charset="-120"/>
               </a:rPr>
-              <a:t>paint</a:t>
+              <a:t>work</a:t>
             </a:r>
             <a:endParaRPr lang="en-US" sz="1300" dirty="0"/>
           </a:p>
@@ -24887,7 +24887,7 @@
                 <a:ea typeface="Calibri" pitchFamily="34" charset="-122"/>
                 <a:cs typeface="Calibri" pitchFamily="34" charset="-120"/>
               </a:rPr>
-              <a:t>to apply colour</a:t>
+              <a:t>result or surface area</a:t>
             </a:r>
             <a:endParaRPr lang="en-US" sz="850" dirty="0"/>
           </a:p>
@@ -24994,7 +24994,7 @@
         </p:nvSpPr>
         <p:spPr>
           <a:xfrm>
-            <a:off x="2313432" y="3364992"/>
+            <a:off x="2999232" y="3364992"/>
             <a:ext cx="1645920" cy="475488"/>
           </a:xfrm>
           <a:prstGeom prst="rect">
@@ -25021,7 +25021,7 @@
         </p:nvSpPr>
         <p:spPr>
           <a:xfrm>
-            <a:off x="2313432" y="3364992"/>
+            <a:off x="2999232" y="3364992"/>
             <a:ext cx="1645920" cy="475488"/>
           </a:xfrm>
           <a:prstGeom prst="rect">
@@ -25046,7 +25046,7 @@
                 <a:ea typeface="Trebuchet MS" pitchFamily="34" charset="-122"/>
                 <a:cs typeface="Trebuchet MS" pitchFamily="34" charset="-120"/>
               </a:rPr>
-              <a:t>un</a:t>
+              <a:t>paint</a:t>
             </a:r>
             <a:endParaRPr lang="en-US" sz="1400" dirty="0"/>
           </a:p>
@@ -25060,8 +25060,8 @@
         </p:nvSpPr>
         <p:spPr>
           <a:xfrm>
-            <a:off x="3959352" y="3364992"/>
-            <a:ext cx="411480" cy="475488"/>
+            <a:off x="4645152" y="3364992"/>
+            <a:ext cx="1097280" cy="475488"/>
           </a:xfrm>
           <a:prstGeom prst="rect">
             <a:avLst/>
@@ -25099,7 +25099,7 @@
         </p:nvSpPr>
         <p:spPr>
           <a:xfrm>
-            <a:off x="4370832" y="3364992"/>
+            <a:off x="5742432" y="3364992"/>
             <a:ext cx="1645920" cy="475488"/>
           </a:xfrm>
           <a:prstGeom prst="rect">
@@ -25126,7 +25126,7 @@
         </p:nvSpPr>
         <p:spPr>
           <a:xfrm>
-            <a:off x="4370832" y="3364992"/>
+            <a:off x="5742432" y="3364992"/>
             <a:ext cx="1645920" cy="475488"/>
           </a:xfrm>
           <a:prstGeom prst="rect">
@@ -25151,7 +25151,7 @@
                 <a:ea typeface="Trebuchet MS" pitchFamily="34" charset="-122"/>
                 <a:cs typeface="Trebuchet MS" pitchFamily="34" charset="-120"/>
               </a:rPr>
-              <a:t>der</a:t>
+              <a:t>work</a:t>
             </a:r>
             <a:endParaRPr lang="en-US" sz="1400" dirty="0"/>
           </a:p>
@@ -25159,14 +25159,41 @@
       </p:sp>
       <p:sp>
         <p:nvSpPr>
-          <p:cNvPr id="30" name="Text 28"/>
-          <p:cNvSpPr/>
-          <p:nvPr/>
-        </p:nvSpPr>
-        <p:spPr>
-          <a:xfrm>
-            <a:off x="6016752" y="3364992"/>
-            <a:ext cx="411480" cy="475488"/>
+          <p:cNvPr id="30" name="Shape 28"/>
+          <p:cNvSpPr/>
+          <p:nvPr/>
+        </p:nvSpPr>
+        <p:spPr>
+          <a:xfrm>
+            <a:off x="365760" y="4096512"/>
+            <a:ext cx="1371600" cy="804672"/>
+          </a:xfrm>
+          <a:prstGeom prst="rect">
+            <a:avLst>
+              <a:gd name="adj" fmla="val 6818"/>
+            </a:avLst>
+          </a:prstGeom>
+          <a:solidFill>
+            <a:srgbClr val="E2E8F0"/>
+          </a:solidFill>
+          <a:ln w="12700">
+            <a:solidFill>
+              <a:srgbClr val="E2E8F0"/>
+            </a:solidFill>
+            <a:prstDash val="solid"/>
+          </a:ln>
+        </p:spPr>
+      </p:sp>
+      <p:sp>
+        <p:nvSpPr>
+          <p:cNvPr id="31" name="Text 29"/>
+          <p:cNvSpPr/>
+          <p:nvPr/>
+        </p:nvSpPr>
+        <p:spPr>
+          <a:xfrm>
+            <a:off x="365760" y="4096512"/>
+            <a:ext cx="1371600" cy="804672"/>
           </a:xfrm>
           <a:prstGeom prst="rect">
             <a:avLst/>
@@ -25182,96 +25209,30 @@
               <a:buNone/>
             </a:pPr>
             <a:r>
-              <a:rPr lang="en-US" sz="1600" b="1" dirty="0">
-                <a:solidFill>
-                  <a:srgbClr val="0D9488"/>
+              <a:rPr lang="en-US" sz="1100" b="1" dirty="0">
+                <a:solidFill>
+                  <a:srgbClr val="475569"/>
                 </a:solidFill>
                 <a:latin typeface="Trebuchet MS" pitchFamily="34" charset="0"/>
                 <a:ea typeface="Trebuchet MS" pitchFamily="34" charset="-122"/>
                 <a:cs typeface="Trebuchet MS" pitchFamily="34" charset="-120"/>
               </a:rPr>
-              <a:t>·</a:t>
-            </a:r>
-            <a:endParaRPr lang="en-US" sz="1600" dirty="0"/>
-          </a:p>
-        </p:txBody>
-      </p:sp>
-      <p:sp>
-        <p:nvSpPr>
-          <p:cNvPr id="31" name="Shape 29"/>
-          <p:cNvSpPr/>
-          <p:nvPr/>
-        </p:nvSpPr>
-        <p:spPr>
-          <a:xfrm>
-            <a:off x="6428232" y="3364992"/>
-            <a:ext cx="1645920" cy="475488"/>
-          </a:xfrm>
-          <a:prstGeom prst="rect">
-            <a:avLst>
-              <a:gd name="adj" fmla="val 9615"/>
-            </a:avLst>
-          </a:prstGeom>
-          <a:solidFill>
-            <a:srgbClr val="FFFFFF"/>
-          </a:solidFill>
-          <a:ln w="12700">
-            <a:solidFill>
-              <a:srgbClr val="0D9488"/>
-            </a:solidFill>
-            <a:prstDash val="solid"/>
-          </a:ln>
-        </p:spPr>
-      </p:sp>
-      <p:sp>
-        <p:nvSpPr>
-          <p:cNvPr id="32" name="Text 30"/>
-          <p:cNvSpPr/>
-          <p:nvPr/>
-        </p:nvSpPr>
-        <p:spPr>
-          <a:xfrm>
-            <a:off x="6428232" y="3364992"/>
-            <a:ext cx="1645920" cy="475488"/>
-          </a:xfrm>
-          <a:prstGeom prst="rect">
-            <a:avLst/>
-          </a:prstGeom>
-          <a:noFill/>
-          <a:ln/>
-        </p:spPr>
-        <p:txBody>
-          <a:bodyPr wrap="square" lIns="0" tIns="0" rIns="0" bIns="0" rtlCol="0" anchor="ctr"/>
-          <a:lstStyle/>
-          <a:p>
-            <a:pPr algn="ctr" indent="0" marL="0">
-              <a:buNone/>
-            </a:pPr>
-            <a:r>
-              <a:rPr lang="en-US" sz="1400" b="1" dirty="0">
-                <a:solidFill>
-                  <a:srgbClr val="0D9488"/>
-                </a:solidFill>
-                <a:latin typeface="Trebuchet MS" pitchFamily="34" charset="0"/>
-                <a:ea typeface="Trebuchet MS" pitchFamily="34" charset="-122"/>
-                <a:cs typeface="Trebuchet MS" pitchFamily="34" charset="-120"/>
-              </a:rPr>
-              <a:t>paint</a:t>
-            </a:r>
-            <a:endParaRPr lang="en-US" sz="1400" dirty="0"/>
-          </a:p>
-        </p:txBody>
-      </p:sp>
-      <p:sp>
-        <p:nvSpPr>
-          <p:cNvPr id="33" name="Shape 31"/>
-          <p:cNvSpPr/>
-          <p:nvPr/>
-        </p:nvSpPr>
-        <p:spPr>
-          <a:xfrm>
-            <a:off x="365760" y="4096512"/>
-            <a:ext cx="1371600" cy="804672"/>
+              <a:t>Phonemes</a:t>
+            </a:r>
+            <a:endParaRPr lang="en-US" sz="1100" dirty="0"/>
+          </a:p>
+        </p:txBody>
+      </p:sp>
+      <p:sp>
+        <p:nvSpPr>
+          <p:cNvPr id="32" name="Shape 30"/>
+          <p:cNvSpPr/>
+          <p:nvPr/>
+        </p:nvSpPr>
+        <p:spPr>
+          <a:xfrm>
+            <a:off x="1874520" y="4096512"/>
+            <a:ext cx="6903720" cy="804672"/>
           </a:xfrm>
           <a:prstGeom prst="rect">
             <a:avLst>
@@ -25279,85 +25240,19 @@
             </a:avLst>
           </a:prstGeom>
           <a:solidFill>
-            <a:srgbClr val="E2E8F0"/>
+            <a:srgbClr val="F8FAFC"/>
           </a:solidFill>
           <a:ln w="12700">
             <a:solidFill>
               <a:srgbClr val="E2E8F0"/>
             </a:solidFill>
-            <a:prstDash val="solid"/>
-          </a:ln>
-        </p:spPr>
-      </p:sp>
-      <p:sp>
-        <p:nvSpPr>
-          <p:cNvPr id="34" name="Text 32"/>
-          <p:cNvSpPr/>
-          <p:nvPr/>
-        </p:nvSpPr>
-        <p:spPr>
-          <a:xfrm>
-            <a:off x="365760" y="4096512"/>
-            <a:ext cx="1371600" cy="804672"/>
-          </a:xfrm>
-          <a:prstGeom prst="rect">
-            <a:avLst/>
-          </a:prstGeom>
-          <a:noFill/>
-          <a:ln/>
-        </p:spPr>
-        <p:txBody>
-          <a:bodyPr wrap="square" lIns="0" tIns="0" rIns="0" bIns="0" rtlCol="0" anchor="ctr"/>
-          <a:lstStyle/>
-          <a:p>
-            <a:pPr algn="ctr" indent="0" marL="0">
-              <a:buNone/>
-            </a:pPr>
-            <a:r>
-              <a:rPr lang="en-US" sz="1100" b="1" dirty="0">
-                <a:solidFill>
-                  <a:srgbClr val="475569"/>
-                </a:solidFill>
-                <a:latin typeface="Trebuchet MS" pitchFamily="34" charset="0"/>
-                <a:ea typeface="Trebuchet MS" pitchFamily="34" charset="-122"/>
-                <a:cs typeface="Trebuchet MS" pitchFamily="34" charset="-120"/>
-              </a:rPr>
-              <a:t>Phonemes</a:t>
-            </a:r>
-            <a:endParaRPr lang="en-US" sz="1100" dirty="0"/>
-          </a:p>
-        </p:txBody>
-      </p:sp>
-      <p:sp>
-        <p:nvSpPr>
-          <p:cNvPr id="35" name="Shape 33"/>
-          <p:cNvSpPr/>
-          <p:nvPr/>
-        </p:nvSpPr>
-        <p:spPr>
-          <a:xfrm>
-            <a:off x="1874520" y="4096512"/>
-            <a:ext cx="6903720" cy="804672"/>
-          </a:xfrm>
-          <a:prstGeom prst="rect">
-            <a:avLst>
-              <a:gd name="adj" fmla="val 6818"/>
-            </a:avLst>
-          </a:prstGeom>
-          <a:solidFill>
-            <a:srgbClr val="F8FAFC"/>
-          </a:solidFill>
-          <a:ln w="12700">
-            <a:solidFill>
-              <a:srgbClr val="E2E8F0"/>
-            </a:solidFill>
             <a:prstDash val="dash"/>
           </a:ln>
         </p:spPr>
       </p:sp>
       <p:sp>
         <p:nvSpPr>
-          <p:cNvPr id="36" name="Text 34"/>
+          <p:cNvPr id="33" name="Text 31"/>
           <p:cNvSpPr/>
           <p:nvPr/>
         </p:nvSpPr>
@@ -25680,7 +25575,7 @@
                 <a:ea typeface="Calibri" pitchFamily="34" charset="-122"/>
                 <a:cs typeface="Calibri" pitchFamily="34" charset="-120"/>
               </a:rPr>
-              <a:t>Word Labs  •  wordlabs.app  •  Root: 'paint' = to apply colour or pigment</a:t>
+              <a:t>Word Labs  •  wordlabs.app  •  Root: 'paint' = to colour or coat surface</a:t>
             </a:r>
             <a:endParaRPr lang="en-US" sz="800" dirty="0"/>
           </a:p>
@@ -25819,7 +25714,7 @@
                 <a:ea typeface="Trebuchet MS" pitchFamily="34" charset="-122"/>
                 <a:cs typeface="Trebuchet MS" pitchFamily="34" charset="-120"/>
               </a:rPr>
-              <a:t>underpaint</a:t>
+              <a:t>paintwork</a:t>
             </a:r>
             <a:endParaRPr lang="en-US" sz="2800" dirty="0"/>
           </a:p>
@@ -25908,11 +25803,11 @@
             </a:avLst>
           </a:prstGeom>
           <a:solidFill>
-            <a:srgbClr val="DDD6FE"/>
+            <a:srgbClr val="CCFBF1"/>
           </a:solidFill>
           <a:ln w="19050">
             <a:solidFill>
-              <a:srgbClr val="7C3AED"/>
+              <a:srgbClr val="0D9488"/>
             </a:solidFill>
             <a:prstDash val="solid"/>
           </a:ln>
@@ -25952,13 +25847,13 @@
             <a:r>
               <a:rPr lang="en-US" sz="1300" b="1" dirty="0">
                 <a:solidFill>
-                  <a:srgbClr val="4C1D95"/>
+                  <a:srgbClr val="0F766E"/>
                 </a:solidFill>
                 <a:latin typeface="Trebuchet MS" pitchFamily="34" charset="0"/>
                 <a:ea typeface="Trebuchet MS" pitchFamily="34" charset="-122"/>
                 <a:cs typeface="Trebuchet MS" pitchFamily="34" charset="-120"/>
               </a:rPr>
-              <a:t>under</a:t>
+              <a:t>paint</a:t>
             </a:r>
             <a:endParaRPr lang="en-US" sz="1300" dirty="0"/>
           </a:p>
@@ -25997,7 +25892,7 @@
                 <a:ea typeface="Calibri" pitchFamily="34" charset="-122"/>
                 <a:cs typeface="Calibri" pitchFamily="34" charset="-120"/>
               </a:rPr>
-              <a:t>below or beneath</a:t>
+              <a:t>to colour a surface</a:t>
             </a:r>
             <a:endParaRPr lang="en-US" sz="850" dirty="0"/>
           </a:p>
@@ -26020,11 +25915,11 @@
             </a:avLst>
           </a:prstGeom>
           <a:solidFill>
-            <a:srgbClr val="CCFBF1"/>
+            <a:srgbClr val="FCE7F3"/>
           </a:solidFill>
           <a:ln w="19050">
             <a:solidFill>
-              <a:srgbClr val="0D9488"/>
+              <a:srgbClr val="DB2777"/>
             </a:solidFill>
             <a:prstDash val="solid"/>
           </a:ln>
@@ -26064,13 +25959,13 @@
             <a:r>
               <a:rPr lang="en-US" sz="1300" b="1" dirty="0">
                 <a:solidFill>
-                  <a:srgbClr val="0F766E"/>
+                  <a:srgbClr val="9D174D"/>
                 </a:solidFill>
                 <a:latin typeface="Trebuchet MS" pitchFamily="34" charset="0"/>
                 <a:ea typeface="Trebuchet MS" pitchFamily="34" charset="-122"/>
                 <a:cs typeface="Trebuchet MS" pitchFamily="34" charset="-120"/>
               </a:rPr>
-              <a:t>paint</a:t>
+              <a:t>work</a:t>
             </a:r>
             <a:endParaRPr lang="en-US" sz="1300" dirty="0"/>
           </a:p>
@@ -26109,7 +26004,7 @@
                 <a:ea typeface="Calibri" pitchFamily="34" charset="-122"/>
                 <a:cs typeface="Calibri" pitchFamily="34" charset="-120"/>
               </a:rPr>
-              <a:t>to apply colour</a:t>
+              <a:t>result or surface area</a:t>
             </a:r>
             <a:endParaRPr lang="en-US" sz="850" dirty="0"/>
           </a:p>
@@ -26216,7 +26111,7 @@
         </p:nvSpPr>
         <p:spPr>
           <a:xfrm>
-            <a:off x="2313432" y="3364992"/>
+            <a:off x="2999232" y="3364992"/>
             <a:ext cx="1645920" cy="475488"/>
           </a:xfrm>
           <a:prstGeom prst="rect">
@@ -26243,7 +26138,7 @@
         </p:nvSpPr>
         <p:spPr>
           <a:xfrm>
-            <a:off x="2313432" y="3364992"/>
+            <a:off x="2999232" y="3364992"/>
             <a:ext cx="1645920" cy="475488"/>
           </a:xfrm>
           <a:prstGeom prst="rect">
@@ -26268,7 +26163,7 @@
                 <a:ea typeface="Trebuchet MS" pitchFamily="34" charset="-122"/>
                 <a:cs typeface="Trebuchet MS" pitchFamily="34" charset="-120"/>
               </a:rPr>
-              <a:t>un</a:t>
+              <a:t>paint</a:t>
             </a:r>
             <a:endParaRPr lang="en-US" sz="1400" dirty="0"/>
           </a:p>
@@ -26282,8 +26177,8 @@
         </p:nvSpPr>
         <p:spPr>
           <a:xfrm>
-            <a:off x="3959352" y="3364992"/>
-            <a:ext cx="411480" cy="475488"/>
+            <a:off x="4645152" y="3364992"/>
+            <a:ext cx="1097280" cy="475488"/>
           </a:xfrm>
           <a:prstGeom prst="rect">
             <a:avLst/>
@@ -26321,7 +26216,7 @@
         </p:nvSpPr>
         <p:spPr>
           <a:xfrm>
-            <a:off x="4370832" y="3364992"/>
+            <a:off x="5742432" y="3364992"/>
             <a:ext cx="1645920" cy="475488"/>
           </a:xfrm>
           <a:prstGeom prst="rect">
@@ -26348,7 +26243,7 @@
         </p:nvSpPr>
         <p:spPr>
           <a:xfrm>
-            <a:off x="4370832" y="3364992"/>
+            <a:off x="5742432" y="3364992"/>
             <a:ext cx="1645920" cy="475488"/>
           </a:xfrm>
           <a:prstGeom prst="rect">
@@ -26373,7 +26268,7 @@
                 <a:ea typeface="Trebuchet MS" pitchFamily="34" charset="-122"/>
                 <a:cs typeface="Trebuchet MS" pitchFamily="34" charset="-120"/>
               </a:rPr>
-              <a:t>der</a:t>
+              <a:t>work</a:t>
             </a:r>
             <a:endParaRPr lang="en-US" sz="1400" dirty="0"/>
           </a:p>
@@ -26381,14 +26276,41 @@
       </p:sp>
       <p:sp>
         <p:nvSpPr>
-          <p:cNvPr id="30" name="Text 28"/>
-          <p:cNvSpPr/>
-          <p:nvPr/>
-        </p:nvSpPr>
-        <p:spPr>
-          <a:xfrm>
-            <a:off x="6016752" y="3364992"/>
-            <a:ext cx="411480" cy="475488"/>
+          <p:cNvPr id="30" name="Shape 28"/>
+          <p:cNvSpPr/>
+          <p:nvPr/>
+        </p:nvSpPr>
+        <p:spPr>
+          <a:xfrm>
+            <a:off x="365760" y="4096512"/>
+            <a:ext cx="1371600" cy="804672"/>
+          </a:xfrm>
+          <a:prstGeom prst="rect">
+            <a:avLst>
+              <a:gd name="adj" fmla="val 6818"/>
+            </a:avLst>
+          </a:prstGeom>
+          <a:solidFill>
+            <a:srgbClr val="E2E8F0"/>
+          </a:solidFill>
+          <a:ln w="12700">
+            <a:solidFill>
+              <a:srgbClr val="E2E8F0"/>
+            </a:solidFill>
+            <a:prstDash val="solid"/>
+          </a:ln>
+        </p:spPr>
+      </p:sp>
+      <p:sp>
+        <p:nvSpPr>
+          <p:cNvPr id="31" name="Text 29"/>
+          <p:cNvSpPr/>
+          <p:nvPr/>
+        </p:nvSpPr>
+        <p:spPr>
+          <a:xfrm>
+            <a:off x="365760" y="4096512"/>
+            <a:ext cx="1371600" cy="804672"/>
           </a:xfrm>
           <a:prstGeom prst="rect">
             <a:avLst/>
@@ -26404,57 +26326,84 @@
               <a:buNone/>
             </a:pPr>
             <a:r>
-              <a:rPr lang="en-US" sz="1600" b="1" dirty="0">
-                <a:solidFill>
-                  <a:srgbClr val="0D9488"/>
+              <a:rPr lang="en-US" sz="1100" b="1" dirty="0">
+                <a:solidFill>
+                  <a:srgbClr val="475569"/>
                 </a:solidFill>
                 <a:latin typeface="Trebuchet MS" pitchFamily="34" charset="0"/>
                 <a:ea typeface="Trebuchet MS" pitchFamily="34" charset="-122"/>
                 <a:cs typeface="Trebuchet MS" pitchFamily="34" charset="-120"/>
               </a:rPr>
-              <a:t>·</a:t>
-            </a:r>
-            <a:endParaRPr lang="en-US" sz="1600" dirty="0"/>
-          </a:p>
-        </p:txBody>
-      </p:sp>
-      <p:sp>
-        <p:nvSpPr>
-          <p:cNvPr id="31" name="Shape 29"/>
-          <p:cNvSpPr/>
-          <p:nvPr/>
-        </p:nvSpPr>
-        <p:spPr>
-          <a:xfrm>
-            <a:off x="6428232" y="3364992"/>
-            <a:ext cx="1645920" cy="475488"/>
+              <a:t>Phonemes</a:t>
+            </a:r>
+            <a:endParaRPr lang="en-US" sz="1100" dirty="0"/>
+          </a:p>
+        </p:txBody>
+      </p:sp>
+      <p:sp>
+        <p:nvSpPr>
+          <p:cNvPr id="32" name="Shape 30"/>
+          <p:cNvSpPr/>
+          <p:nvPr/>
+        </p:nvSpPr>
+        <p:spPr>
+          <a:xfrm>
+            <a:off x="1874520" y="4096512"/>
+            <a:ext cx="6903720" cy="658368"/>
           </a:xfrm>
           <a:prstGeom prst="rect">
             <a:avLst>
-              <a:gd name="adj" fmla="val 9615"/>
+              <a:gd name="adj" fmla="val 8333"/>
             </a:avLst>
           </a:prstGeom>
           <a:solidFill>
+            <a:srgbClr val="FCE7F3"/>
+          </a:solidFill>
+          <a:ln w="12700">
+            <a:solidFill>
+              <a:srgbClr val="DB2777"/>
+            </a:solidFill>
+            <a:prstDash val="solid"/>
+          </a:ln>
+        </p:spPr>
+      </p:sp>
+      <p:sp>
+        <p:nvSpPr>
+          <p:cNvPr id="33" name="Shape 31"/>
+          <p:cNvSpPr/>
+          <p:nvPr/>
+        </p:nvSpPr>
+        <p:spPr>
+          <a:xfrm>
+            <a:off x="2124837" y="4169664"/>
+            <a:ext cx="685800" cy="475488"/>
+          </a:xfrm>
+          <a:prstGeom prst="rect">
+            <a:avLst>
+              <a:gd name="adj" fmla="val 7692"/>
+            </a:avLst>
+          </a:prstGeom>
+          <a:solidFill>
             <a:srgbClr val="FFFFFF"/>
           </a:solidFill>
           <a:ln w="12700">
             <a:solidFill>
-              <a:srgbClr val="0D9488"/>
-            </a:solidFill>
-            <a:prstDash val="solid"/>
-          </a:ln>
-        </p:spPr>
-      </p:sp>
-      <p:sp>
-        <p:nvSpPr>
-          <p:cNvPr id="32" name="Text 30"/>
-          <p:cNvSpPr/>
-          <p:nvPr/>
-        </p:nvSpPr>
-        <p:spPr>
-          <a:xfrm>
-            <a:off x="6428232" y="3364992"/>
-            <a:ext cx="1645920" cy="475488"/>
+              <a:srgbClr val="DB2777"/>
+            </a:solidFill>
+            <a:prstDash val="solid"/>
+          </a:ln>
+        </p:spPr>
+      </p:sp>
+      <p:sp>
+        <p:nvSpPr>
+          <p:cNvPr id="34" name="Text 32"/>
+          <p:cNvSpPr/>
+          <p:nvPr/>
+        </p:nvSpPr>
+        <p:spPr>
+          <a:xfrm>
+            <a:off x="2124837" y="4169664"/>
+            <a:ext cx="685800" cy="475488"/>
           </a:xfrm>
           <a:prstGeom prst="rect">
             <a:avLst/>
@@ -26470,57 +26419,57 @@
               <a:buNone/>
             </a:pPr>
             <a:r>
-              <a:rPr lang="en-US" sz="1400" b="1" dirty="0">
-                <a:solidFill>
-                  <a:srgbClr val="0D9488"/>
+              <a:rPr lang="en-US" sz="900" b="1" dirty="0">
+                <a:solidFill>
+                  <a:srgbClr val="9D174D"/>
                 </a:solidFill>
                 <a:latin typeface="Trebuchet MS" pitchFamily="34" charset="0"/>
                 <a:ea typeface="Trebuchet MS" pitchFamily="34" charset="-122"/>
                 <a:cs typeface="Trebuchet MS" pitchFamily="34" charset="-120"/>
               </a:rPr>
-              <a:t>paint</a:t>
-            </a:r>
-            <a:endParaRPr lang="en-US" sz="1400" dirty="0"/>
-          </a:p>
-        </p:txBody>
-      </p:sp>
-      <p:sp>
-        <p:nvSpPr>
-          <p:cNvPr id="33" name="Shape 31"/>
-          <p:cNvSpPr/>
-          <p:nvPr/>
-        </p:nvSpPr>
-        <p:spPr>
-          <a:xfrm>
-            <a:off x="365760" y="4096512"/>
-            <a:ext cx="1371600" cy="804672"/>
+              <a:t>p</a:t>
+            </a:r>
+            <a:endParaRPr lang="en-US" sz="900" dirty="0"/>
+          </a:p>
+        </p:txBody>
+      </p:sp>
+      <p:sp>
+        <p:nvSpPr>
+          <p:cNvPr id="35" name="Shape 33"/>
+          <p:cNvSpPr/>
+          <p:nvPr/>
+        </p:nvSpPr>
+        <p:spPr>
+          <a:xfrm>
+            <a:off x="3033522" y="4169664"/>
+            <a:ext cx="685800" cy="475488"/>
           </a:xfrm>
           <a:prstGeom prst="rect">
             <a:avLst>
-              <a:gd name="adj" fmla="val 6818"/>
+              <a:gd name="adj" fmla="val 7692"/>
             </a:avLst>
           </a:prstGeom>
           <a:solidFill>
-            <a:srgbClr val="E2E8F0"/>
-          </a:solidFill>
-          <a:ln w="12700">
-            <a:solidFill>
-              <a:srgbClr val="E2E8F0"/>
-            </a:solidFill>
-            <a:prstDash val="solid"/>
-          </a:ln>
-        </p:spPr>
-      </p:sp>
-      <p:sp>
-        <p:nvSpPr>
-          <p:cNvPr id="34" name="Text 32"/>
-          <p:cNvSpPr/>
-          <p:nvPr/>
-        </p:nvSpPr>
-        <p:spPr>
-          <a:xfrm>
-            <a:off x="365760" y="4096512"/>
-            <a:ext cx="1371600" cy="804672"/>
+            <a:srgbClr val="FFFFFF"/>
+          </a:solidFill>
+          <a:ln w="12700">
+            <a:solidFill>
+              <a:srgbClr val="DB2777"/>
+            </a:solidFill>
+            <a:prstDash val="solid"/>
+          </a:ln>
+        </p:spPr>
+      </p:sp>
+      <p:sp>
+        <p:nvSpPr>
+          <p:cNvPr id="36" name="Text 34"/>
+          <p:cNvSpPr/>
+          <p:nvPr/>
+        </p:nvSpPr>
+        <p:spPr>
+          <a:xfrm>
+            <a:off x="3033522" y="4169664"/>
+            <a:ext cx="685800" cy="475488"/>
           </a:xfrm>
           <a:prstGeom prst="rect">
             <a:avLst/>
@@ -26536,56 +26485,29 @@
               <a:buNone/>
             </a:pPr>
             <a:r>
-              <a:rPr lang="en-US" sz="1100" b="1" dirty="0">
-                <a:solidFill>
-                  <a:srgbClr val="475569"/>
+              <a:rPr lang="en-US" sz="900" b="1" dirty="0">
+                <a:solidFill>
+                  <a:srgbClr val="9D174D"/>
                 </a:solidFill>
                 <a:latin typeface="Trebuchet MS" pitchFamily="34" charset="0"/>
                 <a:ea typeface="Trebuchet MS" pitchFamily="34" charset="-122"/>
                 <a:cs typeface="Trebuchet MS" pitchFamily="34" charset="-120"/>
               </a:rPr>
-              <a:t>Phonemes</a:t>
-            </a:r>
-            <a:endParaRPr lang="en-US" sz="1100" dirty="0"/>
-          </a:p>
-        </p:txBody>
-      </p:sp>
-      <p:sp>
-        <p:nvSpPr>
-          <p:cNvPr id="35" name="Shape 33"/>
-          <p:cNvSpPr/>
-          <p:nvPr/>
-        </p:nvSpPr>
-        <p:spPr>
-          <a:xfrm>
-            <a:off x="1874520" y="4096512"/>
-            <a:ext cx="6903720" cy="658368"/>
-          </a:xfrm>
-          <a:prstGeom prst="rect">
-            <a:avLst>
-              <a:gd name="adj" fmla="val 8333"/>
-            </a:avLst>
-          </a:prstGeom>
-          <a:solidFill>
-            <a:srgbClr val="FCE7F3"/>
-          </a:solidFill>
-          <a:ln w="12700">
-            <a:solidFill>
-              <a:srgbClr val="DB2777"/>
-            </a:solidFill>
-            <a:prstDash val="solid"/>
-          </a:ln>
-        </p:spPr>
-      </p:sp>
-      <p:sp>
-        <p:nvSpPr>
-          <p:cNvPr id="36" name="Shape 34"/>
-          <p:cNvSpPr/>
-          <p:nvPr/>
-        </p:nvSpPr>
-        <p:spPr>
-          <a:xfrm>
-            <a:off x="2023872" y="4169664"/>
+              <a:t>ai</a:t>
+            </a:r>
+            <a:endParaRPr lang="en-US" sz="900" dirty="0"/>
+          </a:p>
+        </p:txBody>
+      </p:sp>
+      <p:sp>
+        <p:nvSpPr>
+          <p:cNvPr id="37" name="Shape 35"/>
+          <p:cNvSpPr/>
+          <p:nvPr/>
+        </p:nvSpPr>
+        <p:spPr>
+          <a:xfrm>
+            <a:off x="3942207" y="4169664"/>
             <a:ext cx="685800" cy="475488"/>
           </a:xfrm>
           <a:prstGeom prst="rect">
@@ -26606,13 +26528,13 @@
       </p:sp>
       <p:sp>
         <p:nvSpPr>
-          <p:cNvPr id="37" name="Text 35"/>
-          <p:cNvSpPr/>
-          <p:nvPr/>
-        </p:nvSpPr>
-        <p:spPr>
-          <a:xfrm>
-            <a:off x="2023872" y="4169664"/>
+          <p:cNvPr id="38" name="Text 36"/>
+          <p:cNvSpPr/>
+          <p:nvPr/>
+        </p:nvSpPr>
+        <p:spPr>
+          <a:xfrm>
+            <a:off x="3942207" y="4169664"/>
             <a:ext cx="685800" cy="475488"/>
           </a:xfrm>
           <a:prstGeom prst="rect">
@@ -26637,7 +26559,7 @@
                 <a:ea typeface="Trebuchet MS" pitchFamily="34" charset="-122"/>
                 <a:cs typeface="Trebuchet MS" pitchFamily="34" charset="-120"/>
               </a:rPr>
-              <a:t>u</a:t>
+              <a:t>n</a:t>
             </a:r>
             <a:endParaRPr lang="en-US" sz="900" dirty="0"/>
           </a:p>
@@ -26645,13 +26567,13 @@
       </p:sp>
       <p:sp>
         <p:nvSpPr>
-          <p:cNvPr id="38" name="Shape 36"/>
-          <p:cNvSpPr/>
-          <p:nvPr/>
-        </p:nvSpPr>
-        <p:spPr>
-          <a:xfrm>
-            <a:off x="2831592" y="4169664"/>
+          <p:cNvPr id="39" name="Shape 37"/>
+          <p:cNvSpPr/>
+          <p:nvPr/>
+        </p:nvSpPr>
+        <p:spPr>
+          <a:xfrm>
+            <a:off x="4850892" y="4169664"/>
             <a:ext cx="685800" cy="475488"/>
           </a:xfrm>
           <a:prstGeom prst="rect">
@@ -26672,13 +26594,13 @@
       </p:sp>
       <p:sp>
         <p:nvSpPr>
-          <p:cNvPr id="39" name="Text 37"/>
-          <p:cNvSpPr/>
-          <p:nvPr/>
-        </p:nvSpPr>
-        <p:spPr>
-          <a:xfrm>
-            <a:off x="2831592" y="4169664"/>
+          <p:cNvPr id="40" name="Text 38"/>
+          <p:cNvSpPr/>
+          <p:nvPr/>
+        </p:nvSpPr>
+        <p:spPr>
+          <a:xfrm>
+            <a:off x="4850892" y="4169664"/>
             <a:ext cx="685800" cy="475488"/>
           </a:xfrm>
           <a:prstGeom prst="rect">
@@ -26703,7 +26625,7 @@
                 <a:ea typeface="Trebuchet MS" pitchFamily="34" charset="-122"/>
                 <a:cs typeface="Trebuchet MS" pitchFamily="34" charset="-120"/>
               </a:rPr>
-              <a:t>n</a:t>
+              <a:t>t</a:t>
             </a:r>
             <a:endParaRPr lang="en-US" sz="900" dirty="0"/>
           </a:p>
@@ -26711,13 +26633,13 @@
       </p:sp>
       <p:sp>
         <p:nvSpPr>
-          <p:cNvPr id="40" name="Shape 38"/>
-          <p:cNvSpPr/>
-          <p:nvPr/>
-        </p:nvSpPr>
-        <p:spPr>
-          <a:xfrm>
-            <a:off x="3639312" y="4169664"/>
+          <p:cNvPr id="41" name="Shape 39"/>
+          <p:cNvSpPr/>
+          <p:nvPr/>
+        </p:nvSpPr>
+        <p:spPr>
+          <a:xfrm>
+            <a:off x="5759577" y="4169664"/>
             <a:ext cx="685800" cy="475488"/>
           </a:xfrm>
           <a:prstGeom prst="rect">
@@ -26738,13 +26660,13 @@
       </p:sp>
       <p:sp>
         <p:nvSpPr>
-          <p:cNvPr id="41" name="Text 39"/>
-          <p:cNvSpPr/>
-          <p:nvPr/>
-        </p:nvSpPr>
-        <p:spPr>
-          <a:xfrm>
-            <a:off x="3639312" y="4169664"/>
+          <p:cNvPr id="42" name="Text 40"/>
+          <p:cNvSpPr/>
+          <p:nvPr/>
+        </p:nvSpPr>
+        <p:spPr>
+          <a:xfrm>
+            <a:off x="5759577" y="4169664"/>
             <a:ext cx="685800" cy="475488"/>
           </a:xfrm>
           <a:prstGeom prst="rect">
@@ -26769,7 +26691,7 @@
                 <a:ea typeface="Trebuchet MS" pitchFamily="34" charset="-122"/>
                 <a:cs typeface="Trebuchet MS" pitchFamily="34" charset="-120"/>
               </a:rPr>
-              <a:t>d</a:t>
+              <a:t>w</a:t>
             </a:r>
             <a:endParaRPr lang="en-US" sz="900" dirty="0"/>
           </a:p>
@@ -26777,13 +26699,13 @@
       </p:sp>
       <p:sp>
         <p:nvSpPr>
-          <p:cNvPr id="42" name="Shape 40"/>
-          <p:cNvSpPr/>
-          <p:nvPr/>
-        </p:nvSpPr>
-        <p:spPr>
-          <a:xfrm>
-            <a:off x="4447032" y="4169664"/>
+          <p:cNvPr id="43" name="Shape 41"/>
+          <p:cNvSpPr/>
+          <p:nvPr/>
+        </p:nvSpPr>
+        <p:spPr>
+          <a:xfrm>
+            <a:off x="6668262" y="4169664"/>
             <a:ext cx="685800" cy="475488"/>
           </a:xfrm>
           <a:prstGeom prst="rect">
@@ -26804,13 +26726,13 @@
       </p:sp>
       <p:sp>
         <p:nvSpPr>
-          <p:cNvPr id="43" name="Text 41"/>
-          <p:cNvSpPr/>
-          <p:nvPr/>
-        </p:nvSpPr>
-        <p:spPr>
-          <a:xfrm>
-            <a:off x="4447032" y="4169664"/>
+          <p:cNvPr id="44" name="Text 42"/>
+          <p:cNvSpPr/>
+          <p:nvPr/>
+        </p:nvSpPr>
+        <p:spPr>
+          <a:xfrm>
+            <a:off x="6668262" y="4169664"/>
             <a:ext cx="685800" cy="475488"/>
           </a:xfrm>
           <a:prstGeom prst="rect">
@@ -26835,7 +26757,7 @@
                 <a:ea typeface="Trebuchet MS" pitchFamily="34" charset="-122"/>
                 <a:cs typeface="Trebuchet MS" pitchFamily="34" charset="-120"/>
               </a:rPr>
-              <a:t>er</a:t>
+              <a:t>or</a:t>
             </a:r>
             <a:endParaRPr lang="en-US" sz="900" dirty="0"/>
           </a:p>
@@ -26843,13 +26765,13 @@
       </p:sp>
       <p:sp>
         <p:nvSpPr>
-          <p:cNvPr id="44" name="Shape 42"/>
-          <p:cNvSpPr/>
-          <p:nvPr/>
-        </p:nvSpPr>
-        <p:spPr>
-          <a:xfrm>
-            <a:off x="5254752" y="4169664"/>
+          <p:cNvPr id="45" name="Shape 43"/>
+          <p:cNvSpPr/>
+          <p:nvPr/>
+        </p:nvSpPr>
+        <p:spPr>
+          <a:xfrm>
+            <a:off x="7576947" y="4169664"/>
             <a:ext cx="685800" cy="475488"/>
           </a:xfrm>
           <a:prstGeom prst="rect">
@@ -26870,13 +26792,13 @@
       </p:sp>
       <p:sp>
         <p:nvSpPr>
-          <p:cNvPr id="45" name="Text 43"/>
-          <p:cNvSpPr/>
-          <p:nvPr/>
-        </p:nvSpPr>
-        <p:spPr>
-          <a:xfrm>
-            <a:off x="5254752" y="4169664"/>
+          <p:cNvPr id="46" name="Text 44"/>
+          <p:cNvSpPr/>
+          <p:nvPr/>
+        </p:nvSpPr>
+        <p:spPr>
+          <a:xfrm>
+            <a:off x="7576947" y="4169664"/>
             <a:ext cx="685800" cy="475488"/>
           </a:xfrm>
           <a:prstGeom prst="rect">
@@ -26901,205 +26823,7 @@
                 <a:ea typeface="Trebuchet MS" pitchFamily="34" charset="-122"/>
                 <a:cs typeface="Trebuchet MS" pitchFamily="34" charset="-120"/>
               </a:rPr>
-              <a:t>p</a:t>
-            </a:r>
-            <a:endParaRPr lang="en-US" sz="900" dirty="0"/>
-          </a:p>
-        </p:txBody>
-      </p:sp>
-      <p:sp>
-        <p:nvSpPr>
-          <p:cNvPr id="46" name="Shape 44"/>
-          <p:cNvSpPr/>
-          <p:nvPr/>
-        </p:nvSpPr>
-        <p:spPr>
-          <a:xfrm>
-            <a:off x="6062472" y="4169664"/>
-            <a:ext cx="685800" cy="475488"/>
-          </a:xfrm>
-          <a:prstGeom prst="rect">
-            <a:avLst>
-              <a:gd name="adj" fmla="val 7692"/>
-            </a:avLst>
-          </a:prstGeom>
-          <a:solidFill>
-            <a:srgbClr val="FFFFFF"/>
-          </a:solidFill>
-          <a:ln w="12700">
-            <a:solidFill>
-              <a:srgbClr val="DB2777"/>
-            </a:solidFill>
-            <a:prstDash val="solid"/>
-          </a:ln>
-        </p:spPr>
-      </p:sp>
-      <p:sp>
-        <p:nvSpPr>
-          <p:cNvPr id="47" name="Text 45"/>
-          <p:cNvSpPr/>
-          <p:nvPr/>
-        </p:nvSpPr>
-        <p:spPr>
-          <a:xfrm>
-            <a:off x="6062472" y="4169664"/>
-            <a:ext cx="685800" cy="475488"/>
-          </a:xfrm>
-          <a:prstGeom prst="rect">
-            <a:avLst/>
-          </a:prstGeom>
-          <a:noFill/>
-          <a:ln/>
-        </p:spPr>
-        <p:txBody>
-          <a:bodyPr wrap="square" lIns="0" tIns="0" rIns="0" bIns="0" rtlCol="0" anchor="ctr"/>
-          <a:lstStyle/>
-          <a:p>
-            <a:pPr algn="ctr" indent="0" marL="0">
-              <a:buNone/>
-            </a:pPr>
-            <a:r>
-              <a:rPr lang="en-US" sz="900" b="1" dirty="0">
-                <a:solidFill>
-                  <a:srgbClr val="9D174D"/>
-                </a:solidFill>
-                <a:latin typeface="Trebuchet MS" pitchFamily="34" charset="0"/>
-                <a:ea typeface="Trebuchet MS" pitchFamily="34" charset="-122"/>
-                <a:cs typeface="Trebuchet MS" pitchFamily="34" charset="-120"/>
-              </a:rPr>
-              <a:t>ai</a:t>
-            </a:r>
-            <a:endParaRPr lang="en-US" sz="900" dirty="0"/>
-          </a:p>
-        </p:txBody>
-      </p:sp>
-      <p:sp>
-        <p:nvSpPr>
-          <p:cNvPr id="48" name="Shape 46"/>
-          <p:cNvSpPr/>
-          <p:nvPr/>
-        </p:nvSpPr>
-        <p:spPr>
-          <a:xfrm>
-            <a:off x="6870192" y="4169664"/>
-            <a:ext cx="685800" cy="475488"/>
-          </a:xfrm>
-          <a:prstGeom prst="rect">
-            <a:avLst>
-              <a:gd name="adj" fmla="val 7692"/>
-            </a:avLst>
-          </a:prstGeom>
-          <a:solidFill>
-            <a:srgbClr val="FFFFFF"/>
-          </a:solidFill>
-          <a:ln w="12700">
-            <a:solidFill>
-              <a:srgbClr val="DB2777"/>
-            </a:solidFill>
-            <a:prstDash val="solid"/>
-          </a:ln>
-        </p:spPr>
-      </p:sp>
-      <p:sp>
-        <p:nvSpPr>
-          <p:cNvPr id="49" name="Text 47"/>
-          <p:cNvSpPr/>
-          <p:nvPr/>
-        </p:nvSpPr>
-        <p:spPr>
-          <a:xfrm>
-            <a:off x="6870192" y="4169664"/>
-            <a:ext cx="685800" cy="475488"/>
-          </a:xfrm>
-          <a:prstGeom prst="rect">
-            <a:avLst/>
-          </a:prstGeom>
-          <a:noFill/>
-          <a:ln/>
-        </p:spPr>
-        <p:txBody>
-          <a:bodyPr wrap="square" lIns="0" tIns="0" rIns="0" bIns="0" rtlCol="0" anchor="ctr"/>
-          <a:lstStyle/>
-          <a:p>
-            <a:pPr algn="ctr" indent="0" marL="0">
-              <a:buNone/>
-            </a:pPr>
-            <a:r>
-              <a:rPr lang="en-US" sz="900" b="1" dirty="0">
-                <a:solidFill>
-                  <a:srgbClr val="9D174D"/>
-                </a:solidFill>
-                <a:latin typeface="Trebuchet MS" pitchFamily="34" charset="0"/>
-                <a:ea typeface="Trebuchet MS" pitchFamily="34" charset="-122"/>
-                <a:cs typeface="Trebuchet MS" pitchFamily="34" charset="-120"/>
-              </a:rPr>
-              <a:t>n</a:t>
-            </a:r>
-            <a:endParaRPr lang="en-US" sz="900" dirty="0"/>
-          </a:p>
-        </p:txBody>
-      </p:sp>
-      <p:sp>
-        <p:nvSpPr>
-          <p:cNvPr id="50" name="Shape 48"/>
-          <p:cNvSpPr/>
-          <p:nvPr/>
-        </p:nvSpPr>
-        <p:spPr>
-          <a:xfrm>
-            <a:off x="7677912" y="4169664"/>
-            <a:ext cx="685800" cy="475488"/>
-          </a:xfrm>
-          <a:prstGeom prst="rect">
-            <a:avLst>
-              <a:gd name="adj" fmla="val 7692"/>
-            </a:avLst>
-          </a:prstGeom>
-          <a:solidFill>
-            <a:srgbClr val="FFFFFF"/>
-          </a:solidFill>
-          <a:ln w="12700">
-            <a:solidFill>
-              <a:srgbClr val="DB2777"/>
-            </a:solidFill>
-            <a:prstDash val="solid"/>
-          </a:ln>
-        </p:spPr>
-      </p:sp>
-      <p:sp>
-        <p:nvSpPr>
-          <p:cNvPr id="51" name="Text 49"/>
-          <p:cNvSpPr/>
-          <p:nvPr/>
-        </p:nvSpPr>
-        <p:spPr>
-          <a:xfrm>
-            <a:off x="7677912" y="4169664"/>
-            <a:ext cx="685800" cy="475488"/>
-          </a:xfrm>
-          <a:prstGeom prst="rect">
-            <a:avLst/>
-          </a:prstGeom>
-          <a:noFill/>
-          <a:ln/>
-        </p:spPr>
-        <p:txBody>
-          <a:bodyPr wrap="square" lIns="0" tIns="0" rIns="0" bIns="0" rtlCol="0" anchor="ctr"/>
-          <a:lstStyle/>
-          <a:p>
-            <a:pPr algn="ctr" indent="0" marL="0">
-              <a:buNone/>
-            </a:pPr>
-            <a:r>
-              <a:rPr lang="en-US" sz="900" b="1" dirty="0">
-                <a:solidFill>
-                  <a:srgbClr val="9D174D"/>
-                </a:solidFill>
-                <a:latin typeface="Trebuchet MS" pitchFamily="34" charset="0"/>
-                <a:ea typeface="Trebuchet MS" pitchFamily="34" charset="-122"/>
-                <a:cs typeface="Trebuchet MS" pitchFamily="34" charset="-120"/>
-              </a:rPr>
-              <a:t>t</a:t>
+              <a:t>k</a:t>
             </a:r>
             <a:endParaRPr lang="en-US" sz="900" dirty="0"/>
           </a:p>
@@ -27391,7 +27115,7 @@
                 <a:ea typeface="Calibri" pitchFamily="34" charset="-122"/>
                 <a:cs typeface="Calibri" pitchFamily="34" charset="-120"/>
               </a:rPr>
-              <a:t>Word Labs  •  wordlabs.app  •  Root: 'paint' = to apply colour or pigment</a:t>
+              <a:t>Word Labs  •  wordlabs.app  •  Root: 'paint' = to colour or coat surface</a:t>
             </a:r>
             <a:endParaRPr lang="en-US" sz="800" dirty="0"/>
           </a:p>
@@ -27530,7 +27254,7 @@
                 <a:ea typeface="Trebuchet MS" pitchFamily="34" charset="-122"/>
                 <a:cs typeface="Trebuchet MS" pitchFamily="34" charset="-120"/>
               </a:rPr>
-              <a:t>overpainted</a:t>
+              <a:t>unpainted</a:t>
             </a:r>
             <a:endParaRPr lang="en-US" sz="2800" dirty="0"/>
           </a:p>
@@ -28218,7 +27942,7 @@
                 <a:ea typeface="Calibri" pitchFamily="34" charset="-122"/>
                 <a:cs typeface="Calibri" pitchFamily="34" charset="-120"/>
               </a:rPr>
-              <a:t>Word Labs  •  wordlabs.app  •  Root: 'paint' = to apply colour or pigment</a:t>
+              <a:t>Word Labs  •  wordlabs.app  •  Root: 'paint' = to colour or coat surface</a:t>
             </a:r>
             <a:endParaRPr lang="en-US" sz="800" dirty="0"/>
           </a:p>
@@ -28357,7 +28081,7 @@
                 <a:ea typeface="Trebuchet MS" pitchFamily="34" charset="-122"/>
                 <a:cs typeface="Trebuchet MS" pitchFamily="34" charset="-120"/>
               </a:rPr>
-              <a:t>overpainted</a:t>
+              <a:t>unpainted</a:t>
             </a:r>
             <a:endParaRPr lang="en-US" sz="2800" dirty="0"/>
           </a:p>
@@ -28496,7 +28220,7 @@
                 <a:ea typeface="Trebuchet MS" pitchFamily="34" charset="-122"/>
                 <a:cs typeface="Trebuchet MS" pitchFamily="34" charset="-120"/>
               </a:rPr>
-              <a:t>over</a:t>
+              <a:t>un</a:t>
             </a:r>
             <a:endParaRPr lang="en-US" sz="1300" dirty="0"/>
           </a:p>
@@ -28535,7 +28259,7 @@
                 <a:ea typeface="Calibri" pitchFamily="34" charset="-122"/>
                 <a:cs typeface="Calibri" pitchFamily="34" charset="-120"/>
               </a:rPr>
-              <a:t>above or on top of</a:t>
+              <a:t>not</a:t>
             </a:r>
             <a:endParaRPr lang="en-US" sz="850" dirty="0"/>
           </a:p>
@@ -28647,7 +28371,7 @@
                 <a:ea typeface="Calibri" pitchFamily="34" charset="-122"/>
                 <a:cs typeface="Calibri" pitchFamily="34" charset="-120"/>
               </a:rPr>
-              <a:t>to apply colour</a:t>
+              <a:t>to colour a surface</a:t>
             </a:r>
             <a:endParaRPr lang="en-US" sz="850" dirty="0"/>
           </a:p>
@@ -28759,7 +28483,7 @@
                 <a:ea typeface="Calibri" pitchFamily="34" charset="-122"/>
                 <a:cs typeface="Calibri" pitchFamily="34" charset="-120"/>
               </a:rPr>
-              <a:t>in the past</a:t>
+              <a:t>done in the past</a:t>
             </a:r>
             <a:endParaRPr lang="en-US" sz="850" dirty="0"/>
           </a:p>
@@ -29315,7 +29039,7 @@
                 <a:ea typeface="Calibri" pitchFamily="34" charset="-122"/>
                 <a:cs typeface="Calibri" pitchFamily="34" charset="-120"/>
               </a:rPr>
-              <a:t>Word Labs  •  wordlabs.app  •  Root: 'paint' = to apply colour or pigment</a:t>
+              <a:t>Word Labs  •  wordlabs.app  •  Root: 'paint' = to colour or coat surface</a:t>
             </a:r>
             <a:endParaRPr lang="en-US" sz="800" dirty="0"/>
           </a:p>
@@ -29454,7 +29178,7 @@
                 <a:ea typeface="Trebuchet MS" pitchFamily="34" charset="-122"/>
                 <a:cs typeface="Trebuchet MS" pitchFamily="34" charset="-120"/>
               </a:rPr>
-              <a:t>overpainted</a:t>
+              <a:t>unpainted</a:t>
             </a:r>
             <a:endParaRPr lang="en-US" sz="2800" dirty="0"/>
           </a:p>
@@ -29593,7 +29317,7 @@
                 <a:ea typeface="Trebuchet MS" pitchFamily="34" charset="-122"/>
                 <a:cs typeface="Trebuchet MS" pitchFamily="34" charset="-120"/>
               </a:rPr>
-              <a:t>over</a:t>
+              <a:t>un</a:t>
             </a:r>
             <a:endParaRPr lang="en-US" sz="1300" dirty="0"/>
           </a:p>
@@ -29632,7 +29356,7 @@
                 <a:ea typeface="Calibri" pitchFamily="34" charset="-122"/>
                 <a:cs typeface="Calibri" pitchFamily="34" charset="-120"/>
               </a:rPr>
-              <a:t>above or on top of</a:t>
+              <a:t>not</a:t>
             </a:r>
             <a:endParaRPr lang="en-US" sz="850" dirty="0"/>
           </a:p>
@@ -29744,7 +29468,7 @@
                 <a:ea typeface="Calibri" pitchFamily="34" charset="-122"/>
                 <a:cs typeface="Calibri" pitchFamily="34" charset="-120"/>
               </a:rPr>
-              <a:t>to apply colour</a:t>
+              <a:t>to colour a surface</a:t>
             </a:r>
             <a:endParaRPr lang="en-US" sz="850" dirty="0"/>
           </a:p>
@@ -29856,7 +29580,7 @@
                 <a:ea typeface="Calibri" pitchFamily="34" charset="-122"/>
                 <a:cs typeface="Calibri" pitchFamily="34" charset="-120"/>
               </a:rPr>
-              <a:t>in the past</a:t>
+              <a:t>done in the past</a:t>
             </a:r>
             <a:endParaRPr lang="en-US" sz="850" dirty="0"/>
           </a:p>
@@ -29963,8 +29687,8 @@
         </p:nvSpPr>
         <p:spPr>
           <a:xfrm>
-            <a:off x="1975104" y="3364992"/>
-            <a:ext cx="1554480" cy="475488"/>
+            <a:off x="2313432" y="3364992"/>
+            <a:ext cx="1645920" cy="475488"/>
           </a:xfrm>
           <a:prstGeom prst="rect">
             <a:avLst>
@@ -29990,8 +29714,8 @@
         </p:nvSpPr>
         <p:spPr>
           <a:xfrm>
-            <a:off x="1975104" y="3364992"/>
-            <a:ext cx="1554480" cy="475488"/>
+            <a:off x="2313432" y="3364992"/>
+            <a:ext cx="1645920" cy="475488"/>
           </a:xfrm>
           <a:prstGeom prst="rect">
             <a:avLst/>
@@ -30015,7 +29739,7 @@
                 <a:ea typeface="Trebuchet MS" pitchFamily="34" charset="-122"/>
                 <a:cs typeface="Trebuchet MS" pitchFamily="34" charset="-120"/>
               </a:rPr>
-              <a:t>o</a:t>
+              <a:t>un</a:t>
             </a:r>
             <a:endParaRPr lang="en-US" sz="1400" dirty="0"/>
           </a:p>
@@ -30029,8 +29753,8 @@
         </p:nvSpPr>
         <p:spPr>
           <a:xfrm>
-            <a:off x="3529584" y="3364992"/>
-            <a:ext cx="73152" cy="475488"/>
+            <a:off x="3959352" y="3364992"/>
+            <a:ext cx="411480" cy="475488"/>
           </a:xfrm>
           <a:prstGeom prst="rect">
             <a:avLst/>
@@ -30068,8 +29792,8 @@
         </p:nvSpPr>
         <p:spPr>
           <a:xfrm>
-            <a:off x="3602736" y="3364992"/>
-            <a:ext cx="1554480" cy="475488"/>
+            <a:off x="4370832" y="3364992"/>
+            <a:ext cx="1645920" cy="475488"/>
           </a:xfrm>
           <a:prstGeom prst="rect">
             <a:avLst>
@@ -30095,8 +29819,8 @@
         </p:nvSpPr>
         <p:spPr>
           <a:xfrm>
-            <a:off x="3602736" y="3364992"/>
-            <a:ext cx="1554480" cy="475488"/>
+            <a:off x="4370832" y="3364992"/>
+            <a:ext cx="1645920" cy="475488"/>
           </a:xfrm>
           <a:prstGeom prst="rect">
             <a:avLst/>
@@ -30120,7 +29844,7 @@
                 <a:ea typeface="Trebuchet MS" pitchFamily="34" charset="-122"/>
                 <a:cs typeface="Trebuchet MS" pitchFamily="34" charset="-120"/>
               </a:rPr>
-              <a:t>ver</a:t>
+              <a:t>pain</a:t>
             </a:r>
             <a:endParaRPr lang="en-US" sz="1400" dirty="0"/>
           </a:p>
@@ -30134,8 +29858,8 @@
         </p:nvSpPr>
         <p:spPr>
           <a:xfrm>
-            <a:off x="5157216" y="3364992"/>
-            <a:ext cx="73152" cy="475488"/>
+            <a:off x="6016752" y="3364992"/>
+            <a:ext cx="411480" cy="475488"/>
           </a:xfrm>
           <a:prstGeom prst="rect">
             <a:avLst/>
@@ -30173,8 +29897,8 @@
         </p:nvSpPr>
         <p:spPr>
           <a:xfrm>
-            <a:off x="5230368" y="3364992"/>
-            <a:ext cx="1554480" cy="475488"/>
+            <a:off x="6428232" y="3364992"/>
+            <a:ext cx="1645920" cy="475488"/>
           </a:xfrm>
           <a:prstGeom prst="rect">
             <a:avLst>
@@ -30200,8 +29924,8 @@
         </p:nvSpPr>
         <p:spPr>
           <a:xfrm>
-            <a:off x="5230368" y="3364992"/>
-            <a:ext cx="1554480" cy="475488"/>
+            <a:off x="6428232" y="3364992"/>
+            <a:ext cx="1645920" cy="475488"/>
           </a:xfrm>
           <a:prstGeom prst="rect">
             <a:avLst/>
@@ -30225,7 +29949,7 @@
                 <a:ea typeface="Trebuchet MS" pitchFamily="34" charset="-122"/>
                 <a:cs typeface="Trebuchet MS" pitchFamily="34" charset="-120"/>
               </a:rPr>
-              <a:t>pain</a:t>
+              <a:t>ted</a:t>
             </a:r>
             <a:endParaRPr lang="en-US" sz="1400" dirty="0"/>
           </a:p>
@@ -30233,14 +29957,41 @@
       </p:sp>
       <p:sp>
         <p:nvSpPr>
-          <p:cNvPr id="36" name="Text 34"/>
-          <p:cNvSpPr/>
-          <p:nvPr/>
-        </p:nvSpPr>
-        <p:spPr>
-          <a:xfrm>
-            <a:off x="6784848" y="3364992"/>
-            <a:ext cx="73152" cy="475488"/>
+          <p:cNvPr id="36" name="Shape 34"/>
+          <p:cNvSpPr/>
+          <p:nvPr/>
+        </p:nvSpPr>
+        <p:spPr>
+          <a:xfrm>
+            <a:off x="365760" y="4096512"/>
+            <a:ext cx="1371600" cy="804672"/>
+          </a:xfrm>
+          <a:prstGeom prst="rect">
+            <a:avLst>
+              <a:gd name="adj" fmla="val 6818"/>
+            </a:avLst>
+          </a:prstGeom>
+          <a:solidFill>
+            <a:srgbClr val="E2E8F0"/>
+          </a:solidFill>
+          <a:ln w="12700">
+            <a:solidFill>
+              <a:srgbClr val="E2E8F0"/>
+            </a:solidFill>
+            <a:prstDash val="solid"/>
+          </a:ln>
+        </p:spPr>
+      </p:sp>
+      <p:sp>
+        <p:nvSpPr>
+          <p:cNvPr id="37" name="Text 35"/>
+          <p:cNvSpPr/>
+          <p:nvPr/>
+        </p:nvSpPr>
+        <p:spPr>
+          <a:xfrm>
+            <a:off x="365760" y="4096512"/>
+            <a:ext cx="1371600" cy="804672"/>
           </a:xfrm>
           <a:prstGeom prst="rect">
             <a:avLst/>
@@ -30256,96 +30007,30 @@
               <a:buNone/>
             </a:pPr>
             <a:r>
-              <a:rPr lang="en-US" sz="1600" b="1" dirty="0">
-                <a:solidFill>
-                  <a:srgbClr val="0D9488"/>
+              <a:rPr lang="en-US" sz="1100" b="1" dirty="0">
+                <a:solidFill>
+                  <a:srgbClr val="475569"/>
                 </a:solidFill>
                 <a:latin typeface="Trebuchet MS" pitchFamily="34" charset="0"/>
                 <a:ea typeface="Trebuchet MS" pitchFamily="34" charset="-122"/>
                 <a:cs typeface="Trebuchet MS" pitchFamily="34" charset="-120"/>
               </a:rPr>
-              <a:t>·</a:t>
-            </a:r>
-            <a:endParaRPr lang="en-US" sz="1600" dirty="0"/>
-          </a:p>
-        </p:txBody>
-      </p:sp>
-      <p:sp>
-        <p:nvSpPr>
-          <p:cNvPr id="37" name="Shape 35"/>
-          <p:cNvSpPr/>
-          <p:nvPr/>
-        </p:nvSpPr>
-        <p:spPr>
-          <a:xfrm>
-            <a:off x="6858000" y="3364992"/>
-            <a:ext cx="1554480" cy="475488"/>
-          </a:xfrm>
-          <a:prstGeom prst="rect">
-            <a:avLst>
-              <a:gd name="adj" fmla="val 9615"/>
-            </a:avLst>
-          </a:prstGeom>
-          <a:solidFill>
-            <a:srgbClr val="FFFFFF"/>
-          </a:solidFill>
-          <a:ln w="12700">
-            <a:solidFill>
-              <a:srgbClr val="0D9488"/>
-            </a:solidFill>
-            <a:prstDash val="solid"/>
-          </a:ln>
-        </p:spPr>
-      </p:sp>
-      <p:sp>
-        <p:nvSpPr>
-          <p:cNvPr id="38" name="Text 36"/>
-          <p:cNvSpPr/>
-          <p:nvPr/>
-        </p:nvSpPr>
-        <p:spPr>
-          <a:xfrm>
-            <a:off x="6858000" y="3364992"/>
-            <a:ext cx="1554480" cy="475488"/>
-          </a:xfrm>
-          <a:prstGeom prst="rect">
-            <a:avLst/>
-          </a:prstGeom>
-          <a:noFill/>
-          <a:ln/>
-        </p:spPr>
-        <p:txBody>
-          <a:bodyPr wrap="square" lIns="0" tIns="0" rIns="0" bIns="0" rtlCol="0" anchor="ctr"/>
-          <a:lstStyle/>
-          <a:p>
-            <a:pPr algn="ctr" indent="0" marL="0">
-              <a:buNone/>
-            </a:pPr>
-            <a:r>
-              <a:rPr lang="en-US" sz="1400" b="1" dirty="0">
-                <a:solidFill>
-                  <a:srgbClr val="0D9488"/>
-                </a:solidFill>
-                <a:latin typeface="Trebuchet MS" pitchFamily="34" charset="0"/>
-                <a:ea typeface="Trebuchet MS" pitchFamily="34" charset="-122"/>
-                <a:cs typeface="Trebuchet MS" pitchFamily="34" charset="-120"/>
-              </a:rPr>
-              <a:t>ted</a:t>
-            </a:r>
-            <a:endParaRPr lang="en-US" sz="1400" dirty="0"/>
-          </a:p>
-        </p:txBody>
-      </p:sp>
-      <p:sp>
-        <p:nvSpPr>
-          <p:cNvPr id="39" name="Shape 37"/>
-          <p:cNvSpPr/>
-          <p:nvPr/>
-        </p:nvSpPr>
-        <p:spPr>
-          <a:xfrm>
-            <a:off x="365760" y="4096512"/>
-            <a:ext cx="1371600" cy="804672"/>
+              <a:t>Phonemes</a:t>
+            </a:r>
+            <a:endParaRPr lang="en-US" sz="1100" dirty="0"/>
+          </a:p>
+        </p:txBody>
+      </p:sp>
+      <p:sp>
+        <p:nvSpPr>
+          <p:cNvPr id="38" name="Shape 36"/>
+          <p:cNvSpPr/>
+          <p:nvPr/>
+        </p:nvSpPr>
+        <p:spPr>
+          <a:xfrm>
+            <a:off x="1874520" y="4096512"/>
+            <a:ext cx="6903720" cy="804672"/>
           </a:xfrm>
           <a:prstGeom prst="rect">
             <a:avLst>
@@ -30353,85 +30038,19 @@
             </a:avLst>
           </a:prstGeom>
           <a:solidFill>
-            <a:srgbClr val="E2E8F0"/>
+            <a:srgbClr val="F8FAFC"/>
           </a:solidFill>
           <a:ln w="12700">
             <a:solidFill>
               <a:srgbClr val="E2E8F0"/>
             </a:solidFill>
-            <a:prstDash val="solid"/>
-          </a:ln>
-        </p:spPr>
-      </p:sp>
-      <p:sp>
-        <p:nvSpPr>
-          <p:cNvPr id="40" name="Text 38"/>
-          <p:cNvSpPr/>
-          <p:nvPr/>
-        </p:nvSpPr>
-        <p:spPr>
-          <a:xfrm>
-            <a:off x="365760" y="4096512"/>
-            <a:ext cx="1371600" cy="804672"/>
-          </a:xfrm>
-          <a:prstGeom prst="rect">
-            <a:avLst/>
-          </a:prstGeom>
-          <a:noFill/>
-          <a:ln/>
-        </p:spPr>
-        <p:txBody>
-          <a:bodyPr wrap="square" lIns="0" tIns="0" rIns="0" bIns="0" rtlCol="0" anchor="ctr"/>
-          <a:lstStyle/>
-          <a:p>
-            <a:pPr algn="ctr" indent="0" marL="0">
-              <a:buNone/>
-            </a:pPr>
-            <a:r>
-              <a:rPr lang="en-US" sz="1100" b="1" dirty="0">
-                <a:solidFill>
-                  <a:srgbClr val="475569"/>
-                </a:solidFill>
-                <a:latin typeface="Trebuchet MS" pitchFamily="34" charset="0"/>
-                <a:ea typeface="Trebuchet MS" pitchFamily="34" charset="-122"/>
-                <a:cs typeface="Trebuchet MS" pitchFamily="34" charset="-120"/>
-              </a:rPr>
-              <a:t>Phonemes</a:t>
-            </a:r>
-            <a:endParaRPr lang="en-US" sz="1100" dirty="0"/>
-          </a:p>
-        </p:txBody>
-      </p:sp>
-      <p:sp>
-        <p:nvSpPr>
-          <p:cNvPr id="41" name="Shape 39"/>
-          <p:cNvSpPr/>
-          <p:nvPr/>
-        </p:nvSpPr>
-        <p:spPr>
-          <a:xfrm>
-            <a:off x="1874520" y="4096512"/>
-            <a:ext cx="6903720" cy="804672"/>
-          </a:xfrm>
-          <a:prstGeom prst="rect">
-            <a:avLst>
-              <a:gd name="adj" fmla="val 6818"/>
-            </a:avLst>
-          </a:prstGeom>
-          <a:solidFill>
-            <a:srgbClr val="F8FAFC"/>
-          </a:solidFill>
-          <a:ln w="12700">
-            <a:solidFill>
-              <a:srgbClr val="E2E8F0"/>
-            </a:solidFill>
             <a:prstDash val="dash"/>
           </a:ln>
         </p:spPr>
       </p:sp>
       <p:sp>
         <p:nvSpPr>
-          <p:cNvPr id="42" name="Text 40"/>
+          <p:cNvPr id="39" name="Text 37"/>
           <p:cNvSpPr/>
           <p:nvPr/>
         </p:nvSpPr>
@@ -30754,7 +30373,7 @@
                 <a:ea typeface="Calibri" pitchFamily="34" charset="-122"/>
                 <a:cs typeface="Calibri" pitchFamily="34" charset="-120"/>
               </a:rPr>
-              <a:t>Word Labs  •  wordlabs.app  •  Root: 'paint' = to apply colour or pigment</a:t>
+              <a:t>Word Labs  •  wordlabs.app  •  Root: 'paint' = to colour or coat surface</a:t>
             </a:r>
             <a:endParaRPr lang="en-US" sz="800" dirty="0"/>
           </a:p>
@@ -30893,7 +30512,7 @@
                 <a:ea typeface="Trebuchet MS" pitchFamily="34" charset="-122"/>
                 <a:cs typeface="Trebuchet MS" pitchFamily="34" charset="-120"/>
               </a:rPr>
-              <a:t>overpainted</a:t>
+              <a:t>unpainted</a:t>
             </a:r>
             <a:endParaRPr lang="en-US" sz="2800" dirty="0"/>
           </a:p>
@@ -31032,7 +30651,7 @@
                 <a:ea typeface="Trebuchet MS" pitchFamily="34" charset="-122"/>
                 <a:cs typeface="Trebuchet MS" pitchFamily="34" charset="-120"/>
               </a:rPr>
-              <a:t>over</a:t>
+              <a:t>un</a:t>
             </a:r>
             <a:endParaRPr lang="en-US" sz="1300" dirty="0"/>
           </a:p>
@@ -31071,7 +30690,7 @@
                 <a:ea typeface="Calibri" pitchFamily="34" charset="-122"/>
                 <a:cs typeface="Calibri" pitchFamily="34" charset="-120"/>
               </a:rPr>
-              <a:t>above or on top of</a:t>
+              <a:t>not</a:t>
             </a:r>
             <a:endParaRPr lang="en-US" sz="850" dirty="0"/>
           </a:p>
@@ -31183,7 +30802,7 @@
                 <a:ea typeface="Calibri" pitchFamily="34" charset="-122"/>
                 <a:cs typeface="Calibri" pitchFamily="34" charset="-120"/>
               </a:rPr>
-              <a:t>to apply colour</a:t>
+              <a:t>to colour a surface</a:t>
             </a:r>
             <a:endParaRPr lang="en-US" sz="850" dirty="0"/>
           </a:p>
@@ -31295,7 +30914,7 @@
                 <a:ea typeface="Calibri" pitchFamily="34" charset="-122"/>
                 <a:cs typeface="Calibri" pitchFamily="34" charset="-120"/>
               </a:rPr>
-              <a:t>in the past</a:t>
+              <a:t>done in the past</a:t>
             </a:r>
             <a:endParaRPr lang="en-US" sz="850" dirty="0"/>
           </a:p>
@@ -31402,8 +31021,8 @@
         </p:nvSpPr>
         <p:spPr>
           <a:xfrm>
-            <a:off x="1975104" y="3364992"/>
-            <a:ext cx="1554480" cy="475488"/>
+            <a:off x="2313432" y="3364992"/>
+            <a:ext cx="1645920" cy="475488"/>
           </a:xfrm>
           <a:prstGeom prst="rect">
             <a:avLst>
@@ -31429,8 +31048,8 @@
         </p:nvSpPr>
         <p:spPr>
           <a:xfrm>
-            <a:off x="1975104" y="3364992"/>
-            <a:ext cx="1554480" cy="475488"/>
+            <a:off x="2313432" y="3364992"/>
+            <a:ext cx="1645920" cy="475488"/>
           </a:xfrm>
           <a:prstGeom prst="rect">
             <a:avLst/>
@@ -31454,7 +31073,7 @@
                 <a:ea typeface="Trebuchet MS" pitchFamily="34" charset="-122"/>
                 <a:cs typeface="Trebuchet MS" pitchFamily="34" charset="-120"/>
               </a:rPr>
-              <a:t>o</a:t>
+              <a:t>un</a:t>
             </a:r>
             <a:endParaRPr lang="en-US" sz="1400" dirty="0"/>
           </a:p>
@@ -31468,8 +31087,8 @@
         </p:nvSpPr>
         <p:spPr>
           <a:xfrm>
-            <a:off x="3529584" y="3364992"/>
-            <a:ext cx="73152" cy="475488"/>
+            <a:off x="3959352" y="3364992"/>
+            <a:ext cx="411480" cy="475488"/>
           </a:xfrm>
           <a:prstGeom prst="rect">
             <a:avLst/>
@@ -31507,8 +31126,8 @@
         </p:nvSpPr>
         <p:spPr>
           <a:xfrm>
-            <a:off x="3602736" y="3364992"/>
-            <a:ext cx="1554480" cy="475488"/>
+            <a:off x="4370832" y="3364992"/>
+            <a:ext cx="1645920" cy="475488"/>
           </a:xfrm>
           <a:prstGeom prst="rect">
             <a:avLst>
@@ -31534,8 +31153,8 @@
         </p:nvSpPr>
         <p:spPr>
           <a:xfrm>
-            <a:off x="3602736" y="3364992"/>
-            <a:ext cx="1554480" cy="475488"/>
+            <a:off x="4370832" y="3364992"/>
+            <a:ext cx="1645920" cy="475488"/>
           </a:xfrm>
           <a:prstGeom prst="rect">
             <a:avLst/>
@@ -31559,7 +31178,7 @@
                 <a:ea typeface="Trebuchet MS" pitchFamily="34" charset="-122"/>
                 <a:cs typeface="Trebuchet MS" pitchFamily="34" charset="-120"/>
               </a:rPr>
-              <a:t>ver</a:t>
+              <a:t>pain</a:t>
             </a:r>
             <a:endParaRPr lang="en-US" sz="1400" dirty="0"/>
           </a:p>
@@ -31573,8 +31192,8 @@
         </p:nvSpPr>
         <p:spPr>
           <a:xfrm>
-            <a:off x="5157216" y="3364992"/>
-            <a:ext cx="73152" cy="475488"/>
+            <a:off x="6016752" y="3364992"/>
+            <a:ext cx="411480" cy="475488"/>
           </a:xfrm>
           <a:prstGeom prst="rect">
             <a:avLst/>
@@ -31612,8 +31231,8 @@
         </p:nvSpPr>
         <p:spPr>
           <a:xfrm>
-            <a:off x="5230368" y="3364992"/>
-            <a:ext cx="1554480" cy="475488"/>
+            <a:off x="6428232" y="3364992"/>
+            <a:ext cx="1645920" cy="475488"/>
           </a:xfrm>
           <a:prstGeom prst="rect">
             <a:avLst>
@@ -31639,8 +31258,8 @@
         </p:nvSpPr>
         <p:spPr>
           <a:xfrm>
-            <a:off x="5230368" y="3364992"/>
-            <a:ext cx="1554480" cy="475488"/>
+            <a:off x="6428232" y="3364992"/>
+            <a:ext cx="1645920" cy="475488"/>
           </a:xfrm>
           <a:prstGeom prst="rect">
             <a:avLst/>
@@ -31664,7 +31283,7 @@
                 <a:ea typeface="Trebuchet MS" pitchFamily="34" charset="-122"/>
                 <a:cs typeface="Trebuchet MS" pitchFamily="34" charset="-120"/>
               </a:rPr>
-              <a:t>pain</a:t>
+              <a:t>ted</a:t>
             </a:r>
             <a:endParaRPr lang="en-US" sz="1400" dirty="0"/>
           </a:p>
@@ -31672,14 +31291,41 @@
       </p:sp>
       <p:sp>
         <p:nvSpPr>
-          <p:cNvPr id="36" name="Text 34"/>
-          <p:cNvSpPr/>
-          <p:nvPr/>
-        </p:nvSpPr>
-        <p:spPr>
-          <a:xfrm>
-            <a:off x="6784848" y="3364992"/>
-            <a:ext cx="73152" cy="475488"/>
+          <p:cNvPr id="36" name="Shape 34"/>
+          <p:cNvSpPr/>
+          <p:nvPr/>
+        </p:nvSpPr>
+        <p:spPr>
+          <a:xfrm>
+            <a:off x="365760" y="4096512"/>
+            <a:ext cx="1371600" cy="804672"/>
+          </a:xfrm>
+          <a:prstGeom prst="rect">
+            <a:avLst>
+              <a:gd name="adj" fmla="val 6818"/>
+            </a:avLst>
+          </a:prstGeom>
+          <a:solidFill>
+            <a:srgbClr val="E2E8F0"/>
+          </a:solidFill>
+          <a:ln w="12700">
+            <a:solidFill>
+              <a:srgbClr val="E2E8F0"/>
+            </a:solidFill>
+            <a:prstDash val="solid"/>
+          </a:ln>
+        </p:spPr>
+      </p:sp>
+      <p:sp>
+        <p:nvSpPr>
+          <p:cNvPr id="37" name="Text 35"/>
+          <p:cNvSpPr/>
+          <p:nvPr/>
+        </p:nvSpPr>
+        <p:spPr>
+          <a:xfrm>
+            <a:off x="365760" y="4096512"/>
+            <a:ext cx="1371600" cy="804672"/>
           </a:xfrm>
           <a:prstGeom prst="rect">
             <a:avLst/>
@@ -31695,57 +31341,84 @@
               <a:buNone/>
             </a:pPr>
             <a:r>
-              <a:rPr lang="en-US" sz="1600" b="1" dirty="0">
-                <a:solidFill>
-                  <a:srgbClr val="0D9488"/>
+              <a:rPr lang="en-US" sz="1100" b="1" dirty="0">
+                <a:solidFill>
+                  <a:srgbClr val="475569"/>
                 </a:solidFill>
                 <a:latin typeface="Trebuchet MS" pitchFamily="34" charset="0"/>
                 <a:ea typeface="Trebuchet MS" pitchFamily="34" charset="-122"/>
                 <a:cs typeface="Trebuchet MS" pitchFamily="34" charset="-120"/>
               </a:rPr>
-              <a:t>·</a:t>
-            </a:r>
-            <a:endParaRPr lang="en-US" sz="1600" dirty="0"/>
-          </a:p>
-        </p:txBody>
-      </p:sp>
-      <p:sp>
-        <p:nvSpPr>
-          <p:cNvPr id="37" name="Shape 35"/>
-          <p:cNvSpPr/>
-          <p:nvPr/>
-        </p:nvSpPr>
-        <p:spPr>
-          <a:xfrm>
-            <a:off x="6858000" y="3364992"/>
-            <a:ext cx="1554480" cy="475488"/>
+              <a:t>Phonemes</a:t>
+            </a:r>
+            <a:endParaRPr lang="en-US" sz="1100" dirty="0"/>
+          </a:p>
+        </p:txBody>
+      </p:sp>
+      <p:sp>
+        <p:nvSpPr>
+          <p:cNvPr id="38" name="Shape 36"/>
+          <p:cNvSpPr/>
+          <p:nvPr/>
+        </p:nvSpPr>
+        <p:spPr>
+          <a:xfrm>
+            <a:off x="1874520" y="4096512"/>
+            <a:ext cx="6903720" cy="658368"/>
           </a:xfrm>
           <a:prstGeom prst="rect">
             <a:avLst>
-              <a:gd name="adj" fmla="val 9615"/>
+              <a:gd name="adj" fmla="val 8333"/>
             </a:avLst>
           </a:prstGeom>
           <a:solidFill>
+            <a:srgbClr val="FCE7F3"/>
+          </a:solidFill>
+          <a:ln w="12700">
+            <a:solidFill>
+              <a:srgbClr val="DB2777"/>
+            </a:solidFill>
+            <a:prstDash val="solid"/>
+          </a:ln>
+        </p:spPr>
+      </p:sp>
+      <p:sp>
+        <p:nvSpPr>
+          <p:cNvPr id="39" name="Shape 37"/>
+          <p:cNvSpPr/>
+          <p:nvPr/>
+        </p:nvSpPr>
+        <p:spPr>
+          <a:xfrm>
+            <a:off x="2124837" y="4169664"/>
+            <a:ext cx="685800" cy="475488"/>
+          </a:xfrm>
+          <a:prstGeom prst="rect">
+            <a:avLst>
+              <a:gd name="adj" fmla="val 7692"/>
+            </a:avLst>
+          </a:prstGeom>
+          <a:solidFill>
             <a:srgbClr val="FFFFFF"/>
           </a:solidFill>
           <a:ln w="12700">
             <a:solidFill>
-              <a:srgbClr val="0D9488"/>
-            </a:solidFill>
-            <a:prstDash val="solid"/>
-          </a:ln>
-        </p:spPr>
-      </p:sp>
-      <p:sp>
-        <p:nvSpPr>
-          <p:cNvPr id="38" name="Text 36"/>
-          <p:cNvSpPr/>
-          <p:nvPr/>
-        </p:nvSpPr>
-        <p:spPr>
-          <a:xfrm>
-            <a:off x="6858000" y="3364992"/>
-            <a:ext cx="1554480" cy="475488"/>
+              <a:srgbClr val="DB2777"/>
+            </a:solidFill>
+            <a:prstDash val="solid"/>
+          </a:ln>
+        </p:spPr>
+      </p:sp>
+      <p:sp>
+        <p:nvSpPr>
+          <p:cNvPr id="40" name="Text 38"/>
+          <p:cNvSpPr/>
+          <p:nvPr/>
+        </p:nvSpPr>
+        <p:spPr>
+          <a:xfrm>
+            <a:off x="2124837" y="4169664"/>
+            <a:ext cx="685800" cy="475488"/>
           </a:xfrm>
           <a:prstGeom prst="rect">
             <a:avLst/>
@@ -31761,57 +31434,57 @@
               <a:buNone/>
             </a:pPr>
             <a:r>
-              <a:rPr lang="en-US" sz="1400" b="1" dirty="0">
-                <a:solidFill>
-                  <a:srgbClr val="0D9488"/>
+              <a:rPr lang="en-US" sz="900" b="1" dirty="0">
+                <a:solidFill>
+                  <a:srgbClr val="9D174D"/>
                 </a:solidFill>
                 <a:latin typeface="Trebuchet MS" pitchFamily="34" charset="0"/>
                 <a:ea typeface="Trebuchet MS" pitchFamily="34" charset="-122"/>
                 <a:cs typeface="Trebuchet MS" pitchFamily="34" charset="-120"/>
               </a:rPr>
-              <a:t>ted</a:t>
-            </a:r>
-            <a:endParaRPr lang="en-US" sz="1400" dirty="0"/>
-          </a:p>
-        </p:txBody>
-      </p:sp>
-      <p:sp>
-        <p:nvSpPr>
-          <p:cNvPr id="39" name="Shape 37"/>
-          <p:cNvSpPr/>
-          <p:nvPr/>
-        </p:nvSpPr>
-        <p:spPr>
-          <a:xfrm>
-            <a:off x="365760" y="4096512"/>
-            <a:ext cx="1371600" cy="804672"/>
+              <a:t>u</a:t>
+            </a:r>
+            <a:endParaRPr lang="en-US" sz="900" dirty="0"/>
+          </a:p>
+        </p:txBody>
+      </p:sp>
+      <p:sp>
+        <p:nvSpPr>
+          <p:cNvPr id="41" name="Shape 39"/>
+          <p:cNvSpPr/>
+          <p:nvPr/>
+        </p:nvSpPr>
+        <p:spPr>
+          <a:xfrm>
+            <a:off x="3033522" y="4169664"/>
+            <a:ext cx="685800" cy="475488"/>
           </a:xfrm>
           <a:prstGeom prst="rect">
             <a:avLst>
-              <a:gd name="adj" fmla="val 6818"/>
+              <a:gd name="adj" fmla="val 7692"/>
             </a:avLst>
           </a:prstGeom>
           <a:solidFill>
-            <a:srgbClr val="E2E8F0"/>
-          </a:solidFill>
-          <a:ln w="12700">
-            <a:solidFill>
-              <a:srgbClr val="E2E8F0"/>
-            </a:solidFill>
-            <a:prstDash val="solid"/>
-          </a:ln>
-        </p:spPr>
-      </p:sp>
-      <p:sp>
-        <p:nvSpPr>
-          <p:cNvPr id="40" name="Text 38"/>
-          <p:cNvSpPr/>
-          <p:nvPr/>
-        </p:nvSpPr>
-        <p:spPr>
-          <a:xfrm>
-            <a:off x="365760" y="4096512"/>
-            <a:ext cx="1371600" cy="804672"/>
+            <a:srgbClr val="FFFFFF"/>
+          </a:solidFill>
+          <a:ln w="12700">
+            <a:solidFill>
+              <a:srgbClr val="DB2777"/>
+            </a:solidFill>
+            <a:prstDash val="solid"/>
+          </a:ln>
+        </p:spPr>
+      </p:sp>
+      <p:sp>
+        <p:nvSpPr>
+          <p:cNvPr id="42" name="Text 40"/>
+          <p:cNvSpPr/>
+          <p:nvPr/>
+        </p:nvSpPr>
+        <p:spPr>
+          <a:xfrm>
+            <a:off x="3033522" y="4169664"/>
+            <a:ext cx="685800" cy="475488"/>
           </a:xfrm>
           <a:prstGeom prst="rect">
             <a:avLst/>
@@ -31827,56 +31500,29 @@
               <a:buNone/>
             </a:pPr>
             <a:r>
-              <a:rPr lang="en-US" sz="1100" b="1" dirty="0">
-                <a:solidFill>
-                  <a:srgbClr val="475569"/>
+              <a:rPr lang="en-US" sz="900" b="1" dirty="0">
+                <a:solidFill>
+                  <a:srgbClr val="9D174D"/>
                 </a:solidFill>
                 <a:latin typeface="Trebuchet MS" pitchFamily="34" charset="0"/>
                 <a:ea typeface="Trebuchet MS" pitchFamily="34" charset="-122"/>
                 <a:cs typeface="Trebuchet MS" pitchFamily="34" charset="-120"/>
               </a:rPr>
-              <a:t>Phonemes</a:t>
-            </a:r>
-            <a:endParaRPr lang="en-US" sz="1100" dirty="0"/>
-          </a:p>
-        </p:txBody>
-      </p:sp>
-      <p:sp>
-        <p:nvSpPr>
-          <p:cNvPr id="41" name="Shape 39"/>
-          <p:cNvSpPr/>
-          <p:nvPr/>
-        </p:nvSpPr>
-        <p:spPr>
-          <a:xfrm>
-            <a:off x="1874520" y="4096512"/>
-            <a:ext cx="6903720" cy="658368"/>
-          </a:xfrm>
-          <a:prstGeom prst="rect">
-            <a:avLst>
-              <a:gd name="adj" fmla="val 8333"/>
-            </a:avLst>
-          </a:prstGeom>
-          <a:solidFill>
-            <a:srgbClr val="FCE7F3"/>
-          </a:solidFill>
-          <a:ln w="12700">
-            <a:solidFill>
-              <a:srgbClr val="DB2777"/>
-            </a:solidFill>
-            <a:prstDash val="solid"/>
-          </a:ln>
-        </p:spPr>
-      </p:sp>
-      <p:sp>
-        <p:nvSpPr>
-          <p:cNvPr id="42" name="Shape 40"/>
-          <p:cNvSpPr/>
-          <p:nvPr/>
-        </p:nvSpPr>
-        <p:spPr>
-          <a:xfrm>
-            <a:off x="2023872" y="4169664"/>
+              <a:t>n</a:t>
+            </a:r>
+            <a:endParaRPr lang="en-US" sz="900" dirty="0"/>
+          </a:p>
+        </p:txBody>
+      </p:sp>
+      <p:sp>
+        <p:nvSpPr>
+          <p:cNvPr id="43" name="Shape 41"/>
+          <p:cNvSpPr/>
+          <p:nvPr/>
+        </p:nvSpPr>
+        <p:spPr>
+          <a:xfrm>
+            <a:off x="3942207" y="4169664"/>
             <a:ext cx="685800" cy="475488"/>
           </a:xfrm>
           <a:prstGeom prst="rect">
@@ -31897,13 +31543,13 @@
       </p:sp>
       <p:sp>
         <p:nvSpPr>
-          <p:cNvPr id="43" name="Text 41"/>
-          <p:cNvSpPr/>
-          <p:nvPr/>
-        </p:nvSpPr>
-        <p:spPr>
-          <a:xfrm>
-            <a:off x="2023872" y="4169664"/>
+          <p:cNvPr id="44" name="Text 42"/>
+          <p:cNvSpPr/>
+          <p:nvPr/>
+        </p:nvSpPr>
+        <p:spPr>
+          <a:xfrm>
+            <a:off x="3942207" y="4169664"/>
             <a:ext cx="685800" cy="475488"/>
           </a:xfrm>
           <a:prstGeom prst="rect">
@@ -31928,7 +31574,7 @@
                 <a:ea typeface="Trebuchet MS" pitchFamily="34" charset="-122"/>
                 <a:cs typeface="Trebuchet MS" pitchFamily="34" charset="-120"/>
               </a:rPr>
-              <a:t>o</a:t>
+              <a:t>p</a:t>
             </a:r>
             <a:endParaRPr lang="en-US" sz="900" dirty="0"/>
           </a:p>
@@ -31936,13 +31582,13 @@
       </p:sp>
       <p:sp>
         <p:nvSpPr>
-          <p:cNvPr id="44" name="Shape 42"/>
-          <p:cNvSpPr/>
-          <p:nvPr/>
-        </p:nvSpPr>
-        <p:spPr>
-          <a:xfrm>
-            <a:off x="2831592" y="4169664"/>
+          <p:cNvPr id="45" name="Shape 43"/>
+          <p:cNvSpPr/>
+          <p:nvPr/>
+        </p:nvSpPr>
+        <p:spPr>
+          <a:xfrm>
+            <a:off x="4850892" y="4169664"/>
             <a:ext cx="685800" cy="475488"/>
           </a:xfrm>
           <a:prstGeom prst="rect">
@@ -31963,13 +31609,13 @@
       </p:sp>
       <p:sp>
         <p:nvSpPr>
-          <p:cNvPr id="45" name="Text 43"/>
-          <p:cNvSpPr/>
-          <p:nvPr/>
-        </p:nvSpPr>
-        <p:spPr>
-          <a:xfrm>
-            <a:off x="2831592" y="4169664"/>
+          <p:cNvPr id="46" name="Text 44"/>
+          <p:cNvSpPr/>
+          <p:nvPr/>
+        </p:nvSpPr>
+        <p:spPr>
+          <a:xfrm>
+            <a:off x="4850892" y="4169664"/>
             <a:ext cx="685800" cy="475488"/>
           </a:xfrm>
           <a:prstGeom prst="rect">
@@ -31994,7 +31640,7 @@
                 <a:ea typeface="Trebuchet MS" pitchFamily="34" charset="-122"/>
                 <a:cs typeface="Trebuchet MS" pitchFamily="34" charset="-120"/>
               </a:rPr>
-              <a:t>v</a:t>
+              <a:t>ai</a:t>
             </a:r>
             <a:endParaRPr lang="en-US" sz="900" dirty="0"/>
           </a:p>
@@ -32002,13 +31648,13 @@
       </p:sp>
       <p:sp>
         <p:nvSpPr>
-          <p:cNvPr id="46" name="Shape 44"/>
-          <p:cNvSpPr/>
-          <p:nvPr/>
-        </p:nvSpPr>
-        <p:spPr>
-          <a:xfrm>
-            <a:off x="3639312" y="4169664"/>
+          <p:cNvPr id="47" name="Shape 45"/>
+          <p:cNvSpPr/>
+          <p:nvPr/>
+        </p:nvSpPr>
+        <p:spPr>
+          <a:xfrm>
+            <a:off x="5759577" y="4169664"/>
             <a:ext cx="685800" cy="475488"/>
           </a:xfrm>
           <a:prstGeom prst="rect">
@@ -32029,13 +31675,13 @@
       </p:sp>
       <p:sp>
         <p:nvSpPr>
-          <p:cNvPr id="47" name="Text 45"/>
-          <p:cNvSpPr/>
-          <p:nvPr/>
-        </p:nvSpPr>
-        <p:spPr>
-          <a:xfrm>
-            <a:off x="3639312" y="4169664"/>
+          <p:cNvPr id="48" name="Text 46"/>
+          <p:cNvSpPr/>
+          <p:nvPr/>
+        </p:nvSpPr>
+        <p:spPr>
+          <a:xfrm>
+            <a:off x="5759577" y="4169664"/>
             <a:ext cx="685800" cy="475488"/>
           </a:xfrm>
           <a:prstGeom prst="rect">
@@ -32060,7 +31706,7 @@
                 <a:ea typeface="Trebuchet MS" pitchFamily="34" charset="-122"/>
                 <a:cs typeface="Trebuchet MS" pitchFamily="34" charset="-120"/>
               </a:rPr>
-              <a:t>er</a:t>
+              <a:t>n</a:t>
             </a:r>
             <a:endParaRPr lang="en-US" sz="900" dirty="0"/>
           </a:p>
@@ -32068,13 +31714,13 @@
       </p:sp>
       <p:sp>
         <p:nvSpPr>
-          <p:cNvPr id="48" name="Shape 46"/>
-          <p:cNvSpPr/>
-          <p:nvPr/>
-        </p:nvSpPr>
-        <p:spPr>
-          <a:xfrm>
-            <a:off x="4447032" y="4169664"/>
+          <p:cNvPr id="49" name="Shape 47"/>
+          <p:cNvSpPr/>
+          <p:nvPr/>
+        </p:nvSpPr>
+        <p:spPr>
+          <a:xfrm>
+            <a:off x="6668262" y="4169664"/>
             <a:ext cx="685800" cy="475488"/>
           </a:xfrm>
           <a:prstGeom prst="rect">
@@ -32095,13 +31741,13 @@
       </p:sp>
       <p:sp>
         <p:nvSpPr>
-          <p:cNvPr id="49" name="Text 47"/>
-          <p:cNvSpPr/>
-          <p:nvPr/>
-        </p:nvSpPr>
-        <p:spPr>
-          <a:xfrm>
-            <a:off x="4447032" y="4169664"/>
+          <p:cNvPr id="50" name="Text 48"/>
+          <p:cNvSpPr/>
+          <p:nvPr/>
+        </p:nvSpPr>
+        <p:spPr>
+          <a:xfrm>
+            <a:off x="6668262" y="4169664"/>
             <a:ext cx="685800" cy="475488"/>
           </a:xfrm>
           <a:prstGeom prst="rect">
@@ -32126,7 +31772,7 @@
                 <a:ea typeface="Trebuchet MS" pitchFamily="34" charset="-122"/>
                 <a:cs typeface="Trebuchet MS" pitchFamily="34" charset="-120"/>
               </a:rPr>
-              <a:t>p</a:t>
+              <a:t>t</a:t>
             </a:r>
             <a:endParaRPr lang="en-US" sz="900" dirty="0"/>
           </a:p>
@@ -32134,13 +31780,13 @@
       </p:sp>
       <p:sp>
         <p:nvSpPr>
-          <p:cNvPr id="50" name="Shape 48"/>
-          <p:cNvSpPr/>
-          <p:nvPr/>
-        </p:nvSpPr>
-        <p:spPr>
-          <a:xfrm>
-            <a:off x="5254752" y="4169664"/>
+          <p:cNvPr id="51" name="Shape 49"/>
+          <p:cNvSpPr/>
+          <p:nvPr/>
+        </p:nvSpPr>
+        <p:spPr>
+          <a:xfrm>
+            <a:off x="7576947" y="4169664"/>
             <a:ext cx="685800" cy="475488"/>
           </a:xfrm>
           <a:prstGeom prst="rect">
@@ -32161,211 +31807,13 @@
       </p:sp>
       <p:sp>
         <p:nvSpPr>
-          <p:cNvPr id="51" name="Text 49"/>
-          <p:cNvSpPr/>
-          <p:nvPr/>
-        </p:nvSpPr>
-        <p:spPr>
-          <a:xfrm>
-            <a:off x="5254752" y="4169664"/>
-            <a:ext cx="685800" cy="475488"/>
-          </a:xfrm>
-          <a:prstGeom prst="rect">
-            <a:avLst/>
-          </a:prstGeom>
-          <a:noFill/>
-          <a:ln/>
-        </p:spPr>
-        <p:txBody>
-          <a:bodyPr wrap="square" lIns="0" tIns="0" rIns="0" bIns="0" rtlCol="0" anchor="ctr"/>
-          <a:lstStyle/>
-          <a:p>
-            <a:pPr algn="ctr" indent="0" marL="0">
-              <a:buNone/>
-            </a:pPr>
-            <a:r>
-              <a:rPr lang="en-US" sz="900" b="1" dirty="0">
-                <a:solidFill>
-                  <a:srgbClr val="9D174D"/>
-                </a:solidFill>
-                <a:latin typeface="Trebuchet MS" pitchFamily="34" charset="0"/>
-                <a:ea typeface="Trebuchet MS" pitchFamily="34" charset="-122"/>
-                <a:cs typeface="Trebuchet MS" pitchFamily="34" charset="-120"/>
-              </a:rPr>
-              <a:t>ai</a:t>
-            </a:r>
-            <a:endParaRPr lang="en-US" sz="900" dirty="0"/>
-          </a:p>
-        </p:txBody>
-      </p:sp>
-      <p:sp>
-        <p:nvSpPr>
-          <p:cNvPr id="52" name="Shape 50"/>
-          <p:cNvSpPr/>
-          <p:nvPr/>
-        </p:nvSpPr>
-        <p:spPr>
-          <a:xfrm>
-            <a:off x="6062472" y="4169664"/>
-            <a:ext cx="685800" cy="475488"/>
-          </a:xfrm>
-          <a:prstGeom prst="rect">
-            <a:avLst>
-              <a:gd name="adj" fmla="val 7692"/>
-            </a:avLst>
-          </a:prstGeom>
-          <a:solidFill>
-            <a:srgbClr val="FFFFFF"/>
-          </a:solidFill>
-          <a:ln w="12700">
-            <a:solidFill>
-              <a:srgbClr val="DB2777"/>
-            </a:solidFill>
-            <a:prstDash val="solid"/>
-          </a:ln>
-        </p:spPr>
-      </p:sp>
-      <p:sp>
-        <p:nvSpPr>
-          <p:cNvPr id="53" name="Text 51"/>
-          <p:cNvSpPr/>
-          <p:nvPr/>
-        </p:nvSpPr>
-        <p:spPr>
-          <a:xfrm>
-            <a:off x="6062472" y="4169664"/>
-            <a:ext cx="685800" cy="475488"/>
-          </a:xfrm>
-          <a:prstGeom prst="rect">
-            <a:avLst/>
-          </a:prstGeom>
-          <a:noFill/>
-          <a:ln/>
-        </p:spPr>
-        <p:txBody>
-          <a:bodyPr wrap="square" lIns="0" tIns="0" rIns="0" bIns="0" rtlCol="0" anchor="ctr"/>
-          <a:lstStyle/>
-          <a:p>
-            <a:pPr algn="ctr" indent="0" marL="0">
-              <a:buNone/>
-            </a:pPr>
-            <a:r>
-              <a:rPr lang="en-US" sz="900" b="1" dirty="0">
-                <a:solidFill>
-                  <a:srgbClr val="9D174D"/>
-                </a:solidFill>
-                <a:latin typeface="Trebuchet MS" pitchFamily="34" charset="0"/>
-                <a:ea typeface="Trebuchet MS" pitchFamily="34" charset="-122"/>
-                <a:cs typeface="Trebuchet MS" pitchFamily="34" charset="-120"/>
-              </a:rPr>
-              <a:t>n</a:t>
-            </a:r>
-            <a:endParaRPr lang="en-US" sz="900" dirty="0"/>
-          </a:p>
-        </p:txBody>
-      </p:sp>
-      <p:sp>
-        <p:nvSpPr>
-          <p:cNvPr id="54" name="Shape 52"/>
-          <p:cNvSpPr/>
-          <p:nvPr/>
-        </p:nvSpPr>
-        <p:spPr>
-          <a:xfrm>
-            <a:off x="6870192" y="4169664"/>
-            <a:ext cx="685800" cy="475488"/>
-          </a:xfrm>
-          <a:prstGeom prst="rect">
-            <a:avLst>
-              <a:gd name="adj" fmla="val 7692"/>
-            </a:avLst>
-          </a:prstGeom>
-          <a:solidFill>
-            <a:srgbClr val="FFFFFF"/>
-          </a:solidFill>
-          <a:ln w="12700">
-            <a:solidFill>
-              <a:srgbClr val="DB2777"/>
-            </a:solidFill>
-            <a:prstDash val="solid"/>
-          </a:ln>
-        </p:spPr>
-      </p:sp>
-      <p:sp>
-        <p:nvSpPr>
-          <p:cNvPr id="55" name="Text 53"/>
-          <p:cNvSpPr/>
-          <p:nvPr/>
-        </p:nvSpPr>
-        <p:spPr>
-          <a:xfrm>
-            <a:off x="6870192" y="4169664"/>
-            <a:ext cx="685800" cy="475488"/>
-          </a:xfrm>
-          <a:prstGeom prst="rect">
-            <a:avLst/>
-          </a:prstGeom>
-          <a:noFill/>
-          <a:ln/>
-        </p:spPr>
-        <p:txBody>
-          <a:bodyPr wrap="square" lIns="0" tIns="0" rIns="0" bIns="0" rtlCol="0" anchor="ctr"/>
-          <a:lstStyle/>
-          <a:p>
-            <a:pPr algn="ctr" indent="0" marL="0">
-              <a:buNone/>
-            </a:pPr>
-            <a:r>
-              <a:rPr lang="en-US" sz="900" b="1" dirty="0">
-                <a:solidFill>
-                  <a:srgbClr val="9D174D"/>
-                </a:solidFill>
-                <a:latin typeface="Trebuchet MS" pitchFamily="34" charset="0"/>
-                <a:ea typeface="Trebuchet MS" pitchFamily="34" charset="-122"/>
-                <a:cs typeface="Trebuchet MS" pitchFamily="34" charset="-120"/>
-              </a:rPr>
-              <a:t>t</a:t>
-            </a:r>
-            <a:endParaRPr lang="en-US" sz="900" dirty="0"/>
-          </a:p>
-        </p:txBody>
-      </p:sp>
-      <p:sp>
-        <p:nvSpPr>
-          <p:cNvPr id="56" name="Shape 54"/>
-          <p:cNvSpPr/>
-          <p:nvPr/>
-        </p:nvSpPr>
-        <p:spPr>
-          <a:xfrm>
-            <a:off x="7677912" y="4169664"/>
-            <a:ext cx="685800" cy="475488"/>
-          </a:xfrm>
-          <a:prstGeom prst="rect">
-            <a:avLst>
-              <a:gd name="adj" fmla="val 7692"/>
-            </a:avLst>
-          </a:prstGeom>
-          <a:solidFill>
-            <a:srgbClr val="FFFFFF"/>
-          </a:solidFill>
-          <a:ln w="12700">
-            <a:solidFill>
-              <a:srgbClr val="DB2777"/>
-            </a:solidFill>
-            <a:prstDash val="solid"/>
-          </a:ln>
-        </p:spPr>
-      </p:sp>
-      <p:sp>
-        <p:nvSpPr>
-          <p:cNvPr id="57" name="Text 55"/>
-          <p:cNvSpPr/>
-          <p:nvPr/>
-        </p:nvSpPr>
-        <p:spPr>
-          <a:xfrm>
-            <a:off x="7677912" y="4169664"/>
+          <p:cNvPr id="52" name="Text 50"/>
+          <p:cNvSpPr/>
+          <p:nvPr/>
+        </p:nvSpPr>
+        <p:spPr>
+          <a:xfrm>
+            <a:off x="7576947" y="4169664"/>
             <a:ext cx="685800" cy="475488"/>
           </a:xfrm>
           <a:prstGeom prst="rect">
@@ -32682,7 +32130,7 @@
                 <a:ea typeface="Calibri" pitchFamily="34" charset="-122"/>
                 <a:cs typeface="Calibri" pitchFamily="34" charset="-120"/>
               </a:rPr>
-              <a:t>Word Labs  •  wordlabs.app  •  Root: 'paint' = to apply colour or pigment</a:t>
+              <a:t>Word Labs  •  wordlabs.app  •  Root: 'paint' = to colour or coat surface</a:t>
             </a:r>
             <a:endParaRPr lang="en-US" sz="800" dirty="0"/>
           </a:p>
@@ -33851,7 +33299,7 @@
                 <a:ea typeface="Calibri" pitchFamily="34" charset="-122"/>
                 <a:cs typeface="Calibri" pitchFamily="34" charset="-120"/>
               </a:rPr>
-              <a:t>Word Labs  •  wordlabs.app  •  Root: 'paint' = to apply colour or pigment</a:t>
+              <a:t>Word Labs  •  wordlabs.app  •  Root: 'paint' = to colour or coat surface</a:t>
             </a:r>
             <a:endParaRPr lang="en-US" sz="800" dirty="0"/>
           </a:p>
@@ -35129,7 +34577,7 @@
                 <a:ea typeface="Trebuchet MS" pitchFamily="34" charset="-122"/>
                 <a:cs typeface="Trebuchet MS" pitchFamily="34" charset="-120"/>
               </a:rPr>
-              <a:t>painted</a:t>
+              <a:t>repaint</a:t>
             </a:r>
             <a:endParaRPr lang="en-US" sz="1200" dirty="0"/>
           </a:p>
@@ -35195,7 +34643,7 @@
                 <a:ea typeface="Trebuchet MS" pitchFamily="34" charset="-122"/>
                 <a:cs typeface="Trebuchet MS" pitchFamily="34" charset="-120"/>
               </a:rPr>
-              <a:t>repaint</a:t>
+              <a:t>unpainted</a:t>
             </a:r>
             <a:endParaRPr lang="en-US" sz="1200" dirty="0"/>
           </a:p>
@@ -35261,7 +34709,7 @@
                 <a:ea typeface="Trebuchet MS" pitchFamily="34" charset="-122"/>
                 <a:cs typeface="Trebuchet MS" pitchFamily="34" charset="-120"/>
               </a:rPr>
-              <a:t>paintwork</a:t>
+              <a:t>overpaint</a:t>
             </a:r>
             <a:endParaRPr lang="en-US" sz="1200" dirty="0"/>
           </a:p>
@@ -35327,7 +34775,7 @@
                 <a:ea typeface="Trebuchet MS" pitchFamily="34" charset="-122"/>
                 <a:cs typeface="Trebuchet MS" pitchFamily="34" charset="-120"/>
               </a:rPr>
-              <a:t>overpaint</a:t>
+              <a:t>paintwork</a:t>
             </a:r>
             <a:endParaRPr lang="en-US" sz="1200" dirty="0"/>
           </a:p>
@@ -35393,7 +34841,7 @@
                 <a:ea typeface="Trebuchet MS" pitchFamily="34" charset="-122"/>
                 <a:cs typeface="Trebuchet MS" pitchFamily="34" charset="-120"/>
               </a:rPr>
-              <a:t>underpaint</a:t>
+              <a:t>painted</a:t>
             </a:r>
             <a:endParaRPr lang="en-US" sz="1200" dirty="0"/>
           </a:p>
@@ -35459,7 +34907,7 @@
                 <a:ea typeface="Trebuchet MS" pitchFamily="34" charset="-122"/>
                 <a:cs typeface="Trebuchet MS" pitchFamily="34" charset="-120"/>
               </a:rPr>
-              <a:t>painterly</a:t>
+              <a:t>underpaint</a:t>
             </a:r>
             <a:endParaRPr lang="en-US" sz="1200" dirty="0"/>
           </a:p>
@@ -35751,7 +35199,7 @@
                 <a:ea typeface="Calibri" pitchFamily="34" charset="-122"/>
                 <a:cs typeface="Calibri" pitchFamily="34" charset="-120"/>
               </a:rPr>
-              <a:t>Word Labs  •  wordlabs.app  •  Root: 'paint' = to apply colour or pigment</a:t>
+              <a:t>Word Labs  •  wordlabs.app  •  Root: 'paint' = to colour or coat surface</a:t>
             </a:r>
             <a:endParaRPr lang="en-US" sz="800" dirty="0"/>
           </a:p>
@@ -35915,7 +35363,7 @@
                 <a:ea typeface="Calibri" pitchFamily="34" charset="-122"/>
                 <a:cs typeface="Calibri" pitchFamily="34" charset="-120"/>
               </a:rPr>
-              <a:t>The core part of a word carrying its basic meaning. For example, 'paint' means 'to apply colour or pigment'.</a:t>
+              <a:t>The core part of a word carrying its basic meaning. For example, 'paint' means 'to colour or coat surface'.</a:t>
             </a:r>
             <a:endParaRPr lang="en-US" sz="1350" dirty="0"/>
           </a:p>
@@ -36535,7 +35983,7 @@
                 <a:ea typeface="Calibri" pitchFamily="34" charset="-122"/>
                 <a:cs typeface="Calibri" pitchFamily="34" charset="-120"/>
               </a:rPr>
-              <a:t>Word Labs  •  wordlabs.app  •  Root: 'paint' = to apply colour or pigment</a:t>
+              <a:t>Word Labs  •  wordlabs.app  •  Root: 'paint' = to colour or coat surface</a:t>
             </a:r>
             <a:endParaRPr lang="en-US" sz="800" dirty="0"/>
           </a:p>
@@ -36647,7 +36095,7 @@
                 <a:ea typeface="Calibri" pitchFamily="34" charset="-122"/>
                 <a:cs typeface="Calibri" pitchFamily="34" charset="-120"/>
               </a:rPr>
-              <a:t>1.  The word 'painter' contains the root 'paint' and the suffix '-er', meaning a person who paints.</a:t>
+              <a:t>1.  The word 'painted' uses the suffix '-ed' to show something happened in the past.</a:t>
             </a:r>
             <a:endParaRPr lang="en-US" sz="1300" dirty="0"/>
           </a:p>
@@ -36786,7 +36234,7 @@
                 <a:ea typeface="Calibri" pitchFamily="34" charset="-122"/>
                 <a:cs typeface="Calibri" pitchFamily="34" charset="-120"/>
               </a:rPr>
-              <a:t>2.  The root 'paint' comes from a Greek word meaning colour.</a:t>
+              <a:t>2.  Adding 're' before 'paint' makes the word 'repaint', meaning to paint again.</a:t>
             </a:r>
             <a:endParaRPr lang="en-US" sz="1300" dirty="0"/>
           </a:p>
@@ -36809,11 +36257,11 @@
             </a:avLst>
           </a:prstGeom>
           <a:solidFill>
-            <a:srgbClr val="FEE2E2"/>
-          </a:solidFill>
-          <a:ln w="12700">
-            <a:solidFill>
-              <a:srgbClr val="DC2626"/>
+            <a:srgbClr val="DCFCE7"/>
+          </a:solidFill>
+          <a:ln w="12700">
+            <a:solidFill>
+              <a:srgbClr val="16A34A"/>
             </a:solidFill>
             <a:prstDash val="solid"/>
           </a:ln>
@@ -36846,13 +36294,13 @@
             <a:r>
               <a:rPr lang="en-US" sz="1100" b="1" dirty="0">
                 <a:solidFill>
-                  <a:srgbClr val="DC2626"/>
+                  <a:srgbClr val="16A34A"/>
                 </a:solidFill>
                 <a:latin typeface="Trebuchet MS" pitchFamily="34" charset="0"/>
                 <a:ea typeface="Trebuchet MS" pitchFamily="34" charset="-122"/>
                 <a:cs typeface="Trebuchet MS" pitchFamily="34" charset="-120"/>
               </a:rPr>
-              <a:t>FALSE</a:t>
+              <a:t>TRUE</a:t>
             </a:r>
             <a:endParaRPr lang="en-US" sz="1100" dirty="0"/>
           </a:p>
@@ -36925,7 +36373,7 @@
                 <a:ea typeface="Calibri" pitchFamily="34" charset="-122"/>
                 <a:cs typeface="Calibri" pitchFamily="34" charset="-120"/>
               </a:rPr>
-              <a:t>3.  Adding 're-' before 'paint' makes the word 'repaint', meaning to paint again.</a:t>
+              <a:t>3.  The word 'painting' is always a verb and can never be used as a noun.</a:t>
             </a:r>
             <a:endParaRPr lang="en-US" sz="1300" dirty="0"/>
           </a:p>
@@ -36948,11 +36396,11 @@
             </a:avLst>
           </a:prstGeom>
           <a:solidFill>
-            <a:srgbClr val="DCFCE7"/>
-          </a:solidFill>
-          <a:ln w="12700">
-            <a:solidFill>
-              <a:srgbClr val="16A34A"/>
+            <a:srgbClr val="FEE2E2"/>
+          </a:solidFill>
+          <a:ln w="12700">
+            <a:solidFill>
+              <a:srgbClr val="DC2626"/>
             </a:solidFill>
             <a:prstDash val="solid"/>
           </a:ln>
@@ -36985,13 +36433,13 @@
             <a:r>
               <a:rPr lang="en-US" sz="1100" b="1" dirty="0">
                 <a:solidFill>
-                  <a:srgbClr val="16A34A"/>
+                  <a:srgbClr val="DC2626"/>
                 </a:solidFill>
                 <a:latin typeface="Trebuchet MS" pitchFamily="34" charset="0"/>
                 <a:ea typeface="Trebuchet MS" pitchFamily="34" charset="-122"/>
                 <a:cs typeface="Trebuchet MS" pitchFamily="34" charset="-120"/>
               </a:rPr>
-              <a:t>TRUE</a:t>
+              <a:t>FALSE</a:t>
             </a:r>
             <a:endParaRPr lang="en-US" sz="1100" dirty="0"/>
           </a:p>
@@ -37064,7 +36512,7 @@
                 <a:ea typeface="Calibri" pitchFamily="34" charset="-122"/>
                 <a:cs typeface="Calibri" pitchFamily="34" charset="-120"/>
               </a:rPr>
-              <a:t>4.  A 'painting' is a piece of artwork made using paint.</a:t>
+              <a:t>4.  The root 'paint' comes from an ancient Greek word.</a:t>
             </a:r>
             <a:endParaRPr lang="en-US" sz="1300" dirty="0"/>
           </a:p>
@@ -37087,11 +36535,11 @@
             </a:avLst>
           </a:prstGeom>
           <a:solidFill>
-            <a:srgbClr val="DCFCE7"/>
-          </a:solidFill>
-          <a:ln w="12700">
-            <a:solidFill>
-              <a:srgbClr val="16A34A"/>
+            <a:srgbClr val="FEE2E2"/>
+          </a:solidFill>
+          <a:ln w="12700">
+            <a:solidFill>
+              <a:srgbClr val="DC2626"/>
             </a:solidFill>
             <a:prstDash val="solid"/>
           </a:ln>
@@ -37124,13 +36572,13 @@
             <a:r>
               <a:rPr lang="en-US" sz="1100" b="1" dirty="0">
                 <a:solidFill>
-                  <a:srgbClr val="16A34A"/>
+                  <a:srgbClr val="DC2626"/>
                 </a:solidFill>
                 <a:latin typeface="Trebuchet MS" pitchFamily="34" charset="0"/>
                 <a:ea typeface="Trebuchet MS" pitchFamily="34" charset="-122"/>
                 <a:cs typeface="Trebuchet MS" pitchFamily="34" charset="-120"/>
               </a:rPr>
-              <a:t>TRUE</a:t>
+              <a:t>FALSE</a:t>
             </a:r>
             <a:endParaRPr lang="en-US" sz="1100" dirty="0"/>
           </a:p>
@@ -37203,7 +36651,7 @@
                 <a:ea typeface="Calibri" pitchFamily="34" charset="-122"/>
                 <a:cs typeface="Calibri" pitchFamily="34" charset="-120"/>
               </a:rPr>
-              <a:t>5.  The word 'painted' has no suffix added to the root 'paint'.</a:t>
+              <a:t>5.  The word 'painter' contains the root 'paint' plus a suffix meaning 'one who does'.</a:t>
             </a:r>
             <a:endParaRPr lang="en-US" sz="1300" dirty="0"/>
           </a:p>
@@ -37226,11 +36674,11 @@
             </a:avLst>
           </a:prstGeom>
           <a:solidFill>
-            <a:srgbClr val="FEE2E2"/>
-          </a:solidFill>
-          <a:ln w="12700">
-            <a:solidFill>
-              <a:srgbClr val="DC2626"/>
+            <a:srgbClr val="DCFCE7"/>
+          </a:solidFill>
+          <a:ln w="12700">
+            <a:solidFill>
+              <a:srgbClr val="16A34A"/>
             </a:solidFill>
             <a:prstDash val="solid"/>
           </a:ln>
@@ -37263,13 +36711,13 @@
             <a:r>
               <a:rPr lang="en-US" sz="1100" b="1" dirty="0">
                 <a:solidFill>
-                  <a:srgbClr val="DC2626"/>
+                  <a:srgbClr val="16A34A"/>
                 </a:solidFill>
                 <a:latin typeface="Trebuchet MS" pitchFamily="34" charset="0"/>
                 <a:ea typeface="Trebuchet MS" pitchFamily="34" charset="-122"/>
                 <a:cs typeface="Trebuchet MS" pitchFamily="34" charset="-120"/>
               </a:rPr>
-              <a:t>FALSE</a:t>
+              <a:t>TRUE</a:t>
             </a:r>
             <a:endParaRPr lang="en-US" sz="1100" dirty="0"/>
           </a:p>
@@ -37561,7 +37009,7 @@
                 <a:ea typeface="Calibri" pitchFamily="34" charset="-122"/>
                 <a:cs typeface="Calibri" pitchFamily="34" charset="-120"/>
               </a:rPr>
-              <a:t>Word Labs  •  wordlabs.app  •  Root: 'paint' = to apply colour or pigment</a:t>
+              <a:t>Word Labs  •  wordlabs.app  •  Root: 'paint' = to colour or coat surface</a:t>
             </a:r>
             <a:endParaRPr lang="en-US" sz="800" dirty="0"/>
           </a:p>
@@ -37698,7 +37146,7 @@
                 <a:ea typeface="Trebuchet MS" pitchFamily="34" charset="-122"/>
                 <a:cs typeface="Trebuchet MS" pitchFamily="34" charset="-120"/>
               </a:rPr>
-              <a:t>to apply colour or pigment</a:t>
+              <a:t>to colour or coat surface</a:t>
             </a:r>
             <a:endParaRPr lang="en-US" sz="2000" dirty="0"/>
           </a:p>
@@ -37974,7 +37422,7 @@
                 <a:ea typeface="Trebuchet MS" pitchFamily="34" charset="-122"/>
                 <a:cs typeface="Trebuchet MS" pitchFamily="34" charset="-120"/>
               </a:rPr>
-              <a:t>painted</a:t>
+              <a:t>repaint</a:t>
             </a:r>
             <a:endParaRPr lang="en-US" sz="1300" dirty="0"/>
           </a:p>
@@ -38040,7 +37488,7 @@
                 <a:ea typeface="Trebuchet MS" pitchFamily="34" charset="-122"/>
                 <a:cs typeface="Trebuchet MS" pitchFamily="34" charset="-120"/>
               </a:rPr>
-              <a:t>repaint</a:t>
+              <a:t>unpainted</a:t>
             </a:r>
             <a:endParaRPr lang="en-US" sz="1300" dirty="0"/>
           </a:p>
@@ -38106,7 +37554,7 @@
                 <a:ea typeface="Trebuchet MS" pitchFamily="34" charset="-122"/>
                 <a:cs typeface="Trebuchet MS" pitchFamily="34" charset="-120"/>
               </a:rPr>
-              <a:t>paintwork</a:t>
+              <a:t>overpaint</a:t>
             </a:r>
             <a:endParaRPr lang="en-US" sz="1300" dirty="0"/>
           </a:p>
@@ -38172,7 +37620,7 @@
                 <a:ea typeface="Trebuchet MS" pitchFamily="34" charset="-122"/>
                 <a:cs typeface="Trebuchet MS" pitchFamily="34" charset="-120"/>
               </a:rPr>
-              <a:t>overpaint</a:t>
+              <a:t>paintwork</a:t>
             </a:r>
             <a:endParaRPr lang="en-US" sz="1300" dirty="0"/>
           </a:p>
@@ -38238,7 +37686,7 @@
                 <a:ea typeface="Trebuchet MS" pitchFamily="34" charset="-122"/>
                 <a:cs typeface="Trebuchet MS" pitchFamily="34" charset="-120"/>
               </a:rPr>
-              <a:t>underpaint</a:t>
+              <a:t>painted</a:t>
             </a:r>
             <a:endParaRPr lang="en-US" sz="1300" dirty="0"/>
           </a:p>
@@ -38530,7 +37978,7 @@
                 <a:ea typeface="Calibri" pitchFamily="34" charset="-122"/>
                 <a:cs typeface="Calibri" pitchFamily="34" charset="-120"/>
               </a:rPr>
-              <a:t>Word Labs  •  wordlabs.app  •  Root: 'paint' = to apply colour or pigment</a:t>
+              <a:t>Word Labs  •  wordlabs.app  •  Root: 'paint' = to colour or coat surface</a:t>
             </a:r>
             <a:endParaRPr lang="en-US" sz="800" dirty="0"/>
           </a:p>
@@ -40304,7 +39752,7 @@
                 <a:ea typeface="Calibri" pitchFamily="34" charset="-122"/>
                 <a:cs typeface="Calibri" pitchFamily="34" charset="-120"/>
               </a:rPr>
-              <a:t>Word Labs  •  wordlabs.app  •  Root: 'paint' = to apply colour or pigment</a:t>
+              <a:t>Word Labs  •  wordlabs.app  •  Root: 'paint' = to colour or coat surface</a:t>
             </a:r>
             <a:endParaRPr lang="en-US" sz="800" dirty="0"/>
           </a:p>
@@ -40482,7 +39930,7 @@
                 <a:ea typeface="Calibri" pitchFamily="34" charset="-122"/>
                 <a:cs typeface="Calibri" pitchFamily="34" charset="-120"/>
               </a:rPr>
-              <a:t>Something that has had paint put on it, or a picture that was made with paint.</a:t>
+              <a:t>To paint something again, usually to make it look fresh and new.</a:t>
             </a:r>
             <a:endParaRPr lang="en-US" sz="1200" dirty="0"/>
           </a:p>
@@ -40621,7 +40069,7 @@
                 <a:ea typeface="Calibri" pitchFamily="34" charset="-122"/>
                 <a:cs typeface="Calibri" pitchFamily="34" charset="-120"/>
               </a:rPr>
-              <a:t>The painted surfaces of something, like the outside of a car or a house.</a:t>
+              <a:t>To put too much paint on something, or to paint over something else.</a:t>
             </a:r>
             <a:endParaRPr lang="en-US" sz="1200" dirty="0"/>
           </a:p>
@@ -40694,7 +40142,7 @@
                 <a:ea typeface="Trebuchet MS" pitchFamily="34" charset="-122"/>
                 <a:cs typeface="Trebuchet MS" pitchFamily="34" charset="-120"/>
               </a:rPr>
-              <a:t>painted</a:t>
+              <a:t>repaint</a:t>
             </a:r>
             <a:endParaRPr lang="en-US" sz="1200" dirty="0"/>
           </a:p>
@@ -40760,7 +40208,7 @@
                 <a:ea typeface="Calibri" pitchFamily="34" charset="-122"/>
                 <a:cs typeface="Calibri" pitchFamily="34" charset="-120"/>
               </a:rPr>
-              <a:t>A person who paints pictures or walls for a job or hobby.</a:t>
+              <a:t>A person who paints pictures or walls.</a:t>
             </a:r>
             <a:endParaRPr lang="en-US" sz="1200" dirty="0"/>
           </a:p>
@@ -40833,7 +40281,7 @@
                 <a:ea typeface="Trebuchet MS" pitchFamily="34" charset="-122"/>
                 <a:cs typeface="Trebuchet MS" pitchFamily="34" charset="-120"/>
               </a:rPr>
-              <a:t>repaint</a:t>
+              <a:t>unpainted</a:t>
             </a:r>
             <a:endParaRPr lang="en-US" sz="1200" dirty="0"/>
           </a:p>
@@ -40899,7 +40347,7 @@
                 <a:ea typeface="Calibri" pitchFamily="34" charset="-122"/>
                 <a:cs typeface="Calibri" pitchFamily="34" charset="-120"/>
               </a:rPr>
-              <a:t>To paint over something that already has paint on it, covering it up.</a:t>
+              <a:t>The painted surfaces on something, like a car or a building.</a:t>
             </a:r>
             <a:endParaRPr lang="en-US" sz="1200" dirty="0"/>
           </a:p>
@@ -40972,7 +40420,7 @@
                 <a:ea typeface="Trebuchet MS" pitchFamily="34" charset="-122"/>
                 <a:cs typeface="Trebuchet MS" pitchFamily="34" charset="-120"/>
               </a:rPr>
-              <a:t>paintwork</a:t>
+              <a:t>overpaint</a:t>
             </a:r>
             <a:endParaRPr lang="en-US" sz="1200" dirty="0"/>
           </a:p>
@@ -41038,7 +40486,7 @@
                 <a:ea typeface="Calibri" pitchFamily="34" charset="-122"/>
                 <a:cs typeface="Calibri" pitchFamily="34" charset="-120"/>
               </a:rPr>
-              <a:t>To apply a first layer of paint as a base before adding more layers on top.</a:t>
+              <a:t>Something that has had paint put on it.</a:t>
             </a:r>
             <a:endParaRPr lang="en-US" sz="1200" dirty="0"/>
           </a:p>
@@ -41111,7 +40559,7 @@
                 <a:ea typeface="Trebuchet MS" pitchFamily="34" charset="-122"/>
                 <a:cs typeface="Trebuchet MS" pitchFamily="34" charset="-120"/>
               </a:rPr>
-              <a:t>overpaint</a:t>
+              <a:t>paintwork</a:t>
             </a:r>
             <a:endParaRPr lang="en-US" sz="1200" dirty="0"/>
           </a:p>
@@ -41177,7 +40625,7 @@
                 <a:ea typeface="Calibri" pitchFamily="34" charset="-122"/>
                 <a:cs typeface="Calibri" pitchFamily="34" charset="-120"/>
               </a:rPr>
-              <a:t>To paint something again, usually because the old paint has worn away.</a:t>
+              <a:t>Something that has not had any paint put on it.</a:t>
             </a:r>
             <a:endParaRPr lang="en-US" sz="1200" dirty="0"/>
           </a:p>
@@ -41250,7 +40698,7 @@
                 <a:ea typeface="Trebuchet MS" pitchFamily="34" charset="-122"/>
                 <a:cs typeface="Trebuchet MS" pitchFamily="34" charset="-120"/>
               </a:rPr>
-              <a:t>underpaint</a:t>
+              <a:t>painted</a:t>
             </a:r>
             <a:endParaRPr lang="en-US" sz="1200" dirty="0"/>
           </a:p>
@@ -41316,7 +40764,7 @@
                 <a:ea typeface="Calibri" pitchFamily="34" charset="-122"/>
                 <a:cs typeface="Calibri" pitchFamily="34" charset="-120"/>
               </a:rPr>
-              <a:t>A picture made using paint, or the activity of making one.</a:t>
+              <a:t>A picture made using paint, or the act of putting paint on something.</a:t>
             </a:r>
             <a:endParaRPr lang="en-US" sz="1200" dirty="0"/>
           </a:p>
@@ -41608,7 +41056,7 @@
                 <a:ea typeface="Calibri" pitchFamily="34" charset="-122"/>
                 <a:cs typeface="Calibri" pitchFamily="34" charset="-120"/>
               </a:rPr>
-              <a:t>Word Labs  •  wordlabs.app  •  Root: 'paint' = to apply colour or pigment</a:t>
+              <a:t>Word Labs  •  wordlabs.app  •  Root: 'paint' = to colour or coat surface</a:t>
             </a:r>
             <a:endParaRPr lang="en-US" sz="800" dirty="0"/>
           </a:p>
@@ -41811,7 +41259,7 @@
                 <a:ea typeface="Calibri" pitchFamily="34" charset="-122"/>
                 <a:cs typeface="Calibri" pitchFamily="34" charset="-120"/>
               </a:rPr>
-              <a:t>The painter carefully applied three coats of paint to the old wooden fence.</a:t>
+              <a:t>The painter carefully mixed the colours before beginning the large mural on the school wall.</a:t>
             </a:r>
             <a:endParaRPr lang="en-US" sz="1500" dirty="0"/>
           </a:p>
@@ -41975,7 +41423,7 @@
                 <a:ea typeface="Calibri" pitchFamily="34" charset="-122"/>
                 <a:cs typeface="Calibri" pitchFamily="34" charset="-120"/>
               </a:rPr>
-              <a:t>We will repaint the classroom walls during the school holidays to make them look bright and fresh.</a:t>
+              <a:t>After the storm, Mum decided it was time to repaint the old wooden fence in the backyard.</a:t>
             </a:r>
             <a:endParaRPr lang="en-US" sz="1500" dirty="0"/>
           </a:p>
@@ -42139,7 +41587,7 @@
                 <a:ea typeface="Calibri" pitchFamily="34" charset="-122"/>
                 <a:cs typeface="Calibri" pitchFamily="34" charset="-120"/>
               </a:rPr>
-              <a:t>Her painting of the harbour won first prize at the school art competition.</a:t>
+              <a:t>We admired the beautiful painting hanging in the gallery, which showed a sunset over the ocean.</a:t>
             </a:r>
             <a:endParaRPr lang="en-US" sz="1500" dirty="0"/>
           </a:p>

--- a/output/wordlabs-paint-3day.pptx
+++ b/output/wordlabs-paint-3day.pptx
@@ -4240,7 +4240,7 @@
                 <a:ea typeface="Calibri" pitchFamily="34" charset="-122"/>
                 <a:cs typeface="Calibri" pitchFamily="34" charset="-120"/>
               </a:rPr>
-              <a:t>"to colour or coat surface"</a:t>
+              <a:t>"to colour a surface; a coloured liquid"</a:t>
             </a:r>
             <a:endParaRPr lang="en-US" sz="2200" dirty="0"/>
           </a:p>
@@ -4279,7 +4279,7 @@
                 <a:ea typeface="Calibri" pitchFamily="34" charset="-122"/>
                 <a:cs typeface="Calibri" pitchFamily="34" charset="-120"/>
               </a:rPr>
-              <a:t>Origin: Latin: pingere</a:t>
+              <a:t>Origin: Anglo-Saxon (Old English) root</a:t>
             </a:r>
             <a:endParaRPr lang="en-US" sz="1300" dirty="0"/>
           </a:p>
@@ -5288,7 +5288,7 @@
                 <a:ea typeface="Calibri" pitchFamily="34" charset="-122"/>
                 <a:cs typeface="Calibri" pitchFamily="34" charset="-120"/>
               </a:rPr>
-              <a:t>Word Labs  •  wordlabs.app  •  Root: 'paint' = to colour or coat surface</a:t>
+              <a:t>Word Labs  •  wordlabs.app  •  Root: 'paint' = to colour a surface; a coloured liquid</a:t>
             </a:r>
             <a:endParaRPr lang="en-US" sz="800" dirty="0"/>
           </a:p>
@@ -5622,7 +5622,7 @@
                 <a:ea typeface="Trebuchet MS" pitchFamily="34" charset="-122"/>
                 <a:cs typeface="Trebuchet MS" pitchFamily="34" charset="-120"/>
               </a:rPr>
-              <a:t>1</a:t>
+              <a:t>0</a:t>
             </a:r>
             <a:pPr algn="ctr" indent="0" marL="0">
               <a:buNone/>
@@ -5928,7 +5928,7 @@
                 <a:ea typeface="Calibri" pitchFamily="34" charset="-122"/>
                 <a:cs typeface="Calibri" pitchFamily="34" charset="-120"/>
               </a:rPr>
-              <a:t>Word Labs  •  wordlabs.app  •  Root: 'paint' = to colour or coat surface</a:t>
+              <a:t>Word Labs  •  wordlabs.app  •  Root: 'paint' = to colour a surface; a coloured liquid</a:t>
             </a:r>
             <a:endParaRPr lang="en-US" sz="800" dirty="0"/>
           </a:p>
@@ -6040,7 +6040,7 @@
                 <a:ea typeface="Calibri" pitchFamily="34" charset="-122"/>
                 <a:cs typeface="Calibri" pitchFamily="34" charset="-120"/>
               </a:rPr>
-              <a:t>The </a:t>
+              <a:t>Two </a:t>
             </a:r>
             <a:pPr algn="l" indent="0" marL="0">
               <a:buNone/>
@@ -6057,7 +6057,7 @@
                 <a:ea typeface="Calibri" pitchFamily="34" charset="-122"/>
                 <a:cs typeface="Calibri" pitchFamily="34" charset="-120"/>
               </a:rPr>
-              <a:t>painter</a:t>
+              <a:t>painters</a:t>
             </a:r>
             <a:pPr algn="l" indent="0" marL="0">
               <a:buNone/>
@@ -6071,7 +6071,7 @@
                 <a:ea typeface="Calibri" pitchFamily="34" charset="-122"/>
                 <a:cs typeface="Calibri" pitchFamily="34" charset="-120"/>
               </a:rPr>
-              <a:t> used bright colours, and the finished </a:t>
+              <a:t> arrived early to finish the mural before lunch. The </a:t>
             </a:r>
             <a:pPr algn="l" indent="0" marL="0">
               <a:buNone/>
@@ -6102,7 +6102,7 @@
                 <a:ea typeface="Calibri" pitchFamily="34" charset="-122"/>
                 <a:cs typeface="Calibri" pitchFamily="34" charset="-120"/>
               </a:rPr>
-              <a:t> was hung in the hall.</a:t>
+              <a:t> on the gallery wall showed a stormy sea.</a:t>
             </a:r>
             <a:endParaRPr lang="en-US" sz="1800" dirty="0"/>
           </a:p>
@@ -6257,7 +6257,7 @@
                 <a:ea typeface="Trebuchet MS" pitchFamily="34" charset="-122"/>
                 <a:cs typeface="Trebuchet MS" pitchFamily="34" charset="-120"/>
               </a:rPr>
-              <a:t>painter</a:t>
+              <a:t>painters</a:t>
             </a:r>
             <a:endParaRPr lang="en-US" sz="1400" dirty="0"/>
           </a:p>
@@ -6716,7 +6716,7 @@
                 <a:ea typeface="Calibri" pitchFamily="34" charset="-122"/>
                 <a:cs typeface="Calibri" pitchFamily="34" charset="-120"/>
               </a:rPr>
-              <a:t>Word Labs  •  wordlabs.app  •  Root: 'paint' = to colour or coat surface</a:t>
+              <a:t>Word Labs  •  wordlabs.app  •  Root: 'paint' = to colour a surface; a coloured liquid</a:t>
             </a:r>
             <a:endParaRPr lang="en-US" sz="800" dirty="0"/>
           </a:p>
@@ -6855,7 +6855,7 @@
                 <a:ea typeface="Trebuchet MS" pitchFamily="34" charset="-122"/>
                 <a:cs typeface="Trebuchet MS" pitchFamily="34" charset="-120"/>
               </a:rPr>
-              <a:t>painter</a:t>
+              <a:t>painters</a:t>
             </a:r>
             <a:endParaRPr lang="en-US" sz="2800" dirty="0"/>
           </a:p>
@@ -7543,7 +7543,7 @@
                 <a:ea typeface="Calibri" pitchFamily="34" charset="-122"/>
                 <a:cs typeface="Calibri" pitchFamily="34" charset="-120"/>
               </a:rPr>
-              <a:t>Word Labs  •  wordlabs.app  •  Root: 'paint' = to colour or coat surface</a:t>
+              <a:t>Word Labs  •  wordlabs.app  •  Root: 'paint' = to colour a surface; a coloured liquid</a:t>
             </a:r>
             <a:endParaRPr lang="en-US" sz="800" dirty="0"/>
           </a:p>
@@ -7682,7 +7682,7 @@
                 <a:ea typeface="Trebuchet MS" pitchFamily="34" charset="-122"/>
                 <a:cs typeface="Trebuchet MS" pitchFamily="34" charset="-120"/>
               </a:rPr>
-              <a:t>painter</a:t>
+              <a:t>painters</a:t>
             </a:r>
             <a:endParaRPr lang="en-US" sz="2800" dirty="0"/>
           </a:p>
@@ -7762,7 +7762,7 @@
         </p:nvSpPr>
         <p:spPr>
           <a:xfrm>
-            <a:off x="2938272" y="2258568"/>
+            <a:off x="2221992" y="2258568"/>
             <a:ext cx="1828800" cy="292608"/>
           </a:xfrm>
           <a:prstGeom prst="rect">
@@ -7796,7 +7796,7 @@
         </p:nvSpPr>
         <p:spPr>
           <a:xfrm>
-            <a:off x="2938272" y="2258568"/>
+            <a:off x="2221992" y="2258568"/>
             <a:ext cx="1828800" cy="292608"/>
           </a:xfrm>
           <a:prstGeom prst="rect">
@@ -7835,7 +7835,7 @@
         </p:nvSpPr>
         <p:spPr>
           <a:xfrm>
-            <a:off x="2938272" y="2569464"/>
+            <a:off x="2221992" y="2569464"/>
             <a:ext cx="1828800" cy="201168"/>
           </a:xfrm>
           <a:prstGeom prst="rect">
@@ -7860,7 +7860,7 @@
                 <a:ea typeface="Calibri" pitchFamily="34" charset="-122"/>
                 <a:cs typeface="Calibri" pitchFamily="34" charset="-120"/>
               </a:rPr>
-              <a:t>to colour a surface</a:t>
+              <a:t>to colour a surface; a coloured liquid</a:t>
             </a:r>
             <a:endParaRPr lang="en-US" sz="850" dirty="0"/>
           </a:p>
@@ -7874,7 +7874,7 @@
         </p:nvSpPr>
         <p:spPr>
           <a:xfrm>
-            <a:off x="5803392" y="2258568"/>
+            <a:off x="4370832" y="2258568"/>
             <a:ext cx="1828800" cy="292608"/>
           </a:xfrm>
           <a:prstGeom prst="rect">
@@ -7908,7 +7908,7 @@
         </p:nvSpPr>
         <p:spPr>
           <a:xfrm>
-            <a:off x="5803392" y="2258568"/>
+            <a:off x="4370832" y="2258568"/>
             <a:ext cx="1828800" cy="292608"/>
           </a:xfrm>
           <a:prstGeom prst="rect">
@@ -7947,7 +7947,7 @@
         </p:nvSpPr>
         <p:spPr>
           <a:xfrm>
-            <a:off x="5803392" y="2569464"/>
+            <a:off x="4370832" y="2569464"/>
             <a:ext cx="1828800" cy="201168"/>
           </a:xfrm>
           <a:prstGeom prst="rect">
@@ -7972,7 +7972,7 @@
                 <a:ea typeface="Calibri" pitchFamily="34" charset="-122"/>
                 <a:cs typeface="Calibri" pitchFamily="34" charset="-120"/>
               </a:rPr>
-              <a:t>one who does</a:t>
+              <a:t>person who; more</a:t>
             </a:r>
             <a:endParaRPr lang="en-US" sz="850" dirty="0"/>
           </a:p>
@@ -7981,6 +7981,118 @@
       <p:sp>
         <p:nvSpPr>
           <p:cNvPr id="22" name="Shape 20"/>
+          <p:cNvSpPr/>
+          <p:nvPr/>
+        </p:nvSpPr>
+        <p:spPr>
+          <a:xfrm>
+            <a:off x="6519672" y="2258568"/>
+            <a:ext cx="1828800" cy="292608"/>
+          </a:xfrm>
+          <a:prstGeom prst="rect">
+            <a:avLst>
+              <a:gd name="adj" fmla="val 25000"/>
+            </a:avLst>
+          </a:prstGeom>
+          <a:solidFill>
+            <a:srgbClr val="FCE7F3"/>
+          </a:solidFill>
+          <a:ln w="19050">
+            <a:solidFill>
+              <a:srgbClr val="DB2777"/>
+            </a:solidFill>
+            <a:prstDash val="solid"/>
+          </a:ln>
+          <a:effectLst>
+            <a:outerShdw sx="100000" sy="100000" kx="0" ky="0" algn="bl" rotWithShape="0" blurRad="101600" dist="38100" dir="8100000">
+              <a:srgbClr val="000000">
+                <a:alpha val="12000"/>
+              </a:srgbClr>
+            </a:outerShdw>
+          </a:effectLst>
+        </p:spPr>
+      </p:sp>
+      <p:sp>
+        <p:nvSpPr>
+          <p:cNvPr id="23" name="Text 21"/>
+          <p:cNvSpPr/>
+          <p:nvPr/>
+        </p:nvSpPr>
+        <p:spPr>
+          <a:xfrm>
+            <a:off x="6519672" y="2258568"/>
+            <a:ext cx="1828800" cy="292608"/>
+          </a:xfrm>
+          <a:prstGeom prst="rect">
+            <a:avLst/>
+          </a:prstGeom>
+          <a:noFill/>
+          <a:ln/>
+        </p:spPr>
+        <p:txBody>
+          <a:bodyPr wrap="square" lIns="0" tIns="0" rIns="0" bIns="0" rtlCol="0" anchor="ctr"/>
+          <a:lstStyle/>
+          <a:p>
+            <a:pPr algn="ctr" indent="0" marL="0">
+              <a:buNone/>
+            </a:pPr>
+            <a:r>
+              <a:rPr lang="en-US" sz="1300" b="1" dirty="0">
+                <a:solidFill>
+                  <a:srgbClr val="9D174D"/>
+                </a:solidFill>
+                <a:latin typeface="Trebuchet MS" pitchFamily="34" charset="0"/>
+                <a:ea typeface="Trebuchet MS" pitchFamily="34" charset="-122"/>
+                <a:cs typeface="Trebuchet MS" pitchFamily="34" charset="-120"/>
+              </a:rPr>
+              <a:t>s</a:t>
+            </a:r>
+            <a:endParaRPr lang="en-US" sz="1300" dirty="0"/>
+          </a:p>
+        </p:txBody>
+      </p:sp>
+      <p:sp>
+        <p:nvSpPr>
+          <p:cNvPr id="24" name="Text 22"/>
+          <p:cNvSpPr/>
+          <p:nvPr/>
+        </p:nvSpPr>
+        <p:spPr>
+          <a:xfrm>
+            <a:off x="6519672" y="2569464"/>
+            <a:ext cx="1828800" cy="201168"/>
+          </a:xfrm>
+          <a:prstGeom prst="rect">
+            <a:avLst/>
+          </a:prstGeom>
+          <a:noFill/>
+          <a:ln/>
+        </p:spPr>
+        <p:txBody>
+          <a:bodyPr wrap="square" lIns="0" tIns="0" rIns="0" bIns="0" rtlCol="0" anchor="t"/>
+          <a:lstStyle/>
+          <a:p>
+            <a:pPr algn="ctr" indent="0" marL="0">
+              <a:buNone/>
+            </a:pPr>
+            <a:r>
+              <a:rPr lang="en-US" sz="850" dirty="0">
+                <a:solidFill>
+                  <a:srgbClr val="475569"/>
+                </a:solidFill>
+                <a:latin typeface="Calibri" pitchFamily="34" charset="0"/>
+                <a:ea typeface="Calibri" pitchFamily="34" charset="-122"/>
+                <a:cs typeface="Calibri" pitchFamily="34" charset="-120"/>
+              </a:rPr>
+              <a:t>plural or present tense</a:t>
+            </a:r>
+            <a:endParaRPr lang="en-US" sz="850" dirty="0"/>
+          </a:p>
+        </p:txBody>
+      </p:sp>
+      <p:sp>
+        <p:nvSpPr>
+          <p:cNvPr id="25" name="Shape 23"/>
           <p:cNvSpPr/>
           <p:nvPr/>
         </p:nvSpPr>
@@ -8007,7 +8119,7 @@
       </p:sp>
       <p:sp>
         <p:nvSpPr>
-          <p:cNvPr id="23" name="Text 21"/>
+          <p:cNvPr id="26" name="Text 24"/>
           <p:cNvSpPr/>
           <p:nvPr/>
         </p:nvSpPr>
@@ -8046,7 +8158,7 @@
       </p:sp>
       <p:sp>
         <p:nvSpPr>
-          <p:cNvPr id="24" name="Shape 22"/>
+          <p:cNvPr id="27" name="Shape 25"/>
           <p:cNvSpPr/>
           <p:nvPr/>
         </p:nvSpPr>
@@ -8073,7 +8185,7 @@
       </p:sp>
       <p:sp>
         <p:nvSpPr>
-          <p:cNvPr id="25" name="Text 23"/>
+          <p:cNvPr id="28" name="Text 26"/>
           <p:cNvSpPr/>
           <p:nvPr/>
         </p:nvSpPr>
@@ -8112,7 +8224,7 @@
       </p:sp>
       <p:sp>
         <p:nvSpPr>
-          <p:cNvPr id="26" name="Shape 24"/>
+          <p:cNvPr id="29" name="Shape 27"/>
           <p:cNvSpPr/>
           <p:nvPr/>
         </p:nvSpPr>
@@ -8139,7 +8251,7 @@
       </p:sp>
       <p:sp>
         <p:nvSpPr>
-          <p:cNvPr id="27" name="Text 25"/>
+          <p:cNvPr id="30" name="Text 28"/>
           <p:cNvSpPr/>
           <p:nvPr/>
         </p:nvSpPr>
@@ -8178,7 +8290,7 @@
       </p:sp>
       <p:sp>
         <p:nvSpPr>
-          <p:cNvPr id="28" name="Shape 26"/>
+          <p:cNvPr id="31" name="Shape 29"/>
           <p:cNvSpPr/>
           <p:nvPr/>
         </p:nvSpPr>
@@ -8205,7 +8317,7 @@
       </p:sp>
       <p:sp>
         <p:nvSpPr>
-          <p:cNvPr id="29" name="Text 27"/>
+          <p:cNvPr id="32" name="Text 30"/>
           <p:cNvSpPr/>
           <p:nvPr/>
         </p:nvSpPr>
@@ -8528,7 +8640,7 @@
                 <a:ea typeface="Calibri" pitchFamily="34" charset="-122"/>
                 <a:cs typeface="Calibri" pitchFamily="34" charset="-120"/>
               </a:rPr>
-              <a:t>Word Labs  •  wordlabs.app  •  Root: 'paint' = to colour or coat surface</a:t>
+              <a:t>Word Labs  •  wordlabs.app  •  Root: 'paint' = to colour a surface; a coloured liquid</a:t>
             </a:r>
             <a:endParaRPr lang="en-US" sz="800" dirty="0"/>
           </a:p>
@@ -8667,7 +8779,7 @@
                 <a:ea typeface="Trebuchet MS" pitchFamily="34" charset="-122"/>
                 <a:cs typeface="Trebuchet MS" pitchFamily="34" charset="-120"/>
               </a:rPr>
-              <a:t>painter</a:t>
+              <a:t>painters</a:t>
             </a:r>
             <a:endParaRPr lang="en-US" sz="2800" dirty="0"/>
           </a:p>
@@ -8747,7 +8859,7 @@
         </p:nvSpPr>
         <p:spPr>
           <a:xfrm>
-            <a:off x="2938272" y="2258568"/>
+            <a:off x="2221992" y="2258568"/>
             <a:ext cx="1828800" cy="292608"/>
           </a:xfrm>
           <a:prstGeom prst="rect">
@@ -8781,7 +8893,7 @@
         </p:nvSpPr>
         <p:spPr>
           <a:xfrm>
-            <a:off x="2938272" y="2258568"/>
+            <a:off x="2221992" y="2258568"/>
             <a:ext cx="1828800" cy="292608"/>
           </a:xfrm>
           <a:prstGeom prst="rect">
@@ -8820,7 +8932,7 @@
         </p:nvSpPr>
         <p:spPr>
           <a:xfrm>
-            <a:off x="2938272" y="2569464"/>
+            <a:off x="2221992" y="2569464"/>
             <a:ext cx="1828800" cy="201168"/>
           </a:xfrm>
           <a:prstGeom prst="rect">
@@ -8845,7 +8957,7 @@
                 <a:ea typeface="Calibri" pitchFamily="34" charset="-122"/>
                 <a:cs typeface="Calibri" pitchFamily="34" charset="-120"/>
               </a:rPr>
-              <a:t>to colour a surface</a:t>
+              <a:t>to colour a surface; a coloured liquid</a:t>
             </a:r>
             <a:endParaRPr lang="en-US" sz="850" dirty="0"/>
           </a:p>
@@ -8859,7 +8971,7 @@
         </p:nvSpPr>
         <p:spPr>
           <a:xfrm>
-            <a:off x="5803392" y="2258568"/>
+            <a:off x="4370832" y="2258568"/>
             <a:ext cx="1828800" cy="292608"/>
           </a:xfrm>
           <a:prstGeom prst="rect">
@@ -8893,7 +9005,7 @@
         </p:nvSpPr>
         <p:spPr>
           <a:xfrm>
-            <a:off x="5803392" y="2258568"/>
+            <a:off x="4370832" y="2258568"/>
             <a:ext cx="1828800" cy="292608"/>
           </a:xfrm>
           <a:prstGeom prst="rect">
@@ -8932,7 +9044,7 @@
         </p:nvSpPr>
         <p:spPr>
           <a:xfrm>
-            <a:off x="5803392" y="2569464"/>
+            <a:off x="4370832" y="2569464"/>
             <a:ext cx="1828800" cy="201168"/>
           </a:xfrm>
           <a:prstGeom prst="rect">
@@ -8957,7 +9069,7 @@
                 <a:ea typeface="Calibri" pitchFamily="34" charset="-122"/>
                 <a:cs typeface="Calibri" pitchFamily="34" charset="-120"/>
               </a:rPr>
-              <a:t>one who does</a:t>
+              <a:t>person who; more</a:t>
             </a:r>
             <a:endParaRPr lang="en-US" sz="850" dirty="0"/>
           </a:p>
@@ -8966,6 +9078,118 @@
       <p:sp>
         <p:nvSpPr>
           <p:cNvPr id="22" name="Shape 20"/>
+          <p:cNvSpPr/>
+          <p:nvPr/>
+        </p:nvSpPr>
+        <p:spPr>
+          <a:xfrm>
+            <a:off x="6519672" y="2258568"/>
+            <a:ext cx="1828800" cy="292608"/>
+          </a:xfrm>
+          <a:prstGeom prst="rect">
+            <a:avLst>
+              <a:gd name="adj" fmla="val 25000"/>
+            </a:avLst>
+          </a:prstGeom>
+          <a:solidFill>
+            <a:srgbClr val="FCE7F3"/>
+          </a:solidFill>
+          <a:ln w="19050">
+            <a:solidFill>
+              <a:srgbClr val="DB2777"/>
+            </a:solidFill>
+            <a:prstDash val="solid"/>
+          </a:ln>
+          <a:effectLst>
+            <a:outerShdw sx="100000" sy="100000" kx="0" ky="0" algn="bl" rotWithShape="0" blurRad="101600" dist="38100" dir="8100000">
+              <a:srgbClr val="000000">
+                <a:alpha val="12000"/>
+              </a:srgbClr>
+            </a:outerShdw>
+          </a:effectLst>
+        </p:spPr>
+      </p:sp>
+      <p:sp>
+        <p:nvSpPr>
+          <p:cNvPr id="23" name="Text 21"/>
+          <p:cNvSpPr/>
+          <p:nvPr/>
+        </p:nvSpPr>
+        <p:spPr>
+          <a:xfrm>
+            <a:off x="6519672" y="2258568"/>
+            <a:ext cx="1828800" cy="292608"/>
+          </a:xfrm>
+          <a:prstGeom prst="rect">
+            <a:avLst/>
+          </a:prstGeom>
+          <a:noFill/>
+          <a:ln/>
+        </p:spPr>
+        <p:txBody>
+          <a:bodyPr wrap="square" lIns="0" tIns="0" rIns="0" bIns="0" rtlCol="0" anchor="ctr"/>
+          <a:lstStyle/>
+          <a:p>
+            <a:pPr algn="ctr" indent="0" marL="0">
+              <a:buNone/>
+            </a:pPr>
+            <a:r>
+              <a:rPr lang="en-US" sz="1300" b="1" dirty="0">
+                <a:solidFill>
+                  <a:srgbClr val="9D174D"/>
+                </a:solidFill>
+                <a:latin typeface="Trebuchet MS" pitchFamily="34" charset="0"/>
+                <a:ea typeface="Trebuchet MS" pitchFamily="34" charset="-122"/>
+                <a:cs typeface="Trebuchet MS" pitchFamily="34" charset="-120"/>
+              </a:rPr>
+              <a:t>s</a:t>
+            </a:r>
+            <a:endParaRPr lang="en-US" sz="1300" dirty="0"/>
+          </a:p>
+        </p:txBody>
+      </p:sp>
+      <p:sp>
+        <p:nvSpPr>
+          <p:cNvPr id="24" name="Text 22"/>
+          <p:cNvSpPr/>
+          <p:nvPr/>
+        </p:nvSpPr>
+        <p:spPr>
+          <a:xfrm>
+            <a:off x="6519672" y="2569464"/>
+            <a:ext cx="1828800" cy="201168"/>
+          </a:xfrm>
+          <a:prstGeom prst="rect">
+            <a:avLst/>
+          </a:prstGeom>
+          <a:noFill/>
+          <a:ln/>
+        </p:spPr>
+        <p:txBody>
+          <a:bodyPr wrap="square" lIns="0" tIns="0" rIns="0" bIns="0" rtlCol="0" anchor="t"/>
+          <a:lstStyle/>
+          <a:p>
+            <a:pPr algn="ctr" indent="0" marL="0">
+              <a:buNone/>
+            </a:pPr>
+            <a:r>
+              <a:rPr lang="en-US" sz="850" dirty="0">
+                <a:solidFill>
+                  <a:srgbClr val="475569"/>
+                </a:solidFill>
+                <a:latin typeface="Calibri" pitchFamily="34" charset="0"/>
+                <a:ea typeface="Calibri" pitchFamily="34" charset="-122"/>
+                <a:cs typeface="Calibri" pitchFamily="34" charset="-120"/>
+              </a:rPr>
+              <a:t>plural or present tense</a:t>
+            </a:r>
+            <a:endParaRPr lang="en-US" sz="850" dirty="0"/>
+          </a:p>
+        </p:txBody>
+      </p:sp>
+      <p:sp>
+        <p:nvSpPr>
+          <p:cNvPr id="25" name="Shape 23"/>
           <p:cNvSpPr/>
           <p:nvPr/>
         </p:nvSpPr>
@@ -8992,7 +9216,7 @@
       </p:sp>
       <p:sp>
         <p:nvSpPr>
-          <p:cNvPr id="23" name="Text 21"/>
+          <p:cNvPr id="26" name="Text 24"/>
           <p:cNvSpPr/>
           <p:nvPr/>
         </p:nvSpPr>
@@ -9031,7 +9255,7 @@
       </p:sp>
       <p:sp>
         <p:nvSpPr>
-          <p:cNvPr id="24" name="Shape 22"/>
+          <p:cNvPr id="27" name="Shape 25"/>
           <p:cNvSpPr/>
           <p:nvPr/>
         </p:nvSpPr>
@@ -9058,7 +9282,7 @@
       </p:sp>
       <p:sp>
         <p:nvSpPr>
-          <p:cNvPr id="25" name="Shape 23"/>
+          <p:cNvPr id="28" name="Shape 26"/>
           <p:cNvSpPr/>
           <p:nvPr/>
         </p:nvSpPr>
@@ -9085,7 +9309,7 @@
       </p:sp>
       <p:sp>
         <p:nvSpPr>
-          <p:cNvPr id="26" name="Text 24"/>
+          <p:cNvPr id="29" name="Text 27"/>
           <p:cNvSpPr/>
           <p:nvPr/>
         </p:nvSpPr>
@@ -9116,7 +9340,7 @@
                 <a:ea typeface="Trebuchet MS" pitchFamily="34" charset="-122"/>
                 <a:cs typeface="Trebuchet MS" pitchFamily="34" charset="-120"/>
               </a:rPr>
-              <a:t>pain</a:t>
+              <a:t>paint</a:t>
             </a:r>
             <a:endParaRPr lang="en-US" sz="1400" dirty="0"/>
           </a:p>
@@ -9124,7 +9348,7 @@
       </p:sp>
       <p:sp>
         <p:nvSpPr>
-          <p:cNvPr id="27" name="Text 25"/>
+          <p:cNvPr id="30" name="Text 28"/>
           <p:cNvSpPr/>
           <p:nvPr/>
         </p:nvSpPr>
@@ -9163,7 +9387,7 @@
       </p:sp>
       <p:sp>
         <p:nvSpPr>
-          <p:cNvPr id="28" name="Shape 26"/>
+          <p:cNvPr id="31" name="Shape 29"/>
           <p:cNvSpPr/>
           <p:nvPr/>
         </p:nvSpPr>
@@ -9190,7 +9414,7 @@
       </p:sp>
       <p:sp>
         <p:nvSpPr>
-          <p:cNvPr id="29" name="Text 27"/>
+          <p:cNvPr id="32" name="Text 30"/>
           <p:cNvSpPr/>
           <p:nvPr/>
         </p:nvSpPr>
@@ -9221,7 +9445,7 @@
                 <a:ea typeface="Trebuchet MS" pitchFamily="34" charset="-122"/>
                 <a:cs typeface="Trebuchet MS" pitchFamily="34" charset="-120"/>
               </a:rPr>
-              <a:t>ter</a:t>
+              <a:t>ers</a:t>
             </a:r>
             <a:endParaRPr lang="en-US" sz="1400" dirty="0"/>
           </a:p>
@@ -9229,7 +9453,7 @@
       </p:sp>
       <p:sp>
         <p:nvSpPr>
-          <p:cNvPr id="30" name="Shape 28"/>
+          <p:cNvPr id="33" name="Shape 31"/>
           <p:cNvSpPr/>
           <p:nvPr/>
         </p:nvSpPr>
@@ -9256,7 +9480,7 @@
       </p:sp>
       <p:sp>
         <p:nvSpPr>
-          <p:cNvPr id="31" name="Text 29"/>
+          <p:cNvPr id="34" name="Text 32"/>
           <p:cNvSpPr/>
           <p:nvPr/>
         </p:nvSpPr>
@@ -9295,7 +9519,7 @@
       </p:sp>
       <p:sp>
         <p:nvSpPr>
-          <p:cNvPr id="32" name="Shape 30"/>
+          <p:cNvPr id="35" name="Shape 33"/>
           <p:cNvSpPr/>
           <p:nvPr/>
         </p:nvSpPr>
@@ -9322,7 +9546,7 @@
       </p:sp>
       <p:sp>
         <p:nvSpPr>
-          <p:cNvPr id="33" name="Text 31"/>
+          <p:cNvPr id="36" name="Text 34"/>
           <p:cNvSpPr/>
           <p:nvPr/>
         </p:nvSpPr>
@@ -9645,7 +9869,7 @@
                 <a:ea typeface="Calibri" pitchFamily="34" charset="-122"/>
                 <a:cs typeface="Calibri" pitchFamily="34" charset="-120"/>
               </a:rPr>
-              <a:t>Word Labs  •  wordlabs.app  •  Root: 'paint' = to colour or coat surface</a:t>
+              <a:t>Word Labs  •  wordlabs.app  •  Root: 'paint' = to colour a surface; a coloured liquid</a:t>
             </a:r>
             <a:endParaRPr lang="en-US" sz="800" dirty="0"/>
           </a:p>
@@ -9784,7 +10008,7 @@
                 <a:ea typeface="Trebuchet MS" pitchFamily="34" charset="-122"/>
                 <a:cs typeface="Trebuchet MS" pitchFamily="34" charset="-120"/>
               </a:rPr>
-              <a:t>painter</a:t>
+              <a:t>painters</a:t>
             </a:r>
             <a:endParaRPr lang="en-US" sz="2800" dirty="0"/>
           </a:p>
@@ -9864,7 +10088,7 @@
         </p:nvSpPr>
         <p:spPr>
           <a:xfrm>
-            <a:off x="2938272" y="2258568"/>
+            <a:off x="2221992" y="2258568"/>
             <a:ext cx="1828800" cy="292608"/>
           </a:xfrm>
           <a:prstGeom prst="rect">
@@ -9898,7 +10122,7 @@
         </p:nvSpPr>
         <p:spPr>
           <a:xfrm>
-            <a:off x="2938272" y="2258568"/>
+            <a:off x="2221992" y="2258568"/>
             <a:ext cx="1828800" cy="292608"/>
           </a:xfrm>
           <a:prstGeom prst="rect">
@@ -9937,7 +10161,7 @@
         </p:nvSpPr>
         <p:spPr>
           <a:xfrm>
-            <a:off x="2938272" y="2569464"/>
+            <a:off x="2221992" y="2569464"/>
             <a:ext cx="1828800" cy="201168"/>
           </a:xfrm>
           <a:prstGeom prst="rect">
@@ -9962,7 +10186,7 @@
                 <a:ea typeface="Calibri" pitchFamily="34" charset="-122"/>
                 <a:cs typeface="Calibri" pitchFamily="34" charset="-120"/>
               </a:rPr>
-              <a:t>to colour a surface</a:t>
+              <a:t>to colour a surface; a coloured liquid</a:t>
             </a:r>
             <a:endParaRPr lang="en-US" sz="850" dirty="0"/>
           </a:p>
@@ -9976,7 +10200,7 @@
         </p:nvSpPr>
         <p:spPr>
           <a:xfrm>
-            <a:off x="5803392" y="2258568"/>
+            <a:off x="4370832" y="2258568"/>
             <a:ext cx="1828800" cy="292608"/>
           </a:xfrm>
           <a:prstGeom prst="rect">
@@ -10010,7 +10234,7 @@
         </p:nvSpPr>
         <p:spPr>
           <a:xfrm>
-            <a:off x="5803392" y="2258568"/>
+            <a:off x="4370832" y="2258568"/>
             <a:ext cx="1828800" cy="292608"/>
           </a:xfrm>
           <a:prstGeom prst="rect">
@@ -10049,7 +10273,7 @@
         </p:nvSpPr>
         <p:spPr>
           <a:xfrm>
-            <a:off x="5803392" y="2569464"/>
+            <a:off x="4370832" y="2569464"/>
             <a:ext cx="1828800" cy="201168"/>
           </a:xfrm>
           <a:prstGeom prst="rect">
@@ -10074,7 +10298,7 @@
                 <a:ea typeface="Calibri" pitchFamily="34" charset="-122"/>
                 <a:cs typeface="Calibri" pitchFamily="34" charset="-120"/>
               </a:rPr>
-              <a:t>one who does</a:t>
+              <a:t>person who; more</a:t>
             </a:r>
             <a:endParaRPr lang="en-US" sz="850" dirty="0"/>
           </a:p>
@@ -10083,6 +10307,118 @@
       <p:sp>
         <p:nvSpPr>
           <p:cNvPr id="22" name="Shape 20"/>
+          <p:cNvSpPr/>
+          <p:nvPr/>
+        </p:nvSpPr>
+        <p:spPr>
+          <a:xfrm>
+            <a:off x="6519672" y="2258568"/>
+            <a:ext cx="1828800" cy="292608"/>
+          </a:xfrm>
+          <a:prstGeom prst="rect">
+            <a:avLst>
+              <a:gd name="adj" fmla="val 25000"/>
+            </a:avLst>
+          </a:prstGeom>
+          <a:solidFill>
+            <a:srgbClr val="FCE7F3"/>
+          </a:solidFill>
+          <a:ln w="19050">
+            <a:solidFill>
+              <a:srgbClr val="DB2777"/>
+            </a:solidFill>
+            <a:prstDash val="solid"/>
+          </a:ln>
+          <a:effectLst>
+            <a:outerShdw sx="100000" sy="100000" kx="0" ky="0" algn="bl" rotWithShape="0" blurRad="101600" dist="38100" dir="8100000">
+              <a:srgbClr val="000000">
+                <a:alpha val="12000"/>
+              </a:srgbClr>
+            </a:outerShdw>
+          </a:effectLst>
+        </p:spPr>
+      </p:sp>
+      <p:sp>
+        <p:nvSpPr>
+          <p:cNvPr id="23" name="Text 21"/>
+          <p:cNvSpPr/>
+          <p:nvPr/>
+        </p:nvSpPr>
+        <p:spPr>
+          <a:xfrm>
+            <a:off x="6519672" y="2258568"/>
+            <a:ext cx="1828800" cy="292608"/>
+          </a:xfrm>
+          <a:prstGeom prst="rect">
+            <a:avLst/>
+          </a:prstGeom>
+          <a:noFill/>
+          <a:ln/>
+        </p:spPr>
+        <p:txBody>
+          <a:bodyPr wrap="square" lIns="0" tIns="0" rIns="0" bIns="0" rtlCol="0" anchor="ctr"/>
+          <a:lstStyle/>
+          <a:p>
+            <a:pPr algn="ctr" indent="0" marL="0">
+              <a:buNone/>
+            </a:pPr>
+            <a:r>
+              <a:rPr lang="en-US" sz="1300" b="1" dirty="0">
+                <a:solidFill>
+                  <a:srgbClr val="9D174D"/>
+                </a:solidFill>
+                <a:latin typeface="Trebuchet MS" pitchFamily="34" charset="0"/>
+                <a:ea typeface="Trebuchet MS" pitchFamily="34" charset="-122"/>
+                <a:cs typeface="Trebuchet MS" pitchFamily="34" charset="-120"/>
+              </a:rPr>
+              <a:t>s</a:t>
+            </a:r>
+            <a:endParaRPr lang="en-US" sz="1300" dirty="0"/>
+          </a:p>
+        </p:txBody>
+      </p:sp>
+      <p:sp>
+        <p:nvSpPr>
+          <p:cNvPr id="24" name="Text 22"/>
+          <p:cNvSpPr/>
+          <p:nvPr/>
+        </p:nvSpPr>
+        <p:spPr>
+          <a:xfrm>
+            <a:off x="6519672" y="2569464"/>
+            <a:ext cx="1828800" cy="201168"/>
+          </a:xfrm>
+          <a:prstGeom prst="rect">
+            <a:avLst/>
+          </a:prstGeom>
+          <a:noFill/>
+          <a:ln/>
+        </p:spPr>
+        <p:txBody>
+          <a:bodyPr wrap="square" lIns="0" tIns="0" rIns="0" bIns="0" rtlCol="0" anchor="t"/>
+          <a:lstStyle/>
+          <a:p>
+            <a:pPr algn="ctr" indent="0" marL="0">
+              <a:buNone/>
+            </a:pPr>
+            <a:r>
+              <a:rPr lang="en-US" sz="850" dirty="0">
+                <a:solidFill>
+                  <a:srgbClr val="475569"/>
+                </a:solidFill>
+                <a:latin typeface="Calibri" pitchFamily="34" charset="0"/>
+                <a:ea typeface="Calibri" pitchFamily="34" charset="-122"/>
+                <a:cs typeface="Calibri" pitchFamily="34" charset="-120"/>
+              </a:rPr>
+              <a:t>plural or present tense</a:t>
+            </a:r>
+            <a:endParaRPr lang="en-US" sz="850" dirty="0"/>
+          </a:p>
+        </p:txBody>
+      </p:sp>
+      <p:sp>
+        <p:nvSpPr>
+          <p:cNvPr id="25" name="Shape 23"/>
           <p:cNvSpPr/>
           <p:nvPr/>
         </p:nvSpPr>
@@ -10109,7 +10445,7 @@
       </p:sp>
       <p:sp>
         <p:nvSpPr>
-          <p:cNvPr id="23" name="Text 21"/>
+          <p:cNvPr id="26" name="Text 24"/>
           <p:cNvSpPr/>
           <p:nvPr/>
         </p:nvSpPr>
@@ -10148,7 +10484,7 @@
       </p:sp>
       <p:sp>
         <p:nvSpPr>
-          <p:cNvPr id="24" name="Shape 22"/>
+          <p:cNvPr id="27" name="Shape 25"/>
           <p:cNvSpPr/>
           <p:nvPr/>
         </p:nvSpPr>
@@ -10175,7 +10511,7 @@
       </p:sp>
       <p:sp>
         <p:nvSpPr>
-          <p:cNvPr id="25" name="Shape 23"/>
+          <p:cNvPr id="28" name="Shape 26"/>
           <p:cNvSpPr/>
           <p:nvPr/>
         </p:nvSpPr>
@@ -10202,7 +10538,7 @@
       </p:sp>
       <p:sp>
         <p:nvSpPr>
-          <p:cNvPr id="26" name="Text 24"/>
+          <p:cNvPr id="29" name="Text 27"/>
           <p:cNvSpPr/>
           <p:nvPr/>
         </p:nvSpPr>
@@ -10233,7 +10569,7 @@
                 <a:ea typeface="Trebuchet MS" pitchFamily="34" charset="-122"/>
                 <a:cs typeface="Trebuchet MS" pitchFamily="34" charset="-120"/>
               </a:rPr>
-              <a:t>pain</a:t>
+              <a:t>paint</a:t>
             </a:r>
             <a:endParaRPr lang="en-US" sz="1400" dirty="0"/>
           </a:p>
@@ -10241,7 +10577,7 @@
       </p:sp>
       <p:sp>
         <p:nvSpPr>
-          <p:cNvPr id="27" name="Text 25"/>
+          <p:cNvPr id="30" name="Text 28"/>
           <p:cNvSpPr/>
           <p:nvPr/>
         </p:nvSpPr>
@@ -10280,7 +10616,7 @@
       </p:sp>
       <p:sp>
         <p:nvSpPr>
-          <p:cNvPr id="28" name="Shape 26"/>
+          <p:cNvPr id="31" name="Shape 29"/>
           <p:cNvSpPr/>
           <p:nvPr/>
         </p:nvSpPr>
@@ -10307,7 +10643,7 @@
       </p:sp>
       <p:sp>
         <p:nvSpPr>
-          <p:cNvPr id="29" name="Text 27"/>
+          <p:cNvPr id="32" name="Text 30"/>
           <p:cNvSpPr/>
           <p:nvPr/>
         </p:nvSpPr>
@@ -10338,7 +10674,7 @@
                 <a:ea typeface="Trebuchet MS" pitchFamily="34" charset="-122"/>
                 <a:cs typeface="Trebuchet MS" pitchFamily="34" charset="-120"/>
               </a:rPr>
-              <a:t>ter</a:t>
+              <a:t>ers</a:t>
             </a:r>
             <a:endParaRPr lang="en-US" sz="1400" dirty="0"/>
           </a:p>
@@ -10346,7 +10682,7 @@
       </p:sp>
       <p:sp>
         <p:nvSpPr>
-          <p:cNvPr id="30" name="Shape 28"/>
+          <p:cNvPr id="33" name="Shape 31"/>
           <p:cNvSpPr/>
           <p:nvPr/>
         </p:nvSpPr>
@@ -10373,7 +10709,7 @@
       </p:sp>
       <p:sp>
         <p:nvSpPr>
-          <p:cNvPr id="31" name="Text 29"/>
+          <p:cNvPr id="34" name="Text 32"/>
           <p:cNvSpPr/>
           <p:nvPr/>
         </p:nvSpPr>
@@ -10412,7 +10748,7 @@
       </p:sp>
       <p:sp>
         <p:nvSpPr>
-          <p:cNvPr id="32" name="Shape 30"/>
+          <p:cNvPr id="35" name="Shape 33"/>
           <p:cNvSpPr/>
           <p:nvPr/>
         </p:nvSpPr>
@@ -10439,13 +10775,13 @@
       </p:sp>
       <p:sp>
         <p:nvSpPr>
-          <p:cNvPr id="33" name="Shape 31"/>
-          <p:cNvSpPr/>
-          <p:nvPr/>
-        </p:nvSpPr>
-        <p:spPr>
-          <a:xfrm>
-            <a:off x="2427732" y="4169664"/>
+          <p:cNvPr id="36" name="Shape 34"/>
+          <p:cNvSpPr/>
+          <p:nvPr/>
+        </p:nvSpPr>
+        <p:spPr>
+          <a:xfrm>
+            <a:off x="2254649" y="4169664"/>
             <a:ext cx="685800" cy="475488"/>
           </a:xfrm>
           <a:prstGeom prst="rect">
@@ -10466,13 +10802,13 @@
       </p:sp>
       <p:sp>
         <p:nvSpPr>
-          <p:cNvPr id="34" name="Text 32"/>
-          <p:cNvSpPr/>
-          <p:nvPr/>
-        </p:nvSpPr>
-        <p:spPr>
-          <a:xfrm>
-            <a:off x="2427732" y="4169664"/>
+          <p:cNvPr id="37" name="Text 35"/>
+          <p:cNvSpPr/>
+          <p:nvPr/>
+        </p:nvSpPr>
+        <p:spPr>
+          <a:xfrm>
+            <a:off x="2254649" y="4169664"/>
             <a:ext cx="685800" cy="475488"/>
           </a:xfrm>
           <a:prstGeom prst="rect">
@@ -10505,13 +10841,13 @@
       </p:sp>
       <p:sp>
         <p:nvSpPr>
-          <p:cNvPr id="35" name="Shape 33"/>
-          <p:cNvSpPr/>
-          <p:nvPr/>
-        </p:nvSpPr>
-        <p:spPr>
-          <a:xfrm>
-            <a:off x="3639312" y="4169664"/>
+          <p:cNvPr id="38" name="Shape 36"/>
+          <p:cNvSpPr/>
+          <p:nvPr/>
+        </p:nvSpPr>
+        <p:spPr>
+          <a:xfrm>
+            <a:off x="3293146" y="4169664"/>
             <a:ext cx="685800" cy="475488"/>
           </a:xfrm>
           <a:prstGeom prst="rect">
@@ -10532,13 +10868,13 @@
       </p:sp>
       <p:sp>
         <p:nvSpPr>
-          <p:cNvPr id="36" name="Text 34"/>
-          <p:cNvSpPr/>
-          <p:nvPr/>
-        </p:nvSpPr>
-        <p:spPr>
-          <a:xfrm>
-            <a:off x="3639312" y="4169664"/>
+          <p:cNvPr id="39" name="Text 37"/>
+          <p:cNvSpPr/>
+          <p:nvPr/>
+        </p:nvSpPr>
+        <p:spPr>
+          <a:xfrm>
+            <a:off x="3293146" y="4169664"/>
             <a:ext cx="685800" cy="475488"/>
           </a:xfrm>
           <a:prstGeom prst="rect">
@@ -10571,13 +10907,13 @@
       </p:sp>
       <p:sp>
         <p:nvSpPr>
-          <p:cNvPr id="37" name="Shape 35"/>
-          <p:cNvSpPr/>
-          <p:nvPr/>
-        </p:nvSpPr>
-        <p:spPr>
-          <a:xfrm>
-            <a:off x="4850892" y="4169664"/>
+          <p:cNvPr id="40" name="Shape 38"/>
+          <p:cNvSpPr/>
+          <p:nvPr/>
+        </p:nvSpPr>
+        <p:spPr>
+          <a:xfrm>
+            <a:off x="4331643" y="4169664"/>
             <a:ext cx="685800" cy="475488"/>
           </a:xfrm>
           <a:prstGeom prst="rect">
@@ -10598,13 +10934,13 @@
       </p:sp>
       <p:sp>
         <p:nvSpPr>
-          <p:cNvPr id="38" name="Text 36"/>
-          <p:cNvSpPr/>
-          <p:nvPr/>
-        </p:nvSpPr>
-        <p:spPr>
-          <a:xfrm>
-            <a:off x="4850892" y="4169664"/>
+          <p:cNvPr id="41" name="Text 39"/>
+          <p:cNvSpPr/>
+          <p:nvPr/>
+        </p:nvSpPr>
+        <p:spPr>
+          <a:xfrm>
+            <a:off x="4331643" y="4169664"/>
             <a:ext cx="685800" cy="475488"/>
           </a:xfrm>
           <a:prstGeom prst="rect">
@@ -10637,13 +10973,13 @@
       </p:sp>
       <p:sp>
         <p:nvSpPr>
-          <p:cNvPr id="39" name="Shape 37"/>
-          <p:cNvSpPr/>
-          <p:nvPr/>
-        </p:nvSpPr>
-        <p:spPr>
-          <a:xfrm>
-            <a:off x="6062472" y="4169664"/>
+          <p:cNvPr id="42" name="Shape 40"/>
+          <p:cNvSpPr/>
+          <p:nvPr/>
+        </p:nvSpPr>
+        <p:spPr>
+          <a:xfrm>
+            <a:off x="5370141" y="4169664"/>
             <a:ext cx="685800" cy="475488"/>
           </a:xfrm>
           <a:prstGeom prst="rect">
@@ -10664,13 +11000,13 @@
       </p:sp>
       <p:sp>
         <p:nvSpPr>
-          <p:cNvPr id="40" name="Text 38"/>
-          <p:cNvSpPr/>
-          <p:nvPr/>
-        </p:nvSpPr>
-        <p:spPr>
-          <a:xfrm>
-            <a:off x="6062472" y="4169664"/>
+          <p:cNvPr id="43" name="Text 41"/>
+          <p:cNvSpPr/>
+          <p:nvPr/>
+        </p:nvSpPr>
+        <p:spPr>
+          <a:xfrm>
+            <a:off x="5370141" y="4169664"/>
             <a:ext cx="685800" cy="475488"/>
           </a:xfrm>
           <a:prstGeom prst="rect">
@@ -10703,13 +11039,13 @@
       </p:sp>
       <p:sp>
         <p:nvSpPr>
-          <p:cNvPr id="41" name="Shape 39"/>
-          <p:cNvSpPr/>
-          <p:nvPr/>
-        </p:nvSpPr>
-        <p:spPr>
-          <a:xfrm>
-            <a:off x="7274052" y="4169664"/>
+          <p:cNvPr id="44" name="Shape 42"/>
+          <p:cNvSpPr/>
+          <p:nvPr/>
+        </p:nvSpPr>
+        <p:spPr>
+          <a:xfrm>
+            <a:off x="6408638" y="4169664"/>
             <a:ext cx="685800" cy="475488"/>
           </a:xfrm>
           <a:prstGeom prst="rect">
@@ -10730,13 +11066,13 @@
       </p:sp>
       <p:sp>
         <p:nvSpPr>
-          <p:cNvPr id="42" name="Text 40"/>
-          <p:cNvSpPr/>
-          <p:nvPr/>
-        </p:nvSpPr>
-        <p:spPr>
-          <a:xfrm>
-            <a:off x="7274052" y="4169664"/>
+          <p:cNvPr id="45" name="Text 43"/>
+          <p:cNvSpPr/>
+          <p:nvPr/>
+        </p:nvSpPr>
+        <p:spPr>
+          <a:xfrm>
+            <a:off x="6408638" y="4169664"/>
             <a:ext cx="685800" cy="475488"/>
           </a:xfrm>
           <a:prstGeom prst="rect">
@@ -10762,6 +11098,72 @@
                 <a:cs typeface="Trebuchet MS" pitchFamily="34" charset="-120"/>
               </a:rPr>
               <a:t>er</a:t>
+            </a:r>
+            <a:endParaRPr lang="en-US" sz="900" dirty="0"/>
+          </a:p>
+        </p:txBody>
+      </p:sp>
+      <p:sp>
+        <p:nvSpPr>
+          <p:cNvPr id="46" name="Shape 44"/>
+          <p:cNvSpPr/>
+          <p:nvPr/>
+        </p:nvSpPr>
+        <p:spPr>
+          <a:xfrm>
+            <a:off x="7447135" y="4169664"/>
+            <a:ext cx="685800" cy="475488"/>
+          </a:xfrm>
+          <a:prstGeom prst="rect">
+            <a:avLst>
+              <a:gd name="adj" fmla="val 7692"/>
+            </a:avLst>
+          </a:prstGeom>
+          <a:solidFill>
+            <a:srgbClr val="FFFFFF"/>
+          </a:solidFill>
+          <a:ln w="12700">
+            <a:solidFill>
+              <a:srgbClr val="DB2777"/>
+            </a:solidFill>
+            <a:prstDash val="solid"/>
+          </a:ln>
+        </p:spPr>
+      </p:sp>
+      <p:sp>
+        <p:nvSpPr>
+          <p:cNvPr id="47" name="Text 45"/>
+          <p:cNvSpPr/>
+          <p:nvPr/>
+        </p:nvSpPr>
+        <p:spPr>
+          <a:xfrm>
+            <a:off x="7447135" y="4169664"/>
+            <a:ext cx="685800" cy="475488"/>
+          </a:xfrm>
+          <a:prstGeom prst="rect">
+            <a:avLst/>
+          </a:prstGeom>
+          <a:noFill/>
+          <a:ln/>
+        </p:spPr>
+        <p:txBody>
+          <a:bodyPr wrap="square" lIns="0" tIns="0" rIns="0" bIns="0" rtlCol="0" anchor="ctr"/>
+          <a:lstStyle/>
+          <a:p>
+            <a:pPr algn="ctr" indent="0" marL="0">
+              <a:buNone/>
+            </a:pPr>
+            <a:r>
+              <a:rPr lang="en-US" sz="900" b="1" dirty="0">
+                <a:solidFill>
+                  <a:srgbClr val="9D174D"/>
+                </a:solidFill>
+                <a:latin typeface="Trebuchet MS" pitchFamily="34" charset="0"/>
+                <a:ea typeface="Trebuchet MS" pitchFamily="34" charset="-122"/>
+                <a:cs typeface="Trebuchet MS" pitchFamily="34" charset="-120"/>
+              </a:rPr>
+              <a:t>s</a:t>
             </a:r>
             <a:endParaRPr lang="en-US" sz="900" dirty="0"/>
           </a:p>
@@ -11053,7 +11455,7 @@
                 <a:ea typeface="Calibri" pitchFamily="34" charset="-122"/>
                 <a:cs typeface="Calibri" pitchFamily="34" charset="-120"/>
               </a:rPr>
-              <a:t>Word Labs  •  wordlabs.app  •  Root: 'paint' = to colour or coat surface</a:t>
+              <a:t>Word Labs  •  wordlabs.app  •  Root: 'paint' = to colour a surface; a coloured liquid</a:t>
             </a:r>
             <a:endParaRPr lang="en-US" sz="800" dirty="0"/>
           </a:p>
@@ -11880,7 +12282,7 @@
                 <a:ea typeface="Calibri" pitchFamily="34" charset="-122"/>
                 <a:cs typeface="Calibri" pitchFamily="34" charset="-120"/>
               </a:rPr>
-              <a:t>Word Labs  •  wordlabs.app  •  Root: 'paint' = to colour or coat surface</a:t>
+              <a:t>Word Labs  •  wordlabs.app  •  Root: 'paint' = to colour a surface; a coloured liquid</a:t>
             </a:r>
             <a:endParaRPr lang="en-US" sz="800" dirty="0"/>
           </a:p>
@@ -12197,7 +12599,7 @@
                 <a:ea typeface="Calibri" pitchFamily="34" charset="-122"/>
                 <a:cs typeface="Calibri" pitchFamily="34" charset="-120"/>
               </a:rPr>
-              <a:t>to colour a surface</a:t>
+              <a:t>to colour a surface; a coloured liquid</a:t>
             </a:r>
             <a:endParaRPr lang="en-US" sz="850" dirty="0"/>
           </a:p>
@@ -12309,7 +12711,7 @@
                 <a:ea typeface="Calibri" pitchFamily="34" charset="-122"/>
                 <a:cs typeface="Calibri" pitchFamily="34" charset="-120"/>
               </a:rPr>
-              <a:t>action or process</a:t>
+              <a:t>happening now</a:t>
             </a:r>
             <a:endParaRPr lang="en-US" sz="850" dirty="0"/>
           </a:p>
@@ -12865,7 +13267,7 @@
                 <a:ea typeface="Calibri" pitchFamily="34" charset="-122"/>
                 <a:cs typeface="Calibri" pitchFamily="34" charset="-120"/>
               </a:rPr>
-              <a:t>Word Labs  •  wordlabs.app  •  Root: 'paint' = to colour or coat surface</a:t>
+              <a:t>Word Labs  •  wordlabs.app  •  Root: 'paint' = to colour a surface; a coloured liquid</a:t>
             </a:r>
             <a:endParaRPr lang="en-US" sz="800" dirty="0"/>
           </a:p>
@@ -13182,7 +13584,7 @@
                 <a:ea typeface="Calibri" pitchFamily="34" charset="-122"/>
                 <a:cs typeface="Calibri" pitchFamily="34" charset="-120"/>
               </a:rPr>
-              <a:t>to colour a surface</a:t>
+              <a:t>to colour a surface; a coloured liquid</a:t>
             </a:r>
             <a:endParaRPr lang="en-US" sz="850" dirty="0"/>
           </a:p>
@@ -13294,7 +13696,7 @@
                 <a:ea typeface="Calibri" pitchFamily="34" charset="-122"/>
                 <a:cs typeface="Calibri" pitchFamily="34" charset="-120"/>
               </a:rPr>
-              <a:t>action or process</a:t>
+              <a:t>happening now</a:t>
             </a:r>
             <a:endParaRPr lang="en-US" sz="850" dirty="0"/>
           </a:p>
@@ -13453,7 +13855,7 @@
                 <a:ea typeface="Trebuchet MS" pitchFamily="34" charset="-122"/>
                 <a:cs typeface="Trebuchet MS" pitchFamily="34" charset="-120"/>
               </a:rPr>
-              <a:t>pain</a:t>
+              <a:t>paint</a:t>
             </a:r>
             <a:endParaRPr lang="en-US" sz="1400" dirty="0"/>
           </a:p>
@@ -13558,7 +13960,7 @@
                 <a:ea typeface="Trebuchet MS" pitchFamily="34" charset="-122"/>
                 <a:cs typeface="Trebuchet MS" pitchFamily="34" charset="-120"/>
               </a:rPr>
-              <a:t>ting</a:t>
+              <a:t>ing</a:t>
             </a:r>
             <a:endParaRPr lang="en-US" sz="1400" dirty="0"/>
           </a:p>
@@ -13891,7 +14293,7 @@
                 <a:ea typeface="Calibri" pitchFamily="34" charset="-122"/>
                 <a:cs typeface="Calibri" pitchFamily="34" charset="-120"/>
               </a:rPr>
-              <a:t>Root 'paint' — to colour or coat surface</a:t>
+              <a:t>Root 'paint' — to colour a surface; a coloured liquid</a:t>
             </a:r>
             <a:endParaRPr lang="en-US" sz="1600" dirty="0"/>
           </a:p>
@@ -14247,7 +14649,7 @@
                 <a:ea typeface="Calibri" pitchFamily="34" charset="-122"/>
                 <a:cs typeface="Calibri" pitchFamily="34" charset="-120"/>
               </a:rPr>
-              <a:t>Word Labs  •  wordlabs.app  •  Root: 'paint' = to colour or coat surface</a:t>
+              <a:t>Word Labs  •  wordlabs.app  •  Root: 'paint' = to colour a surface; a coloured liquid</a:t>
             </a:r>
             <a:endParaRPr lang="en-US" sz="800" dirty="0"/>
           </a:p>
@@ -14564,7 +14966,7 @@
                 <a:ea typeface="Calibri" pitchFamily="34" charset="-122"/>
                 <a:cs typeface="Calibri" pitchFamily="34" charset="-120"/>
               </a:rPr>
-              <a:t>to colour a surface</a:t>
+              <a:t>to colour a surface; a coloured liquid</a:t>
             </a:r>
             <a:endParaRPr lang="en-US" sz="850" dirty="0"/>
           </a:p>
@@ -14676,7 +15078,7 @@
                 <a:ea typeface="Calibri" pitchFamily="34" charset="-122"/>
                 <a:cs typeface="Calibri" pitchFamily="34" charset="-120"/>
               </a:rPr>
-              <a:t>action or process</a:t>
+              <a:t>happening now</a:t>
             </a:r>
             <a:endParaRPr lang="en-US" sz="850" dirty="0"/>
           </a:p>
@@ -14835,7 +15237,7 @@
                 <a:ea typeface="Trebuchet MS" pitchFamily="34" charset="-122"/>
                 <a:cs typeface="Trebuchet MS" pitchFamily="34" charset="-120"/>
               </a:rPr>
-              <a:t>pain</a:t>
+              <a:t>paint</a:t>
             </a:r>
             <a:endParaRPr lang="en-US" sz="1400" dirty="0"/>
           </a:p>
@@ -14940,7 +15342,7 @@
                 <a:ea typeface="Trebuchet MS" pitchFamily="34" charset="-122"/>
                 <a:cs typeface="Trebuchet MS" pitchFamily="34" charset="-120"/>
               </a:rPr>
-              <a:t>ting</a:t>
+              <a:t>ing</a:t>
             </a:r>
             <a:endParaRPr lang="en-US" sz="1400" dirty="0"/>
           </a:p>
@@ -15047,7 +15449,7 @@
         </p:nvSpPr>
         <p:spPr>
           <a:xfrm>
-            <a:off x="2427732" y="4169664"/>
+            <a:off x="2254649" y="4169664"/>
             <a:ext cx="685800" cy="475488"/>
           </a:xfrm>
           <a:prstGeom prst="rect">
@@ -15074,7 +15476,7 @@
         </p:nvSpPr>
         <p:spPr>
           <a:xfrm>
-            <a:off x="2427732" y="4169664"/>
+            <a:off x="2254649" y="4169664"/>
             <a:ext cx="685800" cy="475488"/>
           </a:xfrm>
           <a:prstGeom prst="rect">
@@ -15113,7 +15515,7 @@
         </p:nvSpPr>
         <p:spPr>
           <a:xfrm>
-            <a:off x="3639312" y="4169664"/>
+            <a:off x="3293146" y="4169664"/>
             <a:ext cx="685800" cy="475488"/>
           </a:xfrm>
           <a:prstGeom prst="rect">
@@ -15140,7 +15542,7 @@
         </p:nvSpPr>
         <p:spPr>
           <a:xfrm>
-            <a:off x="3639312" y="4169664"/>
+            <a:off x="3293146" y="4169664"/>
             <a:ext cx="685800" cy="475488"/>
           </a:xfrm>
           <a:prstGeom prst="rect">
@@ -15179,7 +15581,7 @@
         </p:nvSpPr>
         <p:spPr>
           <a:xfrm>
-            <a:off x="4850892" y="4169664"/>
+            <a:off x="4331643" y="4169664"/>
             <a:ext cx="685800" cy="475488"/>
           </a:xfrm>
           <a:prstGeom prst="rect">
@@ -15206,7 +15608,7 @@
         </p:nvSpPr>
         <p:spPr>
           <a:xfrm>
-            <a:off x="4850892" y="4169664"/>
+            <a:off x="4331643" y="4169664"/>
             <a:ext cx="685800" cy="475488"/>
           </a:xfrm>
           <a:prstGeom prst="rect">
@@ -15245,7 +15647,7 @@
         </p:nvSpPr>
         <p:spPr>
           <a:xfrm>
-            <a:off x="6062472" y="4169664"/>
+            <a:off x="5370141" y="4169664"/>
             <a:ext cx="685800" cy="475488"/>
           </a:xfrm>
           <a:prstGeom prst="rect">
@@ -15272,7 +15674,7 @@
         </p:nvSpPr>
         <p:spPr>
           <a:xfrm>
-            <a:off x="6062472" y="4169664"/>
+            <a:off x="5370141" y="4169664"/>
             <a:ext cx="685800" cy="475488"/>
           </a:xfrm>
           <a:prstGeom prst="rect">
@@ -15311,7 +15713,7 @@
         </p:nvSpPr>
         <p:spPr>
           <a:xfrm>
-            <a:off x="7274052" y="4169664"/>
+            <a:off x="6408638" y="4169664"/>
             <a:ext cx="685800" cy="475488"/>
           </a:xfrm>
           <a:prstGeom prst="rect">
@@ -15338,7 +15740,7 @@
         </p:nvSpPr>
         <p:spPr>
           <a:xfrm>
-            <a:off x="7274052" y="4169664"/>
+            <a:off x="6408638" y="4169664"/>
             <a:ext cx="685800" cy="475488"/>
           </a:xfrm>
           <a:prstGeom prst="rect">
@@ -15363,7 +15765,73 @@
                 <a:ea typeface="Trebuchet MS" pitchFamily="34" charset="-122"/>
                 <a:cs typeface="Trebuchet MS" pitchFamily="34" charset="-120"/>
               </a:rPr>
-              <a:t>ing</a:t>
+              <a:t>i</a:t>
+            </a:r>
+            <a:endParaRPr lang="en-US" sz="900" dirty="0"/>
+          </a:p>
+        </p:txBody>
+      </p:sp>
+      <p:sp>
+        <p:nvSpPr>
+          <p:cNvPr id="43" name="Shape 41"/>
+          <p:cNvSpPr/>
+          <p:nvPr/>
+        </p:nvSpPr>
+        <p:spPr>
+          <a:xfrm>
+            <a:off x="7447135" y="4169664"/>
+            <a:ext cx="685800" cy="475488"/>
+          </a:xfrm>
+          <a:prstGeom prst="rect">
+            <a:avLst>
+              <a:gd name="adj" fmla="val 7692"/>
+            </a:avLst>
+          </a:prstGeom>
+          <a:solidFill>
+            <a:srgbClr val="FFFFFF"/>
+          </a:solidFill>
+          <a:ln w="12700">
+            <a:solidFill>
+              <a:srgbClr val="DB2777"/>
+            </a:solidFill>
+            <a:prstDash val="solid"/>
+          </a:ln>
+        </p:spPr>
+      </p:sp>
+      <p:sp>
+        <p:nvSpPr>
+          <p:cNvPr id="44" name="Text 42"/>
+          <p:cNvSpPr/>
+          <p:nvPr/>
+        </p:nvSpPr>
+        <p:spPr>
+          <a:xfrm>
+            <a:off x="7447135" y="4169664"/>
+            <a:ext cx="685800" cy="475488"/>
+          </a:xfrm>
+          <a:prstGeom prst="rect">
+            <a:avLst/>
+          </a:prstGeom>
+          <a:noFill/>
+          <a:ln/>
+        </p:spPr>
+        <p:txBody>
+          <a:bodyPr wrap="square" lIns="0" tIns="0" rIns="0" bIns="0" rtlCol="0" anchor="ctr"/>
+          <a:lstStyle/>
+          <a:p>
+            <a:pPr algn="ctr" indent="0" marL="0">
+              <a:buNone/>
+            </a:pPr>
+            <a:r>
+              <a:rPr lang="en-US" sz="900" b="1" dirty="0">
+                <a:solidFill>
+                  <a:srgbClr val="9D174D"/>
+                </a:solidFill>
+                <a:latin typeface="Trebuchet MS" pitchFamily="34" charset="0"/>
+                <a:ea typeface="Trebuchet MS" pitchFamily="34" charset="-122"/>
+                <a:cs typeface="Trebuchet MS" pitchFamily="34" charset="-120"/>
+              </a:rPr>
+              <a:t>ng</a:t>
             </a:r>
             <a:endParaRPr lang="en-US" sz="900" dirty="0"/>
           </a:p>
@@ -15937,7 +16405,7 @@
                 <a:ea typeface="Calibri" pitchFamily="34" charset="-122"/>
                 <a:cs typeface="Calibri" pitchFamily="34" charset="-120"/>
               </a:rPr>
-              <a:t>Word Labs  •  wordlabs.app  •  Root: 'paint' = to colour or coat surface</a:t>
+              <a:t>Word Labs  •  wordlabs.app  •  Root: 'paint' = to colour a surface; a coloured liquid</a:t>
             </a:r>
             <a:endParaRPr lang="en-US" sz="800" dirty="0"/>
           </a:p>
@@ -16271,7 +16739,7 @@
                 <a:ea typeface="Trebuchet MS" pitchFamily="34" charset="-122"/>
                 <a:cs typeface="Trebuchet MS" pitchFamily="34" charset="-120"/>
               </a:rPr>
-              <a:t>1</a:t>
+              <a:t>0</a:t>
             </a:r>
             <a:pPr algn="ctr" indent="0" marL="0">
               <a:buNone/>
@@ -16577,7 +17045,7 @@
                 <a:ea typeface="Calibri" pitchFamily="34" charset="-122"/>
                 <a:cs typeface="Calibri" pitchFamily="34" charset="-120"/>
               </a:rPr>
-              <a:t>Word Labs  •  wordlabs.app  •  Root: 'paint' = to colour or coat surface</a:t>
+              <a:t>Word Labs  •  wordlabs.app  •  Root: 'paint' = to colour a surface; a coloured liquid</a:t>
             </a:r>
             <a:endParaRPr lang="en-US" sz="800" dirty="0"/>
           </a:p>
@@ -16689,7 +17157,7 @@
                 <a:ea typeface="Calibri" pitchFamily="34" charset="-122"/>
                 <a:cs typeface="Calibri" pitchFamily="34" charset="-120"/>
               </a:rPr>
-              <a:t>She decided to </a:t>
+              <a:t>The museum displayed </a:t>
             </a:r>
             <a:pPr algn="l" indent="0" marL="0">
               <a:buNone/>
@@ -16706,7 +17174,7 @@
                 <a:ea typeface="Calibri" pitchFamily="34" charset="-122"/>
                 <a:cs typeface="Calibri" pitchFamily="34" charset="-120"/>
               </a:rPr>
-              <a:t>repaint</a:t>
+              <a:t>paintings</a:t>
             </a:r>
             <a:pPr algn="l" indent="0" marL="0">
               <a:buNone/>
@@ -16720,7 +17188,7 @@
                 <a:ea typeface="Calibri" pitchFamily="34" charset="-122"/>
                 <a:cs typeface="Calibri" pitchFamily="34" charset="-120"/>
               </a:rPr>
-              <a:t> the shed, but the </a:t>
+              <a:t> from famous artists around the world. The old gate was </a:t>
             </a:r>
             <a:pPr algn="l" indent="0" marL="0">
               <a:buNone/>
@@ -16737,7 +17205,7 @@
                 <a:ea typeface="Calibri" pitchFamily="34" charset="-122"/>
                 <a:cs typeface="Calibri" pitchFamily="34" charset="-120"/>
               </a:rPr>
-              <a:t>paintwork</a:t>
+              <a:t>repainted</a:t>
             </a:r>
             <a:pPr algn="l" indent="0" marL="0">
               <a:buNone/>
@@ -16751,7 +17219,7 @@
                 <a:ea typeface="Calibri" pitchFamily="34" charset="-122"/>
                 <a:cs typeface="Calibri" pitchFamily="34" charset="-120"/>
               </a:rPr>
-              <a:t> was already peeling and the </a:t>
+              <a:t> a shiny green. The workers spent all week </a:t>
             </a:r>
             <a:pPr algn="l" indent="0" marL="0">
               <a:buNone/>
@@ -16768,7 +17236,7 @@
                 <a:ea typeface="Calibri" pitchFamily="34" charset="-122"/>
                 <a:cs typeface="Calibri" pitchFamily="34" charset="-120"/>
               </a:rPr>
-              <a:t>unpainted</a:t>
+              <a:t>repainting</a:t>
             </a:r>
             <a:pPr algn="l" indent="0" marL="0">
               <a:buNone/>
@@ -16782,7 +17250,7 @@
                 <a:ea typeface="Calibri" pitchFamily="34" charset="-122"/>
                 <a:cs typeface="Calibri" pitchFamily="34" charset="-120"/>
               </a:rPr>
-              <a:t> patches looked terrible.</a:t>
+              <a:t> the school hall.</a:t>
             </a:r>
             <a:endParaRPr lang="en-US" sz="1800" dirty="0"/>
           </a:p>
@@ -16937,7 +17405,7 @@
                 <a:ea typeface="Trebuchet MS" pitchFamily="34" charset="-122"/>
                 <a:cs typeface="Trebuchet MS" pitchFamily="34" charset="-120"/>
               </a:rPr>
-              <a:t>repaint</a:t>
+              <a:t>paintings</a:t>
             </a:r>
             <a:endParaRPr lang="en-US" sz="1400" dirty="0"/>
           </a:p>
@@ -17065,7 +17533,7 @@
                 <a:ea typeface="Trebuchet MS" pitchFamily="34" charset="-122"/>
                 <a:cs typeface="Trebuchet MS" pitchFamily="34" charset="-120"/>
               </a:rPr>
-              <a:t>paintwork</a:t>
+              <a:t>repainted</a:t>
             </a:r>
             <a:endParaRPr lang="en-US" sz="1400" dirty="0"/>
           </a:p>
@@ -17193,7 +17661,7 @@
                 <a:ea typeface="Trebuchet MS" pitchFamily="34" charset="-122"/>
                 <a:cs typeface="Trebuchet MS" pitchFamily="34" charset="-120"/>
               </a:rPr>
-              <a:t>unpainted</a:t>
+              <a:t>repainting</a:t>
             </a:r>
             <a:endParaRPr lang="en-US" sz="1400" dirty="0"/>
           </a:p>
@@ -17524,7 +17992,7 @@
                 <a:ea typeface="Calibri" pitchFamily="34" charset="-122"/>
                 <a:cs typeface="Calibri" pitchFamily="34" charset="-120"/>
               </a:rPr>
-              <a:t>Word Labs  •  wordlabs.app  •  Root: 'paint' = to colour or coat surface</a:t>
+              <a:t>Word Labs  •  wordlabs.app  •  Root: 'paint' = to colour a surface; a coloured liquid</a:t>
             </a:r>
             <a:endParaRPr lang="en-US" sz="800" dirty="0"/>
           </a:p>
@@ -17663,7 +18131,7 @@
                 <a:ea typeface="Trebuchet MS" pitchFamily="34" charset="-122"/>
                 <a:cs typeface="Trebuchet MS" pitchFamily="34" charset="-120"/>
               </a:rPr>
-              <a:t>repaint</a:t>
+              <a:t>paintings</a:t>
             </a:r>
             <a:endParaRPr lang="en-US" sz="2800" dirty="0"/>
           </a:p>
@@ -18351,7 +18819,7 @@
                 <a:ea typeface="Calibri" pitchFamily="34" charset="-122"/>
                 <a:cs typeface="Calibri" pitchFamily="34" charset="-120"/>
               </a:rPr>
-              <a:t>Word Labs  •  wordlabs.app  •  Root: 'paint' = to colour or coat surface</a:t>
+              <a:t>Word Labs  •  wordlabs.app  •  Root: 'paint' = to colour a surface; a coloured liquid</a:t>
             </a:r>
             <a:endParaRPr lang="en-US" sz="800" dirty="0"/>
           </a:p>
@@ -18490,7 +18958,7 @@
                 <a:ea typeface="Trebuchet MS" pitchFamily="34" charset="-122"/>
                 <a:cs typeface="Trebuchet MS" pitchFamily="34" charset="-120"/>
               </a:rPr>
-              <a:t>repaint</a:t>
+              <a:t>paintings</a:t>
             </a:r>
             <a:endParaRPr lang="en-US" sz="2800" dirty="0"/>
           </a:p>
@@ -18570,7 +19038,7 @@
         </p:nvSpPr>
         <p:spPr>
           <a:xfrm>
-            <a:off x="2938272" y="2258568"/>
+            <a:off x="2221992" y="2258568"/>
             <a:ext cx="1828800" cy="292608"/>
           </a:xfrm>
           <a:prstGeom prst="rect">
@@ -18579,11 +19047,11 @@
             </a:avLst>
           </a:prstGeom>
           <a:solidFill>
-            <a:srgbClr val="DDD6FE"/>
+            <a:srgbClr val="CCFBF1"/>
           </a:solidFill>
           <a:ln w="19050">
             <a:solidFill>
-              <a:srgbClr val="7C3AED"/>
+              <a:srgbClr val="0D9488"/>
             </a:solidFill>
             <a:prstDash val="solid"/>
           </a:ln>
@@ -18604,7 +19072,7 @@
         </p:nvSpPr>
         <p:spPr>
           <a:xfrm>
-            <a:off x="2938272" y="2258568"/>
+            <a:off x="2221992" y="2258568"/>
             <a:ext cx="1828800" cy="292608"/>
           </a:xfrm>
           <a:prstGeom prst="rect">
@@ -18623,13 +19091,13 @@
             <a:r>
               <a:rPr lang="en-US" sz="1300" b="1" dirty="0">
                 <a:solidFill>
-                  <a:srgbClr val="4C1D95"/>
+                  <a:srgbClr val="0F766E"/>
                 </a:solidFill>
                 <a:latin typeface="Trebuchet MS" pitchFamily="34" charset="0"/>
                 <a:ea typeface="Trebuchet MS" pitchFamily="34" charset="-122"/>
                 <a:cs typeface="Trebuchet MS" pitchFamily="34" charset="-120"/>
               </a:rPr>
-              <a:t>re</a:t>
+              <a:t>paint</a:t>
             </a:r>
             <a:endParaRPr lang="en-US" sz="1300" dirty="0"/>
           </a:p>
@@ -18643,7 +19111,7 @@
         </p:nvSpPr>
         <p:spPr>
           <a:xfrm>
-            <a:off x="2938272" y="2569464"/>
+            <a:off x="2221992" y="2569464"/>
             <a:ext cx="1828800" cy="201168"/>
           </a:xfrm>
           <a:prstGeom prst="rect">
@@ -18668,7 +19136,7 @@
                 <a:ea typeface="Calibri" pitchFamily="34" charset="-122"/>
                 <a:cs typeface="Calibri" pitchFamily="34" charset="-120"/>
               </a:rPr>
-              <a:t>again</a:t>
+              <a:t>to colour a surface; a coloured liquid</a:t>
             </a:r>
             <a:endParaRPr lang="en-US" sz="850" dirty="0"/>
           </a:p>
@@ -18682,7 +19150,7 @@
         </p:nvSpPr>
         <p:spPr>
           <a:xfrm>
-            <a:off x="5803392" y="2258568"/>
+            <a:off x="4370832" y="2258568"/>
             <a:ext cx="1828800" cy="292608"/>
           </a:xfrm>
           <a:prstGeom prst="rect">
@@ -18691,11 +19159,11 @@
             </a:avLst>
           </a:prstGeom>
           <a:solidFill>
-            <a:srgbClr val="CCFBF1"/>
+            <a:srgbClr val="FCE7F3"/>
           </a:solidFill>
           <a:ln w="19050">
             <a:solidFill>
-              <a:srgbClr val="0D9488"/>
+              <a:srgbClr val="DB2777"/>
             </a:solidFill>
             <a:prstDash val="solid"/>
           </a:ln>
@@ -18716,7 +19184,7 @@
         </p:nvSpPr>
         <p:spPr>
           <a:xfrm>
-            <a:off x="5803392" y="2258568"/>
+            <a:off x="4370832" y="2258568"/>
             <a:ext cx="1828800" cy="292608"/>
           </a:xfrm>
           <a:prstGeom prst="rect">
@@ -18735,13 +19203,13 @@
             <a:r>
               <a:rPr lang="en-US" sz="1300" b="1" dirty="0">
                 <a:solidFill>
-                  <a:srgbClr val="0F766E"/>
+                  <a:srgbClr val="9D174D"/>
                 </a:solidFill>
                 <a:latin typeface="Trebuchet MS" pitchFamily="34" charset="0"/>
                 <a:ea typeface="Trebuchet MS" pitchFamily="34" charset="-122"/>
                 <a:cs typeface="Trebuchet MS" pitchFamily="34" charset="-120"/>
               </a:rPr>
-              <a:t>paint</a:t>
+              <a:t>ing</a:t>
             </a:r>
             <a:endParaRPr lang="en-US" sz="1300" dirty="0"/>
           </a:p>
@@ -18755,7 +19223,7 @@
         </p:nvSpPr>
         <p:spPr>
           <a:xfrm>
-            <a:off x="5803392" y="2569464"/>
+            <a:off x="4370832" y="2569464"/>
             <a:ext cx="1828800" cy="201168"/>
           </a:xfrm>
           <a:prstGeom prst="rect">
@@ -18780,7 +19248,7 @@
                 <a:ea typeface="Calibri" pitchFamily="34" charset="-122"/>
                 <a:cs typeface="Calibri" pitchFamily="34" charset="-120"/>
               </a:rPr>
-              <a:t>to colour a surface</a:t>
+              <a:t>happening now</a:t>
             </a:r>
             <a:endParaRPr lang="en-US" sz="850" dirty="0"/>
           </a:p>
@@ -18789,6 +19257,118 @@
       <p:sp>
         <p:nvSpPr>
           <p:cNvPr id="22" name="Shape 20"/>
+          <p:cNvSpPr/>
+          <p:nvPr/>
+        </p:nvSpPr>
+        <p:spPr>
+          <a:xfrm>
+            <a:off x="6519672" y="2258568"/>
+            <a:ext cx="1828800" cy="292608"/>
+          </a:xfrm>
+          <a:prstGeom prst="rect">
+            <a:avLst>
+              <a:gd name="adj" fmla="val 25000"/>
+            </a:avLst>
+          </a:prstGeom>
+          <a:solidFill>
+            <a:srgbClr val="FCE7F3"/>
+          </a:solidFill>
+          <a:ln w="19050">
+            <a:solidFill>
+              <a:srgbClr val="DB2777"/>
+            </a:solidFill>
+            <a:prstDash val="solid"/>
+          </a:ln>
+          <a:effectLst>
+            <a:outerShdw sx="100000" sy="100000" kx="0" ky="0" algn="bl" rotWithShape="0" blurRad="101600" dist="38100" dir="8100000">
+              <a:srgbClr val="000000">
+                <a:alpha val="12000"/>
+              </a:srgbClr>
+            </a:outerShdw>
+          </a:effectLst>
+        </p:spPr>
+      </p:sp>
+      <p:sp>
+        <p:nvSpPr>
+          <p:cNvPr id="23" name="Text 21"/>
+          <p:cNvSpPr/>
+          <p:nvPr/>
+        </p:nvSpPr>
+        <p:spPr>
+          <a:xfrm>
+            <a:off x="6519672" y="2258568"/>
+            <a:ext cx="1828800" cy="292608"/>
+          </a:xfrm>
+          <a:prstGeom prst="rect">
+            <a:avLst/>
+          </a:prstGeom>
+          <a:noFill/>
+          <a:ln/>
+        </p:spPr>
+        <p:txBody>
+          <a:bodyPr wrap="square" lIns="0" tIns="0" rIns="0" bIns="0" rtlCol="0" anchor="ctr"/>
+          <a:lstStyle/>
+          <a:p>
+            <a:pPr algn="ctr" indent="0" marL="0">
+              <a:buNone/>
+            </a:pPr>
+            <a:r>
+              <a:rPr lang="en-US" sz="1300" b="1" dirty="0">
+                <a:solidFill>
+                  <a:srgbClr val="9D174D"/>
+                </a:solidFill>
+                <a:latin typeface="Trebuchet MS" pitchFamily="34" charset="0"/>
+                <a:ea typeface="Trebuchet MS" pitchFamily="34" charset="-122"/>
+                <a:cs typeface="Trebuchet MS" pitchFamily="34" charset="-120"/>
+              </a:rPr>
+              <a:t>s</a:t>
+            </a:r>
+            <a:endParaRPr lang="en-US" sz="1300" dirty="0"/>
+          </a:p>
+        </p:txBody>
+      </p:sp>
+      <p:sp>
+        <p:nvSpPr>
+          <p:cNvPr id="24" name="Text 22"/>
+          <p:cNvSpPr/>
+          <p:nvPr/>
+        </p:nvSpPr>
+        <p:spPr>
+          <a:xfrm>
+            <a:off x="6519672" y="2569464"/>
+            <a:ext cx="1828800" cy="201168"/>
+          </a:xfrm>
+          <a:prstGeom prst="rect">
+            <a:avLst/>
+          </a:prstGeom>
+          <a:noFill/>
+          <a:ln/>
+        </p:spPr>
+        <p:txBody>
+          <a:bodyPr wrap="square" lIns="0" tIns="0" rIns="0" bIns="0" rtlCol="0" anchor="t"/>
+          <a:lstStyle/>
+          <a:p>
+            <a:pPr algn="ctr" indent="0" marL="0">
+              <a:buNone/>
+            </a:pPr>
+            <a:r>
+              <a:rPr lang="en-US" sz="850" dirty="0">
+                <a:solidFill>
+                  <a:srgbClr val="475569"/>
+                </a:solidFill>
+                <a:latin typeface="Calibri" pitchFamily="34" charset="0"/>
+                <a:ea typeface="Calibri" pitchFamily="34" charset="-122"/>
+                <a:cs typeface="Calibri" pitchFamily="34" charset="-120"/>
+              </a:rPr>
+              <a:t>plural or present tense</a:t>
+            </a:r>
+            <a:endParaRPr lang="en-US" sz="850" dirty="0"/>
+          </a:p>
+        </p:txBody>
+      </p:sp>
+      <p:sp>
+        <p:nvSpPr>
+          <p:cNvPr id="25" name="Shape 23"/>
           <p:cNvSpPr/>
           <p:nvPr/>
         </p:nvSpPr>
@@ -18815,7 +19395,7 @@
       </p:sp>
       <p:sp>
         <p:nvSpPr>
-          <p:cNvPr id="23" name="Text 21"/>
+          <p:cNvPr id="26" name="Text 24"/>
           <p:cNvSpPr/>
           <p:nvPr/>
         </p:nvSpPr>
@@ -18854,7 +19434,7 @@
       </p:sp>
       <p:sp>
         <p:nvSpPr>
-          <p:cNvPr id="24" name="Shape 22"/>
+          <p:cNvPr id="27" name="Shape 25"/>
           <p:cNvSpPr/>
           <p:nvPr/>
         </p:nvSpPr>
@@ -18881,7 +19461,7 @@
       </p:sp>
       <p:sp>
         <p:nvSpPr>
-          <p:cNvPr id="25" name="Text 23"/>
+          <p:cNvPr id="28" name="Text 26"/>
           <p:cNvSpPr/>
           <p:nvPr/>
         </p:nvSpPr>
@@ -18920,7 +19500,7 @@
       </p:sp>
       <p:sp>
         <p:nvSpPr>
-          <p:cNvPr id="26" name="Shape 24"/>
+          <p:cNvPr id="29" name="Shape 27"/>
           <p:cNvSpPr/>
           <p:nvPr/>
         </p:nvSpPr>
@@ -18947,7 +19527,7 @@
       </p:sp>
       <p:sp>
         <p:nvSpPr>
-          <p:cNvPr id="27" name="Text 25"/>
+          <p:cNvPr id="30" name="Text 28"/>
           <p:cNvSpPr/>
           <p:nvPr/>
         </p:nvSpPr>
@@ -18986,7 +19566,7 @@
       </p:sp>
       <p:sp>
         <p:nvSpPr>
-          <p:cNvPr id="28" name="Shape 26"/>
+          <p:cNvPr id="31" name="Shape 29"/>
           <p:cNvSpPr/>
           <p:nvPr/>
         </p:nvSpPr>
@@ -19013,7 +19593,7 @@
       </p:sp>
       <p:sp>
         <p:nvSpPr>
-          <p:cNvPr id="29" name="Text 27"/>
+          <p:cNvPr id="32" name="Text 30"/>
           <p:cNvSpPr/>
           <p:nvPr/>
         </p:nvSpPr>
@@ -19336,7 +19916,7 @@
                 <a:ea typeface="Calibri" pitchFamily="34" charset="-122"/>
                 <a:cs typeface="Calibri" pitchFamily="34" charset="-120"/>
               </a:rPr>
-              <a:t>Word Labs  •  wordlabs.app  •  Root: 'paint' = to colour or coat surface</a:t>
+              <a:t>Word Labs  •  wordlabs.app  •  Root: 'paint' = to colour a surface; a coloured liquid</a:t>
             </a:r>
             <a:endParaRPr lang="en-US" sz="800" dirty="0"/>
           </a:p>
@@ -19475,7 +20055,7 @@
                 <a:ea typeface="Trebuchet MS" pitchFamily="34" charset="-122"/>
                 <a:cs typeface="Trebuchet MS" pitchFamily="34" charset="-120"/>
               </a:rPr>
-              <a:t>repaint</a:t>
+              <a:t>paintings</a:t>
             </a:r>
             <a:endParaRPr lang="en-US" sz="2800" dirty="0"/>
           </a:p>
@@ -19555,7 +20135,7 @@
         </p:nvSpPr>
         <p:spPr>
           <a:xfrm>
-            <a:off x="2938272" y="2258568"/>
+            <a:off x="2221992" y="2258568"/>
             <a:ext cx="1828800" cy="292608"/>
           </a:xfrm>
           <a:prstGeom prst="rect">
@@ -19564,11 +20144,11 @@
             </a:avLst>
           </a:prstGeom>
           <a:solidFill>
-            <a:srgbClr val="DDD6FE"/>
+            <a:srgbClr val="CCFBF1"/>
           </a:solidFill>
           <a:ln w="19050">
             <a:solidFill>
-              <a:srgbClr val="7C3AED"/>
+              <a:srgbClr val="0D9488"/>
             </a:solidFill>
             <a:prstDash val="solid"/>
           </a:ln>
@@ -19589,7 +20169,7 @@
         </p:nvSpPr>
         <p:spPr>
           <a:xfrm>
-            <a:off x="2938272" y="2258568"/>
+            <a:off x="2221992" y="2258568"/>
             <a:ext cx="1828800" cy="292608"/>
           </a:xfrm>
           <a:prstGeom prst="rect">
@@ -19608,13 +20188,13 @@
             <a:r>
               <a:rPr lang="en-US" sz="1300" b="1" dirty="0">
                 <a:solidFill>
-                  <a:srgbClr val="4C1D95"/>
+                  <a:srgbClr val="0F766E"/>
                 </a:solidFill>
                 <a:latin typeface="Trebuchet MS" pitchFamily="34" charset="0"/>
                 <a:ea typeface="Trebuchet MS" pitchFamily="34" charset="-122"/>
                 <a:cs typeface="Trebuchet MS" pitchFamily="34" charset="-120"/>
               </a:rPr>
-              <a:t>re</a:t>
+              <a:t>paint</a:t>
             </a:r>
             <a:endParaRPr lang="en-US" sz="1300" dirty="0"/>
           </a:p>
@@ -19628,7 +20208,7 @@
         </p:nvSpPr>
         <p:spPr>
           <a:xfrm>
-            <a:off x="2938272" y="2569464"/>
+            <a:off x="2221992" y="2569464"/>
             <a:ext cx="1828800" cy="201168"/>
           </a:xfrm>
           <a:prstGeom prst="rect">
@@ -19653,7 +20233,7 @@
                 <a:ea typeface="Calibri" pitchFamily="34" charset="-122"/>
                 <a:cs typeface="Calibri" pitchFamily="34" charset="-120"/>
               </a:rPr>
-              <a:t>again</a:t>
+              <a:t>to colour a surface; a coloured liquid</a:t>
             </a:r>
             <a:endParaRPr lang="en-US" sz="850" dirty="0"/>
           </a:p>
@@ -19667,7 +20247,7 @@
         </p:nvSpPr>
         <p:spPr>
           <a:xfrm>
-            <a:off x="5803392" y="2258568"/>
+            <a:off x="4370832" y="2258568"/>
             <a:ext cx="1828800" cy="292608"/>
           </a:xfrm>
           <a:prstGeom prst="rect">
@@ -19676,11 +20256,11 @@
             </a:avLst>
           </a:prstGeom>
           <a:solidFill>
-            <a:srgbClr val="CCFBF1"/>
+            <a:srgbClr val="FCE7F3"/>
           </a:solidFill>
           <a:ln w="19050">
             <a:solidFill>
-              <a:srgbClr val="0D9488"/>
+              <a:srgbClr val="DB2777"/>
             </a:solidFill>
             <a:prstDash val="solid"/>
           </a:ln>
@@ -19701,7 +20281,7 @@
         </p:nvSpPr>
         <p:spPr>
           <a:xfrm>
-            <a:off x="5803392" y="2258568"/>
+            <a:off x="4370832" y="2258568"/>
             <a:ext cx="1828800" cy="292608"/>
           </a:xfrm>
           <a:prstGeom prst="rect">
@@ -19720,13 +20300,13 @@
             <a:r>
               <a:rPr lang="en-US" sz="1300" b="1" dirty="0">
                 <a:solidFill>
-                  <a:srgbClr val="0F766E"/>
+                  <a:srgbClr val="9D174D"/>
                 </a:solidFill>
                 <a:latin typeface="Trebuchet MS" pitchFamily="34" charset="0"/>
                 <a:ea typeface="Trebuchet MS" pitchFamily="34" charset="-122"/>
                 <a:cs typeface="Trebuchet MS" pitchFamily="34" charset="-120"/>
               </a:rPr>
-              <a:t>paint</a:t>
+              <a:t>ing</a:t>
             </a:r>
             <a:endParaRPr lang="en-US" sz="1300" dirty="0"/>
           </a:p>
@@ -19740,7 +20320,7 @@
         </p:nvSpPr>
         <p:spPr>
           <a:xfrm>
-            <a:off x="5803392" y="2569464"/>
+            <a:off x="4370832" y="2569464"/>
             <a:ext cx="1828800" cy="201168"/>
           </a:xfrm>
           <a:prstGeom prst="rect">
@@ -19765,7 +20345,7 @@
                 <a:ea typeface="Calibri" pitchFamily="34" charset="-122"/>
                 <a:cs typeface="Calibri" pitchFamily="34" charset="-120"/>
               </a:rPr>
-              <a:t>to colour a surface</a:t>
+              <a:t>happening now</a:t>
             </a:r>
             <a:endParaRPr lang="en-US" sz="850" dirty="0"/>
           </a:p>
@@ -19774,6 +20354,118 @@
       <p:sp>
         <p:nvSpPr>
           <p:cNvPr id="22" name="Shape 20"/>
+          <p:cNvSpPr/>
+          <p:nvPr/>
+        </p:nvSpPr>
+        <p:spPr>
+          <a:xfrm>
+            <a:off x="6519672" y="2258568"/>
+            <a:ext cx="1828800" cy="292608"/>
+          </a:xfrm>
+          <a:prstGeom prst="rect">
+            <a:avLst>
+              <a:gd name="adj" fmla="val 25000"/>
+            </a:avLst>
+          </a:prstGeom>
+          <a:solidFill>
+            <a:srgbClr val="FCE7F3"/>
+          </a:solidFill>
+          <a:ln w="19050">
+            <a:solidFill>
+              <a:srgbClr val="DB2777"/>
+            </a:solidFill>
+            <a:prstDash val="solid"/>
+          </a:ln>
+          <a:effectLst>
+            <a:outerShdw sx="100000" sy="100000" kx="0" ky="0" algn="bl" rotWithShape="0" blurRad="101600" dist="38100" dir="8100000">
+              <a:srgbClr val="000000">
+                <a:alpha val="12000"/>
+              </a:srgbClr>
+            </a:outerShdw>
+          </a:effectLst>
+        </p:spPr>
+      </p:sp>
+      <p:sp>
+        <p:nvSpPr>
+          <p:cNvPr id="23" name="Text 21"/>
+          <p:cNvSpPr/>
+          <p:nvPr/>
+        </p:nvSpPr>
+        <p:spPr>
+          <a:xfrm>
+            <a:off x="6519672" y="2258568"/>
+            <a:ext cx="1828800" cy="292608"/>
+          </a:xfrm>
+          <a:prstGeom prst="rect">
+            <a:avLst/>
+          </a:prstGeom>
+          <a:noFill/>
+          <a:ln/>
+        </p:spPr>
+        <p:txBody>
+          <a:bodyPr wrap="square" lIns="0" tIns="0" rIns="0" bIns="0" rtlCol="0" anchor="ctr"/>
+          <a:lstStyle/>
+          <a:p>
+            <a:pPr algn="ctr" indent="0" marL="0">
+              <a:buNone/>
+            </a:pPr>
+            <a:r>
+              <a:rPr lang="en-US" sz="1300" b="1" dirty="0">
+                <a:solidFill>
+                  <a:srgbClr val="9D174D"/>
+                </a:solidFill>
+                <a:latin typeface="Trebuchet MS" pitchFamily="34" charset="0"/>
+                <a:ea typeface="Trebuchet MS" pitchFamily="34" charset="-122"/>
+                <a:cs typeface="Trebuchet MS" pitchFamily="34" charset="-120"/>
+              </a:rPr>
+              <a:t>s</a:t>
+            </a:r>
+            <a:endParaRPr lang="en-US" sz="1300" dirty="0"/>
+          </a:p>
+        </p:txBody>
+      </p:sp>
+      <p:sp>
+        <p:nvSpPr>
+          <p:cNvPr id="24" name="Text 22"/>
+          <p:cNvSpPr/>
+          <p:nvPr/>
+        </p:nvSpPr>
+        <p:spPr>
+          <a:xfrm>
+            <a:off x="6519672" y="2569464"/>
+            <a:ext cx="1828800" cy="201168"/>
+          </a:xfrm>
+          <a:prstGeom prst="rect">
+            <a:avLst/>
+          </a:prstGeom>
+          <a:noFill/>
+          <a:ln/>
+        </p:spPr>
+        <p:txBody>
+          <a:bodyPr wrap="square" lIns="0" tIns="0" rIns="0" bIns="0" rtlCol="0" anchor="t"/>
+          <a:lstStyle/>
+          <a:p>
+            <a:pPr algn="ctr" indent="0" marL="0">
+              <a:buNone/>
+            </a:pPr>
+            <a:r>
+              <a:rPr lang="en-US" sz="850" dirty="0">
+                <a:solidFill>
+                  <a:srgbClr val="475569"/>
+                </a:solidFill>
+                <a:latin typeface="Calibri" pitchFamily="34" charset="0"/>
+                <a:ea typeface="Calibri" pitchFamily="34" charset="-122"/>
+                <a:cs typeface="Calibri" pitchFamily="34" charset="-120"/>
+              </a:rPr>
+              <a:t>plural or present tense</a:t>
+            </a:r>
+            <a:endParaRPr lang="en-US" sz="850" dirty="0"/>
+          </a:p>
+        </p:txBody>
+      </p:sp>
+      <p:sp>
+        <p:nvSpPr>
+          <p:cNvPr id="25" name="Shape 23"/>
           <p:cNvSpPr/>
           <p:nvPr/>
         </p:nvSpPr>
@@ -19800,7 +20492,7 @@
       </p:sp>
       <p:sp>
         <p:nvSpPr>
-          <p:cNvPr id="23" name="Text 21"/>
+          <p:cNvPr id="26" name="Text 24"/>
           <p:cNvSpPr/>
           <p:nvPr/>
         </p:nvSpPr>
@@ -19839,7 +20531,7 @@
       </p:sp>
       <p:sp>
         <p:nvSpPr>
-          <p:cNvPr id="24" name="Shape 22"/>
+          <p:cNvPr id="27" name="Shape 25"/>
           <p:cNvSpPr/>
           <p:nvPr/>
         </p:nvSpPr>
@@ -19866,7 +20558,7 @@
       </p:sp>
       <p:sp>
         <p:nvSpPr>
-          <p:cNvPr id="25" name="Shape 23"/>
+          <p:cNvPr id="28" name="Shape 26"/>
           <p:cNvSpPr/>
           <p:nvPr/>
         </p:nvSpPr>
@@ -19893,7 +20585,7 @@
       </p:sp>
       <p:sp>
         <p:nvSpPr>
-          <p:cNvPr id="26" name="Text 24"/>
+          <p:cNvPr id="29" name="Text 27"/>
           <p:cNvSpPr/>
           <p:nvPr/>
         </p:nvSpPr>
@@ -19924,7 +20616,7 @@
                 <a:ea typeface="Trebuchet MS" pitchFamily="34" charset="-122"/>
                 <a:cs typeface="Trebuchet MS" pitchFamily="34" charset="-120"/>
               </a:rPr>
-              <a:t>re</a:t>
+              <a:t>paint</a:t>
             </a:r>
             <a:endParaRPr lang="en-US" sz="1400" dirty="0"/>
           </a:p>
@@ -19932,7 +20624,7 @@
       </p:sp>
       <p:sp>
         <p:nvSpPr>
-          <p:cNvPr id="27" name="Text 25"/>
+          <p:cNvPr id="30" name="Text 28"/>
           <p:cNvSpPr/>
           <p:nvPr/>
         </p:nvSpPr>
@@ -19971,7 +20663,7 @@
       </p:sp>
       <p:sp>
         <p:nvSpPr>
-          <p:cNvPr id="28" name="Shape 26"/>
+          <p:cNvPr id="31" name="Shape 29"/>
           <p:cNvSpPr/>
           <p:nvPr/>
         </p:nvSpPr>
@@ -19998,7 +20690,7 @@
       </p:sp>
       <p:sp>
         <p:nvSpPr>
-          <p:cNvPr id="29" name="Text 27"/>
+          <p:cNvPr id="32" name="Text 30"/>
           <p:cNvSpPr/>
           <p:nvPr/>
         </p:nvSpPr>
@@ -20029,7 +20721,7 @@
                 <a:ea typeface="Trebuchet MS" pitchFamily="34" charset="-122"/>
                 <a:cs typeface="Trebuchet MS" pitchFamily="34" charset="-120"/>
               </a:rPr>
-              <a:t>paint</a:t>
+              <a:t>ings</a:t>
             </a:r>
             <a:endParaRPr lang="en-US" sz="1400" dirty="0"/>
           </a:p>
@@ -20037,7 +20729,7 @@
       </p:sp>
       <p:sp>
         <p:nvSpPr>
-          <p:cNvPr id="30" name="Shape 28"/>
+          <p:cNvPr id="33" name="Shape 31"/>
           <p:cNvSpPr/>
           <p:nvPr/>
         </p:nvSpPr>
@@ -20064,7 +20756,7 @@
       </p:sp>
       <p:sp>
         <p:nvSpPr>
-          <p:cNvPr id="31" name="Text 29"/>
+          <p:cNvPr id="34" name="Text 32"/>
           <p:cNvSpPr/>
           <p:nvPr/>
         </p:nvSpPr>
@@ -20103,7 +20795,7 @@
       </p:sp>
       <p:sp>
         <p:nvSpPr>
-          <p:cNvPr id="32" name="Shape 30"/>
+          <p:cNvPr id="35" name="Shape 33"/>
           <p:cNvSpPr/>
           <p:nvPr/>
         </p:nvSpPr>
@@ -20130,7 +20822,7 @@
       </p:sp>
       <p:sp>
         <p:nvSpPr>
-          <p:cNvPr id="33" name="Text 31"/>
+          <p:cNvPr id="36" name="Text 34"/>
           <p:cNvSpPr/>
           <p:nvPr/>
         </p:nvSpPr>
@@ -20453,7 +21145,7 @@
                 <a:ea typeface="Calibri" pitchFamily="34" charset="-122"/>
                 <a:cs typeface="Calibri" pitchFamily="34" charset="-120"/>
               </a:rPr>
-              <a:t>Word Labs  •  wordlabs.app  •  Root: 'paint' = to colour or coat surface</a:t>
+              <a:t>Word Labs  •  wordlabs.app  •  Root: 'paint' = to colour a surface; a coloured liquid</a:t>
             </a:r>
             <a:endParaRPr lang="en-US" sz="800" dirty="0"/>
           </a:p>
@@ -20592,7 +21284,7 @@
                 <a:ea typeface="Trebuchet MS" pitchFamily="34" charset="-122"/>
                 <a:cs typeface="Trebuchet MS" pitchFamily="34" charset="-120"/>
               </a:rPr>
-              <a:t>repaint</a:t>
+              <a:t>paintings</a:t>
             </a:r>
             <a:endParaRPr lang="en-US" sz="2800" dirty="0"/>
           </a:p>
@@ -20672,7 +21364,7 @@
         </p:nvSpPr>
         <p:spPr>
           <a:xfrm>
-            <a:off x="2938272" y="2258568"/>
+            <a:off x="2221992" y="2258568"/>
             <a:ext cx="1828800" cy="292608"/>
           </a:xfrm>
           <a:prstGeom prst="rect">
@@ -20681,11 +21373,11 @@
             </a:avLst>
           </a:prstGeom>
           <a:solidFill>
-            <a:srgbClr val="DDD6FE"/>
+            <a:srgbClr val="CCFBF1"/>
           </a:solidFill>
           <a:ln w="19050">
             <a:solidFill>
-              <a:srgbClr val="7C3AED"/>
+              <a:srgbClr val="0D9488"/>
             </a:solidFill>
             <a:prstDash val="solid"/>
           </a:ln>
@@ -20706,7 +21398,7 @@
         </p:nvSpPr>
         <p:spPr>
           <a:xfrm>
-            <a:off x="2938272" y="2258568"/>
+            <a:off x="2221992" y="2258568"/>
             <a:ext cx="1828800" cy="292608"/>
           </a:xfrm>
           <a:prstGeom prst="rect">
@@ -20725,13 +21417,13 @@
             <a:r>
               <a:rPr lang="en-US" sz="1300" b="1" dirty="0">
                 <a:solidFill>
-                  <a:srgbClr val="4C1D95"/>
+                  <a:srgbClr val="0F766E"/>
                 </a:solidFill>
                 <a:latin typeface="Trebuchet MS" pitchFamily="34" charset="0"/>
                 <a:ea typeface="Trebuchet MS" pitchFamily="34" charset="-122"/>
                 <a:cs typeface="Trebuchet MS" pitchFamily="34" charset="-120"/>
               </a:rPr>
-              <a:t>re</a:t>
+              <a:t>paint</a:t>
             </a:r>
             <a:endParaRPr lang="en-US" sz="1300" dirty="0"/>
           </a:p>
@@ -20745,7 +21437,7 @@
         </p:nvSpPr>
         <p:spPr>
           <a:xfrm>
-            <a:off x="2938272" y="2569464"/>
+            <a:off x="2221992" y="2569464"/>
             <a:ext cx="1828800" cy="201168"/>
           </a:xfrm>
           <a:prstGeom prst="rect">
@@ -20770,7 +21462,7 @@
                 <a:ea typeface="Calibri" pitchFamily="34" charset="-122"/>
                 <a:cs typeface="Calibri" pitchFamily="34" charset="-120"/>
               </a:rPr>
-              <a:t>again</a:t>
+              <a:t>to colour a surface; a coloured liquid</a:t>
             </a:r>
             <a:endParaRPr lang="en-US" sz="850" dirty="0"/>
           </a:p>
@@ -20784,7 +21476,7 @@
         </p:nvSpPr>
         <p:spPr>
           <a:xfrm>
-            <a:off x="5803392" y="2258568"/>
+            <a:off x="4370832" y="2258568"/>
             <a:ext cx="1828800" cy="292608"/>
           </a:xfrm>
           <a:prstGeom prst="rect">
@@ -20793,11 +21485,11 @@
             </a:avLst>
           </a:prstGeom>
           <a:solidFill>
-            <a:srgbClr val="CCFBF1"/>
+            <a:srgbClr val="FCE7F3"/>
           </a:solidFill>
           <a:ln w="19050">
             <a:solidFill>
-              <a:srgbClr val="0D9488"/>
+              <a:srgbClr val="DB2777"/>
             </a:solidFill>
             <a:prstDash val="solid"/>
           </a:ln>
@@ -20818,7 +21510,7 @@
         </p:nvSpPr>
         <p:spPr>
           <a:xfrm>
-            <a:off x="5803392" y="2258568"/>
+            <a:off x="4370832" y="2258568"/>
             <a:ext cx="1828800" cy="292608"/>
           </a:xfrm>
           <a:prstGeom prst="rect">
@@ -20837,13 +21529,13 @@
             <a:r>
               <a:rPr lang="en-US" sz="1300" b="1" dirty="0">
                 <a:solidFill>
-                  <a:srgbClr val="0F766E"/>
+                  <a:srgbClr val="9D174D"/>
                 </a:solidFill>
                 <a:latin typeface="Trebuchet MS" pitchFamily="34" charset="0"/>
                 <a:ea typeface="Trebuchet MS" pitchFamily="34" charset="-122"/>
                 <a:cs typeface="Trebuchet MS" pitchFamily="34" charset="-120"/>
               </a:rPr>
-              <a:t>paint</a:t>
+              <a:t>ing</a:t>
             </a:r>
             <a:endParaRPr lang="en-US" sz="1300" dirty="0"/>
           </a:p>
@@ -20857,7 +21549,7 @@
         </p:nvSpPr>
         <p:spPr>
           <a:xfrm>
-            <a:off x="5803392" y="2569464"/>
+            <a:off x="4370832" y="2569464"/>
             <a:ext cx="1828800" cy="201168"/>
           </a:xfrm>
           <a:prstGeom prst="rect">
@@ -20882,7 +21574,7 @@
                 <a:ea typeface="Calibri" pitchFamily="34" charset="-122"/>
                 <a:cs typeface="Calibri" pitchFamily="34" charset="-120"/>
               </a:rPr>
-              <a:t>to colour a surface</a:t>
+              <a:t>happening now</a:t>
             </a:r>
             <a:endParaRPr lang="en-US" sz="850" dirty="0"/>
           </a:p>
@@ -20891,6 +21583,118 @@
       <p:sp>
         <p:nvSpPr>
           <p:cNvPr id="22" name="Shape 20"/>
+          <p:cNvSpPr/>
+          <p:nvPr/>
+        </p:nvSpPr>
+        <p:spPr>
+          <a:xfrm>
+            <a:off x="6519672" y="2258568"/>
+            <a:ext cx="1828800" cy="292608"/>
+          </a:xfrm>
+          <a:prstGeom prst="rect">
+            <a:avLst>
+              <a:gd name="adj" fmla="val 25000"/>
+            </a:avLst>
+          </a:prstGeom>
+          <a:solidFill>
+            <a:srgbClr val="FCE7F3"/>
+          </a:solidFill>
+          <a:ln w="19050">
+            <a:solidFill>
+              <a:srgbClr val="DB2777"/>
+            </a:solidFill>
+            <a:prstDash val="solid"/>
+          </a:ln>
+          <a:effectLst>
+            <a:outerShdw sx="100000" sy="100000" kx="0" ky="0" algn="bl" rotWithShape="0" blurRad="101600" dist="38100" dir="8100000">
+              <a:srgbClr val="000000">
+                <a:alpha val="12000"/>
+              </a:srgbClr>
+            </a:outerShdw>
+          </a:effectLst>
+        </p:spPr>
+      </p:sp>
+      <p:sp>
+        <p:nvSpPr>
+          <p:cNvPr id="23" name="Text 21"/>
+          <p:cNvSpPr/>
+          <p:nvPr/>
+        </p:nvSpPr>
+        <p:spPr>
+          <a:xfrm>
+            <a:off x="6519672" y="2258568"/>
+            <a:ext cx="1828800" cy="292608"/>
+          </a:xfrm>
+          <a:prstGeom prst="rect">
+            <a:avLst/>
+          </a:prstGeom>
+          <a:noFill/>
+          <a:ln/>
+        </p:spPr>
+        <p:txBody>
+          <a:bodyPr wrap="square" lIns="0" tIns="0" rIns="0" bIns="0" rtlCol="0" anchor="ctr"/>
+          <a:lstStyle/>
+          <a:p>
+            <a:pPr algn="ctr" indent="0" marL="0">
+              <a:buNone/>
+            </a:pPr>
+            <a:r>
+              <a:rPr lang="en-US" sz="1300" b="1" dirty="0">
+                <a:solidFill>
+                  <a:srgbClr val="9D174D"/>
+                </a:solidFill>
+                <a:latin typeface="Trebuchet MS" pitchFamily="34" charset="0"/>
+                <a:ea typeface="Trebuchet MS" pitchFamily="34" charset="-122"/>
+                <a:cs typeface="Trebuchet MS" pitchFamily="34" charset="-120"/>
+              </a:rPr>
+              <a:t>s</a:t>
+            </a:r>
+            <a:endParaRPr lang="en-US" sz="1300" dirty="0"/>
+          </a:p>
+        </p:txBody>
+      </p:sp>
+      <p:sp>
+        <p:nvSpPr>
+          <p:cNvPr id="24" name="Text 22"/>
+          <p:cNvSpPr/>
+          <p:nvPr/>
+        </p:nvSpPr>
+        <p:spPr>
+          <a:xfrm>
+            <a:off x="6519672" y="2569464"/>
+            <a:ext cx="1828800" cy="201168"/>
+          </a:xfrm>
+          <a:prstGeom prst="rect">
+            <a:avLst/>
+          </a:prstGeom>
+          <a:noFill/>
+          <a:ln/>
+        </p:spPr>
+        <p:txBody>
+          <a:bodyPr wrap="square" lIns="0" tIns="0" rIns="0" bIns="0" rtlCol="0" anchor="t"/>
+          <a:lstStyle/>
+          <a:p>
+            <a:pPr algn="ctr" indent="0" marL="0">
+              <a:buNone/>
+            </a:pPr>
+            <a:r>
+              <a:rPr lang="en-US" sz="850" dirty="0">
+                <a:solidFill>
+                  <a:srgbClr val="475569"/>
+                </a:solidFill>
+                <a:latin typeface="Calibri" pitchFamily="34" charset="0"/>
+                <a:ea typeface="Calibri" pitchFamily="34" charset="-122"/>
+                <a:cs typeface="Calibri" pitchFamily="34" charset="-120"/>
+              </a:rPr>
+              <a:t>plural or present tense</a:t>
+            </a:r>
+            <a:endParaRPr lang="en-US" sz="850" dirty="0"/>
+          </a:p>
+        </p:txBody>
+      </p:sp>
+      <p:sp>
+        <p:nvSpPr>
+          <p:cNvPr id="25" name="Shape 23"/>
           <p:cNvSpPr/>
           <p:nvPr/>
         </p:nvSpPr>
@@ -20917,7 +21721,7 @@
       </p:sp>
       <p:sp>
         <p:nvSpPr>
-          <p:cNvPr id="23" name="Text 21"/>
+          <p:cNvPr id="26" name="Text 24"/>
           <p:cNvSpPr/>
           <p:nvPr/>
         </p:nvSpPr>
@@ -20956,7 +21760,7 @@
       </p:sp>
       <p:sp>
         <p:nvSpPr>
-          <p:cNvPr id="24" name="Shape 22"/>
+          <p:cNvPr id="27" name="Shape 25"/>
           <p:cNvSpPr/>
           <p:nvPr/>
         </p:nvSpPr>
@@ -20983,7 +21787,7 @@
       </p:sp>
       <p:sp>
         <p:nvSpPr>
-          <p:cNvPr id="25" name="Shape 23"/>
+          <p:cNvPr id="28" name="Shape 26"/>
           <p:cNvSpPr/>
           <p:nvPr/>
         </p:nvSpPr>
@@ -21010,7 +21814,7 @@
       </p:sp>
       <p:sp>
         <p:nvSpPr>
-          <p:cNvPr id="26" name="Text 24"/>
+          <p:cNvPr id="29" name="Text 27"/>
           <p:cNvSpPr/>
           <p:nvPr/>
         </p:nvSpPr>
@@ -21041,7 +21845,7 @@
                 <a:ea typeface="Trebuchet MS" pitchFamily="34" charset="-122"/>
                 <a:cs typeface="Trebuchet MS" pitchFamily="34" charset="-120"/>
               </a:rPr>
-              <a:t>re</a:t>
+              <a:t>paint</a:t>
             </a:r>
             <a:endParaRPr lang="en-US" sz="1400" dirty="0"/>
           </a:p>
@@ -21049,7 +21853,7 @@
       </p:sp>
       <p:sp>
         <p:nvSpPr>
-          <p:cNvPr id="27" name="Text 25"/>
+          <p:cNvPr id="30" name="Text 28"/>
           <p:cNvSpPr/>
           <p:nvPr/>
         </p:nvSpPr>
@@ -21088,7 +21892,7 @@
       </p:sp>
       <p:sp>
         <p:nvSpPr>
-          <p:cNvPr id="28" name="Shape 26"/>
+          <p:cNvPr id="31" name="Shape 29"/>
           <p:cNvSpPr/>
           <p:nvPr/>
         </p:nvSpPr>
@@ -21115,7 +21919,7 @@
       </p:sp>
       <p:sp>
         <p:nvSpPr>
-          <p:cNvPr id="29" name="Text 27"/>
+          <p:cNvPr id="32" name="Text 30"/>
           <p:cNvSpPr/>
           <p:nvPr/>
         </p:nvSpPr>
@@ -21146,7 +21950,7 @@
                 <a:ea typeface="Trebuchet MS" pitchFamily="34" charset="-122"/>
                 <a:cs typeface="Trebuchet MS" pitchFamily="34" charset="-120"/>
               </a:rPr>
-              <a:t>paint</a:t>
+              <a:t>ings</a:t>
             </a:r>
             <a:endParaRPr lang="en-US" sz="1400" dirty="0"/>
           </a:p>
@@ -21154,7 +21958,7 @@
       </p:sp>
       <p:sp>
         <p:nvSpPr>
-          <p:cNvPr id="30" name="Shape 28"/>
+          <p:cNvPr id="33" name="Shape 31"/>
           <p:cNvSpPr/>
           <p:nvPr/>
         </p:nvSpPr>
@@ -21181,7 +21985,7 @@
       </p:sp>
       <p:sp>
         <p:nvSpPr>
-          <p:cNvPr id="31" name="Text 29"/>
+          <p:cNvPr id="34" name="Text 32"/>
           <p:cNvSpPr/>
           <p:nvPr/>
         </p:nvSpPr>
@@ -21220,7 +22024,7 @@
       </p:sp>
       <p:sp>
         <p:nvSpPr>
-          <p:cNvPr id="32" name="Shape 30"/>
+          <p:cNvPr id="35" name="Shape 33"/>
           <p:cNvSpPr/>
           <p:nvPr/>
         </p:nvSpPr>
@@ -21247,13 +22051,13 @@
       </p:sp>
       <p:sp>
         <p:nvSpPr>
-          <p:cNvPr id="33" name="Shape 31"/>
-          <p:cNvSpPr/>
-          <p:nvPr/>
-        </p:nvSpPr>
-        <p:spPr>
-          <a:xfrm>
-            <a:off x="2254649" y="4169664"/>
+          <p:cNvPr id="36" name="Shape 34"/>
+          <p:cNvSpPr/>
+          <p:nvPr/>
+        </p:nvSpPr>
+        <p:spPr>
+          <a:xfrm>
+            <a:off x="2124837" y="4169664"/>
             <a:ext cx="685800" cy="475488"/>
           </a:xfrm>
           <a:prstGeom prst="rect">
@@ -21274,13 +22078,13 @@
       </p:sp>
       <p:sp>
         <p:nvSpPr>
-          <p:cNvPr id="34" name="Text 32"/>
-          <p:cNvSpPr/>
-          <p:nvPr/>
-        </p:nvSpPr>
-        <p:spPr>
-          <a:xfrm>
-            <a:off x="2254649" y="4169664"/>
+          <p:cNvPr id="37" name="Text 35"/>
+          <p:cNvSpPr/>
+          <p:nvPr/>
+        </p:nvSpPr>
+        <p:spPr>
+          <a:xfrm>
+            <a:off x="2124837" y="4169664"/>
             <a:ext cx="685800" cy="475488"/>
           </a:xfrm>
           <a:prstGeom prst="rect">
@@ -21305,7 +22109,7 @@
                 <a:ea typeface="Trebuchet MS" pitchFamily="34" charset="-122"/>
                 <a:cs typeface="Trebuchet MS" pitchFamily="34" charset="-120"/>
               </a:rPr>
-              <a:t>r</a:t>
+              <a:t>p</a:t>
             </a:r>
             <a:endParaRPr lang="en-US" sz="900" dirty="0"/>
           </a:p>
@@ -21313,13 +22117,13 @@
       </p:sp>
       <p:sp>
         <p:nvSpPr>
-          <p:cNvPr id="35" name="Shape 33"/>
-          <p:cNvSpPr/>
-          <p:nvPr/>
-        </p:nvSpPr>
-        <p:spPr>
-          <a:xfrm>
-            <a:off x="3293146" y="4169664"/>
+          <p:cNvPr id="38" name="Shape 36"/>
+          <p:cNvSpPr/>
+          <p:nvPr/>
+        </p:nvSpPr>
+        <p:spPr>
+          <a:xfrm>
+            <a:off x="3033522" y="4169664"/>
             <a:ext cx="685800" cy="475488"/>
           </a:xfrm>
           <a:prstGeom prst="rect">
@@ -21340,13 +22144,13 @@
       </p:sp>
       <p:sp>
         <p:nvSpPr>
-          <p:cNvPr id="36" name="Text 34"/>
-          <p:cNvSpPr/>
-          <p:nvPr/>
-        </p:nvSpPr>
-        <p:spPr>
-          <a:xfrm>
-            <a:off x="3293146" y="4169664"/>
+          <p:cNvPr id="39" name="Text 37"/>
+          <p:cNvSpPr/>
+          <p:nvPr/>
+        </p:nvSpPr>
+        <p:spPr>
+          <a:xfrm>
+            <a:off x="3033522" y="4169664"/>
             <a:ext cx="685800" cy="475488"/>
           </a:xfrm>
           <a:prstGeom prst="rect">
@@ -21371,7 +22175,7 @@
                 <a:ea typeface="Trebuchet MS" pitchFamily="34" charset="-122"/>
                 <a:cs typeface="Trebuchet MS" pitchFamily="34" charset="-120"/>
               </a:rPr>
-              <a:t>e</a:t>
+              <a:t>ai</a:t>
             </a:r>
             <a:endParaRPr lang="en-US" sz="900" dirty="0"/>
           </a:p>
@@ -21379,13 +22183,13 @@
       </p:sp>
       <p:sp>
         <p:nvSpPr>
-          <p:cNvPr id="37" name="Shape 35"/>
-          <p:cNvSpPr/>
-          <p:nvPr/>
-        </p:nvSpPr>
-        <p:spPr>
-          <a:xfrm>
-            <a:off x="4331643" y="4169664"/>
+          <p:cNvPr id="40" name="Shape 38"/>
+          <p:cNvSpPr/>
+          <p:nvPr/>
+        </p:nvSpPr>
+        <p:spPr>
+          <a:xfrm>
+            <a:off x="3942207" y="4169664"/>
             <a:ext cx="685800" cy="475488"/>
           </a:xfrm>
           <a:prstGeom prst="rect">
@@ -21406,13 +22210,13 @@
       </p:sp>
       <p:sp>
         <p:nvSpPr>
-          <p:cNvPr id="38" name="Text 36"/>
-          <p:cNvSpPr/>
-          <p:nvPr/>
-        </p:nvSpPr>
-        <p:spPr>
-          <a:xfrm>
-            <a:off x="4331643" y="4169664"/>
+          <p:cNvPr id="41" name="Text 39"/>
+          <p:cNvSpPr/>
+          <p:nvPr/>
+        </p:nvSpPr>
+        <p:spPr>
+          <a:xfrm>
+            <a:off x="3942207" y="4169664"/>
             <a:ext cx="685800" cy="475488"/>
           </a:xfrm>
           <a:prstGeom prst="rect">
@@ -21437,7 +22241,7 @@
                 <a:ea typeface="Trebuchet MS" pitchFamily="34" charset="-122"/>
                 <a:cs typeface="Trebuchet MS" pitchFamily="34" charset="-120"/>
               </a:rPr>
-              <a:t>p</a:t>
+              <a:t>n</a:t>
             </a:r>
             <a:endParaRPr lang="en-US" sz="900" dirty="0"/>
           </a:p>
@@ -21445,13 +22249,13 @@
       </p:sp>
       <p:sp>
         <p:nvSpPr>
-          <p:cNvPr id="39" name="Shape 37"/>
-          <p:cNvSpPr/>
-          <p:nvPr/>
-        </p:nvSpPr>
-        <p:spPr>
-          <a:xfrm>
-            <a:off x="5370141" y="4169664"/>
+          <p:cNvPr id="42" name="Shape 40"/>
+          <p:cNvSpPr/>
+          <p:nvPr/>
+        </p:nvSpPr>
+        <p:spPr>
+          <a:xfrm>
+            <a:off x="4850892" y="4169664"/>
             <a:ext cx="685800" cy="475488"/>
           </a:xfrm>
           <a:prstGeom prst="rect">
@@ -21472,13 +22276,13 @@
       </p:sp>
       <p:sp>
         <p:nvSpPr>
-          <p:cNvPr id="40" name="Text 38"/>
-          <p:cNvSpPr/>
-          <p:nvPr/>
-        </p:nvSpPr>
-        <p:spPr>
-          <a:xfrm>
-            <a:off x="5370141" y="4169664"/>
+          <p:cNvPr id="43" name="Text 41"/>
+          <p:cNvSpPr/>
+          <p:nvPr/>
+        </p:nvSpPr>
+        <p:spPr>
+          <a:xfrm>
+            <a:off x="4850892" y="4169664"/>
             <a:ext cx="685800" cy="475488"/>
           </a:xfrm>
           <a:prstGeom prst="rect">
@@ -21503,7 +22307,7 @@
                 <a:ea typeface="Trebuchet MS" pitchFamily="34" charset="-122"/>
                 <a:cs typeface="Trebuchet MS" pitchFamily="34" charset="-120"/>
               </a:rPr>
-              <a:t>ai</a:t>
+              <a:t>t</a:t>
             </a:r>
             <a:endParaRPr lang="en-US" sz="900" dirty="0"/>
           </a:p>
@@ -21511,13 +22315,13 @@
       </p:sp>
       <p:sp>
         <p:nvSpPr>
-          <p:cNvPr id="41" name="Shape 39"/>
-          <p:cNvSpPr/>
-          <p:nvPr/>
-        </p:nvSpPr>
-        <p:spPr>
-          <a:xfrm>
-            <a:off x="6408638" y="4169664"/>
+          <p:cNvPr id="44" name="Shape 42"/>
+          <p:cNvSpPr/>
+          <p:nvPr/>
+        </p:nvSpPr>
+        <p:spPr>
+          <a:xfrm>
+            <a:off x="5759577" y="4169664"/>
             <a:ext cx="685800" cy="475488"/>
           </a:xfrm>
           <a:prstGeom prst="rect">
@@ -21538,13 +22342,13 @@
       </p:sp>
       <p:sp>
         <p:nvSpPr>
-          <p:cNvPr id="42" name="Text 40"/>
-          <p:cNvSpPr/>
-          <p:nvPr/>
-        </p:nvSpPr>
-        <p:spPr>
-          <a:xfrm>
-            <a:off x="6408638" y="4169664"/>
+          <p:cNvPr id="45" name="Text 43"/>
+          <p:cNvSpPr/>
+          <p:nvPr/>
+        </p:nvSpPr>
+        <p:spPr>
+          <a:xfrm>
+            <a:off x="5759577" y="4169664"/>
             <a:ext cx="685800" cy="475488"/>
           </a:xfrm>
           <a:prstGeom prst="rect">
@@ -21569,7 +22373,7 @@
                 <a:ea typeface="Trebuchet MS" pitchFamily="34" charset="-122"/>
                 <a:cs typeface="Trebuchet MS" pitchFamily="34" charset="-120"/>
               </a:rPr>
-              <a:t>n</a:t>
+              <a:t>i</a:t>
             </a:r>
             <a:endParaRPr lang="en-US" sz="900" dirty="0"/>
           </a:p>
@@ -21577,13 +22381,13 @@
       </p:sp>
       <p:sp>
         <p:nvSpPr>
-          <p:cNvPr id="43" name="Shape 41"/>
-          <p:cNvSpPr/>
-          <p:nvPr/>
-        </p:nvSpPr>
-        <p:spPr>
-          <a:xfrm>
-            <a:off x="7447135" y="4169664"/>
+          <p:cNvPr id="46" name="Shape 44"/>
+          <p:cNvSpPr/>
+          <p:nvPr/>
+        </p:nvSpPr>
+        <p:spPr>
+          <a:xfrm>
+            <a:off x="6668262" y="4169664"/>
             <a:ext cx="685800" cy="475488"/>
           </a:xfrm>
           <a:prstGeom prst="rect">
@@ -21604,13 +22408,13 @@
       </p:sp>
       <p:sp>
         <p:nvSpPr>
-          <p:cNvPr id="44" name="Text 42"/>
-          <p:cNvSpPr/>
-          <p:nvPr/>
-        </p:nvSpPr>
-        <p:spPr>
-          <a:xfrm>
-            <a:off x="7447135" y="4169664"/>
+          <p:cNvPr id="47" name="Text 45"/>
+          <p:cNvSpPr/>
+          <p:nvPr/>
+        </p:nvSpPr>
+        <p:spPr>
+          <a:xfrm>
+            <a:off x="6668262" y="4169664"/>
             <a:ext cx="685800" cy="475488"/>
           </a:xfrm>
           <a:prstGeom prst="rect">
@@ -21635,7 +22439,73 @@
                 <a:ea typeface="Trebuchet MS" pitchFamily="34" charset="-122"/>
                 <a:cs typeface="Trebuchet MS" pitchFamily="34" charset="-120"/>
               </a:rPr>
-              <a:t>t</a:t>
+              <a:t>ng</a:t>
+            </a:r>
+            <a:endParaRPr lang="en-US" sz="900" dirty="0"/>
+          </a:p>
+        </p:txBody>
+      </p:sp>
+      <p:sp>
+        <p:nvSpPr>
+          <p:cNvPr id="48" name="Shape 46"/>
+          <p:cNvSpPr/>
+          <p:nvPr/>
+        </p:nvSpPr>
+        <p:spPr>
+          <a:xfrm>
+            <a:off x="7576947" y="4169664"/>
+            <a:ext cx="685800" cy="475488"/>
+          </a:xfrm>
+          <a:prstGeom prst="rect">
+            <a:avLst>
+              <a:gd name="adj" fmla="val 7692"/>
+            </a:avLst>
+          </a:prstGeom>
+          <a:solidFill>
+            <a:srgbClr val="FFFFFF"/>
+          </a:solidFill>
+          <a:ln w="12700">
+            <a:solidFill>
+              <a:srgbClr val="DB2777"/>
+            </a:solidFill>
+            <a:prstDash val="solid"/>
+          </a:ln>
+        </p:spPr>
+      </p:sp>
+      <p:sp>
+        <p:nvSpPr>
+          <p:cNvPr id="49" name="Text 47"/>
+          <p:cNvSpPr/>
+          <p:nvPr/>
+        </p:nvSpPr>
+        <p:spPr>
+          <a:xfrm>
+            <a:off x="7576947" y="4169664"/>
+            <a:ext cx="685800" cy="475488"/>
+          </a:xfrm>
+          <a:prstGeom prst="rect">
+            <a:avLst/>
+          </a:prstGeom>
+          <a:noFill/>
+          <a:ln/>
+        </p:spPr>
+        <p:txBody>
+          <a:bodyPr wrap="square" lIns="0" tIns="0" rIns="0" bIns="0" rtlCol="0" anchor="ctr"/>
+          <a:lstStyle/>
+          <a:p>
+            <a:pPr algn="ctr" indent="0" marL="0">
+              <a:buNone/>
+            </a:pPr>
+            <a:r>
+              <a:rPr lang="en-US" sz="900" b="1" dirty="0">
+                <a:solidFill>
+                  <a:srgbClr val="9D174D"/>
+                </a:solidFill>
+                <a:latin typeface="Trebuchet MS" pitchFamily="34" charset="0"/>
+                <a:ea typeface="Trebuchet MS" pitchFamily="34" charset="-122"/>
+                <a:cs typeface="Trebuchet MS" pitchFamily="34" charset="-120"/>
+              </a:rPr>
+              <a:t>s</a:t>
             </a:r>
             <a:endParaRPr lang="en-US" sz="900" dirty="0"/>
           </a:p>
@@ -21927,7 +22797,7 @@
                 <a:ea typeface="Calibri" pitchFamily="34" charset="-122"/>
                 <a:cs typeface="Calibri" pitchFamily="34" charset="-120"/>
               </a:rPr>
-              <a:t>Word Labs  •  wordlabs.app  •  Root: 'paint' = to colour or coat surface</a:t>
+              <a:t>Word Labs  •  wordlabs.app  •  Root: 'paint' = to colour a surface; a coloured liquid</a:t>
             </a:r>
             <a:endParaRPr lang="en-US" sz="800" dirty="0"/>
           </a:p>
@@ -22066,7 +22936,7 @@
                 <a:ea typeface="Trebuchet MS" pitchFamily="34" charset="-122"/>
                 <a:cs typeface="Trebuchet MS" pitchFamily="34" charset="-120"/>
               </a:rPr>
-              <a:t>paintwork</a:t>
+              <a:t>repainted</a:t>
             </a:r>
             <a:endParaRPr lang="en-US" sz="2800" dirty="0"/>
           </a:p>
@@ -22754,7 +23624,7 @@
                 <a:ea typeface="Calibri" pitchFamily="34" charset="-122"/>
                 <a:cs typeface="Calibri" pitchFamily="34" charset="-120"/>
               </a:rPr>
-              <a:t>Word Labs  •  wordlabs.app  •  Root: 'paint' = to colour or coat surface</a:t>
+              <a:t>Word Labs  •  wordlabs.app  •  Root: 'paint' = to colour a surface; a coloured liquid</a:t>
             </a:r>
             <a:endParaRPr lang="en-US" sz="800" dirty="0"/>
           </a:p>
@@ -22893,7 +23763,7 @@
                 <a:ea typeface="Trebuchet MS" pitchFamily="34" charset="-122"/>
                 <a:cs typeface="Trebuchet MS" pitchFamily="34" charset="-120"/>
               </a:rPr>
-              <a:t>paintwork</a:t>
+              <a:t>repainted</a:t>
             </a:r>
             <a:endParaRPr lang="en-US" sz="2800" dirty="0"/>
           </a:p>
@@ -22973,7 +23843,7 @@
         </p:nvSpPr>
         <p:spPr>
           <a:xfrm>
-            <a:off x="2938272" y="2258568"/>
+            <a:off x="2221992" y="2258568"/>
             <a:ext cx="1828800" cy="292608"/>
           </a:xfrm>
           <a:prstGeom prst="rect">
@@ -22982,11 +23852,11 @@
             </a:avLst>
           </a:prstGeom>
           <a:solidFill>
-            <a:srgbClr val="CCFBF1"/>
+            <a:srgbClr val="DDD6FE"/>
           </a:solidFill>
           <a:ln w="19050">
             <a:solidFill>
-              <a:srgbClr val="0D9488"/>
+              <a:srgbClr val="7C3AED"/>
             </a:solidFill>
             <a:prstDash val="solid"/>
           </a:ln>
@@ -23007,7 +23877,7 @@
         </p:nvSpPr>
         <p:spPr>
           <a:xfrm>
-            <a:off x="2938272" y="2258568"/>
+            <a:off x="2221992" y="2258568"/>
             <a:ext cx="1828800" cy="292608"/>
           </a:xfrm>
           <a:prstGeom prst="rect">
@@ -23026,13 +23896,13 @@
             <a:r>
               <a:rPr lang="en-US" sz="1300" b="1" dirty="0">
                 <a:solidFill>
-                  <a:srgbClr val="0F766E"/>
+                  <a:srgbClr val="4C1D95"/>
                 </a:solidFill>
                 <a:latin typeface="Trebuchet MS" pitchFamily="34" charset="0"/>
                 <a:ea typeface="Trebuchet MS" pitchFamily="34" charset="-122"/>
                 <a:cs typeface="Trebuchet MS" pitchFamily="34" charset="-120"/>
               </a:rPr>
-              <a:t>paint</a:t>
+              <a:t>re</a:t>
             </a:r>
             <a:endParaRPr lang="en-US" sz="1300" dirty="0"/>
           </a:p>
@@ -23046,7 +23916,7 @@
         </p:nvSpPr>
         <p:spPr>
           <a:xfrm>
-            <a:off x="2938272" y="2569464"/>
+            <a:off x="2221992" y="2569464"/>
             <a:ext cx="1828800" cy="201168"/>
           </a:xfrm>
           <a:prstGeom prst="rect">
@@ -23071,7 +23941,7 @@
                 <a:ea typeface="Calibri" pitchFamily="34" charset="-122"/>
                 <a:cs typeface="Calibri" pitchFamily="34" charset="-120"/>
               </a:rPr>
-              <a:t>to colour a surface</a:t>
+              <a:t>again</a:t>
             </a:r>
             <a:endParaRPr lang="en-US" sz="850" dirty="0"/>
           </a:p>
@@ -23085,7 +23955,7 @@
         </p:nvSpPr>
         <p:spPr>
           <a:xfrm>
-            <a:off x="5803392" y="2258568"/>
+            <a:off x="4370832" y="2258568"/>
             <a:ext cx="1828800" cy="292608"/>
           </a:xfrm>
           <a:prstGeom prst="rect">
@@ -23094,11 +23964,11 @@
             </a:avLst>
           </a:prstGeom>
           <a:solidFill>
-            <a:srgbClr val="FCE7F3"/>
+            <a:srgbClr val="CCFBF1"/>
           </a:solidFill>
           <a:ln w="19050">
             <a:solidFill>
-              <a:srgbClr val="DB2777"/>
+              <a:srgbClr val="0D9488"/>
             </a:solidFill>
             <a:prstDash val="solid"/>
           </a:ln>
@@ -23119,7 +23989,7 @@
         </p:nvSpPr>
         <p:spPr>
           <a:xfrm>
-            <a:off x="5803392" y="2258568"/>
+            <a:off x="4370832" y="2258568"/>
             <a:ext cx="1828800" cy="292608"/>
           </a:xfrm>
           <a:prstGeom prst="rect">
@@ -23138,13 +24008,13 @@
             <a:r>
               <a:rPr lang="en-US" sz="1300" b="1" dirty="0">
                 <a:solidFill>
-                  <a:srgbClr val="9D174D"/>
+                  <a:srgbClr val="0F766E"/>
                 </a:solidFill>
                 <a:latin typeface="Trebuchet MS" pitchFamily="34" charset="0"/>
                 <a:ea typeface="Trebuchet MS" pitchFamily="34" charset="-122"/>
                 <a:cs typeface="Trebuchet MS" pitchFamily="34" charset="-120"/>
               </a:rPr>
-              <a:t>work</a:t>
+              <a:t>paint</a:t>
             </a:r>
             <a:endParaRPr lang="en-US" sz="1300" dirty="0"/>
           </a:p>
@@ -23158,7 +24028,7 @@
         </p:nvSpPr>
         <p:spPr>
           <a:xfrm>
-            <a:off x="5803392" y="2569464"/>
+            <a:off x="4370832" y="2569464"/>
             <a:ext cx="1828800" cy="201168"/>
           </a:xfrm>
           <a:prstGeom prst="rect">
@@ -23183,7 +24053,7 @@
                 <a:ea typeface="Calibri" pitchFamily="34" charset="-122"/>
                 <a:cs typeface="Calibri" pitchFamily="34" charset="-120"/>
               </a:rPr>
-              <a:t>result or surface area</a:t>
+              <a:t>to colour a surface; a coloured liquid</a:t>
             </a:r>
             <a:endParaRPr lang="en-US" sz="850" dirty="0"/>
           </a:p>
@@ -23192,6 +24062,118 @@
       <p:sp>
         <p:nvSpPr>
           <p:cNvPr id="22" name="Shape 20"/>
+          <p:cNvSpPr/>
+          <p:nvPr/>
+        </p:nvSpPr>
+        <p:spPr>
+          <a:xfrm>
+            <a:off x="6519672" y="2258568"/>
+            <a:ext cx="1828800" cy="292608"/>
+          </a:xfrm>
+          <a:prstGeom prst="rect">
+            <a:avLst>
+              <a:gd name="adj" fmla="val 25000"/>
+            </a:avLst>
+          </a:prstGeom>
+          <a:solidFill>
+            <a:srgbClr val="FCE7F3"/>
+          </a:solidFill>
+          <a:ln w="19050">
+            <a:solidFill>
+              <a:srgbClr val="DB2777"/>
+            </a:solidFill>
+            <a:prstDash val="solid"/>
+          </a:ln>
+          <a:effectLst>
+            <a:outerShdw sx="100000" sy="100000" kx="0" ky="0" algn="bl" rotWithShape="0" blurRad="101600" dist="38100" dir="8100000">
+              <a:srgbClr val="000000">
+                <a:alpha val="12000"/>
+              </a:srgbClr>
+            </a:outerShdw>
+          </a:effectLst>
+        </p:spPr>
+      </p:sp>
+      <p:sp>
+        <p:nvSpPr>
+          <p:cNvPr id="23" name="Text 21"/>
+          <p:cNvSpPr/>
+          <p:nvPr/>
+        </p:nvSpPr>
+        <p:spPr>
+          <a:xfrm>
+            <a:off x="6519672" y="2258568"/>
+            <a:ext cx="1828800" cy="292608"/>
+          </a:xfrm>
+          <a:prstGeom prst="rect">
+            <a:avLst/>
+          </a:prstGeom>
+          <a:noFill/>
+          <a:ln/>
+        </p:spPr>
+        <p:txBody>
+          <a:bodyPr wrap="square" lIns="0" tIns="0" rIns="0" bIns="0" rtlCol="0" anchor="ctr"/>
+          <a:lstStyle/>
+          <a:p>
+            <a:pPr algn="ctr" indent="0" marL="0">
+              <a:buNone/>
+            </a:pPr>
+            <a:r>
+              <a:rPr lang="en-US" sz="1300" b="1" dirty="0">
+                <a:solidFill>
+                  <a:srgbClr val="9D174D"/>
+                </a:solidFill>
+                <a:latin typeface="Trebuchet MS" pitchFamily="34" charset="0"/>
+                <a:ea typeface="Trebuchet MS" pitchFamily="34" charset="-122"/>
+                <a:cs typeface="Trebuchet MS" pitchFamily="34" charset="-120"/>
+              </a:rPr>
+              <a:t>ed</a:t>
+            </a:r>
+            <a:endParaRPr lang="en-US" sz="1300" dirty="0"/>
+          </a:p>
+        </p:txBody>
+      </p:sp>
+      <p:sp>
+        <p:nvSpPr>
+          <p:cNvPr id="24" name="Text 22"/>
+          <p:cNvSpPr/>
+          <p:nvPr/>
+        </p:nvSpPr>
+        <p:spPr>
+          <a:xfrm>
+            <a:off x="6519672" y="2569464"/>
+            <a:ext cx="1828800" cy="201168"/>
+          </a:xfrm>
+          <a:prstGeom prst="rect">
+            <a:avLst/>
+          </a:prstGeom>
+          <a:noFill/>
+          <a:ln/>
+        </p:spPr>
+        <p:txBody>
+          <a:bodyPr wrap="square" lIns="0" tIns="0" rIns="0" bIns="0" rtlCol="0" anchor="t"/>
+          <a:lstStyle/>
+          <a:p>
+            <a:pPr algn="ctr" indent="0" marL="0">
+              <a:buNone/>
+            </a:pPr>
+            <a:r>
+              <a:rPr lang="en-US" sz="850" dirty="0">
+                <a:solidFill>
+                  <a:srgbClr val="475569"/>
+                </a:solidFill>
+                <a:latin typeface="Calibri" pitchFamily="34" charset="0"/>
+                <a:ea typeface="Calibri" pitchFamily="34" charset="-122"/>
+                <a:cs typeface="Calibri" pitchFamily="34" charset="-120"/>
+              </a:rPr>
+              <a:t>past tense</a:t>
+            </a:r>
+            <a:endParaRPr lang="en-US" sz="850" dirty="0"/>
+          </a:p>
+        </p:txBody>
+      </p:sp>
+      <p:sp>
+        <p:nvSpPr>
+          <p:cNvPr id="25" name="Shape 23"/>
           <p:cNvSpPr/>
           <p:nvPr/>
         </p:nvSpPr>
@@ -23218,7 +24200,7 @@
       </p:sp>
       <p:sp>
         <p:nvSpPr>
-          <p:cNvPr id="23" name="Text 21"/>
+          <p:cNvPr id="26" name="Text 24"/>
           <p:cNvSpPr/>
           <p:nvPr/>
         </p:nvSpPr>
@@ -23257,7 +24239,7 @@
       </p:sp>
       <p:sp>
         <p:nvSpPr>
-          <p:cNvPr id="24" name="Shape 22"/>
+          <p:cNvPr id="27" name="Shape 25"/>
           <p:cNvSpPr/>
           <p:nvPr/>
         </p:nvSpPr>
@@ -23284,7 +24266,7 @@
       </p:sp>
       <p:sp>
         <p:nvSpPr>
-          <p:cNvPr id="25" name="Text 23"/>
+          <p:cNvPr id="28" name="Text 26"/>
           <p:cNvSpPr/>
           <p:nvPr/>
         </p:nvSpPr>
@@ -23323,7 +24305,7 @@
       </p:sp>
       <p:sp>
         <p:nvSpPr>
-          <p:cNvPr id="26" name="Shape 24"/>
+          <p:cNvPr id="29" name="Shape 27"/>
           <p:cNvSpPr/>
           <p:nvPr/>
         </p:nvSpPr>
@@ -23350,7 +24332,7 @@
       </p:sp>
       <p:sp>
         <p:nvSpPr>
-          <p:cNvPr id="27" name="Text 25"/>
+          <p:cNvPr id="30" name="Text 28"/>
           <p:cNvSpPr/>
           <p:nvPr/>
         </p:nvSpPr>
@@ -23389,7 +24371,7 @@
       </p:sp>
       <p:sp>
         <p:nvSpPr>
-          <p:cNvPr id="28" name="Shape 26"/>
+          <p:cNvPr id="31" name="Shape 29"/>
           <p:cNvSpPr/>
           <p:nvPr/>
         </p:nvSpPr>
@@ -23416,7 +24398,7 @@
       </p:sp>
       <p:sp>
         <p:nvSpPr>
-          <p:cNvPr id="29" name="Text 27"/>
+          <p:cNvPr id="32" name="Text 30"/>
           <p:cNvSpPr/>
           <p:nvPr/>
         </p:nvSpPr>
@@ -23739,7 +24721,7 @@
                 <a:ea typeface="Calibri" pitchFamily="34" charset="-122"/>
                 <a:cs typeface="Calibri" pitchFamily="34" charset="-120"/>
               </a:rPr>
-              <a:t>Word Labs  •  wordlabs.app  •  Root: 'paint' = to colour or coat surface</a:t>
+              <a:t>Word Labs  •  wordlabs.app  •  Root: 'paint' = to colour a surface; a coloured liquid</a:t>
             </a:r>
             <a:endParaRPr lang="en-US" sz="800" dirty="0"/>
           </a:p>
@@ -23812,7 +24794,7 @@
                 <a:ea typeface="Trebuchet MS" pitchFamily="34" charset="-122"/>
                 <a:cs typeface="Trebuchet MS" pitchFamily="34" charset="-120"/>
               </a:rPr>
-              <a:t>We are learning that the root 'paint' means 'to colour or coat surface'.</a:t>
+              <a:t>We are learning that the root 'paint' means 'to colour a surface; a coloured liquid'.</a:t>
             </a:r>
             <a:endParaRPr lang="en-US" sz="2000" dirty="0"/>
           </a:p>
@@ -24458,7 +25440,7 @@
                 <a:ea typeface="Calibri" pitchFamily="34" charset="-122"/>
                 <a:cs typeface="Calibri" pitchFamily="34" charset="-120"/>
               </a:rPr>
-              <a:t>Word Labs  •  wordlabs.app  •  Root: 'paint' = to colour or coat surface</a:t>
+              <a:t>Word Labs  •  wordlabs.app  •  Root: 'paint' = to colour a surface; a coloured liquid</a:t>
             </a:r>
             <a:endParaRPr lang="en-US" sz="800" dirty="0"/>
           </a:p>
@@ -24597,7 +25579,7 @@
                 <a:ea typeface="Trebuchet MS" pitchFamily="34" charset="-122"/>
                 <a:cs typeface="Trebuchet MS" pitchFamily="34" charset="-120"/>
               </a:rPr>
-              <a:t>paintwork</a:t>
+              <a:t>repainted</a:t>
             </a:r>
             <a:endParaRPr lang="en-US" sz="2800" dirty="0"/>
           </a:p>
@@ -24677,7 +25659,7 @@
         </p:nvSpPr>
         <p:spPr>
           <a:xfrm>
-            <a:off x="2938272" y="2258568"/>
+            <a:off x="2221992" y="2258568"/>
             <a:ext cx="1828800" cy="292608"/>
           </a:xfrm>
           <a:prstGeom prst="rect">
@@ -24686,11 +25668,11 @@
             </a:avLst>
           </a:prstGeom>
           <a:solidFill>
-            <a:srgbClr val="CCFBF1"/>
+            <a:srgbClr val="DDD6FE"/>
           </a:solidFill>
           <a:ln w="19050">
             <a:solidFill>
-              <a:srgbClr val="0D9488"/>
+              <a:srgbClr val="7C3AED"/>
             </a:solidFill>
             <a:prstDash val="solid"/>
           </a:ln>
@@ -24711,7 +25693,7 @@
         </p:nvSpPr>
         <p:spPr>
           <a:xfrm>
-            <a:off x="2938272" y="2258568"/>
+            <a:off x="2221992" y="2258568"/>
             <a:ext cx="1828800" cy="292608"/>
           </a:xfrm>
           <a:prstGeom prst="rect">
@@ -24730,13 +25712,13 @@
             <a:r>
               <a:rPr lang="en-US" sz="1300" b="1" dirty="0">
                 <a:solidFill>
-                  <a:srgbClr val="0F766E"/>
+                  <a:srgbClr val="4C1D95"/>
                 </a:solidFill>
                 <a:latin typeface="Trebuchet MS" pitchFamily="34" charset="0"/>
                 <a:ea typeface="Trebuchet MS" pitchFamily="34" charset="-122"/>
                 <a:cs typeface="Trebuchet MS" pitchFamily="34" charset="-120"/>
               </a:rPr>
-              <a:t>paint</a:t>
+              <a:t>re</a:t>
             </a:r>
             <a:endParaRPr lang="en-US" sz="1300" dirty="0"/>
           </a:p>
@@ -24750,7 +25732,7 @@
         </p:nvSpPr>
         <p:spPr>
           <a:xfrm>
-            <a:off x="2938272" y="2569464"/>
+            <a:off x="2221992" y="2569464"/>
             <a:ext cx="1828800" cy="201168"/>
           </a:xfrm>
           <a:prstGeom prst="rect">
@@ -24775,7 +25757,7 @@
                 <a:ea typeface="Calibri" pitchFamily="34" charset="-122"/>
                 <a:cs typeface="Calibri" pitchFamily="34" charset="-120"/>
               </a:rPr>
-              <a:t>to colour a surface</a:t>
+              <a:t>again</a:t>
             </a:r>
             <a:endParaRPr lang="en-US" sz="850" dirty="0"/>
           </a:p>
@@ -24789,7 +25771,7 @@
         </p:nvSpPr>
         <p:spPr>
           <a:xfrm>
-            <a:off x="5803392" y="2258568"/>
+            <a:off x="4370832" y="2258568"/>
             <a:ext cx="1828800" cy="292608"/>
           </a:xfrm>
           <a:prstGeom prst="rect">
@@ -24798,11 +25780,11 @@
             </a:avLst>
           </a:prstGeom>
           <a:solidFill>
-            <a:srgbClr val="FCE7F3"/>
+            <a:srgbClr val="CCFBF1"/>
           </a:solidFill>
           <a:ln w="19050">
             <a:solidFill>
-              <a:srgbClr val="DB2777"/>
+              <a:srgbClr val="0D9488"/>
             </a:solidFill>
             <a:prstDash val="solid"/>
           </a:ln>
@@ -24823,7 +25805,7 @@
         </p:nvSpPr>
         <p:spPr>
           <a:xfrm>
-            <a:off x="5803392" y="2258568"/>
+            <a:off x="4370832" y="2258568"/>
             <a:ext cx="1828800" cy="292608"/>
           </a:xfrm>
           <a:prstGeom prst="rect">
@@ -24842,13 +25824,13 @@
             <a:r>
               <a:rPr lang="en-US" sz="1300" b="1" dirty="0">
                 <a:solidFill>
-                  <a:srgbClr val="9D174D"/>
+                  <a:srgbClr val="0F766E"/>
                 </a:solidFill>
                 <a:latin typeface="Trebuchet MS" pitchFamily="34" charset="0"/>
                 <a:ea typeface="Trebuchet MS" pitchFamily="34" charset="-122"/>
                 <a:cs typeface="Trebuchet MS" pitchFamily="34" charset="-120"/>
               </a:rPr>
-              <a:t>work</a:t>
+              <a:t>paint</a:t>
             </a:r>
             <a:endParaRPr lang="en-US" sz="1300" dirty="0"/>
           </a:p>
@@ -24862,7 +25844,7 @@
         </p:nvSpPr>
         <p:spPr>
           <a:xfrm>
-            <a:off x="5803392" y="2569464"/>
+            <a:off x="4370832" y="2569464"/>
             <a:ext cx="1828800" cy="201168"/>
           </a:xfrm>
           <a:prstGeom prst="rect">
@@ -24887,7 +25869,7 @@
                 <a:ea typeface="Calibri" pitchFamily="34" charset="-122"/>
                 <a:cs typeface="Calibri" pitchFamily="34" charset="-120"/>
               </a:rPr>
-              <a:t>result or surface area</a:t>
+              <a:t>to colour a surface; a coloured liquid</a:t>
             </a:r>
             <a:endParaRPr lang="en-US" sz="850" dirty="0"/>
           </a:p>
@@ -24896,6 +25878,118 @@
       <p:sp>
         <p:nvSpPr>
           <p:cNvPr id="22" name="Shape 20"/>
+          <p:cNvSpPr/>
+          <p:nvPr/>
+        </p:nvSpPr>
+        <p:spPr>
+          <a:xfrm>
+            <a:off x="6519672" y="2258568"/>
+            <a:ext cx="1828800" cy="292608"/>
+          </a:xfrm>
+          <a:prstGeom prst="rect">
+            <a:avLst>
+              <a:gd name="adj" fmla="val 25000"/>
+            </a:avLst>
+          </a:prstGeom>
+          <a:solidFill>
+            <a:srgbClr val="FCE7F3"/>
+          </a:solidFill>
+          <a:ln w="19050">
+            <a:solidFill>
+              <a:srgbClr val="DB2777"/>
+            </a:solidFill>
+            <a:prstDash val="solid"/>
+          </a:ln>
+          <a:effectLst>
+            <a:outerShdw sx="100000" sy="100000" kx="0" ky="0" algn="bl" rotWithShape="0" blurRad="101600" dist="38100" dir="8100000">
+              <a:srgbClr val="000000">
+                <a:alpha val="12000"/>
+              </a:srgbClr>
+            </a:outerShdw>
+          </a:effectLst>
+        </p:spPr>
+      </p:sp>
+      <p:sp>
+        <p:nvSpPr>
+          <p:cNvPr id="23" name="Text 21"/>
+          <p:cNvSpPr/>
+          <p:nvPr/>
+        </p:nvSpPr>
+        <p:spPr>
+          <a:xfrm>
+            <a:off x="6519672" y="2258568"/>
+            <a:ext cx="1828800" cy="292608"/>
+          </a:xfrm>
+          <a:prstGeom prst="rect">
+            <a:avLst/>
+          </a:prstGeom>
+          <a:noFill/>
+          <a:ln/>
+        </p:spPr>
+        <p:txBody>
+          <a:bodyPr wrap="square" lIns="0" tIns="0" rIns="0" bIns="0" rtlCol="0" anchor="ctr"/>
+          <a:lstStyle/>
+          <a:p>
+            <a:pPr algn="ctr" indent="0" marL="0">
+              <a:buNone/>
+            </a:pPr>
+            <a:r>
+              <a:rPr lang="en-US" sz="1300" b="1" dirty="0">
+                <a:solidFill>
+                  <a:srgbClr val="9D174D"/>
+                </a:solidFill>
+                <a:latin typeface="Trebuchet MS" pitchFamily="34" charset="0"/>
+                <a:ea typeface="Trebuchet MS" pitchFamily="34" charset="-122"/>
+                <a:cs typeface="Trebuchet MS" pitchFamily="34" charset="-120"/>
+              </a:rPr>
+              <a:t>ed</a:t>
+            </a:r>
+            <a:endParaRPr lang="en-US" sz="1300" dirty="0"/>
+          </a:p>
+        </p:txBody>
+      </p:sp>
+      <p:sp>
+        <p:nvSpPr>
+          <p:cNvPr id="24" name="Text 22"/>
+          <p:cNvSpPr/>
+          <p:nvPr/>
+        </p:nvSpPr>
+        <p:spPr>
+          <a:xfrm>
+            <a:off x="6519672" y="2569464"/>
+            <a:ext cx="1828800" cy="201168"/>
+          </a:xfrm>
+          <a:prstGeom prst="rect">
+            <a:avLst/>
+          </a:prstGeom>
+          <a:noFill/>
+          <a:ln/>
+        </p:spPr>
+        <p:txBody>
+          <a:bodyPr wrap="square" lIns="0" tIns="0" rIns="0" bIns="0" rtlCol="0" anchor="t"/>
+          <a:lstStyle/>
+          <a:p>
+            <a:pPr algn="ctr" indent="0" marL="0">
+              <a:buNone/>
+            </a:pPr>
+            <a:r>
+              <a:rPr lang="en-US" sz="850" dirty="0">
+                <a:solidFill>
+                  <a:srgbClr val="475569"/>
+                </a:solidFill>
+                <a:latin typeface="Calibri" pitchFamily="34" charset="0"/>
+                <a:ea typeface="Calibri" pitchFamily="34" charset="-122"/>
+                <a:cs typeface="Calibri" pitchFamily="34" charset="-120"/>
+              </a:rPr>
+              <a:t>past tense</a:t>
+            </a:r>
+            <a:endParaRPr lang="en-US" sz="850" dirty="0"/>
+          </a:p>
+        </p:txBody>
+      </p:sp>
+      <p:sp>
+        <p:nvSpPr>
+          <p:cNvPr id="25" name="Shape 23"/>
           <p:cNvSpPr/>
           <p:nvPr/>
         </p:nvSpPr>
@@ -24922,7 +26016,7 @@
       </p:sp>
       <p:sp>
         <p:nvSpPr>
-          <p:cNvPr id="23" name="Text 21"/>
+          <p:cNvPr id="26" name="Text 24"/>
           <p:cNvSpPr/>
           <p:nvPr/>
         </p:nvSpPr>
@@ -24961,7 +26055,7 @@
       </p:sp>
       <p:sp>
         <p:nvSpPr>
-          <p:cNvPr id="24" name="Shape 22"/>
+          <p:cNvPr id="27" name="Shape 25"/>
           <p:cNvSpPr/>
           <p:nvPr/>
         </p:nvSpPr>
@@ -24988,13 +26082,13 @@
       </p:sp>
       <p:sp>
         <p:nvSpPr>
-          <p:cNvPr id="25" name="Shape 23"/>
-          <p:cNvSpPr/>
-          <p:nvPr/>
-        </p:nvSpPr>
-        <p:spPr>
-          <a:xfrm>
-            <a:off x="2999232" y="3364992"/>
+          <p:cNvPr id="28" name="Shape 26"/>
+          <p:cNvSpPr/>
+          <p:nvPr/>
+        </p:nvSpPr>
+        <p:spPr>
+          <a:xfrm>
+            <a:off x="2313432" y="3364992"/>
             <a:ext cx="1645920" cy="475488"/>
           </a:xfrm>
           <a:prstGeom prst="rect">
@@ -25015,13 +26109,13 @@
       </p:sp>
       <p:sp>
         <p:nvSpPr>
-          <p:cNvPr id="26" name="Text 24"/>
-          <p:cNvSpPr/>
-          <p:nvPr/>
-        </p:nvSpPr>
-        <p:spPr>
-          <a:xfrm>
-            <a:off x="2999232" y="3364992"/>
+          <p:cNvPr id="29" name="Text 27"/>
+          <p:cNvSpPr/>
+          <p:nvPr/>
+        </p:nvSpPr>
+        <p:spPr>
+          <a:xfrm>
+            <a:off x="2313432" y="3364992"/>
             <a:ext cx="1645920" cy="475488"/>
           </a:xfrm>
           <a:prstGeom prst="rect">
@@ -25046,7 +26140,7 @@
                 <a:ea typeface="Trebuchet MS" pitchFamily="34" charset="-122"/>
                 <a:cs typeface="Trebuchet MS" pitchFamily="34" charset="-120"/>
               </a:rPr>
-              <a:t>paint</a:t>
+              <a:t>re</a:t>
             </a:r>
             <a:endParaRPr lang="en-US" sz="1400" dirty="0"/>
           </a:p>
@@ -25054,14 +26148,14 @@
       </p:sp>
       <p:sp>
         <p:nvSpPr>
-          <p:cNvPr id="27" name="Text 25"/>
-          <p:cNvSpPr/>
-          <p:nvPr/>
-        </p:nvSpPr>
-        <p:spPr>
-          <a:xfrm>
-            <a:off x="4645152" y="3364992"/>
-            <a:ext cx="1097280" cy="475488"/>
+          <p:cNvPr id="30" name="Text 28"/>
+          <p:cNvSpPr/>
+          <p:nvPr/>
+        </p:nvSpPr>
+        <p:spPr>
+          <a:xfrm>
+            <a:off x="3959352" y="3364992"/>
+            <a:ext cx="411480" cy="475488"/>
           </a:xfrm>
           <a:prstGeom prst="rect">
             <a:avLst/>
@@ -25093,13 +26187,13 @@
       </p:sp>
       <p:sp>
         <p:nvSpPr>
-          <p:cNvPr id="28" name="Shape 26"/>
-          <p:cNvSpPr/>
-          <p:nvPr/>
-        </p:nvSpPr>
-        <p:spPr>
-          <a:xfrm>
-            <a:off x="5742432" y="3364992"/>
+          <p:cNvPr id="31" name="Shape 29"/>
+          <p:cNvSpPr/>
+          <p:nvPr/>
+        </p:nvSpPr>
+        <p:spPr>
+          <a:xfrm>
+            <a:off x="4370832" y="3364992"/>
             <a:ext cx="1645920" cy="475488"/>
           </a:xfrm>
           <a:prstGeom prst="rect">
@@ -25120,13 +26214,13 @@
       </p:sp>
       <p:sp>
         <p:nvSpPr>
-          <p:cNvPr id="29" name="Text 27"/>
-          <p:cNvSpPr/>
-          <p:nvPr/>
-        </p:nvSpPr>
-        <p:spPr>
-          <a:xfrm>
-            <a:off x="5742432" y="3364992"/>
+          <p:cNvPr id="32" name="Text 30"/>
+          <p:cNvSpPr/>
+          <p:nvPr/>
+        </p:nvSpPr>
+        <p:spPr>
+          <a:xfrm>
+            <a:off x="4370832" y="3364992"/>
             <a:ext cx="1645920" cy="475488"/>
           </a:xfrm>
           <a:prstGeom prst="rect">
@@ -25151,7 +26245,7 @@
                 <a:ea typeface="Trebuchet MS" pitchFamily="34" charset="-122"/>
                 <a:cs typeface="Trebuchet MS" pitchFamily="34" charset="-120"/>
               </a:rPr>
-              <a:t>work</a:t>
+              <a:t>paint</a:t>
             </a:r>
             <a:endParaRPr lang="en-US" sz="1400" dirty="0"/>
           </a:p>
@@ -25159,7 +26253,112 @@
       </p:sp>
       <p:sp>
         <p:nvSpPr>
-          <p:cNvPr id="30" name="Shape 28"/>
+          <p:cNvPr id="33" name="Text 31"/>
+          <p:cNvSpPr/>
+          <p:nvPr/>
+        </p:nvSpPr>
+        <p:spPr>
+          <a:xfrm>
+            <a:off x="6016752" y="3364992"/>
+            <a:ext cx="411480" cy="475488"/>
+          </a:xfrm>
+          <a:prstGeom prst="rect">
+            <a:avLst/>
+          </a:prstGeom>
+          <a:noFill/>
+          <a:ln/>
+        </p:spPr>
+        <p:txBody>
+          <a:bodyPr wrap="square" lIns="0" tIns="0" rIns="0" bIns="0" rtlCol="0" anchor="ctr"/>
+          <a:lstStyle/>
+          <a:p>
+            <a:pPr algn="ctr" indent="0" marL="0">
+              <a:buNone/>
+            </a:pPr>
+            <a:r>
+              <a:rPr lang="en-US" sz="1600" b="1" dirty="0">
+                <a:solidFill>
+                  <a:srgbClr val="0D9488"/>
+                </a:solidFill>
+                <a:latin typeface="Trebuchet MS" pitchFamily="34" charset="0"/>
+                <a:ea typeface="Trebuchet MS" pitchFamily="34" charset="-122"/>
+                <a:cs typeface="Trebuchet MS" pitchFamily="34" charset="-120"/>
+              </a:rPr>
+              <a:t>·</a:t>
+            </a:r>
+            <a:endParaRPr lang="en-US" sz="1600" dirty="0"/>
+          </a:p>
+        </p:txBody>
+      </p:sp>
+      <p:sp>
+        <p:nvSpPr>
+          <p:cNvPr id="34" name="Shape 32"/>
+          <p:cNvSpPr/>
+          <p:nvPr/>
+        </p:nvSpPr>
+        <p:spPr>
+          <a:xfrm>
+            <a:off x="6428232" y="3364992"/>
+            <a:ext cx="1645920" cy="475488"/>
+          </a:xfrm>
+          <a:prstGeom prst="rect">
+            <a:avLst>
+              <a:gd name="adj" fmla="val 9615"/>
+            </a:avLst>
+          </a:prstGeom>
+          <a:solidFill>
+            <a:srgbClr val="FFFFFF"/>
+          </a:solidFill>
+          <a:ln w="12700">
+            <a:solidFill>
+              <a:srgbClr val="0D9488"/>
+            </a:solidFill>
+            <a:prstDash val="solid"/>
+          </a:ln>
+        </p:spPr>
+      </p:sp>
+      <p:sp>
+        <p:nvSpPr>
+          <p:cNvPr id="35" name="Text 33"/>
+          <p:cNvSpPr/>
+          <p:nvPr/>
+        </p:nvSpPr>
+        <p:spPr>
+          <a:xfrm>
+            <a:off x="6428232" y="3364992"/>
+            <a:ext cx="1645920" cy="475488"/>
+          </a:xfrm>
+          <a:prstGeom prst="rect">
+            <a:avLst/>
+          </a:prstGeom>
+          <a:noFill/>
+          <a:ln/>
+        </p:spPr>
+        <p:txBody>
+          <a:bodyPr wrap="square" lIns="0" tIns="0" rIns="0" bIns="0" rtlCol="0" anchor="ctr"/>
+          <a:lstStyle/>
+          <a:p>
+            <a:pPr algn="ctr" indent="0" marL="0">
+              <a:buNone/>
+            </a:pPr>
+            <a:r>
+              <a:rPr lang="en-US" sz="1400" b="1" dirty="0">
+                <a:solidFill>
+                  <a:srgbClr val="0D9488"/>
+                </a:solidFill>
+                <a:latin typeface="Trebuchet MS" pitchFamily="34" charset="0"/>
+                <a:ea typeface="Trebuchet MS" pitchFamily="34" charset="-122"/>
+                <a:cs typeface="Trebuchet MS" pitchFamily="34" charset="-120"/>
+              </a:rPr>
+              <a:t>ed</a:t>
+            </a:r>
+            <a:endParaRPr lang="en-US" sz="1400" dirty="0"/>
+          </a:p>
+        </p:txBody>
+      </p:sp>
+      <p:sp>
+        <p:nvSpPr>
+          <p:cNvPr id="36" name="Shape 34"/>
           <p:cNvSpPr/>
           <p:nvPr/>
         </p:nvSpPr>
@@ -25186,7 +26385,7 @@
       </p:sp>
       <p:sp>
         <p:nvSpPr>
-          <p:cNvPr id="31" name="Text 29"/>
+          <p:cNvPr id="37" name="Text 35"/>
           <p:cNvSpPr/>
           <p:nvPr/>
         </p:nvSpPr>
@@ -25225,7 +26424,7 @@
       </p:sp>
       <p:sp>
         <p:nvSpPr>
-          <p:cNvPr id="32" name="Shape 30"/>
+          <p:cNvPr id="38" name="Shape 36"/>
           <p:cNvSpPr/>
           <p:nvPr/>
         </p:nvSpPr>
@@ -25252,7 +26451,7 @@
       </p:sp>
       <p:sp>
         <p:nvSpPr>
-          <p:cNvPr id="33" name="Text 31"/>
+          <p:cNvPr id="39" name="Text 37"/>
           <p:cNvSpPr/>
           <p:nvPr/>
         </p:nvSpPr>
@@ -25575,7 +26774,7 @@
                 <a:ea typeface="Calibri" pitchFamily="34" charset="-122"/>
                 <a:cs typeface="Calibri" pitchFamily="34" charset="-120"/>
               </a:rPr>
-              <a:t>Word Labs  •  wordlabs.app  •  Root: 'paint' = to colour or coat surface</a:t>
+              <a:t>Word Labs  •  wordlabs.app  •  Root: 'paint' = to colour a surface; a coloured liquid</a:t>
             </a:r>
             <a:endParaRPr lang="en-US" sz="800" dirty="0"/>
           </a:p>
@@ -25714,7 +26913,7 @@
                 <a:ea typeface="Trebuchet MS" pitchFamily="34" charset="-122"/>
                 <a:cs typeface="Trebuchet MS" pitchFamily="34" charset="-120"/>
               </a:rPr>
-              <a:t>paintwork</a:t>
+              <a:t>repainted</a:t>
             </a:r>
             <a:endParaRPr lang="en-US" sz="2800" dirty="0"/>
           </a:p>
@@ -25794,7 +26993,7 @@
         </p:nvSpPr>
         <p:spPr>
           <a:xfrm>
-            <a:off x="2938272" y="2258568"/>
+            <a:off x="2221992" y="2258568"/>
             <a:ext cx="1828800" cy="292608"/>
           </a:xfrm>
           <a:prstGeom prst="rect">
@@ -25803,11 +27002,11 @@
             </a:avLst>
           </a:prstGeom>
           <a:solidFill>
-            <a:srgbClr val="CCFBF1"/>
+            <a:srgbClr val="DDD6FE"/>
           </a:solidFill>
           <a:ln w="19050">
             <a:solidFill>
-              <a:srgbClr val="0D9488"/>
+              <a:srgbClr val="7C3AED"/>
             </a:solidFill>
             <a:prstDash val="solid"/>
           </a:ln>
@@ -25828,7 +27027,7 @@
         </p:nvSpPr>
         <p:spPr>
           <a:xfrm>
-            <a:off x="2938272" y="2258568"/>
+            <a:off x="2221992" y="2258568"/>
             <a:ext cx="1828800" cy="292608"/>
           </a:xfrm>
           <a:prstGeom prst="rect">
@@ -25847,13 +27046,13 @@
             <a:r>
               <a:rPr lang="en-US" sz="1300" b="1" dirty="0">
                 <a:solidFill>
-                  <a:srgbClr val="0F766E"/>
+                  <a:srgbClr val="4C1D95"/>
                 </a:solidFill>
                 <a:latin typeface="Trebuchet MS" pitchFamily="34" charset="0"/>
                 <a:ea typeface="Trebuchet MS" pitchFamily="34" charset="-122"/>
                 <a:cs typeface="Trebuchet MS" pitchFamily="34" charset="-120"/>
               </a:rPr>
-              <a:t>paint</a:t>
+              <a:t>re</a:t>
             </a:r>
             <a:endParaRPr lang="en-US" sz="1300" dirty="0"/>
           </a:p>
@@ -25867,7 +27066,7 @@
         </p:nvSpPr>
         <p:spPr>
           <a:xfrm>
-            <a:off x="2938272" y="2569464"/>
+            <a:off x="2221992" y="2569464"/>
             <a:ext cx="1828800" cy="201168"/>
           </a:xfrm>
           <a:prstGeom prst="rect">
@@ -25892,7 +27091,7 @@
                 <a:ea typeface="Calibri" pitchFamily="34" charset="-122"/>
                 <a:cs typeface="Calibri" pitchFamily="34" charset="-120"/>
               </a:rPr>
-              <a:t>to colour a surface</a:t>
+              <a:t>again</a:t>
             </a:r>
             <a:endParaRPr lang="en-US" sz="850" dirty="0"/>
           </a:p>
@@ -25906,7 +27105,7 @@
         </p:nvSpPr>
         <p:spPr>
           <a:xfrm>
-            <a:off x="5803392" y="2258568"/>
+            <a:off x="4370832" y="2258568"/>
             <a:ext cx="1828800" cy="292608"/>
           </a:xfrm>
           <a:prstGeom prst="rect">
@@ -25915,11 +27114,11 @@
             </a:avLst>
           </a:prstGeom>
           <a:solidFill>
-            <a:srgbClr val="FCE7F3"/>
+            <a:srgbClr val="CCFBF1"/>
           </a:solidFill>
           <a:ln w="19050">
             <a:solidFill>
-              <a:srgbClr val="DB2777"/>
+              <a:srgbClr val="0D9488"/>
             </a:solidFill>
             <a:prstDash val="solid"/>
           </a:ln>
@@ -25940,7 +27139,7 @@
         </p:nvSpPr>
         <p:spPr>
           <a:xfrm>
-            <a:off x="5803392" y="2258568"/>
+            <a:off x="4370832" y="2258568"/>
             <a:ext cx="1828800" cy="292608"/>
           </a:xfrm>
           <a:prstGeom prst="rect">
@@ -25959,13 +27158,13 @@
             <a:r>
               <a:rPr lang="en-US" sz="1300" b="1" dirty="0">
                 <a:solidFill>
-                  <a:srgbClr val="9D174D"/>
+                  <a:srgbClr val="0F766E"/>
                 </a:solidFill>
                 <a:latin typeface="Trebuchet MS" pitchFamily="34" charset="0"/>
                 <a:ea typeface="Trebuchet MS" pitchFamily="34" charset="-122"/>
                 <a:cs typeface="Trebuchet MS" pitchFamily="34" charset="-120"/>
               </a:rPr>
-              <a:t>work</a:t>
+              <a:t>paint</a:t>
             </a:r>
             <a:endParaRPr lang="en-US" sz="1300" dirty="0"/>
           </a:p>
@@ -25979,7 +27178,7 @@
         </p:nvSpPr>
         <p:spPr>
           <a:xfrm>
-            <a:off x="5803392" y="2569464"/>
+            <a:off x="4370832" y="2569464"/>
             <a:ext cx="1828800" cy="201168"/>
           </a:xfrm>
           <a:prstGeom prst="rect">
@@ -26004,7 +27203,7 @@
                 <a:ea typeface="Calibri" pitchFamily="34" charset="-122"/>
                 <a:cs typeface="Calibri" pitchFamily="34" charset="-120"/>
               </a:rPr>
-              <a:t>result or surface area</a:t>
+              <a:t>to colour a surface; a coloured liquid</a:t>
             </a:r>
             <a:endParaRPr lang="en-US" sz="850" dirty="0"/>
           </a:p>
@@ -26013,6 +27212,118 @@
       <p:sp>
         <p:nvSpPr>
           <p:cNvPr id="22" name="Shape 20"/>
+          <p:cNvSpPr/>
+          <p:nvPr/>
+        </p:nvSpPr>
+        <p:spPr>
+          <a:xfrm>
+            <a:off x="6519672" y="2258568"/>
+            <a:ext cx="1828800" cy="292608"/>
+          </a:xfrm>
+          <a:prstGeom prst="rect">
+            <a:avLst>
+              <a:gd name="adj" fmla="val 25000"/>
+            </a:avLst>
+          </a:prstGeom>
+          <a:solidFill>
+            <a:srgbClr val="FCE7F3"/>
+          </a:solidFill>
+          <a:ln w="19050">
+            <a:solidFill>
+              <a:srgbClr val="DB2777"/>
+            </a:solidFill>
+            <a:prstDash val="solid"/>
+          </a:ln>
+          <a:effectLst>
+            <a:outerShdw sx="100000" sy="100000" kx="0" ky="0" algn="bl" rotWithShape="0" blurRad="101600" dist="38100" dir="8100000">
+              <a:srgbClr val="000000">
+                <a:alpha val="12000"/>
+              </a:srgbClr>
+            </a:outerShdw>
+          </a:effectLst>
+        </p:spPr>
+      </p:sp>
+      <p:sp>
+        <p:nvSpPr>
+          <p:cNvPr id="23" name="Text 21"/>
+          <p:cNvSpPr/>
+          <p:nvPr/>
+        </p:nvSpPr>
+        <p:spPr>
+          <a:xfrm>
+            <a:off x="6519672" y="2258568"/>
+            <a:ext cx="1828800" cy="292608"/>
+          </a:xfrm>
+          <a:prstGeom prst="rect">
+            <a:avLst/>
+          </a:prstGeom>
+          <a:noFill/>
+          <a:ln/>
+        </p:spPr>
+        <p:txBody>
+          <a:bodyPr wrap="square" lIns="0" tIns="0" rIns="0" bIns="0" rtlCol="0" anchor="ctr"/>
+          <a:lstStyle/>
+          <a:p>
+            <a:pPr algn="ctr" indent="0" marL="0">
+              <a:buNone/>
+            </a:pPr>
+            <a:r>
+              <a:rPr lang="en-US" sz="1300" b="1" dirty="0">
+                <a:solidFill>
+                  <a:srgbClr val="9D174D"/>
+                </a:solidFill>
+                <a:latin typeface="Trebuchet MS" pitchFamily="34" charset="0"/>
+                <a:ea typeface="Trebuchet MS" pitchFamily="34" charset="-122"/>
+                <a:cs typeface="Trebuchet MS" pitchFamily="34" charset="-120"/>
+              </a:rPr>
+              <a:t>ed</a:t>
+            </a:r>
+            <a:endParaRPr lang="en-US" sz="1300" dirty="0"/>
+          </a:p>
+        </p:txBody>
+      </p:sp>
+      <p:sp>
+        <p:nvSpPr>
+          <p:cNvPr id="24" name="Text 22"/>
+          <p:cNvSpPr/>
+          <p:nvPr/>
+        </p:nvSpPr>
+        <p:spPr>
+          <a:xfrm>
+            <a:off x="6519672" y="2569464"/>
+            <a:ext cx="1828800" cy="201168"/>
+          </a:xfrm>
+          <a:prstGeom prst="rect">
+            <a:avLst/>
+          </a:prstGeom>
+          <a:noFill/>
+          <a:ln/>
+        </p:spPr>
+        <p:txBody>
+          <a:bodyPr wrap="square" lIns="0" tIns="0" rIns="0" bIns="0" rtlCol="0" anchor="t"/>
+          <a:lstStyle/>
+          <a:p>
+            <a:pPr algn="ctr" indent="0" marL="0">
+              <a:buNone/>
+            </a:pPr>
+            <a:r>
+              <a:rPr lang="en-US" sz="850" dirty="0">
+                <a:solidFill>
+                  <a:srgbClr val="475569"/>
+                </a:solidFill>
+                <a:latin typeface="Calibri" pitchFamily="34" charset="0"/>
+                <a:ea typeface="Calibri" pitchFamily="34" charset="-122"/>
+                <a:cs typeface="Calibri" pitchFamily="34" charset="-120"/>
+              </a:rPr>
+              <a:t>past tense</a:t>
+            </a:r>
+            <a:endParaRPr lang="en-US" sz="850" dirty="0"/>
+          </a:p>
+        </p:txBody>
+      </p:sp>
+      <p:sp>
+        <p:nvSpPr>
+          <p:cNvPr id="25" name="Shape 23"/>
           <p:cNvSpPr/>
           <p:nvPr/>
         </p:nvSpPr>
@@ -26039,7 +27350,7 @@
       </p:sp>
       <p:sp>
         <p:nvSpPr>
-          <p:cNvPr id="23" name="Text 21"/>
+          <p:cNvPr id="26" name="Text 24"/>
           <p:cNvSpPr/>
           <p:nvPr/>
         </p:nvSpPr>
@@ -26078,7 +27389,7 @@
       </p:sp>
       <p:sp>
         <p:nvSpPr>
-          <p:cNvPr id="24" name="Shape 22"/>
+          <p:cNvPr id="27" name="Shape 25"/>
           <p:cNvSpPr/>
           <p:nvPr/>
         </p:nvSpPr>
@@ -26105,13 +27416,13 @@
       </p:sp>
       <p:sp>
         <p:nvSpPr>
-          <p:cNvPr id="25" name="Shape 23"/>
-          <p:cNvSpPr/>
-          <p:nvPr/>
-        </p:nvSpPr>
-        <p:spPr>
-          <a:xfrm>
-            <a:off x="2999232" y="3364992"/>
+          <p:cNvPr id="28" name="Shape 26"/>
+          <p:cNvSpPr/>
+          <p:nvPr/>
+        </p:nvSpPr>
+        <p:spPr>
+          <a:xfrm>
+            <a:off x="2313432" y="3364992"/>
             <a:ext cx="1645920" cy="475488"/>
           </a:xfrm>
           <a:prstGeom prst="rect">
@@ -26132,13 +27443,13 @@
       </p:sp>
       <p:sp>
         <p:nvSpPr>
-          <p:cNvPr id="26" name="Text 24"/>
-          <p:cNvSpPr/>
-          <p:nvPr/>
-        </p:nvSpPr>
-        <p:spPr>
-          <a:xfrm>
-            <a:off x="2999232" y="3364992"/>
+          <p:cNvPr id="29" name="Text 27"/>
+          <p:cNvSpPr/>
+          <p:nvPr/>
+        </p:nvSpPr>
+        <p:spPr>
+          <a:xfrm>
+            <a:off x="2313432" y="3364992"/>
             <a:ext cx="1645920" cy="475488"/>
           </a:xfrm>
           <a:prstGeom prst="rect">
@@ -26163,7 +27474,7 @@
                 <a:ea typeface="Trebuchet MS" pitchFamily="34" charset="-122"/>
                 <a:cs typeface="Trebuchet MS" pitchFamily="34" charset="-120"/>
               </a:rPr>
-              <a:t>paint</a:t>
+              <a:t>re</a:t>
             </a:r>
             <a:endParaRPr lang="en-US" sz="1400" dirty="0"/>
           </a:p>
@@ -26171,14 +27482,14 @@
       </p:sp>
       <p:sp>
         <p:nvSpPr>
-          <p:cNvPr id="27" name="Text 25"/>
-          <p:cNvSpPr/>
-          <p:nvPr/>
-        </p:nvSpPr>
-        <p:spPr>
-          <a:xfrm>
-            <a:off x="4645152" y="3364992"/>
-            <a:ext cx="1097280" cy="475488"/>
+          <p:cNvPr id="30" name="Text 28"/>
+          <p:cNvSpPr/>
+          <p:nvPr/>
+        </p:nvSpPr>
+        <p:spPr>
+          <a:xfrm>
+            <a:off x="3959352" y="3364992"/>
+            <a:ext cx="411480" cy="475488"/>
           </a:xfrm>
           <a:prstGeom prst="rect">
             <a:avLst/>
@@ -26210,13 +27521,13 @@
       </p:sp>
       <p:sp>
         <p:nvSpPr>
-          <p:cNvPr id="28" name="Shape 26"/>
-          <p:cNvSpPr/>
-          <p:nvPr/>
-        </p:nvSpPr>
-        <p:spPr>
-          <a:xfrm>
-            <a:off x="5742432" y="3364992"/>
+          <p:cNvPr id="31" name="Shape 29"/>
+          <p:cNvSpPr/>
+          <p:nvPr/>
+        </p:nvSpPr>
+        <p:spPr>
+          <a:xfrm>
+            <a:off x="4370832" y="3364992"/>
             <a:ext cx="1645920" cy="475488"/>
           </a:xfrm>
           <a:prstGeom prst="rect">
@@ -26237,13 +27548,13 @@
       </p:sp>
       <p:sp>
         <p:nvSpPr>
-          <p:cNvPr id="29" name="Text 27"/>
-          <p:cNvSpPr/>
-          <p:nvPr/>
-        </p:nvSpPr>
-        <p:spPr>
-          <a:xfrm>
-            <a:off x="5742432" y="3364992"/>
+          <p:cNvPr id="32" name="Text 30"/>
+          <p:cNvSpPr/>
+          <p:nvPr/>
+        </p:nvSpPr>
+        <p:spPr>
+          <a:xfrm>
+            <a:off x="4370832" y="3364992"/>
             <a:ext cx="1645920" cy="475488"/>
           </a:xfrm>
           <a:prstGeom prst="rect">
@@ -26268,7 +27579,7 @@
                 <a:ea typeface="Trebuchet MS" pitchFamily="34" charset="-122"/>
                 <a:cs typeface="Trebuchet MS" pitchFamily="34" charset="-120"/>
               </a:rPr>
-              <a:t>work</a:t>
+              <a:t>paint</a:t>
             </a:r>
             <a:endParaRPr lang="en-US" sz="1400" dirty="0"/>
           </a:p>
@@ -26276,7 +27587,112 @@
       </p:sp>
       <p:sp>
         <p:nvSpPr>
-          <p:cNvPr id="30" name="Shape 28"/>
+          <p:cNvPr id="33" name="Text 31"/>
+          <p:cNvSpPr/>
+          <p:nvPr/>
+        </p:nvSpPr>
+        <p:spPr>
+          <a:xfrm>
+            <a:off x="6016752" y="3364992"/>
+            <a:ext cx="411480" cy="475488"/>
+          </a:xfrm>
+          <a:prstGeom prst="rect">
+            <a:avLst/>
+          </a:prstGeom>
+          <a:noFill/>
+          <a:ln/>
+        </p:spPr>
+        <p:txBody>
+          <a:bodyPr wrap="square" lIns="0" tIns="0" rIns="0" bIns="0" rtlCol="0" anchor="ctr"/>
+          <a:lstStyle/>
+          <a:p>
+            <a:pPr algn="ctr" indent="0" marL="0">
+              <a:buNone/>
+            </a:pPr>
+            <a:r>
+              <a:rPr lang="en-US" sz="1600" b="1" dirty="0">
+                <a:solidFill>
+                  <a:srgbClr val="0D9488"/>
+                </a:solidFill>
+                <a:latin typeface="Trebuchet MS" pitchFamily="34" charset="0"/>
+                <a:ea typeface="Trebuchet MS" pitchFamily="34" charset="-122"/>
+                <a:cs typeface="Trebuchet MS" pitchFamily="34" charset="-120"/>
+              </a:rPr>
+              <a:t>·</a:t>
+            </a:r>
+            <a:endParaRPr lang="en-US" sz="1600" dirty="0"/>
+          </a:p>
+        </p:txBody>
+      </p:sp>
+      <p:sp>
+        <p:nvSpPr>
+          <p:cNvPr id="34" name="Shape 32"/>
+          <p:cNvSpPr/>
+          <p:nvPr/>
+        </p:nvSpPr>
+        <p:spPr>
+          <a:xfrm>
+            <a:off x="6428232" y="3364992"/>
+            <a:ext cx="1645920" cy="475488"/>
+          </a:xfrm>
+          <a:prstGeom prst="rect">
+            <a:avLst>
+              <a:gd name="adj" fmla="val 9615"/>
+            </a:avLst>
+          </a:prstGeom>
+          <a:solidFill>
+            <a:srgbClr val="FFFFFF"/>
+          </a:solidFill>
+          <a:ln w="12700">
+            <a:solidFill>
+              <a:srgbClr val="0D9488"/>
+            </a:solidFill>
+            <a:prstDash val="solid"/>
+          </a:ln>
+        </p:spPr>
+      </p:sp>
+      <p:sp>
+        <p:nvSpPr>
+          <p:cNvPr id="35" name="Text 33"/>
+          <p:cNvSpPr/>
+          <p:nvPr/>
+        </p:nvSpPr>
+        <p:spPr>
+          <a:xfrm>
+            <a:off x="6428232" y="3364992"/>
+            <a:ext cx="1645920" cy="475488"/>
+          </a:xfrm>
+          <a:prstGeom prst="rect">
+            <a:avLst/>
+          </a:prstGeom>
+          <a:noFill/>
+          <a:ln/>
+        </p:spPr>
+        <p:txBody>
+          <a:bodyPr wrap="square" lIns="0" tIns="0" rIns="0" bIns="0" rtlCol="0" anchor="ctr"/>
+          <a:lstStyle/>
+          <a:p>
+            <a:pPr algn="ctr" indent="0" marL="0">
+              <a:buNone/>
+            </a:pPr>
+            <a:r>
+              <a:rPr lang="en-US" sz="1400" b="1" dirty="0">
+                <a:solidFill>
+                  <a:srgbClr val="0D9488"/>
+                </a:solidFill>
+                <a:latin typeface="Trebuchet MS" pitchFamily="34" charset="0"/>
+                <a:ea typeface="Trebuchet MS" pitchFamily="34" charset="-122"/>
+                <a:cs typeface="Trebuchet MS" pitchFamily="34" charset="-120"/>
+              </a:rPr>
+              <a:t>ed</a:t>
+            </a:r>
+            <a:endParaRPr lang="en-US" sz="1400" dirty="0"/>
+          </a:p>
+        </p:txBody>
+      </p:sp>
+      <p:sp>
+        <p:nvSpPr>
+          <p:cNvPr id="36" name="Shape 34"/>
           <p:cNvSpPr/>
           <p:nvPr/>
         </p:nvSpPr>
@@ -26303,7 +27719,7 @@
       </p:sp>
       <p:sp>
         <p:nvSpPr>
-          <p:cNvPr id="31" name="Text 29"/>
+          <p:cNvPr id="37" name="Text 35"/>
           <p:cNvSpPr/>
           <p:nvPr/>
         </p:nvSpPr>
@@ -26342,7 +27758,7 @@
       </p:sp>
       <p:sp>
         <p:nvSpPr>
-          <p:cNvPr id="32" name="Shape 30"/>
+          <p:cNvPr id="38" name="Shape 36"/>
           <p:cNvSpPr/>
           <p:nvPr/>
         </p:nvSpPr>
@@ -26369,7 +27785,7 @@
       </p:sp>
       <p:sp>
         <p:nvSpPr>
-          <p:cNvPr id="33" name="Shape 31"/>
+          <p:cNvPr id="39" name="Shape 37"/>
           <p:cNvSpPr/>
           <p:nvPr/>
         </p:nvSpPr>
@@ -26396,7 +27812,7 @@
       </p:sp>
       <p:sp>
         <p:nvSpPr>
-          <p:cNvPr id="34" name="Text 32"/>
+          <p:cNvPr id="40" name="Text 38"/>
           <p:cNvSpPr/>
           <p:nvPr/>
         </p:nvSpPr>
@@ -26427,7 +27843,7 @@
                 <a:ea typeface="Trebuchet MS" pitchFamily="34" charset="-122"/>
                 <a:cs typeface="Trebuchet MS" pitchFamily="34" charset="-120"/>
               </a:rPr>
-              <a:t>p</a:t>
+              <a:t>r</a:t>
             </a:r>
             <a:endParaRPr lang="en-US" sz="900" dirty="0"/>
           </a:p>
@@ -26435,7 +27851,7 @@
       </p:sp>
       <p:sp>
         <p:nvSpPr>
-          <p:cNvPr id="35" name="Shape 33"/>
+          <p:cNvPr id="41" name="Shape 39"/>
           <p:cNvSpPr/>
           <p:nvPr/>
         </p:nvSpPr>
@@ -26462,7 +27878,7 @@
       </p:sp>
       <p:sp>
         <p:nvSpPr>
-          <p:cNvPr id="36" name="Text 34"/>
+          <p:cNvPr id="42" name="Text 40"/>
           <p:cNvSpPr/>
           <p:nvPr/>
         </p:nvSpPr>
@@ -26493,7 +27909,7 @@
                 <a:ea typeface="Trebuchet MS" pitchFamily="34" charset="-122"/>
                 <a:cs typeface="Trebuchet MS" pitchFamily="34" charset="-120"/>
               </a:rPr>
-              <a:t>ai</a:t>
+              <a:t>e</a:t>
             </a:r>
             <a:endParaRPr lang="en-US" sz="900" dirty="0"/>
           </a:p>
@@ -26501,7 +27917,7 @@
       </p:sp>
       <p:sp>
         <p:nvSpPr>
-          <p:cNvPr id="37" name="Shape 35"/>
+          <p:cNvPr id="43" name="Shape 41"/>
           <p:cNvSpPr/>
           <p:nvPr/>
         </p:nvSpPr>
@@ -26528,7 +27944,7 @@
       </p:sp>
       <p:sp>
         <p:nvSpPr>
-          <p:cNvPr id="38" name="Text 36"/>
+          <p:cNvPr id="44" name="Text 42"/>
           <p:cNvSpPr/>
           <p:nvPr/>
         </p:nvSpPr>
@@ -26559,7 +27975,7 @@
                 <a:ea typeface="Trebuchet MS" pitchFamily="34" charset="-122"/>
                 <a:cs typeface="Trebuchet MS" pitchFamily="34" charset="-120"/>
               </a:rPr>
-              <a:t>n</a:t>
+              <a:t>p</a:t>
             </a:r>
             <a:endParaRPr lang="en-US" sz="900" dirty="0"/>
           </a:p>
@@ -26567,7 +27983,7 @@
       </p:sp>
       <p:sp>
         <p:nvSpPr>
-          <p:cNvPr id="39" name="Shape 37"/>
+          <p:cNvPr id="45" name="Shape 43"/>
           <p:cNvSpPr/>
           <p:nvPr/>
         </p:nvSpPr>
@@ -26594,7 +28010,7 @@
       </p:sp>
       <p:sp>
         <p:nvSpPr>
-          <p:cNvPr id="40" name="Text 38"/>
+          <p:cNvPr id="46" name="Text 44"/>
           <p:cNvSpPr/>
           <p:nvPr/>
         </p:nvSpPr>
@@ -26625,7 +28041,7 @@
                 <a:ea typeface="Trebuchet MS" pitchFamily="34" charset="-122"/>
                 <a:cs typeface="Trebuchet MS" pitchFamily="34" charset="-120"/>
               </a:rPr>
-              <a:t>t</a:t>
+              <a:t>ai</a:t>
             </a:r>
             <a:endParaRPr lang="en-US" sz="900" dirty="0"/>
           </a:p>
@@ -26633,7 +28049,7 @@
       </p:sp>
       <p:sp>
         <p:nvSpPr>
-          <p:cNvPr id="41" name="Shape 39"/>
+          <p:cNvPr id="47" name="Shape 45"/>
           <p:cNvSpPr/>
           <p:nvPr/>
         </p:nvSpPr>
@@ -26660,7 +28076,7 @@
       </p:sp>
       <p:sp>
         <p:nvSpPr>
-          <p:cNvPr id="42" name="Text 40"/>
+          <p:cNvPr id="48" name="Text 46"/>
           <p:cNvSpPr/>
           <p:nvPr/>
         </p:nvSpPr>
@@ -26691,7 +28107,7 @@
                 <a:ea typeface="Trebuchet MS" pitchFamily="34" charset="-122"/>
                 <a:cs typeface="Trebuchet MS" pitchFamily="34" charset="-120"/>
               </a:rPr>
-              <a:t>w</a:t>
+              <a:t>n</a:t>
             </a:r>
             <a:endParaRPr lang="en-US" sz="900" dirty="0"/>
           </a:p>
@@ -26699,7 +28115,7 @@
       </p:sp>
       <p:sp>
         <p:nvSpPr>
-          <p:cNvPr id="43" name="Shape 41"/>
+          <p:cNvPr id="49" name="Shape 47"/>
           <p:cNvSpPr/>
           <p:nvPr/>
         </p:nvSpPr>
@@ -26726,7 +28142,7 @@
       </p:sp>
       <p:sp>
         <p:nvSpPr>
-          <p:cNvPr id="44" name="Text 42"/>
+          <p:cNvPr id="50" name="Text 48"/>
           <p:cNvSpPr/>
           <p:nvPr/>
         </p:nvSpPr>
@@ -26757,7 +28173,7 @@
                 <a:ea typeface="Trebuchet MS" pitchFamily="34" charset="-122"/>
                 <a:cs typeface="Trebuchet MS" pitchFamily="34" charset="-120"/>
               </a:rPr>
-              <a:t>or</a:t>
+              <a:t>t</a:t>
             </a:r>
             <a:endParaRPr lang="en-US" sz="900" dirty="0"/>
           </a:p>
@@ -26765,7 +28181,7 @@
       </p:sp>
       <p:sp>
         <p:nvSpPr>
-          <p:cNvPr id="45" name="Shape 43"/>
+          <p:cNvPr id="51" name="Shape 49"/>
           <p:cNvSpPr/>
           <p:nvPr/>
         </p:nvSpPr>
@@ -26792,7 +28208,7 @@
       </p:sp>
       <p:sp>
         <p:nvSpPr>
-          <p:cNvPr id="46" name="Text 44"/>
+          <p:cNvPr id="52" name="Text 50"/>
           <p:cNvSpPr/>
           <p:nvPr/>
         </p:nvSpPr>
@@ -26823,7 +28239,7 @@
                 <a:ea typeface="Trebuchet MS" pitchFamily="34" charset="-122"/>
                 <a:cs typeface="Trebuchet MS" pitchFamily="34" charset="-120"/>
               </a:rPr>
-              <a:t>k</a:t>
+              <a:t>ed</a:t>
             </a:r>
             <a:endParaRPr lang="en-US" sz="900" dirty="0"/>
           </a:p>
@@ -27115,7 +28531,7 @@
                 <a:ea typeface="Calibri" pitchFamily="34" charset="-122"/>
                 <a:cs typeface="Calibri" pitchFamily="34" charset="-120"/>
               </a:rPr>
-              <a:t>Word Labs  •  wordlabs.app  •  Root: 'paint' = to colour or coat surface</a:t>
+              <a:t>Word Labs  •  wordlabs.app  •  Root: 'paint' = to colour a surface; a coloured liquid</a:t>
             </a:r>
             <a:endParaRPr lang="en-US" sz="800" dirty="0"/>
           </a:p>
@@ -27254,7 +28670,7 @@
                 <a:ea typeface="Trebuchet MS" pitchFamily="34" charset="-122"/>
                 <a:cs typeface="Trebuchet MS" pitchFamily="34" charset="-120"/>
               </a:rPr>
-              <a:t>unpainted</a:t>
+              <a:t>repainting</a:t>
             </a:r>
             <a:endParaRPr lang="en-US" sz="2800" dirty="0"/>
           </a:p>
@@ -27942,7 +29358,7 @@
                 <a:ea typeface="Calibri" pitchFamily="34" charset="-122"/>
                 <a:cs typeface="Calibri" pitchFamily="34" charset="-120"/>
               </a:rPr>
-              <a:t>Word Labs  •  wordlabs.app  •  Root: 'paint' = to colour or coat surface</a:t>
+              <a:t>Word Labs  •  wordlabs.app  •  Root: 'paint' = to colour a surface; a coloured liquid</a:t>
             </a:r>
             <a:endParaRPr lang="en-US" sz="800" dirty="0"/>
           </a:p>
@@ -28081,7 +29497,7 @@
                 <a:ea typeface="Trebuchet MS" pitchFamily="34" charset="-122"/>
                 <a:cs typeface="Trebuchet MS" pitchFamily="34" charset="-120"/>
               </a:rPr>
-              <a:t>unpainted</a:t>
+              <a:t>repainting</a:t>
             </a:r>
             <a:endParaRPr lang="en-US" sz="2800" dirty="0"/>
           </a:p>
@@ -28220,7 +29636,7 @@
                 <a:ea typeface="Trebuchet MS" pitchFamily="34" charset="-122"/>
                 <a:cs typeface="Trebuchet MS" pitchFamily="34" charset="-120"/>
               </a:rPr>
-              <a:t>un</a:t>
+              <a:t>re</a:t>
             </a:r>
             <a:endParaRPr lang="en-US" sz="1300" dirty="0"/>
           </a:p>
@@ -28259,7 +29675,7 @@
                 <a:ea typeface="Calibri" pitchFamily="34" charset="-122"/>
                 <a:cs typeface="Calibri" pitchFamily="34" charset="-120"/>
               </a:rPr>
-              <a:t>not</a:t>
+              <a:t>again</a:t>
             </a:r>
             <a:endParaRPr lang="en-US" sz="850" dirty="0"/>
           </a:p>
@@ -28371,7 +29787,7 @@
                 <a:ea typeface="Calibri" pitchFamily="34" charset="-122"/>
                 <a:cs typeface="Calibri" pitchFamily="34" charset="-120"/>
               </a:rPr>
-              <a:t>to colour a surface</a:t>
+              <a:t>to colour a surface; a coloured liquid</a:t>
             </a:r>
             <a:endParaRPr lang="en-US" sz="850" dirty="0"/>
           </a:p>
@@ -28444,7 +29860,7 @@
                 <a:ea typeface="Trebuchet MS" pitchFamily="34" charset="-122"/>
                 <a:cs typeface="Trebuchet MS" pitchFamily="34" charset="-120"/>
               </a:rPr>
-              <a:t>ed</a:t>
+              <a:t>ing</a:t>
             </a:r>
             <a:endParaRPr lang="en-US" sz="1300" dirty="0"/>
           </a:p>
@@ -28483,7 +29899,7 @@
                 <a:ea typeface="Calibri" pitchFamily="34" charset="-122"/>
                 <a:cs typeface="Calibri" pitchFamily="34" charset="-120"/>
               </a:rPr>
-              <a:t>done in the past</a:t>
+              <a:t>happening now</a:t>
             </a:r>
             <a:endParaRPr lang="en-US" sz="850" dirty="0"/>
           </a:p>
@@ -29039,7 +30455,7 @@
                 <a:ea typeface="Calibri" pitchFamily="34" charset="-122"/>
                 <a:cs typeface="Calibri" pitchFamily="34" charset="-120"/>
               </a:rPr>
-              <a:t>Word Labs  •  wordlabs.app  •  Root: 'paint' = to colour or coat surface</a:t>
+              <a:t>Word Labs  •  wordlabs.app  •  Root: 'paint' = to colour a surface; a coloured liquid</a:t>
             </a:r>
             <a:endParaRPr lang="en-US" sz="800" dirty="0"/>
           </a:p>
@@ -29178,7 +30594,7 @@
                 <a:ea typeface="Trebuchet MS" pitchFamily="34" charset="-122"/>
                 <a:cs typeface="Trebuchet MS" pitchFamily="34" charset="-120"/>
               </a:rPr>
-              <a:t>unpainted</a:t>
+              <a:t>repainting</a:t>
             </a:r>
             <a:endParaRPr lang="en-US" sz="2800" dirty="0"/>
           </a:p>
@@ -29317,7 +30733,7 @@
                 <a:ea typeface="Trebuchet MS" pitchFamily="34" charset="-122"/>
                 <a:cs typeface="Trebuchet MS" pitchFamily="34" charset="-120"/>
               </a:rPr>
-              <a:t>un</a:t>
+              <a:t>re</a:t>
             </a:r>
             <a:endParaRPr lang="en-US" sz="1300" dirty="0"/>
           </a:p>
@@ -29356,7 +30772,7 @@
                 <a:ea typeface="Calibri" pitchFamily="34" charset="-122"/>
                 <a:cs typeface="Calibri" pitchFamily="34" charset="-120"/>
               </a:rPr>
-              <a:t>not</a:t>
+              <a:t>again</a:t>
             </a:r>
             <a:endParaRPr lang="en-US" sz="850" dirty="0"/>
           </a:p>
@@ -29468,7 +30884,7 @@
                 <a:ea typeface="Calibri" pitchFamily="34" charset="-122"/>
                 <a:cs typeface="Calibri" pitchFamily="34" charset="-120"/>
               </a:rPr>
-              <a:t>to colour a surface</a:t>
+              <a:t>to colour a surface; a coloured liquid</a:t>
             </a:r>
             <a:endParaRPr lang="en-US" sz="850" dirty="0"/>
           </a:p>
@@ -29541,7 +30957,7 @@
                 <a:ea typeface="Trebuchet MS" pitchFamily="34" charset="-122"/>
                 <a:cs typeface="Trebuchet MS" pitchFamily="34" charset="-120"/>
               </a:rPr>
-              <a:t>ed</a:t>
+              <a:t>ing</a:t>
             </a:r>
             <a:endParaRPr lang="en-US" sz="1300" dirty="0"/>
           </a:p>
@@ -29580,7 +30996,7 @@
                 <a:ea typeface="Calibri" pitchFamily="34" charset="-122"/>
                 <a:cs typeface="Calibri" pitchFamily="34" charset="-120"/>
               </a:rPr>
-              <a:t>done in the past</a:t>
+              <a:t>happening now</a:t>
             </a:r>
             <a:endParaRPr lang="en-US" sz="850" dirty="0"/>
           </a:p>
@@ -29739,7 +31155,7 @@
                 <a:ea typeface="Trebuchet MS" pitchFamily="34" charset="-122"/>
                 <a:cs typeface="Trebuchet MS" pitchFamily="34" charset="-120"/>
               </a:rPr>
-              <a:t>un</a:t>
+              <a:t>re</a:t>
             </a:r>
             <a:endParaRPr lang="en-US" sz="1400" dirty="0"/>
           </a:p>
@@ -29844,7 +31260,7 @@
                 <a:ea typeface="Trebuchet MS" pitchFamily="34" charset="-122"/>
                 <a:cs typeface="Trebuchet MS" pitchFamily="34" charset="-120"/>
               </a:rPr>
-              <a:t>pain</a:t>
+              <a:t>paint</a:t>
             </a:r>
             <a:endParaRPr lang="en-US" sz="1400" dirty="0"/>
           </a:p>
@@ -29949,7 +31365,7 @@
                 <a:ea typeface="Trebuchet MS" pitchFamily="34" charset="-122"/>
                 <a:cs typeface="Trebuchet MS" pitchFamily="34" charset="-120"/>
               </a:rPr>
-              <a:t>ted</a:t>
+              <a:t>ing</a:t>
             </a:r>
             <a:endParaRPr lang="en-US" sz="1400" dirty="0"/>
           </a:p>
@@ -30373,7 +31789,7 @@
                 <a:ea typeface="Calibri" pitchFamily="34" charset="-122"/>
                 <a:cs typeface="Calibri" pitchFamily="34" charset="-120"/>
               </a:rPr>
-              <a:t>Word Labs  •  wordlabs.app  •  Root: 'paint' = to colour or coat surface</a:t>
+              <a:t>Word Labs  •  wordlabs.app  •  Root: 'paint' = to colour a surface; a coloured liquid</a:t>
             </a:r>
             <a:endParaRPr lang="en-US" sz="800" dirty="0"/>
           </a:p>
@@ -30512,7 +31928,7 @@
                 <a:ea typeface="Trebuchet MS" pitchFamily="34" charset="-122"/>
                 <a:cs typeface="Trebuchet MS" pitchFamily="34" charset="-120"/>
               </a:rPr>
-              <a:t>unpainted</a:t>
+              <a:t>repainting</a:t>
             </a:r>
             <a:endParaRPr lang="en-US" sz="2800" dirty="0"/>
           </a:p>
@@ -30651,7 +32067,7 @@
                 <a:ea typeface="Trebuchet MS" pitchFamily="34" charset="-122"/>
                 <a:cs typeface="Trebuchet MS" pitchFamily="34" charset="-120"/>
               </a:rPr>
-              <a:t>un</a:t>
+              <a:t>re</a:t>
             </a:r>
             <a:endParaRPr lang="en-US" sz="1300" dirty="0"/>
           </a:p>
@@ -30690,7 +32106,7 @@
                 <a:ea typeface="Calibri" pitchFamily="34" charset="-122"/>
                 <a:cs typeface="Calibri" pitchFamily="34" charset="-120"/>
               </a:rPr>
-              <a:t>not</a:t>
+              <a:t>again</a:t>
             </a:r>
             <a:endParaRPr lang="en-US" sz="850" dirty="0"/>
           </a:p>
@@ -30802,7 +32218,7 @@
                 <a:ea typeface="Calibri" pitchFamily="34" charset="-122"/>
                 <a:cs typeface="Calibri" pitchFamily="34" charset="-120"/>
               </a:rPr>
-              <a:t>to colour a surface</a:t>
+              <a:t>to colour a surface; a coloured liquid</a:t>
             </a:r>
             <a:endParaRPr lang="en-US" sz="850" dirty="0"/>
           </a:p>
@@ -30875,7 +32291,7 @@
                 <a:ea typeface="Trebuchet MS" pitchFamily="34" charset="-122"/>
                 <a:cs typeface="Trebuchet MS" pitchFamily="34" charset="-120"/>
               </a:rPr>
-              <a:t>ed</a:t>
+              <a:t>ing</a:t>
             </a:r>
             <a:endParaRPr lang="en-US" sz="1300" dirty="0"/>
           </a:p>
@@ -30914,7 +32330,7 @@
                 <a:ea typeface="Calibri" pitchFamily="34" charset="-122"/>
                 <a:cs typeface="Calibri" pitchFamily="34" charset="-120"/>
               </a:rPr>
-              <a:t>done in the past</a:t>
+              <a:t>happening now</a:t>
             </a:r>
             <a:endParaRPr lang="en-US" sz="850" dirty="0"/>
           </a:p>
@@ -31073,7 +32489,7 @@
                 <a:ea typeface="Trebuchet MS" pitchFamily="34" charset="-122"/>
                 <a:cs typeface="Trebuchet MS" pitchFamily="34" charset="-120"/>
               </a:rPr>
-              <a:t>un</a:t>
+              <a:t>re</a:t>
             </a:r>
             <a:endParaRPr lang="en-US" sz="1400" dirty="0"/>
           </a:p>
@@ -31178,7 +32594,7 @@
                 <a:ea typeface="Trebuchet MS" pitchFamily="34" charset="-122"/>
                 <a:cs typeface="Trebuchet MS" pitchFamily="34" charset="-120"/>
               </a:rPr>
-              <a:t>pain</a:t>
+              <a:t>paint</a:t>
             </a:r>
             <a:endParaRPr lang="en-US" sz="1400" dirty="0"/>
           </a:p>
@@ -31283,7 +32699,7 @@
                 <a:ea typeface="Trebuchet MS" pitchFamily="34" charset="-122"/>
                 <a:cs typeface="Trebuchet MS" pitchFamily="34" charset="-120"/>
               </a:rPr>
-              <a:t>ted</a:t>
+              <a:t>ing</a:t>
             </a:r>
             <a:endParaRPr lang="en-US" sz="1400" dirty="0"/>
           </a:p>
@@ -31390,7 +32806,7 @@
         </p:nvSpPr>
         <p:spPr>
           <a:xfrm>
-            <a:off x="2124837" y="4169664"/>
+            <a:off x="2023872" y="4169664"/>
             <a:ext cx="685800" cy="475488"/>
           </a:xfrm>
           <a:prstGeom prst="rect">
@@ -31417,7 +32833,7 @@
         </p:nvSpPr>
         <p:spPr>
           <a:xfrm>
-            <a:off x="2124837" y="4169664"/>
+            <a:off x="2023872" y="4169664"/>
             <a:ext cx="685800" cy="475488"/>
           </a:xfrm>
           <a:prstGeom prst="rect">
@@ -31442,7 +32858,7 @@
                 <a:ea typeface="Trebuchet MS" pitchFamily="34" charset="-122"/>
                 <a:cs typeface="Trebuchet MS" pitchFamily="34" charset="-120"/>
               </a:rPr>
-              <a:t>u</a:t>
+              <a:t>r</a:t>
             </a:r>
             <a:endParaRPr lang="en-US" sz="900" dirty="0"/>
           </a:p>
@@ -31456,7 +32872,7 @@
         </p:nvSpPr>
         <p:spPr>
           <a:xfrm>
-            <a:off x="3033522" y="4169664"/>
+            <a:off x="2831592" y="4169664"/>
             <a:ext cx="685800" cy="475488"/>
           </a:xfrm>
           <a:prstGeom prst="rect">
@@ -31483,7 +32899,7 @@
         </p:nvSpPr>
         <p:spPr>
           <a:xfrm>
-            <a:off x="3033522" y="4169664"/>
+            <a:off x="2831592" y="4169664"/>
             <a:ext cx="685800" cy="475488"/>
           </a:xfrm>
           <a:prstGeom prst="rect">
@@ -31508,7 +32924,7 @@
                 <a:ea typeface="Trebuchet MS" pitchFamily="34" charset="-122"/>
                 <a:cs typeface="Trebuchet MS" pitchFamily="34" charset="-120"/>
               </a:rPr>
-              <a:t>n</a:t>
+              <a:t>e</a:t>
             </a:r>
             <a:endParaRPr lang="en-US" sz="900" dirty="0"/>
           </a:p>
@@ -31522,7 +32938,7 @@
         </p:nvSpPr>
         <p:spPr>
           <a:xfrm>
-            <a:off x="3942207" y="4169664"/>
+            <a:off x="3639312" y="4169664"/>
             <a:ext cx="685800" cy="475488"/>
           </a:xfrm>
           <a:prstGeom prst="rect">
@@ -31549,7 +32965,7 @@
         </p:nvSpPr>
         <p:spPr>
           <a:xfrm>
-            <a:off x="3942207" y="4169664"/>
+            <a:off x="3639312" y="4169664"/>
             <a:ext cx="685800" cy="475488"/>
           </a:xfrm>
           <a:prstGeom prst="rect">
@@ -31588,7 +33004,7 @@
         </p:nvSpPr>
         <p:spPr>
           <a:xfrm>
-            <a:off x="4850892" y="4169664"/>
+            <a:off x="4447032" y="4169664"/>
             <a:ext cx="685800" cy="475488"/>
           </a:xfrm>
           <a:prstGeom prst="rect">
@@ -31615,7 +33031,7 @@
         </p:nvSpPr>
         <p:spPr>
           <a:xfrm>
-            <a:off x="4850892" y="4169664"/>
+            <a:off x="4447032" y="4169664"/>
             <a:ext cx="685800" cy="475488"/>
           </a:xfrm>
           <a:prstGeom prst="rect">
@@ -31654,7 +33070,7 @@
         </p:nvSpPr>
         <p:spPr>
           <a:xfrm>
-            <a:off x="5759577" y="4169664"/>
+            <a:off x="5254752" y="4169664"/>
             <a:ext cx="685800" cy="475488"/>
           </a:xfrm>
           <a:prstGeom prst="rect">
@@ -31681,7 +33097,7 @@
         </p:nvSpPr>
         <p:spPr>
           <a:xfrm>
-            <a:off x="5759577" y="4169664"/>
+            <a:off x="5254752" y="4169664"/>
             <a:ext cx="685800" cy="475488"/>
           </a:xfrm>
           <a:prstGeom prst="rect">
@@ -31720,7 +33136,7 @@
         </p:nvSpPr>
         <p:spPr>
           <a:xfrm>
-            <a:off x="6668262" y="4169664"/>
+            <a:off x="6062472" y="4169664"/>
             <a:ext cx="685800" cy="475488"/>
           </a:xfrm>
           <a:prstGeom prst="rect">
@@ -31747,7 +33163,7 @@
         </p:nvSpPr>
         <p:spPr>
           <a:xfrm>
-            <a:off x="6668262" y="4169664"/>
+            <a:off x="6062472" y="4169664"/>
             <a:ext cx="685800" cy="475488"/>
           </a:xfrm>
           <a:prstGeom prst="rect">
@@ -31786,7 +33202,7 @@
         </p:nvSpPr>
         <p:spPr>
           <a:xfrm>
-            <a:off x="7576947" y="4169664"/>
+            <a:off x="6870192" y="4169664"/>
             <a:ext cx="685800" cy="475488"/>
           </a:xfrm>
           <a:prstGeom prst="rect">
@@ -31813,7 +33229,7 @@
         </p:nvSpPr>
         <p:spPr>
           <a:xfrm>
-            <a:off x="7576947" y="4169664"/>
+            <a:off x="6870192" y="4169664"/>
             <a:ext cx="685800" cy="475488"/>
           </a:xfrm>
           <a:prstGeom prst="rect">
@@ -31838,7 +33254,73 @@
                 <a:ea typeface="Trebuchet MS" pitchFamily="34" charset="-122"/>
                 <a:cs typeface="Trebuchet MS" pitchFamily="34" charset="-120"/>
               </a:rPr>
-              <a:t>ed</a:t>
+              <a:t>i</a:t>
+            </a:r>
+            <a:endParaRPr lang="en-US" sz="900" dirty="0"/>
+          </a:p>
+        </p:txBody>
+      </p:sp>
+      <p:sp>
+        <p:nvSpPr>
+          <p:cNvPr id="53" name="Shape 51"/>
+          <p:cNvSpPr/>
+          <p:nvPr/>
+        </p:nvSpPr>
+        <p:spPr>
+          <a:xfrm>
+            <a:off x="7677912" y="4169664"/>
+            <a:ext cx="685800" cy="475488"/>
+          </a:xfrm>
+          <a:prstGeom prst="rect">
+            <a:avLst>
+              <a:gd name="adj" fmla="val 7692"/>
+            </a:avLst>
+          </a:prstGeom>
+          <a:solidFill>
+            <a:srgbClr val="FFFFFF"/>
+          </a:solidFill>
+          <a:ln w="12700">
+            <a:solidFill>
+              <a:srgbClr val="DB2777"/>
+            </a:solidFill>
+            <a:prstDash val="solid"/>
+          </a:ln>
+        </p:spPr>
+      </p:sp>
+      <p:sp>
+        <p:nvSpPr>
+          <p:cNvPr id="54" name="Text 52"/>
+          <p:cNvSpPr/>
+          <p:nvPr/>
+        </p:nvSpPr>
+        <p:spPr>
+          <a:xfrm>
+            <a:off x="7677912" y="4169664"/>
+            <a:ext cx="685800" cy="475488"/>
+          </a:xfrm>
+          <a:prstGeom prst="rect">
+            <a:avLst/>
+          </a:prstGeom>
+          <a:noFill/>
+          <a:ln/>
+        </p:spPr>
+        <p:txBody>
+          <a:bodyPr wrap="square" lIns="0" tIns="0" rIns="0" bIns="0" rtlCol="0" anchor="ctr"/>
+          <a:lstStyle/>
+          <a:p>
+            <a:pPr algn="ctr" indent="0" marL="0">
+              <a:buNone/>
+            </a:pPr>
+            <a:r>
+              <a:rPr lang="en-US" sz="900" b="1" dirty="0">
+                <a:solidFill>
+                  <a:srgbClr val="9D174D"/>
+                </a:solidFill>
+                <a:latin typeface="Trebuchet MS" pitchFamily="34" charset="0"/>
+                <a:ea typeface="Trebuchet MS" pitchFamily="34" charset="-122"/>
+                <a:cs typeface="Trebuchet MS" pitchFamily="34" charset="-120"/>
+              </a:rPr>
+              <a:t>ng</a:t>
             </a:r>
             <a:endParaRPr lang="en-US" sz="900" dirty="0"/>
           </a:p>
@@ -32130,7 +33612,7 @@
                 <a:ea typeface="Calibri" pitchFamily="34" charset="-122"/>
                 <a:cs typeface="Calibri" pitchFamily="34" charset="-120"/>
               </a:rPr>
-              <a:t>Word Labs  •  wordlabs.app  •  Root: 'paint' = to colour or coat surface</a:t>
+              <a:t>Word Labs  •  wordlabs.app  •  Root: 'paint' = to colour a surface; a coloured liquid</a:t>
             </a:r>
             <a:endParaRPr lang="en-US" sz="800" dirty="0"/>
           </a:p>
@@ -33299,7 +34781,7 @@
                 <a:ea typeface="Calibri" pitchFamily="34" charset="-122"/>
                 <a:cs typeface="Calibri" pitchFamily="34" charset="-120"/>
               </a:rPr>
-              <a:t>Word Labs  •  wordlabs.app  •  Root: 'paint' = to colour or coat surface</a:t>
+              <a:t>Word Labs  •  wordlabs.app  •  Root: 'paint' = to colour a surface; a coloured liquid</a:t>
             </a:r>
             <a:endParaRPr lang="en-US" sz="800" dirty="0"/>
           </a:p>
@@ -33728,7 +35210,7 @@
                 <a:ea typeface="Trebuchet MS" pitchFamily="34" charset="-122"/>
                 <a:cs typeface="Trebuchet MS" pitchFamily="34" charset="-120"/>
               </a:rPr>
-              <a:t>-er</a:t>
+              <a:t>-ed</a:t>
             </a:r>
             <a:endParaRPr lang="en-US" sz="1300" dirty="0"/>
           </a:p>
@@ -33749,7 +35231,7 @@
             <a:avLst/>
           </a:prstGeom>
           <a:solidFill>
-            <a:srgbClr val="DDD6FE"/>
+            <a:srgbClr val="F1F5F9"/>
           </a:solidFill>
           <a:ln w="12700">
             <a:solidFill>
@@ -33761,14 +35243,64 @@
       </p:sp>
       <p:sp>
         <p:nvSpPr>
-          <p:cNvPr id="24" name="Text 22"/>
-          <p:cNvSpPr/>
-          <p:nvPr/>
-        </p:nvSpPr>
-        <p:spPr>
-          <a:xfrm>
-            <a:off x="365760" y="1984248"/>
-            <a:ext cx="2468880" cy="402336"/>
+          <p:cNvPr id="24" name="Shape 22"/>
+          <p:cNvSpPr/>
+          <p:nvPr/>
+        </p:nvSpPr>
+        <p:spPr>
+          <a:xfrm>
+            <a:off x="2971800" y="1984248"/>
+            <a:ext cx="2834640" cy="402336"/>
+          </a:xfrm>
+          <a:prstGeom prst="rect">
+            <a:avLst/>
+          </a:prstGeom>
+          <a:solidFill>
+            <a:srgbClr val="F1F5F9"/>
+          </a:solidFill>
+          <a:ln w="12700">
+            <a:solidFill>
+              <a:srgbClr val="E2E8F0"/>
+            </a:solidFill>
+            <a:prstDash val="solid"/>
+          </a:ln>
+        </p:spPr>
+      </p:sp>
+      <p:sp>
+        <p:nvSpPr>
+          <p:cNvPr id="25" name="Shape 23"/>
+          <p:cNvSpPr/>
+          <p:nvPr/>
+        </p:nvSpPr>
+        <p:spPr>
+          <a:xfrm>
+            <a:off x="5943600" y="1984248"/>
+            <a:ext cx="2834640" cy="402336"/>
+          </a:xfrm>
+          <a:prstGeom prst="rect">
+            <a:avLst/>
+          </a:prstGeom>
+          <a:solidFill>
+            <a:srgbClr val="FCE7F3"/>
+          </a:solidFill>
+          <a:ln w="12700">
+            <a:solidFill>
+              <a:srgbClr val="E2E8F0"/>
+            </a:solidFill>
+            <a:prstDash val="solid"/>
+          </a:ln>
+        </p:spPr>
+      </p:sp>
+      <p:sp>
+        <p:nvSpPr>
+          <p:cNvPr id="26" name="Text 24"/>
+          <p:cNvSpPr/>
+          <p:nvPr/>
+        </p:nvSpPr>
+        <p:spPr>
+          <a:xfrm>
+            <a:off x="5943600" y="1984248"/>
+            <a:ext cx="2834640" cy="402336"/>
           </a:xfrm>
           <a:prstGeom prst="rect">
             <a:avLst/>
@@ -33786,13 +35318,13 @@
             <a:r>
               <a:rPr lang="en-US" sz="1300" b="1" dirty="0">
                 <a:solidFill>
-                  <a:srgbClr val="4C1D95"/>
+                  <a:srgbClr val="9D174D"/>
                 </a:solidFill>
                 <a:latin typeface="Trebuchet MS" pitchFamily="34" charset="0"/>
                 <a:ea typeface="Trebuchet MS" pitchFamily="34" charset="-122"/>
                 <a:cs typeface="Trebuchet MS" pitchFamily="34" charset="-120"/>
               </a:rPr>
-              <a:t>un-</a:t>
+              <a:t>-er</a:t>
             </a:r>
             <a:endParaRPr lang="en-US" sz="1300" dirty="0"/>
           </a:p>
@@ -33800,20 +35332,45 @@
       </p:sp>
       <p:sp>
         <p:nvSpPr>
-          <p:cNvPr id="25" name="Shape 23"/>
-          <p:cNvSpPr/>
-          <p:nvPr/>
-        </p:nvSpPr>
-        <p:spPr>
-          <a:xfrm>
-            <a:off x="2971800" y="1984248"/>
+          <p:cNvPr id="27" name="Shape 25"/>
+          <p:cNvSpPr/>
+          <p:nvPr/>
+        </p:nvSpPr>
+        <p:spPr>
+          <a:xfrm>
+            <a:off x="365760" y="2404872"/>
+            <a:ext cx="2468880" cy="402336"/>
+          </a:xfrm>
+          <a:prstGeom prst="rect">
+            <a:avLst/>
+          </a:prstGeom>
+          <a:solidFill>
+            <a:srgbClr val="F8FAFC"/>
+          </a:solidFill>
+          <a:ln w="12700">
+            <a:solidFill>
+              <a:srgbClr val="E2E8F0"/>
+            </a:solidFill>
+            <a:prstDash val="solid"/>
+          </a:ln>
+        </p:spPr>
+      </p:sp>
+      <p:sp>
+        <p:nvSpPr>
+          <p:cNvPr id="28" name="Shape 26"/>
+          <p:cNvSpPr/>
+          <p:nvPr/>
+        </p:nvSpPr>
+        <p:spPr>
+          <a:xfrm>
+            <a:off x="2971800" y="2404872"/>
             <a:ext cx="2834640" cy="402336"/>
           </a:xfrm>
           <a:prstGeom prst="rect">
             <a:avLst/>
           </a:prstGeom>
           <a:solidFill>
-            <a:srgbClr val="F1F5F9"/>
+            <a:srgbClr val="F8FAFC"/>
           </a:solidFill>
           <a:ln w="12700">
             <a:solidFill>
@@ -33825,13 +35382,13 @@
       </p:sp>
       <p:sp>
         <p:nvSpPr>
-          <p:cNvPr id="26" name="Shape 24"/>
-          <p:cNvSpPr/>
-          <p:nvPr/>
-        </p:nvSpPr>
-        <p:spPr>
-          <a:xfrm>
-            <a:off x="5943600" y="1984248"/>
+          <p:cNvPr id="29" name="Shape 27"/>
+          <p:cNvSpPr/>
+          <p:nvPr/>
+        </p:nvSpPr>
+        <p:spPr>
+          <a:xfrm>
+            <a:off x="5943600" y="2404872"/>
             <a:ext cx="2834640" cy="402336"/>
           </a:xfrm>
           <a:prstGeom prst="rect">
@@ -33850,13 +35407,13 @@
       </p:sp>
       <p:sp>
         <p:nvSpPr>
-          <p:cNvPr id="27" name="Text 25"/>
-          <p:cNvSpPr/>
-          <p:nvPr/>
-        </p:nvSpPr>
-        <p:spPr>
-          <a:xfrm>
-            <a:off x="5943600" y="1984248"/>
+          <p:cNvPr id="30" name="Text 28"/>
+          <p:cNvSpPr/>
+          <p:nvPr/>
+        </p:nvSpPr>
+        <p:spPr>
+          <a:xfrm>
+            <a:off x="5943600" y="2404872"/>
             <a:ext cx="2834640" cy="402336"/>
           </a:xfrm>
           <a:prstGeom prst="rect">
@@ -33889,20 +35446,20 @@
       </p:sp>
       <p:sp>
         <p:nvSpPr>
-          <p:cNvPr id="28" name="Shape 26"/>
-          <p:cNvSpPr/>
-          <p:nvPr/>
-        </p:nvSpPr>
-        <p:spPr>
-          <a:xfrm>
-            <a:off x="365760" y="2404872"/>
+          <p:cNvPr id="31" name="Shape 29"/>
+          <p:cNvSpPr/>
+          <p:nvPr/>
+        </p:nvSpPr>
+        <p:spPr>
+          <a:xfrm>
+            <a:off x="365760" y="2825496"/>
             <a:ext cx="2468880" cy="402336"/>
           </a:xfrm>
           <a:prstGeom prst="rect">
             <a:avLst/>
           </a:prstGeom>
           <a:solidFill>
-            <a:srgbClr val="DDD6FE"/>
+            <a:srgbClr val="F1F5F9"/>
           </a:solidFill>
           <a:ln w="12700">
             <a:solidFill>
@@ -33914,14 +35471,64 @@
       </p:sp>
       <p:sp>
         <p:nvSpPr>
-          <p:cNvPr id="29" name="Text 27"/>
-          <p:cNvSpPr/>
-          <p:nvPr/>
-        </p:nvSpPr>
-        <p:spPr>
-          <a:xfrm>
-            <a:off x="365760" y="2404872"/>
-            <a:ext cx="2468880" cy="402336"/>
+          <p:cNvPr id="32" name="Shape 30"/>
+          <p:cNvSpPr/>
+          <p:nvPr/>
+        </p:nvSpPr>
+        <p:spPr>
+          <a:xfrm>
+            <a:off x="2971800" y="2825496"/>
+            <a:ext cx="2834640" cy="402336"/>
+          </a:xfrm>
+          <a:prstGeom prst="rect">
+            <a:avLst/>
+          </a:prstGeom>
+          <a:solidFill>
+            <a:srgbClr val="F1F5F9"/>
+          </a:solidFill>
+          <a:ln w="12700">
+            <a:solidFill>
+              <a:srgbClr val="E2E8F0"/>
+            </a:solidFill>
+            <a:prstDash val="solid"/>
+          </a:ln>
+        </p:spPr>
+      </p:sp>
+      <p:sp>
+        <p:nvSpPr>
+          <p:cNvPr id="33" name="Shape 31"/>
+          <p:cNvSpPr/>
+          <p:nvPr/>
+        </p:nvSpPr>
+        <p:spPr>
+          <a:xfrm>
+            <a:off x="5943600" y="2825496"/>
+            <a:ext cx="2834640" cy="402336"/>
+          </a:xfrm>
+          <a:prstGeom prst="rect">
+            <a:avLst/>
+          </a:prstGeom>
+          <a:solidFill>
+            <a:srgbClr val="FCE7F3"/>
+          </a:solidFill>
+          <a:ln w="12700">
+            <a:solidFill>
+              <a:srgbClr val="E2E8F0"/>
+            </a:solidFill>
+            <a:prstDash val="solid"/>
+          </a:ln>
+        </p:spPr>
+      </p:sp>
+      <p:sp>
+        <p:nvSpPr>
+          <p:cNvPr id="34" name="Text 32"/>
+          <p:cNvSpPr/>
+          <p:nvPr/>
+        </p:nvSpPr>
+        <p:spPr>
+          <a:xfrm>
+            <a:off x="5943600" y="2825496"/>
+            <a:ext cx="2834640" cy="402336"/>
           </a:xfrm>
           <a:prstGeom prst="rect">
             <a:avLst/>
@@ -33939,13 +35546,13 @@
             <a:r>
               <a:rPr lang="en-US" sz="1300" b="1" dirty="0">
                 <a:solidFill>
-                  <a:srgbClr val="4C1D95"/>
+                  <a:srgbClr val="9D174D"/>
                 </a:solidFill>
                 <a:latin typeface="Trebuchet MS" pitchFamily="34" charset="0"/>
                 <a:ea typeface="Trebuchet MS" pitchFamily="34" charset="-122"/>
                 <a:cs typeface="Trebuchet MS" pitchFamily="34" charset="-120"/>
               </a:rPr>
-              <a:t>over-</a:t>
+              <a:t>-s</a:t>
             </a:r>
             <a:endParaRPr lang="en-US" sz="1300" dirty="0"/>
           </a:p>
@@ -33953,64 +35560,14 @@
       </p:sp>
       <p:sp>
         <p:nvSpPr>
-          <p:cNvPr id="30" name="Shape 28"/>
-          <p:cNvSpPr/>
-          <p:nvPr/>
-        </p:nvSpPr>
-        <p:spPr>
-          <a:xfrm>
-            <a:off x="2971800" y="2404872"/>
-            <a:ext cx="2834640" cy="402336"/>
-          </a:xfrm>
-          <a:prstGeom prst="rect">
-            <a:avLst/>
-          </a:prstGeom>
-          <a:solidFill>
-            <a:srgbClr val="F8FAFC"/>
-          </a:solidFill>
-          <a:ln w="12700">
-            <a:solidFill>
-              <a:srgbClr val="E2E8F0"/>
-            </a:solidFill>
-            <a:prstDash val="solid"/>
-          </a:ln>
-        </p:spPr>
-      </p:sp>
-      <p:sp>
-        <p:nvSpPr>
-          <p:cNvPr id="31" name="Shape 29"/>
-          <p:cNvSpPr/>
-          <p:nvPr/>
-        </p:nvSpPr>
-        <p:spPr>
-          <a:xfrm>
-            <a:off x="5943600" y="2404872"/>
-            <a:ext cx="2834640" cy="402336"/>
-          </a:xfrm>
-          <a:prstGeom prst="rect">
-            <a:avLst/>
-          </a:prstGeom>
-          <a:solidFill>
-            <a:srgbClr val="FCE7F3"/>
-          </a:solidFill>
-          <a:ln w="12700">
-            <a:solidFill>
-              <a:srgbClr val="E2E8F0"/>
-            </a:solidFill>
-            <a:prstDash val="solid"/>
-          </a:ln>
-        </p:spPr>
-      </p:sp>
-      <p:sp>
-        <p:nvSpPr>
-          <p:cNvPr id="32" name="Text 30"/>
-          <p:cNvSpPr/>
-          <p:nvPr/>
-        </p:nvSpPr>
-        <p:spPr>
-          <a:xfrm>
-            <a:off x="5943600" y="2404872"/>
-            <a:ext cx="2834640" cy="402336"/>
+          <p:cNvPr id="35" name="Text 33"/>
+          <p:cNvSpPr/>
+          <p:nvPr/>
+        </p:nvSpPr>
+        <p:spPr>
+          <a:xfrm>
+            <a:off x="365760" y="3611880"/>
+            <a:ext cx="1828800" cy="347472"/>
           </a:xfrm>
           <a:prstGeom prst="rect">
             <a:avLst/>
@@ -34022,59 +35579,61 @@
           <a:bodyPr wrap="square" lIns="0" tIns="0" rIns="0" bIns="0" rtlCol="0" anchor="ctr"/>
           <a:lstStyle/>
           <a:p>
-            <a:pPr algn="ctr" indent="0" marL="0">
-              <a:buNone/>
-            </a:pPr>
-            <a:r>
-              <a:rPr lang="en-US" sz="1300" b="1" dirty="0">
-                <a:solidFill>
-                  <a:srgbClr val="9D174D"/>
+            <a:pPr algn="l" indent="0" marL="0">
+              <a:buNone/>
+            </a:pPr>
+            <a:r>
+              <a:rPr lang="en-US" sz="1200" b="1" dirty="0">
+                <a:solidFill>
+                  <a:srgbClr val="0F172A"/>
                 </a:solidFill>
                 <a:latin typeface="Trebuchet MS" pitchFamily="34" charset="0"/>
                 <a:ea typeface="Trebuchet MS" pitchFamily="34" charset="-122"/>
                 <a:cs typeface="Trebuchet MS" pitchFamily="34" charset="-120"/>
               </a:rPr>
-              <a:t>-ed</a:t>
-            </a:r>
-            <a:endParaRPr lang="en-US" sz="1300" dirty="0"/>
-          </a:p>
-        </p:txBody>
-      </p:sp>
-      <p:sp>
-        <p:nvSpPr>
-          <p:cNvPr id="33" name="Shape 31"/>
-          <p:cNvSpPr/>
-          <p:nvPr/>
-        </p:nvSpPr>
-        <p:spPr>
-          <a:xfrm>
-            <a:off x="365760" y="2825496"/>
-            <a:ext cx="2468880" cy="402336"/>
-          </a:xfrm>
-          <a:prstGeom prst="rect">
-            <a:avLst/>
-          </a:prstGeom>
-          <a:solidFill>
-            <a:srgbClr val="DDD6FE"/>
-          </a:solidFill>
-          <a:ln w="12700">
-            <a:solidFill>
-              <a:srgbClr val="E2E8F0"/>
-            </a:solidFill>
-            <a:prstDash val="solid"/>
-          </a:ln>
-        </p:spPr>
-      </p:sp>
-      <p:sp>
-        <p:nvSpPr>
-          <p:cNvPr id="34" name="Text 32"/>
-          <p:cNvSpPr/>
-          <p:nvPr/>
-        </p:nvSpPr>
-        <p:spPr>
-          <a:xfrm>
-            <a:off x="365760" y="2825496"/>
-            <a:ext cx="2468880" cy="402336"/>
+              <a:t>Sample words:</a:t>
+            </a:r>
+            <a:endParaRPr lang="en-US" sz="1200" dirty="0"/>
+          </a:p>
+        </p:txBody>
+      </p:sp>
+      <p:sp>
+        <p:nvSpPr>
+          <p:cNvPr id="36" name="Shape 34"/>
+          <p:cNvSpPr/>
+          <p:nvPr/>
+        </p:nvSpPr>
+        <p:spPr>
+          <a:xfrm>
+            <a:off x="365760" y="4023360"/>
+            <a:ext cx="2011680" cy="402336"/>
+          </a:xfrm>
+          <a:prstGeom prst="rect">
+            <a:avLst>
+              <a:gd name="adj" fmla="val 13636"/>
+            </a:avLst>
+          </a:prstGeom>
+          <a:solidFill>
+            <a:srgbClr val="EEF2FF"/>
+          </a:solidFill>
+          <a:ln w="12700">
+            <a:solidFill>
+              <a:srgbClr val="6366F1"/>
+            </a:solidFill>
+            <a:prstDash val="solid"/>
+          </a:ln>
+        </p:spPr>
+      </p:sp>
+      <p:sp>
+        <p:nvSpPr>
+          <p:cNvPr id="37" name="Text 35"/>
+          <p:cNvSpPr/>
+          <p:nvPr/>
+        </p:nvSpPr>
+        <p:spPr>
+          <a:xfrm>
+            <a:off x="365760" y="4023360"/>
+            <a:ext cx="2011680" cy="402336"/>
           </a:xfrm>
           <a:prstGeom prst="rect">
             <a:avLst/>
@@ -34090,80 +35649,57 @@
               <a:buNone/>
             </a:pPr>
             <a:r>
-              <a:rPr lang="en-US" sz="1300" b="1" dirty="0">
-                <a:solidFill>
-                  <a:srgbClr val="4C1D95"/>
+              <a:rPr lang="en-US" sz="1200" b="1" dirty="0">
+                <a:solidFill>
+                  <a:srgbClr val="4338CA"/>
                 </a:solidFill>
                 <a:latin typeface="Trebuchet MS" pitchFamily="34" charset="0"/>
                 <a:ea typeface="Trebuchet MS" pitchFamily="34" charset="-122"/>
                 <a:cs typeface="Trebuchet MS" pitchFamily="34" charset="-120"/>
               </a:rPr>
-              <a:t>under-</a:t>
-            </a:r>
-            <a:endParaRPr lang="en-US" sz="1300" dirty="0"/>
-          </a:p>
-        </p:txBody>
-      </p:sp>
-      <p:sp>
-        <p:nvSpPr>
-          <p:cNvPr id="35" name="Shape 33"/>
-          <p:cNvSpPr/>
-          <p:nvPr/>
-        </p:nvSpPr>
-        <p:spPr>
-          <a:xfrm>
-            <a:off x="2971800" y="2825496"/>
-            <a:ext cx="2834640" cy="402336"/>
-          </a:xfrm>
-          <a:prstGeom prst="rect">
-            <a:avLst/>
-          </a:prstGeom>
-          <a:solidFill>
-            <a:srgbClr val="F1F5F9"/>
-          </a:solidFill>
-          <a:ln w="12700">
-            <a:solidFill>
-              <a:srgbClr val="E2E8F0"/>
-            </a:solidFill>
-            <a:prstDash val="solid"/>
-          </a:ln>
-        </p:spPr>
-      </p:sp>
-      <p:sp>
-        <p:nvSpPr>
-          <p:cNvPr id="36" name="Shape 34"/>
-          <p:cNvSpPr/>
-          <p:nvPr/>
-        </p:nvSpPr>
-        <p:spPr>
-          <a:xfrm>
-            <a:off x="5943600" y="2825496"/>
-            <a:ext cx="2834640" cy="402336"/>
-          </a:xfrm>
-          <a:prstGeom prst="rect">
-            <a:avLst/>
-          </a:prstGeom>
-          <a:solidFill>
-            <a:srgbClr val="FCE7F3"/>
-          </a:solidFill>
-          <a:ln w="12700">
-            <a:solidFill>
-              <a:srgbClr val="E2E8F0"/>
-            </a:solidFill>
-            <a:prstDash val="solid"/>
-          </a:ln>
-        </p:spPr>
-      </p:sp>
-      <p:sp>
-        <p:nvSpPr>
-          <p:cNvPr id="37" name="Text 35"/>
-          <p:cNvSpPr/>
-          <p:nvPr/>
-        </p:nvSpPr>
-        <p:spPr>
-          <a:xfrm>
-            <a:off x="5943600" y="2825496"/>
-            <a:ext cx="2834640" cy="402336"/>
+              <a:t>paint</a:t>
+            </a:r>
+            <a:endParaRPr lang="en-US" sz="1200" dirty="0"/>
+          </a:p>
+        </p:txBody>
+      </p:sp>
+      <p:sp>
+        <p:nvSpPr>
+          <p:cNvPr id="38" name="Shape 36"/>
+          <p:cNvSpPr/>
+          <p:nvPr/>
+        </p:nvSpPr>
+        <p:spPr>
+          <a:xfrm>
+            <a:off x="2542032" y="4023360"/>
+            <a:ext cx="2011680" cy="402336"/>
+          </a:xfrm>
+          <a:prstGeom prst="rect">
+            <a:avLst>
+              <a:gd name="adj" fmla="val 13636"/>
+            </a:avLst>
+          </a:prstGeom>
+          <a:solidFill>
+            <a:srgbClr val="EEF2FF"/>
+          </a:solidFill>
+          <a:ln w="12700">
+            <a:solidFill>
+              <a:srgbClr val="6366F1"/>
+            </a:solidFill>
+            <a:prstDash val="solid"/>
+          </a:ln>
+        </p:spPr>
+      </p:sp>
+      <p:sp>
+        <p:nvSpPr>
+          <p:cNvPr id="39" name="Text 37"/>
+          <p:cNvSpPr/>
+          <p:nvPr/>
+        </p:nvSpPr>
+        <p:spPr>
+          <a:xfrm>
+            <a:off x="2542032" y="4023360"/>
+            <a:ext cx="2011680" cy="402336"/>
           </a:xfrm>
           <a:prstGeom prst="rect">
             <a:avLst/>
@@ -34179,55 +35715,57 @@
               <a:buNone/>
             </a:pPr>
             <a:r>
-              <a:rPr lang="en-US" sz="1300" b="1" dirty="0">
-                <a:solidFill>
-                  <a:srgbClr val="9D174D"/>
+              <a:rPr lang="en-US" sz="1200" b="1" dirty="0">
+                <a:solidFill>
+                  <a:srgbClr val="4338CA"/>
                 </a:solidFill>
                 <a:latin typeface="Trebuchet MS" pitchFamily="34" charset="0"/>
                 <a:ea typeface="Trebuchet MS" pitchFamily="34" charset="-122"/>
                 <a:cs typeface="Trebuchet MS" pitchFamily="34" charset="-120"/>
               </a:rPr>
-              <a:t>-erly</a:t>
-            </a:r>
-            <a:endParaRPr lang="en-US" sz="1300" dirty="0"/>
-          </a:p>
-        </p:txBody>
-      </p:sp>
-      <p:sp>
-        <p:nvSpPr>
-          <p:cNvPr id="38" name="Shape 36"/>
-          <p:cNvSpPr/>
-          <p:nvPr/>
-        </p:nvSpPr>
-        <p:spPr>
-          <a:xfrm>
-            <a:off x="365760" y="3246120"/>
-            <a:ext cx="2468880" cy="402336"/>
-          </a:xfrm>
-          <a:prstGeom prst="rect">
-            <a:avLst/>
-          </a:prstGeom>
-          <a:solidFill>
-            <a:srgbClr val="DDD6FE"/>
-          </a:solidFill>
-          <a:ln w="12700">
-            <a:solidFill>
-              <a:srgbClr val="E2E8F0"/>
-            </a:solidFill>
-            <a:prstDash val="solid"/>
-          </a:ln>
-        </p:spPr>
-      </p:sp>
-      <p:sp>
-        <p:nvSpPr>
-          <p:cNvPr id="39" name="Text 37"/>
-          <p:cNvSpPr/>
-          <p:nvPr/>
-        </p:nvSpPr>
-        <p:spPr>
-          <a:xfrm>
-            <a:off x="365760" y="3246120"/>
-            <a:ext cx="2468880" cy="402336"/>
+              <a:t>paints</a:t>
+            </a:r>
+            <a:endParaRPr lang="en-US" sz="1200" dirty="0"/>
+          </a:p>
+        </p:txBody>
+      </p:sp>
+      <p:sp>
+        <p:nvSpPr>
+          <p:cNvPr id="40" name="Shape 38"/>
+          <p:cNvSpPr/>
+          <p:nvPr/>
+        </p:nvSpPr>
+        <p:spPr>
+          <a:xfrm>
+            <a:off x="4718304" y="4023360"/>
+            <a:ext cx="2011680" cy="402336"/>
+          </a:xfrm>
+          <a:prstGeom prst="rect">
+            <a:avLst>
+              <a:gd name="adj" fmla="val 13636"/>
+            </a:avLst>
+          </a:prstGeom>
+          <a:solidFill>
+            <a:srgbClr val="EEF2FF"/>
+          </a:solidFill>
+          <a:ln w="12700">
+            <a:solidFill>
+              <a:srgbClr val="6366F1"/>
+            </a:solidFill>
+            <a:prstDash val="solid"/>
+          </a:ln>
+        </p:spPr>
+      </p:sp>
+      <p:sp>
+        <p:nvSpPr>
+          <p:cNvPr id="41" name="Text 39"/>
+          <p:cNvSpPr/>
+          <p:nvPr/>
+        </p:nvSpPr>
+        <p:spPr>
+          <a:xfrm>
+            <a:off x="4718304" y="4023360"/>
+            <a:ext cx="2011680" cy="402336"/>
           </a:xfrm>
           <a:prstGeom prst="rect">
             <a:avLst/>
@@ -34243,80 +35781,57 @@
               <a:buNone/>
             </a:pPr>
             <a:r>
-              <a:rPr lang="en-US" sz="1300" b="1" dirty="0">
-                <a:solidFill>
-                  <a:srgbClr val="4C1D95"/>
+              <a:rPr lang="en-US" sz="1200" b="1" dirty="0">
+                <a:solidFill>
+                  <a:srgbClr val="4338CA"/>
                 </a:solidFill>
                 <a:latin typeface="Trebuchet MS" pitchFamily="34" charset="0"/>
                 <a:ea typeface="Trebuchet MS" pitchFamily="34" charset="-122"/>
                 <a:cs typeface="Trebuchet MS" pitchFamily="34" charset="-120"/>
               </a:rPr>
-              <a:t>mis-</a:t>
-            </a:r>
-            <a:endParaRPr lang="en-US" sz="1300" dirty="0"/>
-          </a:p>
-        </p:txBody>
-      </p:sp>
-      <p:sp>
-        <p:nvSpPr>
-          <p:cNvPr id="40" name="Shape 38"/>
-          <p:cNvSpPr/>
-          <p:nvPr/>
-        </p:nvSpPr>
-        <p:spPr>
-          <a:xfrm>
-            <a:off x="2971800" y="3246120"/>
-            <a:ext cx="2834640" cy="402336"/>
-          </a:xfrm>
-          <a:prstGeom prst="rect">
-            <a:avLst/>
-          </a:prstGeom>
-          <a:solidFill>
-            <a:srgbClr val="F8FAFC"/>
-          </a:solidFill>
-          <a:ln w="12700">
-            <a:solidFill>
-              <a:srgbClr val="E2E8F0"/>
-            </a:solidFill>
-            <a:prstDash val="solid"/>
-          </a:ln>
-        </p:spPr>
-      </p:sp>
-      <p:sp>
-        <p:nvSpPr>
-          <p:cNvPr id="41" name="Shape 39"/>
-          <p:cNvSpPr/>
-          <p:nvPr/>
-        </p:nvSpPr>
-        <p:spPr>
-          <a:xfrm>
-            <a:off x="5943600" y="3246120"/>
-            <a:ext cx="2834640" cy="402336"/>
-          </a:xfrm>
-          <a:prstGeom prst="rect">
-            <a:avLst/>
-          </a:prstGeom>
-          <a:solidFill>
-            <a:srgbClr val="FCE7F3"/>
-          </a:solidFill>
-          <a:ln w="12700">
-            <a:solidFill>
-              <a:srgbClr val="E2E8F0"/>
-            </a:solidFill>
-            <a:prstDash val="solid"/>
-          </a:ln>
-        </p:spPr>
-      </p:sp>
-      <p:sp>
-        <p:nvSpPr>
-          <p:cNvPr id="42" name="Text 40"/>
-          <p:cNvSpPr/>
-          <p:nvPr/>
-        </p:nvSpPr>
-        <p:spPr>
-          <a:xfrm>
-            <a:off x="5943600" y="3246120"/>
-            <a:ext cx="2834640" cy="402336"/>
+              <a:t>painted</a:t>
+            </a:r>
+            <a:endParaRPr lang="en-US" sz="1200" dirty="0"/>
+          </a:p>
+        </p:txBody>
+      </p:sp>
+      <p:sp>
+        <p:nvSpPr>
+          <p:cNvPr id="42" name="Shape 40"/>
+          <p:cNvSpPr/>
+          <p:nvPr/>
+        </p:nvSpPr>
+        <p:spPr>
+          <a:xfrm>
+            <a:off x="6894576" y="4023360"/>
+            <a:ext cx="2011680" cy="402336"/>
+          </a:xfrm>
+          <a:prstGeom prst="rect">
+            <a:avLst>
+              <a:gd name="adj" fmla="val 13636"/>
+            </a:avLst>
+          </a:prstGeom>
+          <a:solidFill>
+            <a:srgbClr val="EEF2FF"/>
+          </a:solidFill>
+          <a:ln w="12700">
+            <a:solidFill>
+              <a:srgbClr val="6366F1"/>
+            </a:solidFill>
+            <a:prstDash val="solid"/>
+          </a:ln>
+        </p:spPr>
+      </p:sp>
+      <p:sp>
+        <p:nvSpPr>
+          <p:cNvPr id="43" name="Text 41"/>
+          <p:cNvSpPr/>
+          <p:nvPr/>
+        </p:nvSpPr>
+        <p:spPr>
+          <a:xfrm>
+            <a:off x="6894576" y="4023360"/>
+            <a:ext cx="2011680" cy="402336"/>
           </a:xfrm>
           <a:prstGeom prst="rect">
             <a:avLst/>
@@ -34332,30 +35847,57 @@
               <a:buNone/>
             </a:pPr>
             <a:r>
-              <a:rPr lang="en-US" sz="1300" b="1" dirty="0">
-                <a:solidFill>
-                  <a:srgbClr val="9D174D"/>
+              <a:rPr lang="en-US" sz="1200" b="1" dirty="0">
+                <a:solidFill>
+                  <a:srgbClr val="4338CA"/>
                 </a:solidFill>
                 <a:latin typeface="Trebuchet MS" pitchFamily="34" charset="0"/>
                 <a:ea typeface="Trebuchet MS" pitchFamily="34" charset="-122"/>
                 <a:cs typeface="Trebuchet MS" pitchFamily="34" charset="-120"/>
               </a:rPr>
-              <a:t>-work</a:t>
-            </a:r>
-            <a:endParaRPr lang="en-US" sz="1300" dirty="0"/>
-          </a:p>
-        </p:txBody>
-      </p:sp>
-      <p:sp>
-        <p:nvSpPr>
-          <p:cNvPr id="43" name="Text 41"/>
-          <p:cNvSpPr/>
-          <p:nvPr/>
-        </p:nvSpPr>
-        <p:spPr>
-          <a:xfrm>
-            <a:off x="365760" y="3611880"/>
-            <a:ext cx="1828800" cy="347472"/>
+              <a:t>painter</a:t>
+            </a:r>
+            <a:endParaRPr lang="en-US" sz="1200" dirty="0"/>
+          </a:p>
+        </p:txBody>
+      </p:sp>
+      <p:sp>
+        <p:nvSpPr>
+          <p:cNvPr id="44" name="Shape 42"/>
+          <p:cNvSpPr/>
+          <p:nvPr/>
+        </p:nvSpPr>
+        <p:spPr>
+          <a:xfrm>
+            <a:off x="365760" y="4498848"/>
+            <a:ext cx="2011680" cy="402336"/>
+          </a:xfrm>
+          <a:prstGeom prst="rect">
+            <a:avLst>
+              <a:gd name="adj" fmla="val 13636"/>
+            </a:avLst>
+          </a:prstGeom>
+          <a:solidFill>
+            <a:srgbClr val="EEF2FF"/>
+          </a:solidFill>
+          <a:ln w="12700">
+            <a:solidFill>
+              <a:srgbClr val="6366F1"/>
+            </a:solidFill>
+            <a:prstDash val="solid"/>
+          </a:ln>
+        </p:spPr>
+      </p:sp>
+      <p:sp>
+        <p:nvSpPr>
+          <p:cNvPr id="45" name="Text 43"/>
+          <p:cNvSpPr/>
+          <p:nvPr/>
+        </p:nvSpPr>
+        <p:spPr>
+          <a:xfrm>
+            <a:off x="365760" y="4498848"/>
+            <a:ext cx="2011680" cy="402336"/>
           </a:xfrm>
           <a:prstGeom prst="rect">
             <a:avLst/>
@@ -34367,547 +35909,19 @@
           <a:bodyPr wrap="square" lIns="0" tIns="0" rIns="0" bIns="0" rtlCol="0" anchor="ctr"/>
           <a:lstStyle/>
           <a:p>
-            <a:pPr algn="l" indent="0" marL="0">
+            <a:pPr algn="ctr" indent="0" marL="0">
               <a:buNone/>
             </a:pPr>
             <a:r>
               <a:rPr lang="en-US" sz="1200" b="1" dirty="0">
                 <a:solidFill>
-                  <a:srgbClr val="0F172A"/>
+                  <a:srgbClr val="4338CA"/>
                 </a:solidFill>
                 <a:latin typeface="Trebuchet MS" pitchFamily="34" charset="0"/>
                 <a:ea typeface="Trebuchet MS" pitchFamily="34" charset="-122"/>
                 <a:cs typeface="Trebuchet MS" pitchFamily="34" charset="-120"/>
               </a:rPr>
-              <a:t>Sample words:</a:t>
-            </a:r>
-            <a:endParaRPr lang="en-US" sz="1200" dirty="0"/>
-          </a:p>
-        </p:txBody>
-      </p:sp>
-      <p:sp>
-        <p:nvSpPr>
-          <p:cNvPr id="44" name="Shape 42"/>
-          <p:cNvSpPr/>
-          <p:nvPr/>
-        </p:nvSpPr>
-        <p:spPr>
-          <a:xfrm>
-            <a:off x="365760" y="4023360"/>
-            <a:ext cx="2011680" cy="402336"/>
-          </a:xfrm>
-          <a:prstGeom prst="rect">
-            <a:avLst>
-              <a:gd name="adj" fmla="val 13636"/>
-            </a:avLst>
-          </a:prstGeom>
-          <a:solidFill>
-            <a:srgbClr val="EEF2FF"/>
-          </a:solidFill>
-          <a:ln w="12700">
-            <a:solidFill>
-              <a:srgbClr val="6366F1"/>
-            </a:solidFill>
-            <a:prstDash val="solid"/>
-          </a:ln>
-        </p:spPr>
-      </p:sp>
-      <p:sp>
-        <p:nvSpPr>
-          <p:cNvPr id="45" name="Text 43"/>
-          <p:cNvSpPr/>
-          <p:nvPr/>
-        </p:nvSpPr>
-        <p:spPr>
-          <a:xfrm>
-            <a:off x="365760" y="4023360"/>
-            <a:ext cx="2011680" cy="402336"/>
-          </a:xfrm>
-          <a:prstGeom prst="rect">
-            <a:avLst/>
-          </a:prstGeom>
-          <a:noFill/>
-          <a:ln/>
-        </p:spPr>
-        <p:txBody>
-          <a:bodyPr wrap="square" lIns="0" tIns="0" rIns="0" bIns="0" rtlCol="0" anchor="ctr"/>
-          <a:lstStyle/>
-          <a:p>
-            <a:pPr algn="ctr" indent="0" marL="0">
-              <a:buNone/>
-            </a:pPr>
-            <a:r>
-              <a:rPr lang="en-US" sz="1200" b="1" dirty="0">
-                <a:solidFill>
-                  <a:srgbClr val="4338CA"/>
-                </a:solidFill>
-                <a:latin typeface="Trebuchet MS" pitchFamily="34" charset="0"/>
-                <a:ea typeface="Trebuchet MS" pitchFamily="34" charset="-122"/>
-                <a:cs typeface="Trebuchet MS" pitchFamily="34" charset="-120"/>
-              </a:rPr>
-              <a:t>painter</a:t>
-            </a:r>
-            <a:endParaRPr lang="en-US" sz="1200" dirty="0"/>
-          </a:p>
-        </p:txBody>
-      </p:sp>
-      <p:sp>
-        <p:nvSpPr>
-          <p:cNvPr id="46" name="Shape 44"/>
-          <p:cNvSpPr/>
-          <p:nvPr/>
-        </p:nvSpPr>
-        <p:spPr>
-          <a:xfrm>
-            <a:off x="2542032" y="4023360"/>
-            <a:ext cx="2011680" cy="402336"/>
-          </a:xfrm>
-          <a:prstGeom prst="rect">
-            <a:avLst>
-              <a:gd name="adj" fmla="val 13636"/>
-            </a:avLst>
-          </a:prstGeom>
-          <a:solidFill>
-            <a:srgbClr val="EEF2FF"/>
-          </a:solidFill>
-          <a:ln w="12700">
-            <a:solidFill>
-              <a:srgbClr val="6366F1"/>
-            </a:solidFill>
-            <a:prstDash val="solid"/>
-          </a:ln>
-        </p:spPr>
-      </p:sp>
-      <p:sp>
-        <p:nvSpPr>
-          <p:cNvPr id="47" name="Text 45"/>
-          <p:cNvSpPr/>
-          <p:nvPr/>
-        </p:nvSpPr>
-        <p:spPr>
-          <a:xfrm>
-            <a:off x="2542032" y="4023360"/>
-            <a:ext cx="2011680" cy="402336"/>
-          </a:xfrm>
-          <a:prstGeom prst="rect">
-            <a:avLst/>
-          </a:prstGeom>
-          <a:noFill/>
-          <a:ln/>
-        </p:spPr>
-        <p:txBody>
-          <a:bodyPr wrap="square" lIns="0" tIns="0" rIns="0" bIns="0" rtlCol="0" anchor="ctr"/>
-          <a:lstStyle/>
-          <a:p>
-            <a:pPr algn="ctr" indent="0" marL="0">
-              <a:buNone/>
-            </a:pPr>
-            <a:r>
-              <a:rPr lang="en-US" sz="1200" b="1" dirty="0">
-                <a:solidFill>
-                  <a:srgbClr val="4338CA"/>
-                </a:solidFill>
-                <a:latin typeface="Trebuchet MS" pitchFamily="34" charset="0"/>
-                <a:ea typeface="Trebuchet MS" pitchFamily="34" charset="-122"/>
-                <a:cs typeface="Trebuchet MS" pitchFamily="34" charset="-120"/>
-              </a:rPr>
-              <a:t>painting</a:t>
-            </a:r>
-            <a:endParaRPr lang="en-US" sz="1200" dirty="0"/>
-          </a:p>
-        </p:txBody>
-      </p:sp>
-      <p:sp>
-        <p:nvSpPr>
-          <p:cNvPr id="48" name="Shape 46"/>
-          <p:cNvSpPr/>
-          <p:nvPr/>
-        </p:nvSpPr>
-        <p:spPr>
-          <a:xfrm>
-            <a:off x="4718304" y="4023360"/>
-            <a:ext cx="2011680" cy="402336"/>
-          </a:xfrm>
-          <a:prstGeom prst="rect">
-            <a:avLst>
-              <a:gd name="adj" fmla="val 13636"/>
-            </a:avLst>
-          </a:prstGeom>
-          <a:solidFill>
-            <a:srgbClr val="EEF2FF"/>
-          </a:solidFill>
-          <a:ln w="12700">
-            <a:solidFill>
-              <a:srgbClr val="6366F1"/>
-            </a:solidFill>
-            <a:prstDash val="solid"/>
-          </a:ln>
-        </p:spPr>
-      </p:sp>
-      <p:sp>
-        <p:nvSpPr>
-          <p:cNvPr id="49" name="Text 47"/>
-          <p:cNvSpPr/>
-          <p:nvPr/>
-        </p:nvSpPr>
-        <p:spPr>
-          <a:xfrm>
-            <a:off x="4718304" y="4023360"/>
-            <a:ext cx="2011680" cy="402336"/>
-          </a:xfrm>
-          <a:prstGeom prst="rect">
-            <a:avLst/>
-          </a:prstGeom>
-          <a:noFill/>
-          <a:ln/>
-        </p:spPr>
-        <p:txBody>
-          <a:bodyPr wrap="square" lIns="0" tIns="0" rIns="0" bIns="0" rtlCol="0" anchor="ctr"/>
-          <a:lstStyle/>
-          <a:p>
-            <a:pPr algn="ctr" indent="0" marL="0">
-              <a:buNone/>
-            </a:pPr>
-            <a:r>
-              <a:rPr lang="en-US" sz="1200" b="1" dirty="0">
-                <a:solidFill>
-                  <a:srgbClr val="4338CA"/>
-                </a:solidFill>
-                <a:latin typeface="Trebuchet MS" pitchFamily="34" charset="0"/>
-                <a:ea typeface="Trebuchet MS" pitchFamily="34" charset="-122"/>
-                <a:cs typeface="Trebuchet MS" pitchFamily="34" charset="-120"/>
-              </a:rPr>
               <a:t>repaint</a:t>
-            </a:r>
-            <a:endParaRPr lang="en-US" sz="1200" dirty="0"/>
-          </a:p>
-        </p:txBody>
-      </p:sp>
-      <p:sp>
-        <p:nvSpPr>
-          <p:cNvPr id="50" name="Shape 48"/>
-          <p:cNvSpPr/>
-          <p:nvPr/>
-        </p:nvSpPr>
-        <p:spPr>
-          <a:xfrm>
-            <a:off x="6894576" y="4023360"/>
-            <a:ext cx="2011680" cy="402336"/>
-          </a:xfrm>
-          <a:prstGeom prst="rect">
-            <a:avLst>
-              <a:gd name="adj" fmla="val 13636"/>
-            </a:avLst>
-          </a:prstGeom>
-          <a:solidFill>
-            <a:srgbClr val="EEF2FF"/>
-          </a:solidFill>
-          <a:ln w="12700">
-            <a:solidFill>
-              <a:srgbClr val="6366F1"/>
-            </a:solidFill>
-            <a:prstDash val="solid"/>
-          </a:ln>
-        </p:spPr>
-      </p:sp>
-      <p:sp>
-        <p:nvSpPr>
-          <p:cNvPr id="51" name="Text 49"/>
-          <p:cNvSpPr/>
-          <p:nvPr/>
-        </p:nvSpPr>
-        <p:spPr>
-          <a:xfrm>
-            <a:off x="6894576" y="4023360"/>
-            <a:ext cx="2011680" cy="402336"/>
-          </a:xfrm>
-          <a:prstGeom prst="rect">
-            <a:avLst/>
-          </a:prstGeom>
-          <a:noFill/>
-          <a:ln/>
-        </p:spPr>
-        <p:txBody>
-          <a:bodyPr wrap="square" lIns="0" tIns="0" rIns="0" bIns="0" rtlCol="0" anchor="ctr"/>
-          <a:lstStyle/>
-          <a:p>
-            <a:pPr algn="ctr" indent="0" marL="0">
-              <a:buNone/>
-            </a:pPr>
-            <a:r>
-              <a:rPr lang="en-US" sz="1200" b="1" dirty="0">
-                <a:solidFill>
-                  <a:srgbClr val="4338CA"/>
-                </a:solidFill>
-                <a:latin typeface="Trebuchet MS" pitchFamily="34" charset="0"/>
-                <a:ea typeface="Trebuchet MS" pitchFamily="34" charset="-122"/>
-                <a:cs typeface="Trebuchet MS" pitchFamily="34" charset="-120"/>
-              </a:rPr>
-              <a:t>unpainted</a:t>
-            </a:r>
-            <a:endParaRPr lang="en-US" sz="1200" dirty="0"/>
-          </a:p>
-        </p:txBody>
-      </p:sp>
-      <p:sp>
-        <p:nvSpPr>
-          <p:cNvPr id="52" name="Shape 50"/>
-          <p:cNvSpPr/>
-          <p:nvPr/>
-        </p:nvSpPr>
-        <p:spPr>
-          <a:xfrm>
-            <a:off x="365760" y="4498848"/>
-            <a:ext cx="2011680" cy="402336"/>
-          </a:xfrm>
-          <a:prstGeom prst="rect">
-            <a:avLst>
-              <a:gd name="adj" fmla="val 13636"/>
-            </a:avLst>
-          </a:prstGeom>
-          <a:solidFill>
-            <a:srgbClr val="EEF2FF"/>
-          </a:solidFill>
-          <a:ln w="12700">
-            <a:solidFill>
-              <a:srgbClr val="6366F1"/>
-            </a:solidFill>
-            <a:prstDash val="solid"/>
-          </a:ln>
-        </p:spPr>
-      </p:sp>
-      <p:sp>
-        <p:nvSpPr>
-          <p:cNvPr id="53" name="Text 51"/>
-          <p:cNvSpPr/>
-          <p:nvPr/>
-        </p:nvSpPr>
-        <p:spPr>
-          <a:xfrm>
-            <a:off x="365760" y="4498848"/>
-            <a:ext cx="2011680" cy="402336"/>
-          </a:xfrm>
-          <a:prstGeom prst="rect">
-            <a:avLst/>
-          </a:prstGeom>
-          <a:noFill/>
-          <a:ln/>
-        </p:spPr>
-        <p:txBody>
-          <a:bodyPr wrap="square" lIns="0" tIns="0" rIns="0" bIns="0" rtlCol="0" anchor="ctr"/>
-          <a:lstStyle/>
-          <a:p>
-            <a:pPr algn="ctr" indent="0" marL="0">
-              <a:buNone/>
-            </a:pPr>
-            <a:r>
-              <a:rPr lang="en-US" sz="1200" b="1" dirty="0">
-                <a:solidFill>
-                  <a:srgbClr val="4338CA"/>
-                </a:solidFill>
-                <a:latin typeface="Trebuchet MS" pitchFamily="34" charset="0"/>
-                <a:ea typeface="Trebuchet MS" pitchFamily="34" charset="-122"/>
-                <a:cs typeface="Trebuchet MS" pitchFamily="34" charset="-120"/>
-              </a:rPr>
-              <a:t>overpaint</a:t>
-            </a:r>
-            <a:endParaRPr lang="en-US" sz="1200" dirty="0"/>
-          </a:p>
-        </p:txBody>
-      </p:sp>
-      <p:sp>
-        <p:nvSpPr>
-          <p:cNvPr id="54" name="Shape 52"/>
-          <p:cNvSpPr/>
-          <p:nvPr/>
-        </p:nvSpPr>
-        <p:spPr>
-          <a:xfrm>
-            <a:off x="2542032" y="4498848"/>
-            <a:ext cx="2011680" cy="402336"/>
-          </a:xfrm>
-          <a:prstGeom prst="rect">
-            <a:avLst>
-              <a:gd name="adj" fmla="val 13636"/>
-            </a:avLst>
-          </a:prstGeom>
-          <a:solidFill>
-            <a:srgbClr val="EEF2FF"/>
-          </a:solidFill>
-          <a:ln w="12700">
-            <a:solidFill>
-              <a:srgbClr val="6366F1"/>
-            </a:solidFill>
-            <a:prstDash val="solid"/>
-          </a:ln>
-        </p:spPr>
-      </p:sp>
-      <p:sp>
-        <p:nvSpPr>
-          <p:cNvPr id="55" name="Text 53"/>
-          <p:cNvSpPr/>
-          <p:nvPr/>
-        </p:nvSpPr>
-        <p:spPr>
-          <a:xfrm>
-            <a:off x="2542032" y="4498848"/>
-            <a:ext cx="2011680" cy="402336"/>
-          </a:xfrm>
-          <a:prstGeom prst="rect">
-            <a:avLst/>
-          </a:prstGeom>
-          <a:noFill/>
-          <a:ln/>
-        </p:spPr>
-        <p:txBody>
-          <a:bodyPr wrap="square" lIns="0" tIns="0" rIns="0" bIns="0" rtlCol="0" anchor="ctr"/>
-          <a:lstStyle/>
-          <a:p>
-            <a:pPr algn="ctr" indent="0" marL="0">
-              <a:buNone/>
-            </a:pPr>
-            <a:r>
-              <a:rPr lang="en-US" sz="1200" b="1" dirty="0">
-                <a:solidFill>
-                  <a:srgbClr val="4338CA"/>
-                </a:solidFill>
-                <a:latin typeface="Trebuchet MS" pitchFamily="34" charset="0"/>
-                <a:ea typeface="Trebuchet MS" pitchFamily="34" charset="-122"/>
-                <a:cs typeface="Trebuchet MS" pitchFamily="34" charset="-120"/>
-              </a:rPr>
-              <a:t>paintwork</a:t>
-            </a:r>
-            <a:endParaRPr lang="en-US" sz="1200" dirty="0"/>
-          </a:p>
-        </p:txBody>
-      </p:sp>
-      <p:sp>
-        <p:nvSpPr>
-          <p:cNvPr id="56" name="Shape 54"/>
-          <p:cNvSpPr/>
-          <p:nvPr/>
-        </p:nvSpPr>
-        <p:spPr>
-          <a:xfrm>
-            <a:off x="4718304" y="4498848"/>
-            <a:ext cx="2011680" cy="402336"/>
-          </a:xfrm>
-          <a:prstGeom prst="rect">
-            <a:avLst>
-              <a:gd name="adj" fmla="val 13636"/>
-            </a:avLst>
-          </a:prstGeom>
-          <a:solidFill>
-            <a:srgbClr val="EEF2FF"/>
-          </a:solidFill>
-          <a:ln w="12700">
-            <a:solidFill>
-              <a:srgbClr val="6366F1"/>
-            </a:solidFill>
-            <a:prstDash val="solid"/>
-          </a:ln>
-        </p:spPr>
-      </p:sp>
-      <p:sp>
-        <p:nvSpPr>
-          <p:cNvPr id="57" name="Text 55"/>
-          <p:cNvSpPr/>
-          <p:nvPr/>
-        </p:nvSpPr>
-        <p:spPr>
-          <a:xfrm>
-            <a:off x="4718304" y="4498848"/>
-            <a:ext cx="2011680" cy="402336"/>
-          </a:xfrm>
-          <a:prstGeom prst="rect">
-            <a:avLst/>
-          </a:prstGeom>
-          <a:noFill/>
-          <a:ln/>
-        </p:spPr>
-        <p:txBody>
-          <a:bodyPr wrap="square" lIns="0" tIns="0" rIns="0" bIns="0" rtlCol="0" anchor="ctr"/>
-          <a:lstStyle/>
-          <a:p>
-            <a:pPr algn="ctr" indent="0" marL="0">
-              <a:buNone/>
-            </a:pPr>
-            <a:r>
-              <a:rPr lang="en-US" sz="1200" b="1" dirty="0">
-                <a:solidFill>
-                  <a:srgbClr val="4338CA"/>
-                </a:solidFill>
-                <a:latin typeface="Trebuchet MS" pitchFamily="34" charset="0"/>
-                <a:ea typeface="Trebuchet MS" pitchFamily="34" charset="-122"/>
-                <a:cs typeface="Trebuchet MS" pitchFamily="34" charset="-120"/>
-              </a:rPr>
-              <a:t>painted</a:t>
-            </a:r>
-            <a:endParaRPr lang="en-US" sz="1200" dirty="0"/>
-          </a:p>
-        </p:txBody>
-      </p:sp>
-      <p:sp>
-        <p:nvSpPr>
-          <p:cNvPr id="58" name="Shape 56"/>
-          <p:cNvSpPr/>
-          <p:nvPr/>
-        </p:nvSpPr>
-        <p:spPr>
-          <a:xfrm>
-            <a:off x="6894576" y="4498848"/>
-            <a:ext cx="2011680" cy="402336"/>
-          </a:xfrm>
-          <a:prstGeom prst="rect">
-            <a:avLst>
-              <a:gd name="adj" fmla="val 13636"/>
-            </a:avLst>
-          </a:prstGeom>
-          <a:solidFill>
-            <a:srgbClr val="EEF2FF"/>
-          </a:solidFill>
-          <a:ln w="12700">
-            <a:solidFill>
-              <a:srgbClr val="6366F1"/>
-            </a:solidFill>
-            <a:prstDash val="solid"/>
-          </a:ln>
-        </p:spPr>
-      </p:sp>
-      <p:sp>
-        <p:nvSpPr>
-          <p:cNvPr id="59" name="Text 57"/>
-          <p:cNvSpPr/>
-          <p:nvPr/>
-        </p:nvSpPr>
-        <p:spPr>
-          <a:xfrm>
-            <a:off x="6894576" y="4498848"/>
-            <a:ext cx="2011680" cy="402336"/>
-          </a:xfrm>
-          <a:prstGeom prst="rect">
-            <a:avLst/>
-          </a:prstGeom>
-          <a:noFill/>
-          <a:ln/>
-        </p:spPr>
-        <p:txBody>
-          <a:bodyPr wrap="square" lIns="0" tIns="0" rIns="0" bIns="0" rtlCol="0" anchor="ctr"/>
-          <a:lstStyle/>
-          <a:p>
-            <a:pPr algn="ctr" indent="0" marL="0">
-              <a:buNone/>
-            </a:pPr>
-            <a:r>
-              <a:rPr lang="en-US" sz="1200" b="1" dirty="0">
-                <a:solidFill>
-                  <a:srgbClr val="4338CA"/>
-                </a:solidFill>
-                <a:latin typeface="Trebuchet MS" pitchFamily="34" charset="0"/>
-                <a:ea typeface="Trebuchet MS" pitchFamily="34" charset="-122"/>
-                <a:cs typeface="Trebuchet MS" pitchFamily="34" charset="-120"/>
-              </a:rPr>
-              <a:t>underpaint</a:t>
             </a:r>
             <a:endParaRPr lang="en-US" sz="1200" dirty="0"/>
           </a:p>
@@ -35199,7 +36213,7 @@
                 <a:ea typeface="Calibri" pitchFamily="34" charset="-122"/>
                 <a:cs typeface="Calibri" pitchFamily="34" charset="-120"/>
               </a:rPr>
-              <a:t>Word Labs  •  wordlabs.app  •  Root: 'paint' = to colour or coat surface</a:t>
+              <a:t>Word Labs  •  wordlabs.app  •  Root: 'paint' = to colour a surface; a coloured liquid</a:t>
             </a:r>
             <a:endParaRPr lang="en-US" sz="800" dirty="0"/>
           </a:p>
@@ -35363,7 +36377,7 @@
                 <a:ea typeface="Calibri" pitchFamily="34" charset="-122"/>
                 <a:cs typeface="Calibri" pitchFamily="34" charset="-120"/>
               </a:rPr>
-              <a:t>The core part of a word carrying its basic meaning. For example, 'paint' means 'to colour or coat surface'.</a:t>
+              <a:t>The core part of a word carrying its basic meaning. For example, 'paint' means 'to colour a surface; a coloured liquid'.</a:t>
             </a:r>
             <a:endParaRPr lang="en-US" sz="1350" dirty="0"/>
           </a:p>
@@ -35983,7 +36997,7 @@
                 <a:ea typeface="Calibri" pitchFamily="34" charset="-122"/>
                 <a:cs typeface="Calibri" pitchFamily="34" charset="-120"/>
               </a:rPr>
-              <a:t>Word Labs  •  wordlabs.app  •  Root: 'paint' = to colour or coat surface</a:t>
+              <a:t>Word Labs  •  wordlabs.app  •  Root: 'paint' = to colour a surface; a coloured liquid</a:t>
             </a:r>
             <a:endParaRPr lang="en-US" sz="800" dirty="0"/>
           </a:p>
@@ -36095,7 +37109,7 @@
                 <a:ea typeface="Calibri" pitchFamily="34" charset="-122"/>
                 <a:cs typeface="Calibri" pitchFamily="34" charset="-120"/>
               </a:rPr>
-              <a:t>1.  The word 'painted' uses the suffix '-ed' to show something happened in the past.</a:t>
+              <a:t>1.  'paint' means 'to colour a surface; a coloured liquid'.</a:t>
             </a:r>
             <a:endParaRPr lang="en-US" sz="1300" dirty="0"/>
           </a:p>
@@ -36234,7 +37248,7 @@
                 <a:ea typeface="Calibri" pitchFamily="34" charset="-122"/>
                 <a:cs typeface="Calibri" pitchFamily="34" charset="-120"/>
               </a:rPr>
-              <a:t>2.  Adding 're' before 'paint' makes the word 'repaint', meaning to paint again.</a:t>
+              <a:t>2.  'paints' means 'puts colour onto a surface using a brush, or tubes of coloured liquid'.</a:t>
             </a:r>
             <a:endParaRPr lang="en-US" sz="1300" dirty="0"/>
           </a:p>
@@ -36373,7 +37387,7 @@
                 <a:ea typeface="Calibri" pitchFamily="34" charset="-122"/>
                 <a:cs typeface="Calibri" pitchFamily="34" charset="-120"/>
               </a:rPr>
-              <a:t>3.  The word 'painting' is always a verb and can never be used as a noun.</a:t>
+              <a:t>3.  'paint' means 'a loud noise made by a musical instrument'.</a:t>
             </a:r>
             <a:endParaRPr lang="en-US" sz="1300" dirty="0"/>
           </a:p>
@@ -36512,7 +37526,7 @@
                 <a:ea typeface="Calibri" pitchFamily="34" charset="-122"/>
                 <a:cs typeface="Calibri" pitchFamily="34" charset="-120"/>
               </a:rPr>
-              <a:t>4.  The root 'paint' comes from an ancient Greek word.</a:t>
+              <a:t>4.  'paint' means 'coloured liquid used to decorate or protect surfaces'.</a:t>
             </a:r>
             <a:endParaRPr lang="en-US" sz="1300" dirty="0"/>
           </a:p>
@@ -36535,11 +37549,11 @@
             </a:avLst>
           </a:prstGeom>
           <a:solidFill>
-            <a:srgbClr val="FEE2E2"/>
-          </a:solidFill>
-          <a:ln w="12700">
-            <a:solidFill>
-              <a:srgbClr val="DC2626"/>
+            <a:srgbClr val="DCFCE7"/>
+          </a:solidFill>
+          <a:ln w="12700">
+            <a:solidFill>
+              <a:srgbClr val="16A34A"/>
             </a:solidFill>
             <a:prstDash val="solid"/>
           </a:ln>
@@ -36572,13 +37586,13 @@
             <a:r>
               <a:rPr lang="en-US" sz="1100" b="1" dirty="0">
                 <a:solidFill>
-                  <a:srgbClr val="DC2626"/>
+                  <a:srgbClr val="16A34A"/>
                 </a:solidFill>
                 <a:latin typeface="Trebuchet MS" pitchFamily="34" charset="0"/>
                 <a:ea typeface="Trebuchet MS" pitchFamily="34" charset="-122"/>
                 <a:cs typeface="Trebuchet MS" pitchFamily="34" charset="-120"/>
               </a:rPr>
-              <a:t>FALSE</a:t>
+              <a:t>TRUE</a:t>
             </a:r>
             <a:endParaRPr lang="en-US" sz="1100" dirty="0"/>
           </a:p>
@@ -36651,7 +37665,7 @@
                 <a:ea typeface="Calibri" pitchFamily="34" charset="-122"/>
                 <a:cs typeface="Calibri" pitchFamily="34" charset="-120"/>
               </a:rPr>
-              <a:t>5.  The word 'painter' contains the root 'paint' plus a suffix meaning 'one who does'.</a:t>
+              <a:t>5.  'paints' means 'walks somewhere slowly and carefully'.</a:t>
             </a:r>
             <a:endParaRPr lang="en-US" sz="1300" dirty="0"/>
           </a:p>
@@ -36674,11 +37688,11 @@
             </a:avLst>
           </a:prstGeom>
           <a:solidFill>
-            <a:srgbClr val="DCFCE7"/>
-          </a:solidFill>
-          <a:ln w="12700">
-            <a:solidFill>
-              <a:srgbClr val="16A34A"/>
+            <a:srgbClr val="FEE2E2"/>
+          </a:solidFill>
+          <a:ln w="12700">
+            <a:solidFill>
+              <a:srgbClr val="DC2626"/>
             </a:solidFill>
             <a:prstDash val="solid"/>
           </a:ln>
@@ -36711,13 +37725,13 @@
             <a:r>
               <a:rPr lang="en-US" sz="1100" b="1" dirty="0">
                 <a:solidFill>
-                  <a:srgbClr val="16A34A"/>
+                  <a:srgbClr val="DC2626"/>
                 </a:solidFill>
                 <a:latin typeface="Trebuchet MS" pitchFamily="34" charset="0"/>
                 <a:ea typeface="Trebuchet MS" pitchFamily="34" charset="-122"/>
                 <a:cs typeface="Trebuchet MS" pitchFamily="34" charset="-120"/>
               </a:rPr>
-              <a:t>TRUE</a:t>
+              <a:t>FALSE</a:t>
             </a:r>
             <a:endParaRPr lang="en-US" sz="1100" dirty="0"/>
           </a:p>
@@ -37009,7 +38023,7 @@
                 <a:ea typeface="Calibri" pitchFamily="34" charset="-122"/>
                 <a:cs typeface="Calibri" pitchFamily="34" charset="-120"/>
               </a:rPr>
-              <a:t>Word Labs  •  wordlabs.app  •  Root: 'paint' = to colour or coat surface</a:t>
+              <a:t>Word Labs  •  wordlabs.app  •  Root: 'paint' = to colour a surface; a coloured liquid</a:t>
             </a:r>
             <a:endParaRPr lang="en-US" sz="800" dirty="0"/>
           </a:p>
@@ -37146,7 +38160,7 @@
                 <a:ea typeface="Trebuchet MS" pitchFamily="34" charset="-122"/>
                 <a:cs typeface="Trebuchet MS" pitchFamily="34" charset="-120"/>
               </a:rPr>
-              <a:t>to colour or coat surface</a:t>
+              <a:t>to colour a surface; a coloured liquid</a:t>
             </a:r>
             <a:endParaRPr lang="en-US" sz="2000" dirty="0"/>
           </a:p>
@@ -37185,7 +38199,7 @@
                 <a:ea typeface="Calibri" pitchFamily="34" charset="-122"/>
                 <a:cs typeface="Calibri" pitchFamily="34" charset="-120"/>
               </a:rPr>
-              <a:t>Origin: Latin: pingere</a:t>
+              <a:t>Origin: Anglo-Saxon (Old English) root</a:t>
             </a:r>
             <a:endParaRPr lang="en-US" sz="1100" dirty="0"/>
           </a:p>
@@ -37290,7 +38304,7 @@
                 <a:ea typeface="Trebuchet MS" pitchFamily="34" charset="-122"/>
                 <a:cs typeface="Trebuchet MS" pitchFamily="34" charset="-120"/>
               </a:rPr>
-              <a:t>painter</a:t>
+              <a:t>paint</a:t>
             </a:r>
             <a:endParaRPr lang="en-US" sz="1300" dirty="0"/>
           </a:p>
@@ -37356,7 +38370,7 @@
                 <a:ea typeface="Trebuchet MS" pitchFamily="34" charset="-122"/>
                 <a:cs typeface="Trebuchet MS" pitchFamily="34" charset="-120"/>
               </a:rPr>
-              <a:t>painting</a:t>
+              <a:t>paints</a:t>
             </a:r>
             <a:endParaRPr lang="en-US" sz="1300" dirty="0"/>
           </a:p>
@@ -37422,7 +38436,7 @@
                 <a:ea typeface="Trebuchet MS" pitchFamily="34" charset="-122"/>
                 <a:cs typeface="Trebuchet MS" pitchFamily="34" charset="-120"/>
               </a:rPr>
-              <a:t>repaint</a:t>
+              <a:t>painted</a:t>
             </a:r>
             <a:endParaRPr lang="en-US" sz="1300" dirty="0"/>
           </a:p>
@@ -37488,7 +38502,7 @@
                 <a:ea typeface="Trebuchet MS" pitchFamily="34" charset="-122"/>
                 <a:cs typeface="Trebuchet MS" pitchFamily="34" charset="-120"/>
               </a:rPr>
-              <a:t>unpainted</a:t>
+              <a:t>painter</a:t>
             </a:r>
             <a:endParaRPr lang="en-US" sz="1300" dirty="0"/>
           </a:p>
@@ -37554,139 +38568,7 @@
                 <a:ea typeface="Trebuchet MS" pitchFamily="34" charset="-122"/>
                 <a:cs typeface="Trebuchet MS" pitchFamily="34" charset="-120"/>
               </a:rPr>
-              <a:t>overpaint</a:t>
-            </a:r>
-            <a:endParaRPr lang="en-US" sz="1300" dirty="0"/>
-          </a:p>
-        </p:txBody>
-      </p:sp>
-      <p:sp>
-        <p:nvSpPr>
-          <p:cNvPr id="26" name="Shape 24"/>
-          <p:cNvSpPr/>
-          <p:nvPr/>
-        </p:nvSpPr>
-        <p:spPr>
-          <a:xfrm>
-            <a:off x="2514600" y="3401568"/>
-            <a:ext cx="2011680" cy="502920"/>
-          </a:xfrm>
-          <a:prstGeom prst="rect">
-            <a:avLst>
-              <a:gd name="adj" fmla="val 14545"/>
-            </a:avLst>
-          </a:prstGeom>
-          <a:solidFill>
-            <a:srgbClr val="EEF2FF"/>
-          </a:solidFill>
-          <a:ln w="12700">
-            <a:solidFill>
-              <a:srgbClr val="6366F1"/>
-            </a:solidFill>
-            <a:prstDash val="solid"/>
-          </a:ln>
-        </p:spPr>
-      </p:sp>
-      <p:sp>
-        <p:nvSpPr>
-          <p:cNvPr id="27" name="Text 25"/>
-          <p:cNvSpPr/>
-          <p:nvPr/>
-        </p:nvSpPr>
-        <p:spPr>
-          <a:xfrm>
-            <a:off x="2514600" y="3401568"/>
-            <a:ext cx="2011680" cy="502920"/>
-          </a:xfrm>
-          <a:prstGeom prst="rect">
-            <a:avLst/>
-          </a:prstGeom>
-          <a:noFill/>
-          <a:ln/>
-        </p:spPr>
-        <p:txBody>
-          <a:bodyPr wrap="square" lIns="0" tIns="0" rIns="0" bIns="0" rtlCol="0" anchor="ctr"/>
-          <a:lstStyle/>
-          <a:p>
-            <a:pPr algn="ctr" indent="0" marL="0">
-              <a:buNone/>
-            </a:pPr>
-            <a:r>
-              <a:rPr lang="en-US" sz="1300" b="1" dirty="0">
-                <a:solidFill>
-                  <a:srgbClr val="4338CA"/>
-                </a:solidFill>
-                <a:latin typeface="Trebuchet MS" pitchFamily="34" charset="0"/>
-                <a:ea typeface="Trebuchet MS" pitchFamily="34" charset="-122"/>
-                <a:cs typeface="Trebuchet MS" pitchFamily="34" charset="-120"/>
-              </a:rPr>
-              <a:t>paintwork</a:t>
-            </a:r>
-            <a:endParaRPr lang="en-US" sz="1300" dirty="0"/>
-          </a:p>
-        </p:txBody>
-      </p:sp>
-      <p:sp>
-        <p:nvSpPr>
-          <p:cNvPr id="28" name="Shape 26"/>
-          <p:cNvSpPr/>
-          <p:nvPr/>
-        </p:nvSpPr>
-        <p:spPr>
-          <a:xfrm>
-            <a:off x="4663440" y="3401568"/>
-            <a:ext cx="2011680" cy="502920"/>
-          </a:xfrm>
-          <a:prstGeom prst="rect">
-            <a:avLst>
-              <a:gd name="adj" fmla="val 14545"/>
-            </a:avLst>
-          </a:prstGeom>
-          <a:solidFill>
-            <a:srgbClr val="EEF2FF"/>
-          </a:solidFill>
-          <a:ln w="12700">
-            <a:solidFill>
-              <a:srgbClr val="6366F1"/>
-            </a:solidFill>
-            <a:prstDash val="solid"/>
-          </a:ln>
-        </p:spPr>
-      </p:sp>
-      <p:sp>
-        <p:nvSpPr>
-          <p:cNvPr id="29" name="Text 27"/>
-          <p:cNvSpPr/>
-          <p:nvPr/>
-        </p:nvSpPr>
-        <p:spPr>
-          <a:xfrm>
-            <a:off x="4663440" y="3401568"/>
-            <a:ext cx="2011680" cy="502920"/>
-          </a:xfrm>
-          <a:prstGeom prst="rect">
-            <a:avLst/>
-          </a:prstGeom>
-          <a:noFill/>
-          <a:ln/>
-        </p:spPr>
-        <p:txBody>
-          <a:bodyPr wrap="square" lIns="0" tIns="0" rIns="0" bIns="0" rtlCol="0" anchor="ctr"/>
-          <a:lstStyle/>
-          <a:p>
-            <a:pPr algn="ctr" indent="0" marL="0">
-              <a:buNone/>
-            </a:pPr>
-            <a:r>
-              <a:rPr lang="en-US" sz="1300" b="1" dirty="0">
-                <a:solidFill>
-                  <a:srgbClr val="4338CA"/>
-                </a:solidFill>
-                <a:latin typeface="Trebuchet MS" pitchFamily="34" charset="0"/>
-                <a:ea typeface="Trebuchet MS" pitchFamily="34" charset="-122"/>
-                <a:cs typeface="Trebuchet MS" pitchFamily="34" charset="-120"/>
-              </a:rPr>
-              <a:t>painted</a:t>
+              <a:t>repaint</a:t>
             </a:r>
             <a:endParaRPr lang="en-US" sz="1300" dirty="0"/>
           </a:p>
@@ -37978,7 +38860,7 @@
                 <a:ea typeface="Calibri" pitchFamily="34" charset="-122"/>
                 <a:cs typeface="Calibri" pitchFamily="34" charset="-120"/>
               </a:rPr>
-              <a:t>Word Labs  •  wordlabs.app  •  Root: 'paint' = to colour or coat surface</a:t>
+              <a:t>Word Labs  •  wordlabs.app  •  Root: 'paint' = to colour a surface; a coloured liquid</a:t>
             </a:r>
             <a:endParaRPr lang="en-US" sz="800" dirty="0"/>
           </a:p>
@@ -38407,7 +39289,7 @@
                 <a:ea typeface="Trebuchet MS" pitchFamily="34" charset="-122"/>
                 <a:cs typeface="Trebuchet MS" pitchFamily="34" charset="-120"/>
               </a:rPr>
-              <a:t>-er</a:t>
+              <a:t>-ed</a:t>
             </a:r>
             <a:endParaRPr lang="en-US" sz="1300" dirty="0"/>
           </a:p>
@@ -38428,7 +39310,7 @@
             <a:avLst/>
           </a:prstGeom>
           <a:solidFill>
-            <a:srgbClr val="DDD6FE"/>
+            <a:srgbClr val="F1F5F9"/>
           </a:solidFill>
           <a:ln w="12700">
             <a:solidFill>
@@ -38440,18 +39322,68 @@
       </p:sp>
       <p:sp>
         <p:nvSpPr>
-          <p:cNvPr id="24" name="Text 22"/>
-          <p:cNvSpPr/>
-          <p:nvPr/>
-        </p:nvSpPr>
-        <p:spPr>
-          <a:xfrm>
-            <a:off x="640080" y="2212848"/>
+          <p:cNvPr id="24" name="Shape 22"/>
+          <p:cNvSpPr/>
+          <p:nvPr/>
+        </p:nvSpPr>
+        <p:spPr>
+          <a:xfrm>
+            <a:off x="3291840" y="2212848"/>
+            <a:ext cx="1645920" cy="420624"/>
+          </a:xfrm>
+          <a:prstGeom prst="rect">
+            <a:avLst/>
+          </a:prstGeom>
+          <a:solidFill>
+            <a:srgbClr val="F1F5F9"/>
+          </a:solidFill>
+          <a:ln w="12700">
+            <a:solidFill>
+              <a:srgbClr val="E5E7EB"/>
+            </a:solidFill>
+            <a:prstDash val="solid"/>
+          </a:ln>
+        </p:spPr>
+      </p:sp>
+      <p:sp>
+        <p:nvSpPr>
+          <p:cNvPr id="25" name="Shape 23"/>
+          <p:cNvSpPr/>
+          <p:nvPr/>
+        </p:nvSpPr>
+        <p:spPr>
+          <a:xfrm>
+            <a:off x="5943600" y="2212848"/>
             <a:ext cx="1463040" cy="420624"/>
           </a:xfrm>
           <a:prstGeom prst="rect">
             <a:avLst/>
           </a:prstGeom>
+          <a:solidFill>
+            <a:srgbClr val="FCE7F3"/>
+          </a:solidFill>
+          <a:ln w="12700">
+            <a:solidFill>
+              <a:srgbClr val="E5E7EB"/>
+            </a:solidFill>
+            <a:prstDash val="solid"/>
+          </a:ln>
+        </p:spPr>
+      </p:sp>
+      <p:sp>
+        <p:nvSpPr>
+          <p:cNvPr id="26" name="Text 24"/>
+          <p:cNvSpPr/>
+          <p:nvPr/>
+        </p:nvSpPr>
+        <p:spPr>
+          <a:xfrm>
+            <a:off x="5943600" y="2212848"/>
+            <a:ext cx="1463040" cy="420624"/>
+          </a:xfrm>
+          <a:prstGeom prst="rect">
+            <a:avLst/>
+          </a:prstGeom>
           <a:noFill/>
           <a:ln/>
         </p:spPr>
@@ -38465,13 +39397,13 @@
             <a:r>
               <a:rPr lang="en-US" sz="1300" b="1" dirty="0">
                 <a:solidFill>
-                  <a:srgbClr val="4C1D95"/>
+                  <a:srgbClr val="9D174D"/>
                 </a:solidFill>
                 <a:latin typeface="Trebuchet MS" pitchFamily="34" charset="0"/>
                 <a:ea typeface="Trebuchet MS" pitchFamily="34" charset="-122"/>
                 <a:cs typeface="Trebuchet MS" pitchFamily="34" charset="-120"/>
               </a:rPr>
-              <a:t>un-</a:t>
+              <a:t>-er</a:t>
             </a:r>
             <a:endParaRPr lang="en-US" sz="1300" dirty="0"/>
           </a:p>
@@ -38479,20 +39411,45 @@
       </p:sp>
       <p:sp>
         <p:nvSpPr>
-          <p:cNvPr id="25" name="Shape 23"/>
-          <p:cNvSpPr/>
-          <p:nvPr/>
-        </p:nvSpPr>
-        <p:spPr>
-          <a:xfrm>
-            <a:off x="3291840" y="2212848"/>
+          <p:cNvPr id="27" name="Shape 25"/>
+          <p:cNvSpPr/>
+          <p:nvPr/>
+        </p:nvSpPr>
+        <p:spPr>
+          <a:xfrm>
+            <a:off x="640080" y="2670048"/>
+            <a:ext cx="1463040" cy="420624"/>
+          </a:xfrm>
+          <a:prstGeom prst="rect">
+            <a:avLst/>
+          </a:prstGeom>
+          <a:solidFill>
+            <a:srgbClr val="F8FAFC"/>
+          </a:solidFill>
+          <a:ln w="12700">
+            <a:solidFill>
+              <a:srgbClr val="E5E7EB"/>
+            </a:solidFill>
+            <a:prstDash val="solid"/>
+          </a:ln>
+        </p:spPr>
+      </p:sp>
+      <p:sp>
+        <p:nvSpPr>
+          <p:cNvPr id="28" name="Shape 26"/>
+          <p:cNvSpPr/>
+          <p:nvPr/>
+        </p:nvSpPr>
+        <p:spPr>
+          <a:xfrm>
+            <a:off x="3291840" y="2670048"/>
             <a:ext cx="1645920" cy="420624"/>
           </a:xfrm>
           <a:prstGeom prst="rect">
             <a:avLst/>
           </a:prstGeom>
           <a:solidFill>
-            <a:srgbClr val="F1F5F9"/>
+            <a:srgbClr val="F8FAFC"/>
           </a:solidFill>
           <a:ln w="12700">
             <a:solidFill>
@@ -38504,13 +39461,13 @@
       </p:sp>
       <p:sp>
         <p:nvSpPr>
-          <p:cNvPr id="26" name="Shape 24"/>
-          <p:cNvSpPr/>
-          <p:nvPr/>
-        </p:nvSpPr>
-        <p:spPr>
-          <a:xfrm>
-            <a:off x="5943600" y="2212848"/>
+          <p:cNvPr id="29" name="Shape 27"/>
+          <p:cNvSpPr/>
+          <p:nvPr/>
+        </p:nvSpPr>
+        <p:spPr>
+          <a:xfrm>
+            <a:off x="5943600" y="2670048"/>
             <a:ext cx="1463040" cy="420624"/>
           </a:xfrm>
           <a:prstGeom prst="rect">
@@ -38529,13 +39486,13 @@
       </p:sp>
       <p:sp>
         <p:nvSpPr>
-          <p:cNvPr id="27" name="Text 25"/>
-          <p:cNvSpPr/>
-          <p:nvPr/>
-        </p:nvSpPr>
-        <p:spPr>
-          <a:xfrm>
-            <a:off x="5943600" y="2212848"/>
+          <p:cNvPr id="30" name="Text 28"/>
+          <p:cNvSpPr/>
+          <p:nvPr/>
+        </p:nvSpPr>
+        <p:spPr>
+          <a:xfrm>
+            <a:off x="5943600" y="2670048"/>
             <a:ext cx="1463040" cy="420624"/>
           </a:xfrm>
           <a:prstGeom prst="rect">
@@ -38568,20 +39525,20 @@
       </p:sp>
       <p:sp>
         <p:nvSpPr>
-          <p:cNvPr id="28" name="Shape 26"/>
-          <p:cNvSpPr/>
-          <p:nvPr/>
-        </p:nvSpPr>
-        <p:spPr>
-          <a:xfrm>
-            <a:off x="640080" y="2670048"/>
+          <p:cNvPr id="31" name="Shape 29"/>
+          <p:cNvSpPr/>
+          <p:nvPr/>
+        </p:nvSpPr>
+        <p:spPr>
+          <a:xfrm>
+            <a:off x="640080" y="3127248"/>
             <a:ext cx="1463040" cy="420624"/>
           </a:xfrm>
           <a:prstGeom prst="rect">
             <a:avLst/>
           </a:prstGeom>
           <a:solidFill>
-            <a:srgbClr val="DDD6FE"/>
+            <a:srgbClr val="F1F5F9"/>
           </a:solidFill>
           <a:ln w="12700">
             <a:solidFill>
@@ -38593,18 +39550,68 @@
       </p:sp>
       <p:sp>
         <p:nvSpPr>
-          <p:cNvPr id="29" name="Text 27"/>
-          <p:cNvSpPr/>
-          <p:nvPr/>
-        </p:nvSpPr>
-        <p:spPr>
-          <a:xfrm>
-            <a:off x="640080" y="2670048"/>
+          <p:cNvPr id="32" name="Shape 30"/>
+          <p:cNvSpPr/>
+          <p:nvPr/>
+        </p:nvSpPr>
+        <p:spPr>
+          <a:xfrm>
+            <a:off x="3291840" y="3127248"/>
+            <a:ext cx="1645920" cy="420624"/>
+          </a:xfrm>
+          <a:prstGeom prst="rect">
+            <a:avLst/>
+          </a:prstGeom>
+          <a:solidFill>
+            <a:srgbClr val="F1F5F9"/>
+          </a:solidFill>
+          <a:ln w="12700">
+            <a:solidFill>
+              <a:srgbClr val="E5E7EB"/>
+            </a:solidFill>
+            <a:prstDash val="solid"/>
+          </a:ln>
+        </p:spPr>
+      </p:sp>
+      <p:sp>
+        <p:nvSpPr>
+          <p:cNvPr id="33" name="Shape 31"/>
+          <p:cNvSpPr/>
+          <p:nvPr/>
+        </p:nvSpPr>
+        <p:spPr>
+          <a:xfrm>
+            <a:off x="5943600" y="3127248"/>
             <a:ext cx="1463040" cy="420624"/>
           </a:xfrm>
           <a:prstGeom prst="rect">
             <a:avLst/>
           </a:prstGeom>
+          <a:solidFill>
+            <a:srgbClr val="FCE7F3"/>
+          </a:solidFill>
+          <a:ln w="12700">
+            <a:solidFill>
+              <a:srgbClr val="E5E7EB"/>
+            </a:solidFill>
+            <a:prstDash val="solid"/>
+          </a:ln>
+        </p:spPr>
+      </p:sp>
+      <p:sp>
+        <p:nvSpPr>
+          <p:cNvPr id="34" name="Text 32"/>
+          <p:cNvSpPr/>
+          <p:nvPr/>
+        </p:nvSpPr>
+        <p:spPr>
+          <a:xfrm>
+            <a:off x="5943600" y="3127248"/>
+            <a:ext cx="1463040" cy="420624"/>
+          </a:xfrm>
+          <a:prstGeom prst="rect">
+            <a:avLst/>
+          </a:prstGeom>
           <a:noFill/>
           <a:ln/>
         </p:spPr>
@@ -38618,13 +39625,13 @@
             <a:r>
               <a:rPr lang="en-US" sz="1300" b="1" dirty="0">
                 <a:solidFill>
-                  <a:srgbClr val="4C1D95"/>
+                  <a:srgbClr val="9D174D"/>
                 </a:solidFill>
                 <a:latin typeface="Trebuchet MS" pitchFamily="34" charset="0"/>
                 <a:ea typeface="Trebuchet MS" pitchFamily="34" charset="-122"/>
                 <a:cs typeface="Trebuchet MS" pitchFamily="34" charset="-120"/>
               </a:rPr>
-              <a:t>over-</a:t>
+              <a:t>-s</a:t>
             </a:r>
             <a:endParaRPr lang="en-US" sz="1300" dirty="0"/>
           </a:p>
@@ -38632,408 +39639,13 @@
       </p:sp>
       <p:sp>
         <p:nvSpPr>
-          <p:cNvPr id="30" name="Shape 28"/>
-          <p:cNvSpPr/>
-          <p:nvPr/>
-        </p:nvSpPr>
-        <p:spPr>
-          <a:xfrm>
-            <a:off x="3291840" y="2670048"/>
-            <a:ext cx="1645920" cy="420624"/>
-          </a:xfrm>
-          <a:prstGeom prst="rect">
-            <a:avLst/>
-          </a:prstGeom>
-          <a:solidFill>
-            <a:srgbClr val="F8FAFC"/>
-          </a:solidFill>
-          <a:ln w="12700">
-            <a:solidFill>
-              <a:srgbClr val="E5E7EB"/>
-            </a:solidFill>
-            <a:prstDash val="solid"/>
-          </a:ln>
-        </p:spPr>
-      </p:sp>
-      <p:sp>
-        <p:nvSpPr>
-          <p:cNvPr id="31" name="Shape 29"/>
-          <p:cNvSpPr/>
-          <p:nvPr/>
-        </p:nvSpPr>
-        <p:spPr>
-          <a:xfrm>
-            <a:off x="5943600" y="2670048"/>
-            <a:ext cx="1463040" cy="420624"/>
-          </a:xfrm>
-          <a:prstGeom prst="rect">
-            <a:avLst/>
-          </a:prstGeom>
-          <a:solidFill>
-            <a:srgbClr val="FCE7F3"/>
-          </a:solidFill>
-          <a:ln w="12700">
-            <a:solidFill>
-              <a:srgbClr val="E5E7EB"/>
-            </a:solidFill>
-            <a:prstDash val="solid"/>
-          </a:ln>
-        </p:spPr>
-      </p:sp>
-      <p:sp>
-        <p:nvSpPr>
-          <p:cNvPr id="32" name="Text 30"/>
-          <p:cNvSpPr/>
-          <p:nvPr/>
-        </p:nvSpPr>
-        <p:spPr>
-          <a:xfrm>
-            <a:off x="5943600" y="2670048"/>
-            <a:ext cx="1463040" cy="420624"/>
-          </a:xfrm>
-          <a:prstGeom prst="rect">
-            <a:avLst/>
-          </a:prstGeom>
-          <a:noFill/>
-          <a:ln/>
-        </p:spPr>
-        <p:txBody>
-          <a:bodyPr wrap="square" lIns="0" tIns="0" rIns="0" bIns="0" rtlCol="0" anchor="ctr"/>
-          <a:lstStyle/>
-          <a:p>
-            <a:pPr algn="ctr" indent="0" marL="0">
-              <a:buNone/>
-            </a:pPr>
-            <a:r>
-              <a:rPr lang="en-US" sz="1300" b="1" dirty="0">
-                <a:solidFill>
-                  <a:srgbClr val="9D174D"/>
-                </a:solidFill>
-                <a:latin typeface="Trebuchet MS" pitchFamily="34" charset="0"/>
-                <a:ea typeface="Trebuchet MS" pitchFamily="34" charset="-122"/>
-                <a:cs typeface="Trebuchet MS" pitchFamily="34" charset="-120"/>
-              </a:rPr>
-              <a:t>-ed</a:t>
-            </a:r>
-            <a:endParaRPr lang="en-US" sz="1300" dirty="0"/>
-          </a:p>
-        </p:txBody>
-      </p:sp>
-      <p:sp>
-        <p:nvSpPr>
-          <p:cNvPr id="33" name="Shape 31"/>
-          <p:cNvSpPr/>
-          <p:nvPr/>
-        </p:nvSpPr>
-        <p:spPr>
-          <a:xfrm>
-            <a:off x="640080" y="3127248"/>
-            <a:ext cx="1463040" cy="420624"/>
-          </a:xfrm>
-          <a:prstGeom prst="rect">
-            <a:avLst/>
-          </a:prstGeom>
-          <a:solidFill>
-            <a:srgbClr val="DDD6FE"/>
-          </a:solidFill>
-          <a:ln w="12700">
-            <a:solidFill>
-              <a:srgbClr val="E5E7EB"/>
-            </a:solidFill>
-            <a:prstDash val="solid"/>
-          </a:ln>
-        </p:spPr>
-      </p:sp>
-      <p:sp>
-        <p:nvSpPr>
-          <p:cNvPr id="34" name="Text 32"/>
-          <p:cNvSpPr/>
-          <p:nvPr/>
-        </p:nvSpPr>
-        <p:spPr>
-          <a:xfrm>
-            <a:off x="640080" y="3127248"/>
-            <a:ext cx="1463040" cy="420624"/>
-          </a:xfrm>
-          <a:prstGeom prst="rect">
-            <a:avLst/>
-          </a:prstGeom>
-          <a:noFill/>
-          <a:ln/>
-        </p:spPr>
-        <p:txBody>
-          <a:bodyPr wrap="square" lIns="0" tIns="0" rIns="0" bIns="0" rtlCol="0" anchor="ctr"/>
-          <a:lstStyle/>
-          <a:p>
-            <a:pPr algn="ctr" indent="0" marL="0">
-              <a:buNone/>
-            </a:pPr>
-            <a:r>
-              <a:rPr lang="en-US" sz="1300" b="1" dirty="0">
-                <a:solidFill>
-                  <a:srgbClr val="4C1D95"/>
-                </a:solidFill>
-                <a:latin typeface="Trebuchet MS" pitchFamily="34" charset="0"/>
-                <a:ea typeface="Trebuchet MS" pitchFamily="34" charset="-122"/>
-                <a:cs typeface="Trebuchet MS" pitchFamily="34" charset="-120"/>
-              </a:rPr>
-              <a:t>under-</a:t>
-            </a:r>
-            <a:endParaRPr lang="en-US" sz="1300" dirty="0"/>
-          </a:p>
-        </p:txBody>
-      </p:sp>
-      <p:sp>
-        <p:nvSpPr>
-          <p:cNvPr id="35" name="Shape 33"/>
-          <p:cNvSpPr/>
-          <p:nvPr/>
-        </p:nvSpPr>
-        <p:spPr>
-          <a:xfrm>
-            <a:off x="3291840" y="3127248"/>
-            <a:ext cx="1645920" cy="420624"/>
-          </a:xfrm>
-          <a:prstGeom prst="rect">
-            <a:avLst/>
-          </a:prstGeom>
-          <a:solidFill>
-            <a:srgbClr val="F1F5F9"/>
-          </a:solidFill>
-          <a:ln w="12700">
-            <a:solidFill>
-              <a:srgbClr val="E5E7EB"/>
-            </a:solidFill>
-            <a:prstDash val="solid"/>
-          </a:ln>
-        </p:spPr>
-      </p:sp>
-      <p:sp>
-        <p:nvSpPr>
-          <p:cNvPr id="36" name="Shape 34"/>
-          <p:cNvSpPr/>
-          <p:nvPr/>
-        </p:nvSpPr>
-        <p:spPr>
-          <a:xfrm>
-            <a:off x="5943600" y="3127248"/>
-            <a:ext cx="1463040" cy="420624"/>
-          </a:xfrm>
-          <a:prstGeom prst="rect">
-            <a:avLst/>
-          </a:prstGeom>
-          <a:solidFill>
-            <a:srgbClr val="FCE7F3"/>
-          </a:solidFill>
-          <a:ln w="12700">
-            <a:solidFill>
-              <a:srgbClr val="E5E7EB"/>
-            </a:solidFill>
-            <a:prstDash val="solid"/>
-          </a:ln>
-        </p:spPr>
-      </p:sp>
-      <p:sp>
-        <p:nvSpPr>
-          <p:cNvPr id="37" name="Text 35"/>
-          <p:cNvSpPr/>
-          <p:nvPr/>
-        </p:nvSpPr>
-        <p:spPr>
-          <a:xfrm>
-            <a:off x="5943600" y="3127248"/>
-            <a:ext cx="1463040" cy="420624"/>
-          </a:xfrm>
-          <a:prstGeom prst="rect">
-            <a:avLst/>
-          </a:prstGeom>
-          <a:noFill/>
-          <a:ln/>
-        </p:spPr>
-        <p:txBody>
-          <a:bodyPr wrap="square" lIns="0" tIns="0" rIns="0" bIns="0" rtlCol="0" anchor="ctr"/>
-          <a:lstStyle/>
-          <a:p>
-            <a:pPr algn="ctr" indent="0" marL="0">
-              <a:buNone/>
-            </a:pPr>
-            <a:r>
-              <a:rPr lang="en-US" sz="1300" b="1" dirty="0">
-                <a:solidFill>
-                  <a:srgbClr val="9D174D"/>
-                </a:solidFill>
-                <a:latin typeface="Trebuchet MS" pitchFamily="34" charset="0"/>
-                <a:ea typeface="Trebuchet MS" pitchFamily="34" charset="-122"/>
-                <a:cs typeface="Trebuchet MS" pitchFamily="34" charset="-120"/>
-              </a:rPr>
-              <a:t>-erly</a:t>
-            </a:r>
-            <a:endParaRPr lang="en-US" sz="1300" dirty="0"/>
-          </a:p>
-        </p:txBody>
-      </p:sp>
-      <p:sp>
-        <p:nvSpPr>
-          <p:cNvPr id="38" name="Shape 36"/>
-          <p:cNvSpPr/>
-          <p:nvPr/>
-        </p:nvSpPr>
-        <p:spPr>
-          <a:xfrm>
-            <a:off x="640080" y="3584448"/>
-            <a:ext cx="1463040" cy="420624"/>
-          </a:xfrm>
-          <a:prstGeom prst="rect">
-            <a:avLst/>
-          </a:prstGeom>
-          <a:solidFill>
-            <a:srgbClr val="DDD6FE"/>
-          </a:solidFill>
-          <a:ln w="12700">
-            <a:solidFill>
-              <a:srgbClr val="E5E7EB"/>
-            </a:solidFill>
-            <a:prstDash val="solid"/>
-          </a:ln>
-        </p:spPr>
-      </p:sp>
-      <p:sp>
-        <p:nvSpPr>
-          <p:cNvPr id="39" name="Text 37"/>
-          <p:cNvSpPr/>
-          <p:nvPr/>
-        </p:nvSpPr>
-        <p:spPr>
-          <a:xfrm>
-            <a:off x="640080" y="3584448"/>
-            <a:ext cx="1463040" cy="420624"/>
-          </a:xfrm>
-          <a:prstGeom prst="rect">
-            <a:avLst/>
-          </a:prstGeom>
-          <a:noFill/>
-          <a:ln/>
-        </p:spPr>
-        <p:txBody>
-          <a:bodyPr wrap="square" lIns="0" tIns="0" rIns="0" bIns="0" rtlCol="0" anchor="ctr"/>
-          <a:lstStyle/>
-          <a:p>
-            <a:pPr algn="ctr" indent="0" marL="0">
-              <a:buNone/>
-            </a:pPr>
-            <a:r>
-              <a:rPr lang="en-US" sz="1300" b="1" dirty="0">
-                <a:solidFill>
-                  <a:srgbClr val="4C1D95"/>
-                </a:solidFill>
-                <a:latin typeface="Trebuchet MS" pitchFamily="34" charset="0"/>
-                <a:ea typeface="Trebuchet MS" pitchFamily="34" charset="-122"/>
-                <a:cs typeface="Trebuchet MS" pitchFamily="34" charset="-120"/>
-              </a:rPr>
-              <a:t>mis-</a:t>
-            </a:r>
-            <a:endParaRPr lang="en-US" sz="1300" dirty="0"/>
-          </a:p>
-        </p:txBody>
-      </p:sp>
-      <p:sp>
-        <p:nvSpPr>
-          <p:cNvPr id="40" name="Shape 38"/>
-          <p:cNvSpPr/>
-          <p:nvPr/>
-        </p:nvSpPr>
-        <p:spPr>
-          <a:xfrm>
-            <a:off x="3291840" y="3584448"/>
-            <a:ext cx="1645920" cy="420624"/>
-          </a:xfrm>
-          <a:prstGeom prst="rect">
-            <a:avLst/>
-          </a:prstGeom>
-          <a:solidFill>
-            <a:srgbClr val="F8FAFC"/>
-          </a:solidFill>
-          <a:ln w="12700">
-            <a:solidFill>
-              <a:srgbClr val="E5E7EB"/>
-            </a:solidFill>
-            <a:prstDash val="solid"/>
-          </a:ln>
-        </p:spPr>
-      </p:sp>
-      <p:sp>
-        <p:nvSpPr>
-          <p:cNvPr id="41" name="Shape 39"/>
-          <p:cNvSpPr/>
-          <p:nvPr/>
-        </p:nvSpPr>
-        <p:spPr>
-          <a:xfrm>
-            <a:off x="5943600" y="3584448"/>
-            <a:ext cx="1463040" cy="420624"/>
-          </a:xfrm>
-          <a:prstGeom prst="rect">
-            <a:avLst/>
-          </a:prstGeom>
-          <a:solidFill>
-            <a:srgbClr val="FCE7F3"/>
-          </a:solidFill>
-          <a:ln w="12700">
-            <a:solidFill>
-              <a:srgbClr val="E5E7EB"/>
-            </a:solidFill>
-            <a:prstDash val="solid"/>
-          </a:ln>
-        </p:spPr>
-      </p:sp>
-      <p:sp>
-        <p:nvSpPr>
-          <p:cNvPr id="42" name="Text 40"/>
-          <p:cNvSpPr/>
-          <p:nvPr/>
-        </p:nvSpPr>
-        <p:spPr>
-          <a:xfrm>
-            <a:off x="5943600" y="3584448"/>
-            <a:ext cx="1463040" cy="420624"/>
-          </a:xfrm>
-          <a:prstGeom prst="rect">
-            <a:avLst/>
-          </a:prstGeom>
-          <a:noFill/>
-          <a:ln/>
-        </p:spPr>
-        <p:txBody>
-          <a:bodyPr wrap="square" lIns="0" tIns="0" rIns="0" bIns="0" rtlCol="0" anchor="ctr"/>
-          <a:lstStyle/>
-          <a:p>
-            <a:pPr algn="ctr" indent="0" marL="0">
-              <a:buNone/>
-            </a:pPr>
-            <a:r>
-              <a:rPr lang="en-US" sz="1300" b="1" dirty="0">
-                <a:solidFill>
-                  <a:srgbClr val="9D174D"/>
-                </a:solidFill>
-                <a:latin typeface="Trebuchet MS" pitchFamily="34" charset="0"/>
-                <a:ea typeface="Trebuchet MS" pitchFamily="34" charset="-122"/>
-                <a:cs typeface="Trebuchet MS" pitchFamily="34" charset="-120"/>
-              </a:rPr>
-              <a:t>-work</a:t>
-            </a:r>
-            <a:endParaRPr lang="en-US" sz="1300" dirty="0"/>
-          </a:p>
-        </p:txBody>
-      </p:sp>
-      <p:sp>
-        <p:nvSpPr>
-          <p:cNvPr id="43" name="Text 41"/>
-          <p:cNvSpPr/>
-          <p:nvPr/>
-        </p:nvSpPr>
-        <p:spPr>
-          <a:xfrm>
-            <a:off x="365760" y="4178808"/>
+          <p:cNvPr id="35" name="Text 33"/>
+          <p:cNvSpPr/>
+          <p:nvPr/>
+        </p:nvSpPr>
+        <p:spPr>
+          <a:xfrm>
+            <a:off x="365760" y="3721608"/>
             <a:ext cx="1097280" cy="420624"/>
           </a:xfrm>
           <a:prstGeom prst="rect">
@@ -39066,13 +39678,13 @@
       </p:sp>
       <p:sp>
         <p:nvSpPr>
-          <p:cNvPr id="44" name="Shape 42"/>
-          <p:cNvSpPr/>
-          <p:nvPr/>
-        </p:nvSpPr>
-        <p:spPr>
-          <a:xfrm>
-            <a:off x="1508760" y="4178808"/>
+          <p:cNvPr id="36" name="Shape 34"/>
+          <p:cNvSpPr/>
+          <p:nvPr/>
+        </p:nvSpPr>
+        <p:spPr>
+          <a:xfrm>
+            <a:off x="1508760" y="3721608"/>
             <a:ext cx="822960" cy="420624"/>
           </a:xfrm>
           <a:prstGeom prst="rect">
@@ -39100,13 +39712,13 @@
       </p:sp>
       <p:sp>
         <p:nvSpPr>
-          <p:cNvPr id="45" name="Text 43"/>
-          <p:cNvSpPr/>
-          <p:nvPr/>
-        </p:nvSpPr>
-        <p:spPr>
-          <a:xfrm>
-            <a:off x="1508760" y="4178808"/>
+          <p:cNvPr id="37" name="Text 35"/>
+          <p:cNvSpPr/>
+          <p:nvPr/>
+        </p:nvSpPr>
+        <p:spPr>
+          <a:xfrm>
+            <a:off x="1508760" y="3721608"/>
             <a:ext cx="822960" cy="420624"/>
           </a:xfrm>
           <a:prstGeom prst="rect">
@@ -39139,13 +39751,13 @@
       </p:sp>
       <p:sp>
         <p:nvSpPr>
-          <p:cNvPr id="46" name="Text 44"/>
-          <p:cNvSpPr/>
-          <p:nvPr/>
-        </p:nvSpPr>
-        <p:spPr>
-          <a:xfrm>
-            <a:off x="2359152" y="4178808"/>
+          <p:cNvPr id="38" name="Text 36"/>
+          <p:cNvSpPr/>
+          <p:nvPr/>
+        </p:nvSpPr>
+        <p:spPr>
+          <a:xfrm>
+            <a:off x="2359152" y="3721608"/>
             <a:ext cx="320040" cy="420624"/>
           </a:xfrm>
           <a:prstGeom prst="rect">
@@ -39178,13 +39790,13 @@
       </p:sp>
       <p:sp>
         <p:nvSpPr>
-          <p:cNvPr id="47" name="Shape 45"/>
-          <p:cNvSpPr/>
-          <p:nvPr/>
-        </p:nvSpPr>
-        <p:spPr>
-          <a:xfrm>
-            <a:off x="2706624" y="4178808"/>
+          <p:cNvPr id="39" name="Shape 37"/>
+          <p:cNvSpPr/>
+          <p:nvPr/>
+        </p:nvSpPr>
+        <p:spPr>
+          <a:xfrm>
+            <a:off x="2706624" y="3721608"/>
             <a:ext cx="1389888" cy="420624"/>
           </a:xfrm>
           <a:prstGeom prst="rect">
@@ -39212,13 +39824,13 @@
       </p:sp>
       <p:sp>
         <p:nvSpPr>
-          <p:cNvPr id="48" name="Text 46"/>
-          <p:cNvSpPr/>
-          <p:nvPr/>
-        </p:nvSpPr>
-        <p:spPr>
-          <a:xfrm>
-            <a:off x="2706624" y="4178808"/>
+          <p:cNvPr id="40" name="Text 38"/>
+          <p:cNvSpPr/>
+          <p:nvPr/>
+        </p:nvSpPr>
+        <p:spPr>
+          <a:xfrm>
+            <a:off x="2706624" y="3721608"/>
             <a:ext cx="1389888" cy="420624"/>
           </a:xfrm>
           <a:prstGeom prst="rect">
@@ -39251,13 +39863,13 @@
       </p:sp>
       <p:sp>
         <p:nvSpPr>
-          <p:cNvPr id="49" name="Text 47"/>
-          <p:cNvSpPr/>
-          <p:nvPr/>
-        </p:nvSpPr>
-        <p:spPr>
-          <a:xfrm>
-            <a:off x="4123944" y="4178808"/>
+          <p:cNvPr id="41" name="Text 39"/>
+          <p:cNvSpPr/>
+          <p:nvPr/>
+        </p:nvSpPr>
+        <p:spPr>
+          <a:xfrm>
+            <a:off x="4123944" y="3721608"/>
             <a:ext cx="320040" cy="420624"/>
           </a:xfrm>
           <a:prstGeom prst="rect">
@@ -39290,13 +39902,13 @@
       </p:sp>
       <p:sp>
         <p:nvSpPr>
-          <p:cNvPr id="50" name="Shape 48"/>
-          <p:cNvSpPr/>
-          <p:nvPr/>
-        </p:nvSpPr>
-        <p:spPr>
-          <a:xfrm>
-            <a:off x="4471416" y="4178808"/>
+          <p:cNvPr id="42" name="Shape 40"/>
+          <p:cNvSpPr/>
+          <p:nvPr/>
+        </p:nvSpPr>
+        <p:spPr>
+          <a:xfrm>
+            <a:off x="4471416" y="3721608"/>
             <a:ext cx="822960" cy="420624"/>
           </a:xfrm>
           <a:prstGeom prst="rect">
@@ -39324,13 +39936,13 @@
       </p:sp>
       <p:sp>
         <p:nvSpPr>
-          <p:cNvPr id="51" name="Text 49"/>
-          <p:cNvSpPr/>
-          <p:nvPr/>
-        </p:nvSpPr>
-        <p:spPr>
-          <a:xfrm>
-            <a:off x="4471416" y="4178808"/>
+          <p:cNvPr id="43" name="Text 41"/>
+          <p:cNvSpPr/>
+          <p:nvPr/>
+        </p:nvSpPr>
+        <p:spPr>
+          <a:xfrm>
+            <a:off x="4471416" y="3721608"/>
             <a:ext cx="822960" cy="420624"/>
           </a:xfrm>
           <a:prstGeom prst="rect">
@@ -39355,7 +39967,7 @@
                 <a:ea typeface="Trebuchet MS" pitchFamily="34" charset="-122"/>
                 <a:cs typeface="Trebuchet MS" pitchFamily="34" charset="-120"/>
               </a:rPr>
-              <a:t>-er</a:t>
+              <a:t>-ed</a:t>
             </a:r>
             <a:endParaRPr lang="en-US" sz="1300" dirty="0"/>
           </a:p>
@@ -39363,13 +39975,13 @@
       </p:sp>
       <p:sp>
         <p:nvSpPr>
-          <p:cNvPr id="52" name="Text 50"/>
-          <p:cNvSpPr/>
-          <p:nvPr/>
-        </p:nvSpPr>
-        <p:spPr>
-          <a:xfrm>
-            <a:off x="5367528" y="4178808"/>
+          <p:cNvPr id="44" name="Text 42"/>
+          <p:cNvSpPr/>
+          <p:nvPr/>
+        </p:nvSpPr>
+        <p:spPr>
+          <a:xfrm>
+            <a:off x="5367528" y="3721608"/>
             <a:ext cx="365760" cy="420624"/>
           </a:xfrm>
           <a:prstGeom prst="rect">
@@ -39402,13 +40014,13 @@
       </p:sp>
       <p:sp>
         <p:nvSpPr>
-          <p:cNvPr id="53" name="Shape 51"/>
-          <p:cNvSpPr/>
-          <p:nvPr/>
-        </p:nvSpPr>
-        <p:spPr>
-          <a:xfrm>
-            <a:off x="5779008" y="4178808"/>
+          <p:cNvPr id="45" name="Shape 43"/>
+          <p:cNvSpPr/>
+          <p:nvPr/>
+        </p:nvSpPr>
+        <p:spPr>
+          <a:xfrm>
+            <a:off x="5779008" y="3721608"/>
             <a:ext cx="2194560" cy="420624"/>
           </a:xfrm>
           <a:prstGeom prst="rect">
@@ -39429,13 +40041,13 @@
       </p:sp>
       <p:sp>
         <p:nvSpPr>
-          <p:cNvPr id="54" name="Text 52"/>
-          <p:cNvSpPr/>
-          <p:nvPr/>
-        </p:nvSpPr>
-        <p:spPr>
-          <a:xfrm>
-            <a:off x="5779008" y="4178808"/>
+          <p:cNvPr id="46" name="Text 44"/>
+          <p:cNvSpPr/>
+          <p:nvPr/>
+        </p:nvSpPr>
+        <p:spPr>
+          <a:xfrm>
+            <a:off x="5779008" y="3721608"/>
             <a:ext cx="2194560" cy="420624"/>
           </a:xfrm>
           <a:prstGeom prst="rect">
@@ -39460,7 +40072,7 @@
                 <a:ea typeface="Trebuchet MS" pitchFamily="34" charset="-122"/>
                 <a:cs typeface="Trebuchet MS" pitchFamily="34" charset="-120"/>
               </a:rPr>
-              <a:t>painter</a:t>
+              <a:t>paint</a:t>
             </a:r>
             <a:endParaRPr lang="en-US" sz="1400" dirty="0"/>
           </a:p>
@@ -39752,7 +40364,7 @@
                 <a:ea typeface="Calibri" pitchFamily="34" charset="-122"/>
                 <a:cs typeface="Calibri" pitchFamily="34" charset="-120"/>
               </a:rPr>
-              <a:t>Word Labs  •  wordlabs.app  •  Root: 'paint' = to colour or coat surface</a:t>
+              <a:t>Word Labs  •  wordlabs.app  •  Root: 'paint' = to colour a surface; a coloured liquid</a:t>
             </a:r>
             <a:endParaRPr lang="en-US" sz="800" dirty="0"/>
           </a:p>
@@ -39864,7 +40476,7 @@
                 <a:ea typeface="Trebuchet MS" pitchFamily="34" charset="-122"/>
                 <a:cs typeface="Trebuchet MS" pitchFamily="34" charset="-120"/>
               </a:rPr>
-              <a:t>painter</a:t>
+              <a:t>paint</a:t>
             </a:r>
             <a:endParaRPr lang="en-US" sz="1200" dirty="0"/>
           </a:p>
@@ -39930,7 +40542,7 @@
                 <a:ea typeface="Calibri" pitchFamily="34" charset="-122"/>
                 <a:cs typeface="Calibri" pitchFamily="34" charset="-120"/>
               </a:rPr>
-              <a:t>To paint something again, usually to make it look fresh and new.</a:t>
+              <a:t>covered or decorated something with paint</a:t>
             </a:r>
             <a:endParaRPr lang="en-US" sz="1200" dirty="0"/>
           </a:p>
@@ -40003,7 +40615,7 @@
                 <a:ea typeface="Trebuchet MS" pitchFamily="34" charset="-122"/>
                 <a:cs typeface="Trebuchet MS" pitchFamily="34" charset="-120"/>
               </a:rPr>
-              <a:t>painting</a:t>
+              <a:t>paints</a:t>
             </a:r>
             <a:endParaRPr lang="en-US" sz="1200" dirty="0"/>
           </a:p>
@@ -40069,7 +40681,7 @@
                 <a:ea typeface="Calibri" pitchFamily="34" charset="-122"/>
                 <a:cs typeface="Calibri" pitchFamily="34" charset="-120"/>
               </a:rPr>
-              <a:t>To put too much paint on something, or to paint over something else.</a:t>
+              <a:t>to paint something again, often a different colour</a:t>
             </a:r>
             <a:endParaRPr lang="en-US" sz="1200" dirty="0"/>
           </a:p>
@@ -40142,7 +40754,7 @@
                 <a:ea typeface="Trebuchet MS" pitchFamily="34" charset="-122"/>
                 <a:cs typeface="Trebuchet MS" pitchFamily="34" charset="-120"/>
               </a:rPr>
-              <a:t>repaint</a:t>
+              <a:t>painted</a:t>
             </a:r>
             <a:endParaRPr lang="en-US" sz="1200" dirty="0"/>
           </a:p>
@@ -40208,7 +40820,7 @@
                 <a:ea typeface="Calibri" pitchFamily="34" charset="-122"/>
                 <a:cs typeface="Calibri" pitchFamily="34" charset="-120"/>
               </a:rPr>
-              <a:t>A person who paints pictures or walls.</a:t>
+              <a:t>coloured liquid used to decorate or protect surfaces</a:t>
             </a:r>
             <a:endParaRPr lang="en-US" sz="1200" dirty="0"/>
           </a:p>
@@ -40281,7 +40893,7 @@
                 <a:ea typeface="Trebuchet MS" pitchFamily="34" charset="-122"/>
                 <a:cs typeface="Trebuchet MS" pitchFamily="34" charset="-120"/>
               </a:rPr>
-              <a:t>unpainted</a:t>
+              <a:t>painter</a:t>
             </a:r>
             <a:endParaRPr lang="en-US" sz="1200" dirty="0"/>
           </a:p>
@@ -40347,7 +40959,7 @@
                 <a:ea typeface="Calibri" pitchFamily="34" charset="-122"/>
                 <a:cs typeface="Calibri" pitchFamily="34" charset="-120"/>
               </a:rPr>
-              <a:t>The painted surfaces on something, like a car or a building.</a:t>
+              <a:t>a person who paints pictures or houses as a job</a:t>
             </a:r>
             <a:endParaRPr lang="en-US" sz="1200" dirty="0"/>
           </a:p>
@@ -40420,7 +41032,7 @@
                 <a:ea typeface="Trebuchet MS" pitchFamily="34" charset="-122"/>
                 <a:cs typeface="Trebuchet MS" pitchFamily="34" charset="-120"/>
               </a:rPr>
-              <a:t>overpaint</a:t>
+              <a:t>repaint</a:t>
             </a:r>
             <a:endParaRPr lang="en-US" sz="1200" dirty="0"/>
           </a:p>
@@ -40486,285 +41098,7 @@
                 <a:ea typeface="Calibri" pitchFamily="34" charset="-122"/>
                 <a:cs typeface="Calibri" pitchFamily="34" charset="-120"/>
               </a:rPr>
-              <a:t>Something that has had paint put on it.</a:t>
-            </a:r>
-            <a:endParaRPr lang="en-US" sz="1200" dirty="0"/>
-          </a:p>
-        </p:txBody>
-      </p:sp>
-      <p:sp>
-        <p:nvSpPr>
-          <p:cNvPr id="31" name="Shape 29"/>
-          <p:cNvSpPr/>
-          <p:nvPr/>
-        </p:nvSpPr>
-        <p:spPr>
-          <a:xfrm>
-            <a:off x="365760" y="3840480"/>
-            <a:ext cx="2011680" cy="457200"/>
-          </a:xfrm>
-          <a:prstGeom prst="rect">
-            <a:avLst>
-              <a:gd name="adj" fmla="val 12000"/>
-            </a:avLst>
-          </a:prstGeom>
-          <a:solidFill>
-            <a:srgbClr val="EEF2FF"/>
-          </a:solidFill>
-          <a:ln w="12700">
-            <a:solidFill>
-              <a:srgbClr val="6366F1"/>
-            </a:solidFill>
-            <a:prstDash val="solid"/>
-          </a:ln>
-          <a:effectLst>
-            <a:outerShdw sx="100000" sy="100000" kx="0" ky="0" algn="bl" rotWithShape="0" blurRad="101600" dist="38100" dir="8100000">
-              <a:srgbClr val="000000">
-                <a:alpha val="12000"/>
-              </a:srgbClr>
-            </a:outerShdw>
-          </a:effectLst>
-        </p:spPr>
-      </p:sp>
-      <p:sp>
-        <p:nvSpPr>
-          <p:cNvPr id="32" name="Text 30"/>
-          <p:cNvSpPr/>
-          <p:nvPr/>
-        </p:nvSpPr>
-        <p:spPr>
-          <a:xfrm>
-            <a:off x="365760" y="3840480"/>
-            <a:ext cx="2011680" cy="457200"/>
-          </a:xfrm>
-          <a:prstGeom prst="rect">
-            <a:avLst/>
-          </a:prstGeom>
-          <a:noFill/>
-          <a:ln/>
-        </p:spPr>
-        <p:txBody>
-          <a:bodyPr wrap="square" lIns="0" tIns="0" rIns="0" bIns="0" rtlCol="0" anchor="ctr"/>
-          <a:lstStyle/>
-          <a:p>
-            <a:pPr algn="ctr" indent="0" marL="0">
-              <a:buNone/>
-            </a:pPr>
-            <a:r>
-              <a:rPr lang="en-US" sz="1200" b="1" dirty="0">
-                <a:solidFill>
-                  <a:srgbClr val="4338CA"/>
-                </a:solidFill>
-                <a:latin typeface="Trebuchet MS" pitchFamily="34" charset="0"/>
-                <a:ea typeface="Trebuchet MS" pitchFamily="34" charset="-122"/>
-                <a:cs typeface="Trebuchet MS" pitchFamily="34" charset="-120"/>
-              </a:rPr>
-              <a:t>paintwork</a:t>
-            </a:r>
-            <a:endParaRPr lang="en-US" sz="1200" dirty="0"/>
-          </a:p>
-        </p:txBody>
-      </p:sp>
-      <p:sp>
-        <p:nvSpPr>
-          <p:cNvPr id="33" name="Shape 31"/>
-          <p:cNvSpPr/>
-          <p:nvPr/>
-        </p:nvSpPr>
-        <p:spPr>
-          <a:xfrm>
-            <a:off x="2514600" y="3840480"/>
-            <a:ext cx="6263640" cy="457200"/>
-          </a:xfrm>
-          <a:prstGeom prst="rect">
-            <a:avLst>
-              <a:gd name="adj" fmla="val 12000"/>
-            </a:avLst>
-          </a:prstGeom>
-          <a:solidFill>
-            <a:srgbClr val="F8FAFC"/>
-          </a:solidFill>
-          <a:ln w="12700">
-            <a:solidFill>
-              <a:srgbClr val="E2E8F0"/>
-            </a:solidFill>
-            <a:prstDash val="solid"/>
-          </a:ln>
-        </p:spPr>
-      </p:sp>
-      <p:sp>
-        <p:nvSpPr>
-          <p:cNvPr id="34" name="Text 32"/>
-          <p:cNvSpPr/>
-          <p:nvPr/>
-        </p:nvSpPr>
-        <p:spPr>
-          <a:xfrm>
-            <a:off x="2651760" y="3840480"/>
-            <a:ext cx="6035040" cy="457200"/>
-          </a:xfrm>
-          <a:prstGeom prst="rect">
-            <a:avLst/>
-          </a:prstGeom>
-          <a:noFill/>
-          <a:ln/>
-        </p:spPr>
-        <p:txBody>
-          <a:bodyPr wrap="square" rtlCol="0" anchor="ctr"/>
-          <a:lstStyle/>
-          <a:p>
-            <a:pPr algn="l" indent="0" marL="0">
-              <a:buNone/>
-            </a:pPr>
-            <a:r>
-              <a:rPr lang="en-US" sz="1200" dirty="0">
-                <a:solidFill>
-                  <a:srgbClr val="0F172A"/>
-                </a:solidFill>
-                <a:latin typeface="Calibri" pitchFamily="34" charset="0"/>
-                <a:ea typeface="Calibri" pitchFamily="34" charset="-122"/>
-                <a:cs typeface="Calibri" pitchFamily="34" charset="-120"/>
-              </a:rPr>
-              <a:t>Something that has not had any paint put on it.</a:t>
-            </a:r>
-            <a:endParaRPr lang="en-US" sz="1200" dirty="0"/>
-          </a:p>
-        </p:txBody>
-      </p:sp>
-      <p:sp>
-        <p:nvSpPr>
-          <p:cNvPr id="35" name="Shape 33"/>
-          <p:cNvSpPr/>
-          <p:nvPr/>
-        </p:nvSpPr>
-        <p:spPr>
-          <a:xfrm>
-            <a:off x="365760" y="4370832"/>
-            <a:ext cx="2011680" cy="457200"/>
-          </a:xfrm>
-          <a:prstGeom prst="rect">
-            <a:avLst>
-              <a:gd name="adj" fmla="val 12000"/>
-            </a:avLst>
-          </a:prstGeom>
-          <a:solidFill>
-            <a:srgbClr val="EEF2FF"/>
-          </a:solidFill>
-          <a:ln w="12700">
-            <a:solidFill>
-              <a:srgbClr val="6366F1"/>
-            </a:solidFill>
-            <a:prstDash val="solid"/>
-          </a:ln>
-          <a:effectLst>
-            <a:outerShdw sx="100000" sy="100000" kx="0" ky="0" algn="bl" rotWithShape="0" blurRad="101600" dist="38100" dir="8100000">
-              <a:srgbClr val="000000">
-                <a:alpha val="12000"/>
-              </a:srgbClr>
-            </a:outerShdw>
-          </a:effectLst>
-        </p:spPr>
-      </p:sp>
-      <p:sp>
-        <p:nvSpPr>
-          <p:cNvPr id="36" name="Text 34"/>
-          <p:cNvSpPr/>
-          <p:nvPr/>
-        </p:nvSpPr>
-        <p:spPr>
-          <a:xfrm>
-            <a:off x="365760" y="4370832"/>
-            <a:ext cx="2011680" cy="457200"/>
-          </a:xfrm>
-          <a:prstGeom prst="rect">
-            <a:avLst/>
-          </a:prstGeom>
-          <a:noFill/>
-          <a:ln/>
-        </p:spPr>
-        <p:txBody>
-          <a:bodyPr wrap="square" lIns="0" tIns="0" rIns="0" bIns="0" rtlCol="0" anchor="ctr"/>
-          <a:lstStyle/>
-          <a:p>
-            <a:pPr algn="ctr" indent="0" marL="0">
-              <a:buNone/>
-            </a:pPr>
-            <a:r>
-              <a:rPr lang="en-US" sz="1200" b="1" dirty="0">
-                <a:solidFill>
-                  <a:srgbClr val="4338CA"/>
-                </a:solidFill>
-                <a:latin typeface="Trebuchet MS" pitchFamily="34" charset="0"/>
-                <a:ea typeface="Trebuchet MS" pitchFamily="34" charset="-122"/>
-                <a:cs typeface="Trebuchet MS" pitchFamily="34" charset="-120"/>
-              </a:rPr>
-              <a:t>painted</a:t>
-            </a:r>
-            <a:endParaRPr lang="en-US" sz="1200" dirty="0"/>
-          </a:p>
-        </p:txBody>
-      </p:sp>
-      <p:sp>
-        <p:nvSpPr>
-          <p:cNvPr id="37" name="Shape 35"/>
-          <p:cNvSpPr/>
-          <p:nvPr/>
-        </p:nvSpPr>
-        <p:spPr>
-          <a:xfrm>
-            <a:off x="2514600" y="4370832"/>
-            <a:ext cx="6263640" cy="457200"/>
-          </a:xfrm>
-          <a:prstGeom prst="rect">
-            <a:avLst>
-              <a:gd name="adj" fmla="val 12000"/>
-            </a:avLst>
-          </a:prstGeom>
-          <a:solidFill>
-            <a:srgbClr val="F8FAFC"/>
-          </a:solidFill>
-          <a:ln w="12700">
-            <a:solidFill>
-              <a:srgbClr val="E2E8F0"/>
-            </a:solidFill>
-            <a:prstDash val="solid"/>
-          </a:ln>
-        </p:spPr>
-      </p:sp>
-      <p:sp>
-        <p:nvSpPr>
-          <p:cNvPr id="38" name="Text 36"/>
-          <p:cNvSpPr/>
-          <p:nvPr/>
-        </p:nvSpPr>
-        <p:spPr>
-          <a:xfrm>
-            <a:off x="2651760" y="4370832"/>
-            <a:ext cx="6035040" cy="457200"/>
-          </a:xfrm>
-          <a:prstGeom prst="rect">
-            <a:avLst/>
-          </a:prstGeom>
-          <a:noFill/>
-          <a:ln/>
-        </p:spPr>
-        <p:txBody>
-          <a:bodyPr wrap="square" rtlCol="0" anchor="ctr"/>
-          <a:lstStyle/>
-          <a:p>
-            <a:pPr algn="l" indent="0" marL="0">
-              <a:buNone/>
-            </a:pPr>
-            <a:r>
-              <a:rPr lang="en-US" sz="1200" dirty="0">
-                <a:solidFill>
-                  <a:srgbClr val="0F172A"/>
-                </a:solidFill>
-                <a:latin typeface="Calibri" pitchFamily="34" charset="0"/>
-                <a:ea typeface="Calibri" pitchFamily="34" charset="-122"/>
-                <a:cs typeface="Calibri" pitchFamily="34" charset="-120"/>
-              </a:rPr>
-              <a:t>A picture made using paint, or the act of putting paint on something.</a:t>
+              <a:t>puts colour onto a surface using a brush, or tubes of coloured liquid</a:t>
             </a:r>
             <a:endParaRPr lang="en-US" sz="1200" dirty="0"/>
           </a:p>
@@ -41056,7 +41390,7 @@
                 <a:ea typeface="Calibri" pitchFamily="34" charset="-122"/>
                 <a:cs typeface="Calibri" pitchFamily="34" charset="-120"/>
               </a:rPr>
-              <a:t>Word Labs  •  wordlabs.app  •  Root: 'paint' = to colour or coat surface</a:t>
+              <a:t>Word Labs  •  wordlabs.app  •  Root: 'paint' = to colour a surface; a coloured liquid</a:t>
             </a:r>
             <a:endParaRPr lang="en-US" sz="800" dirty="0"/>
           </a:p>
@@ -41259,7 +41593,7 @@
                 <a:ea typeface="Calibri" pitchFamily="34" charset="-122"/>
                 <a:cs typeface="Calibri" pitchFamily="34" charset="-120"/>
               </a:rPr>
-              <a:t>The painter carefully mixed the colours before beginning the large mural on the school wall.</a:t>
+              <a:t>She used blue paint to decorate her bedroom wall.</a:t>
             </a:r>
             <a:endParaRPr lang="en-US" sz="1500" dirty="0"/>
           </a:p>
@@ -41423,7 +41757,7 @@
                 <a:ea typeface="Calibri" pitchFamily="34" charset="-122"/>
                 <a:cs typeface="Calibri" pitchFamily="34" charset="-120"/>
               </a:rPr>
-              <a:t>After the storm, Mum decided it was time to repaint the old wooden fence in the backyard.</a:t>
+              <a:t>He paints a new picture every weekend in his studio.</a:t>
             </a:r>
             <a:endParaRPr lang="en-US" sz="1500" dirty="0"/>
           </a:p>
@@ -41587,7 +41921,7 @@
                 <a:ea typeface="Calibri" pitchFamily="34" charset="-122"/>
                 <a:cs typeface="Calibri" pitchFamily="34" charset="-120"/>
               </a:rPr>
-              <a:t>We admired the beautiful painting hanging in the gallery, which showed a sunset over the ocean.</a:t>
+              <a:t>Yesterday, we painted the fence a bright green colour.</a:t>
             </a:r>
             <a:endParaRPr lang="en-US" sz="1500" dirty="0"/>
           </a:p>
